--- a/docs/test/stress/e2e-outputs/development_basic_pr04.pptx
+++ b/docs/test/stress/e2e-outputs/development_basic_pr04.pptx
@@ -15,9 +15,10 @@
     <p:sldId id="263" r:id="rId9"/>
     <p:sldId id="264" r:id="rId10"/>
     <p:sldId id="265" r:id="rId11"/>
+    <p:sldId id="266" r:id="rId12"/>
   </p:sldIdLst>
   <p:notesMasterIdLst>
-    <p:notesMasterId r:id="rId12"/>
+    <p:notesMasterId r:id="rId13"/>
   </p:notesMasterIdLst>
   <p:sldSz cx="12192000" cy="6858000"/>
   <p:notesSz cx="6858000" cy="12192000"/>
@@ -623,6 +624,94 @@
             <a:fld id="{F7021451-1387-4CA6-816F-3879F97B5CBC}" type="slidenum">
               <a:rPr lang="en-US"/>
               <a:t>10</a:t>
+            </a:fld>
+            <a:endParaRPr lang="en-US"/>
+          </a:p>
+        </p:txBody>
+      </p:sp>
+    </p:spTree>
+    <p:extLst>
+      <p:ext uri="{BB962C8B-B14F-4D97-AF65-F5344CB8AC3E}">
+        <p14:creationId xmlns:p14="http://schemas.microsoft.com/office/powerpoint/2010/main" val="1024086991"/>
+      </p:ext>
+    </p:extLst>
+  </p:cSld>
+  <p:clrMapOvr>
+    <a:masterClrMapping/>
+  </p:clrMapOvr>
+</p:notes>
+</file>
+
+<file path=ppt/notesSlides/notesSlide11.xml><?xml version="1.0" encoding="utf-8"?>
+<p:notes xmlns:a="http://schemas.openxmlformats.org/drawingml/2006/main" xmlns:r="http://schemas.openxmlformats.org/officeDocument/2006/relationships" xmlns:p="http://schemas.openxmlformats.org/presentationml/2006/main">
+  <p:cSld>
+    <p:spTree>
+      <p:nvGrpSpPr>
+        <p:cNvPr id="1" name=""/>
+        <p:cNvGrpSpPr/>
+        <p:nvPr/>
+      </p:nvGrpSpPr>
+      <p:grpSpPr>
+        <a:xfrm>
+          <a:off x="0" y="0"/>
+          <a:ext cx="0" cy="0"/>
+          <a:chOff x="0" y="0"/>
+          <a:chExt cx="0" cy="0"/>
+        </a:xfrm>
+      </p:grpSpPr>
+      <p:sp>
+        <p:nvSpPr>
+          <p:cNvPr id="2" name="Slide Image Placeholder 1"/>
+          <p:cNvSpPr>
+            <a:spLocks noGrp="1" noRot="1" noChangeAspect="1"/>
+          </p:cNvSpPr>
+          <p:nvPr>
+            <p:ph type="sldImg"/>
+          </p:nvPr>
+        </p:nvSpPr>
+        <p:spPr/>
+      </p:sp>
+      <p:sp>
+        <p:nvSpPr>
+          <p:cNvPr id="3" name="Notes Placeholder 2"/>
+          <p:cNvSpPr>
+            <a:spLocks noGrp="1"/>
+          </p:cNvSpPr>
+          <p:nvPr>
+            <p:ph type="body" idx="1"/>
+          </p:nvPr>
+        </p:nvSpPr>
+        <p:spPr/>
+        <p:txBody>
+          <a:bodyPr/>
+          <a:lstStyle/>
+          <a:p>
+            <a:r>
+              <a:rPr lang="en-US" dirty="0"/>
+              <a:t/>
+            </a:r>
+            <a:endParaRPr lang="en-US" dirty="0"/>
+          </a:p>
+        </p:txBody>
+      </p:sp>
+      <p:sp>
+        <p:nvSpPr>
+          <p:cNvPr id="4" name="Slide Number Placeholder 3"/>
+          <p:cNvSpPr>
+            <a:spLocks noGrp="1"/>
+          </p:cNvSpPr>
+          <p:nvPr>
+            <p:ph type="sldNum" sz="quarter" idx="10"/>
+          </p:nvPr>
+        </p:nvSpPr>
+        <p:spPr/>
+        <p:txBody>
+          <a:bodyPr/>
+          <a:lstStyle/>
+          <a:p>
+            <a:fld id="{F7021451-1387-4CA6-816F-3879F97B5CBC}" type="slidenum">
+              <a:rPr lang="en-US"/>
+              <a:t>11</a:t>
             </a:fld>
             <a:endParaRPr lang="en-US"/>
           </a:p>
@@ -1691,7 +1780,7 @@
             <a:avLst/>
           </a:prstGeom>
           <a:solidFill>
-            <a:srgbClr val="2A2118"/>
+            <a:srgbClr val="0D2233"/>
           </a:solidFill>
           <a:ln/>
         </p:spPr>
@@ -1711,7 +1800,7 @@
             <a:avLst/>
           </a:prstGeom>
           <a:solidFill>
-            <a:srgbClr val="3D2E1A"/>
+            <a:srgbClr val="1A3A4A"/>
           </a:solidFill>
           <a:ln/>
         </p:spPr>
@@ -1731,7 +1820,7 @@
             <a:avLst/>
           </a:prstGeom>
           <a:solidFill>
-            <a:srgbClr val="33271A"/>
+            <a:srgbClr val="132A3A"/>
           </a:solidFill>
           <a:ln/>
         </p:spPr>
@@ -1827,7 +1916,7 @@
         </p:nvSpPr>
         <p:spPr>
           <a:xfrm>
-            <a:off x="566928" y="475488"/>
+            <a:off x="502920" y="475488"/>
             <a:ext cx="2743200" cy="365760"/>
           </a:xfrm>
           <a:prstGeom prst="rect">
@@ -1880,7 +1969,7 @@
         </p:nvSpPr>
         <p:spPr>
           <a:xfrm>
-            <a:off x="566928" y="2029968"/>
+            <a:off x="502920" y="2029968"/>
             <a:ext cx="7315200" cy="274320"/>
           </a:xfrm>
           <a:prstGeom prst="rect">
@@ -1919,7 +2008,7 @@
         </p:nvSpPr>
         <p:spPr>
           <a:xfrm>
-            <a:off x="566928" y="2304288"/>
+            <a:off x="502920" y="2304288"/>
             <a:ext cx="7315200" cy="731520"/>
           </a:xfrm>
           <a:prstGeom prst="rect">
@@ -1958,7 +2047,7 @@
         </p:nvSpPr>
         <p:spPr>
           <a:xfrm>
-            <a:off x="566928" y="3090672"/>
+            <a:off x="502920" y="3090672"/>
             <a:ext cx="7315200" cy="365760"/>
           </a:xfrm>
           <a:prstGeom prst="rect">
@@ -1997,7 +2086,7 @@
         </p:nvSpPr>
         <p:spPr>
           <a:xfrm>
-            <a:off x="566928" y="3685032"/>
+            <a:off x="502920" y="3685032"/>
             <a:ext cx="1005840" cy="292608"/>
           </a:xfrm>
           <a:prstGeom prst="roundRect">
@@ -2019,7 +2108,7 @@
         </p:nvSpPr>
         <p:spPr>
           <a:xfrm>
-            <a:off x="566928" y="3685032"/>
+            <a:off x="502920" y="3685032"/>
             <a:ext cx="1005840" cy="292608"/>
           </a:xfrm>
           <a:prstGeom prst="rect">
@@ -2058,7 +2147,7 @@
         </p:nvSpPr>
         <p:spPr>
           <a:xfrm>
-            <a:off x="1664208" y="3685032"/>
+            <a:off x="1600200" y="3685032"/>
             <a:ext cx="1005840" cy="292608"/>
           </a:xfrm>
           <a:prstGeom prst="roundRect">
@@ -2080,7 +2169,7 @@
         </p:nvSpPr>
         <p:spPr>
           <a:xfrm>
-            <a:off x="1664208" y="3685032"/>
+            <a:off x="1600200" y="3685032"/>
             <a:ext cx="1005840" cy="292608"/>
           </a:xfrm>
           <a:prstGeom prst="rect">
@@ -2119,7 +2208,7 @@
         </p:nvSpPr>
         <p:spPr>
           <a:xfrm>
-            <a:off x="566928" y="4187952"/>
+            <a:off x="502920" y="4187952"/>
             <a:ext cx="6858000" cy="1051560"/>
           </a:xfrm>
           <a:prstGeom prst="roundRect">
@@ -2146,7 +2235,7 @@
         </p:nvSpPr>
         <p:spPr>
           <a:xfrm>
-            <a:off x="822960" y="4297680"/>
+            <a:off x="758952" y="4297680"/>
             <a:ext cx="6345936" cy="832104"/>
           </a:xfrm>
           <a:prstGeom prst="rect">
@@ -2185,7 +2274,7 @@
         </p:nvSpPr>
         <p:spPr>
           <a:xfrm>
-            <a:off x="566928" y="1700784"/>
+            <a:off x="502920" y="1700784"/>
             <a:ext cx="7315200" cy="256032"/>
           </a:xfrm>
           <a:prstGeom prst="rect">
@@ -2224,7 +2313,7 @@
         </p:nvSpPr>
         <p:spPr>
           <a:xfrm>
-            <a:off x="566928" y="6035040"/>
+            <a:off x="502920" y="6035040"/>
             <a:ext cx="11057839" cy="274320"/>
           </a:xfrm>
           <a:prstGeom prst="rect">
@@ -2263,7 +2352,7 @@
         </p:nvSpPr>
         <p:spPr>
           <a:xfrm>
-            <a:off x="566928" y="6382512"/>
+            <a:off x="502920" y="6382512"/>
             <a:ext cx="7315200" cy="219456"/>
           </a:xfrm>
           <a:prstGeom prst="rect">
@@ -2302,7 +2391,7 @@
         </p:nvSpPr>
         <p:spPr>
           <a:xfrm>
-            <a:off x="10710367" y="6382512"/>
+            <a:off x="10774375" y="6382512"/>
             <a:ext cx="914400" cy="219456"/>
           </a:xfrm>
           <a:prstGeom prst="rect">
@@ -2344,6 +2433,434 @@
 <file path=ppt/slides/slide10.xml><?xml version="1.0" encoding="utf-8"?>
 <p:sld xmlns:a="http://schemas.openxmlformats.org/drawingml/2006/main" xmlns:r="http://schemas.openxmlformats.org/officeDocument/2006/relationships" xmlns:p="http://schemas.openxmlformats.org/presentationml/2006/main">
   <p:cSld name="Slide 10">
+    <p:bg>
+      <p:bgPr>
+        <a:solidFill>
+          <a:srgbClr val="FFFFFF"/>
+        </a:solidFill>
+      </p:bgPr>
+    </p:bg>
+    <p:spTree>
+      <p:nvGrpSpPr>
+        <p:cNvPr id="1" name=""/>
+        <p:cNvGrpSpPr/>
+        <p:nvPr/>
+      </p:nvGrpSpPr>
+      <p:grpSpPr>
+        <a:xfrm>
+          <a:off x="0" y="0"/>
+          <a:ext cx="0" cy="0"/>
+          <a:chOff x="0" y="0"/>
+          <a:chExt cx="0" cy="0"/>
+        </a:xfrm>
+      </p:grpSpPr>
+      <p:sp>
+        <p:nvSpPr>
+          <p:cNvPr id="2" name="Shape 0"/>
+          <p:cNvSpPr/>
+          <p:nvPr/>
+        </p:nvSpPr>
+        <p:spPr>
+          <a:xfrm>
+            <a:off x="502920" y="457200"/>
+            <a:ext cx="384048" cy="384048"/>
+          </a:xfrm>
+          <a:prstGeom prst="ellipse">
+            <a:avLst/>
+          </a:prstGeom>
+          <a:solidFill>
+            <a:srgbClr val="B98A2E"/>
+          </a:solidFill>
+          <a:ln/>
+        </p:spPr>
+      </p:sp>
+      <p:sp>
+        <p:nvSpPr>
+          <p:cNvPr id="3" name="Text 1"/>
+          <p:cNvSpPr/>
+          <p:nvPr/>
+        </p:nvSpPr>
+        <p:spPr>
+          <a:xfrm>
+            <a:off x="502920" y="457200"/>
+            <a:ext cx="384048" cy="384048"/>
+          </a:xfrm>
+          <a:prstGeom prst="rect">
+            <a:avLst/>
+          </a:prstGeom>
+          <a:noFill/>
+          <a:ln/>
+        </p:spPr>
+        <p:txBody>
+          <a:bodyPr wrap="square" lIns="0" tIns="0" rIns="0" bIns="0" rtlCol="0" anchor="ctr"/>
+          <a:lstStyle/>
+          <a:p>
+            <a:pPr algn="ctr" indent="0" marL="0">
+              <a:buNone/>
+            </a:pPr>
+            <a:r>
+              <a:rPr lang="en-US" sz="1300" b="1" dirty="0">
+                <a:solidFill>
+                  <a:srgbClr val="FFFFFF"/>
+                </a:solidFill>
+                <a:latin typeface="Arial" pitchFamily="34" charset="0"/>
+                <a:ea typeface="Arial" pitchFamily="34" charset="-122"/>
+                <a:cs typeface="Arial" pitchFamily="34" charset="-120"/>
+              </a:rPr>
+              <a:t>10</a:t>
+            </a:r>
+            <a:endParaRPr lang="en-US" sz="1300" dirty="0"/>
+          </a:p>
+        </p:txBody>
+      </p:sp>
+      <p:sp>
+        <p:nvSpPr>
+          <p:cNvPr id="4" name="Text 2"/>
+          <p:cNvSpPr/>
+          <p:nvPr/>
+        </p:nvSpPr>
+        <p:spPr>
+          <a:xfrm>
+            <a:off x="1069848" y="457200"/>
+            <a:ext cx="10490911" cy="182880"/>
+          </a:xfrm>
+          <a:prstGeom prst="rect">
+            <a:avLst/>
+          </a:prstGeom>
+          <a:noFill/>
+          <a:ln/>
+        </p:spPr>
+        <p:txBody>
+          <a:bodyPr wrap="square" lIns="0" tIns="0" rIns="0" bIns="0" rtlCol="0" anchor="ctr"/>
+          <a:lstStyle/>
+          <a:p>
+            <a:pPr indent="0" marL="0">
+              <a:buNone/>
+            </a:pPr>
+            <a:r>
+              <a:rPr lang="en-US" sz="950" b="1" spc="200" kern="0" dirty="0">
+                <a:solidFill>
+                  <a:srgbClr val="B98A2E"/>
+                </a:solidFill>
+                <a:latin typeface="Arial" pitchFamily="34" charset="0"/>
+                <a:ea typeface="Arial" pitchFamily="34" charset="-122"/>
+                <a:cs typeface="Arial" pitchFamily="34" charset="-120"/>
+              </a:rPr>
+              <a:t>Process</a:t>
+            </a:r>
+            <a:endParaRPr lang="en-US" sz="950" dirty="0"/>
+          </a:p>
+        </p:txBody>
+      </p:sp>
+      <p:sp>
+        <p:nvSpPr>
+          <p:cNvPr id="5" name="Text 3"/>
+          <p:cNvSpPr/>
+          <p:nvPr/>
+        </p:nvSpPr>
+        <p:spPr>
+          <a:xfrm>
+            <a:off x="1069848" y="640080"/>
+            <a:ext cx="10490911" cy="365760"/>
+          </a:xfrm>
+          <a:prstGeom prst="rect">
+            <a:avLst/>
+          </a:prstGeom>
+          <a:noFill/>
+          <a:ln/>
+        </p:spPr>
+        <p:txBody>
+          <a:bodyPr wrap="square" lIns="0" tIns="0" rIns="0" bIns="0" rtlCol="0" anchor="ctr"/>
+          <a:lstStyle/>
+          <a:p>
+            <a:pPr indent="0" marL="0">
+              <a:buNone/>
+            </a:pPr>
+            <a:r>
+              <a:rPr lang="en-US" sz="2300" b="1" dirty="0">
+                <a:solidFill>
+                  <a:srgbClr val="10161F"/>
+                </a:solidFill>
+                <a:latin typeface="Pretendard" pitchFamily="34" charset="0"/>
+                <a:ea typeface="Pretendard" pitchFamily="34" charset="-122"/>
+                <a:cs typeface="Pretendard" pitchFamily="34" charset="-120"/>
+              </a:rPr>
+              <a:t>진행 절차</a:t>
+            </a:r>
+            <a:endParaRPr lang="en-US" sz="2300" dirty="0"/>
+          </a:p>
+        </p:txBody>
+      </p:sp>
+      <p:sp>
+        <p:nvSpPr>
+          <p:cNvPr id="6" name="Shape 4"/>
+          <p:cNvSpPr/>
+          <p:nvPr/>
+        </p:nvSpPr>
+        <p:spPr>
+          <a:xfrm>
+            <a:off x="502920" y="1572768"/>
+            <a:ext cx="11057839" cy="3200400"/>
+          </a:xfrm>
+          <a:prstGeom prst="roundRect">
+            <a:avLst>
+              <a:gd name="adj" fmla="val 1714"/>
+            </a:avLst>
+          </a:prstGeom>
+          <a:solidFill>
+            <a:srgbClr val="F7FAFC"/>
+          </a:solidFill>
+          <a:ln w="6350">
+            <a:solidFill>
+              <a:srgbClr val="CBD5E0"/>
+            </a:solidFill>
+            <a:prstDash val="solid"/>
+          </a:ln>
+        </p:spPr>
+      </p:sp>
+      <p:sp>
+        <p:nvSpPr>
+          <p:cNvPr id="7" name="Shape 5"/>
+          <p:cNvSpPr/>
+          <p:nvPr/>
+        </p:nvSpPr>
+        <p:spPr>
+          <a:xfrm>
+            <a:off x="722376" y="1792224"/>
+            <a:ext cx="438912" cy="438912"/>
+          </a:xfrm>
+          <a:prstGeom prst="ellipse">
+            <a:avLst/>
+          </a:prstGeom>
+          <a:solidFill>
+            <a:srgbClr val="B98A2E"/>
+          </a:solidFill>
+          <a:ln/>
+        </p:spPr>
+      </p:sp>
+      <p:sp>
+        <p:nvSpPr>
+          <p:cNvPr id="8" name="Text 6"/>
+          <p:cNvSpPr/>
+          <p:nvPr/>
+        </p:nvSpPr>
+        <p:spPr>
+          <a:xfrm>
+            <a:off x="722376" y="1792224"/>
+            <a:ext cx="438912" cy="438912"/>
+          </a:xfrm>
+          <a:prstGeom prst="rect">
+            <a:avLst/>
+          </a:prstGeom>
+          <a:noFill/>
+          <a:ln/>
+        </p:spPr>
+        <p:txBody>
+          <a:bodyPr wrap="square" lIns="0" tIns="0" rIns="0" bIns="0" rtlCol="0" anchor="ctr"/>
+          <a:lstStyle/>
+          <a:p>
+            <a:pPr algn="ctr" indent="0" marL="0">
+              <a:buNone/>
+            </a:pPr>
+            <a:r>
+              <a:rPr lang="en-US" sz="1400" b="1" dirty="0">
+                <a:solidFill>
+                  <a:srgbClr val="FFFFFF"/>
+                </a:solidFill>
+                <a:latin typeface="Arial" pitchFamily="34" charset="0"/>
+                <a:ea typeface="Arial" pitchFamily="34" charset="-122"/>
+                <a:cs typeface="Arial" pitchFamily="34" charset="-120"/>
+              </a:rPr>
+              <a:t>01</a:t>
+            </a:r>
+            <a:endParaRPr lang="en-US" sz="1400" dirty="0"/>
+          </a:p>
+        </p:txBody>
+      </p:sp>
+      <p:sp>
+        <p:nvSpPr>
+          <p:cNvPr id="9" name="Text 7"/>
+          <p:cNvSpPr/>
+          <p:nvPr/>
+        </p:nvSpPr>
+        <p:spPr>
+          <a:xfrm>
+            <a:off x="722376" y="2304288"/>
+            <a:ext cx="10618927" cy="365760"/>
+          </a:xfrm>
+          <a:prstGeom prst="rect">
+            <a:avLst/>
+          </a:prstGeom>
+          <a:noFill/>
+          <a:ln/>
+        </p:spPr>
+        <p:txBody>
+          <a:bodyPr wrap="square" rtlCol="0" anchor="ctr"/>
+          <a:lstStyle/>
+          <a:p>
+            <a:pPr indent="0" marL="0">
+              <a:buNone/>
+            </a:pPr>
+            <a:r>
+              <a:rPr lang="en-US" sz="1600" b="1" dirty="0">
+                <a:solidFill>
+                  <a:srgbClr val="10161F"/>
+                </a:solidFill>
+                <a:latin typeface="Pretendard" pitchFamily="34" charset="0"/>
+                <a:ea typeface="Pretendard" pitchFamily="34" charset="-122"/>
+                <a:cs typeface="Pretendard" pitchFamily="34" charset="-120"/>
+              </a:rPr>
+              <a:t>1단계</a:t>
+            </a:r>
+            <a:endParaRPr lang="en-US" sz="1600" dirty="0"/>
+          </a:p>
+        </p:txBody>
+      </p:sp>
+      <p:sp>
+        <p:nvSpPr>
+          <p:cNvPr id="10" name="Text 8"/>
+          <p:cNvSpPr/>
+          <p:nvPr/>
+        </p:nvSpPr>
+        <p:spPr>
+          <a:xfrm>
+            <a:off x="722376" y="2761488"/>
+            <a:ext cx="10618927" cy="1828800"/>
+          </a:xfrm>
+          <a:prstGeom prst="rect">
+            <a:avLst/>
+          </a:prstGeom>
+          <a:noFill/>
+          <a:ln/>
+        </p:spPr>
+        <p:txBody>
+          <a:bodyPr wrap="square" rtlCol="0" anchor="t"/>
+          <a:lstStyle/>
+          <a:p>
+            <a:pPr indent="0" marL="0">
+              <a:buNone/>
+            </a:pPr>
+            <a:r>
+              <a:rPr lang="en-US" sz="1100" dirty="0">
+                <a:solidFill>
+                  <a:srgbClr val="10161F"/>
+                </a:solidFill>
+                <a:latin typeface="Pretendard" pitchFamily="34" charset="0"/>
+                <a:ea typeface="Pretendard" pitchFamily="34" charset="-122"/>
+                <a:cs typeface="Pretendard" pitchFamily="34" charset="-120"/>
+              </a:rPr>
+              <a:t>건축 설계 발주 및 인허가 일정 협의를 권장합니다.</a:t>
+            </a:r>
+            <a:endParaRPr lang="en-US" sz="1100" dirty="0"/>
+          </a:p>
+          <a:p>
+            <a:pPr indent="0" marL="0">
+              <a:buNone/>
+            </a:pPr>
+            <a:r>
+              <a:rPr lang="en-US" sz="1100" dirty="0">
+                <a:solidFill>
+                  <a:srgbClr val="10161F"/>
+                </a:solidFill>
+                <a:latin typeface="Pretendard" pitchFamily="34" charset="0"/>
+                <a:ea typeface="Pretendard" pitchFamily="34" charset="-122"/>
+                <a:cs typeface="Pretendard" pitchFamily="34" charset="-120"/>
+              </a:rPr>
+              <a:t>건축 설계 발주 및 인허가 일정 협의를 권장합니다.</a:t>
+            </a:r>
+            <a:endParaRPr lang="en-US" sz="1100" dirty="0"/>
+          </a:p>
+        </p:txBody>
+      </p:sp>
+      <p:sp>
+        <p:nvSpPr>
+          <p:cNvPr id="11" name="Text 9"/>
+          <p:cNvSpPr/>
+          <p:nvPr/>
+        </p:nvSpPr>
+        <p:spPr>
+          <a:xfrm>
+            <a:off x="502920" y="6382512"/>
+            <a:ext cx="7315200" cy="219456"/>
+          </a:xfrm>
+          <a:prstGeom prst="rect">
+            <a:avLst/>
+          </a:prstGeom>
+          <a:noFill/>
+          <a:ln/>
+        </p:spPr>
+        <p:txBody>
+          <a:bodyPr wrap="square" lIns="0" tIns="0" rIns="0" bIns="0" rtlCol="0" anchor="ctr"/>
+          <a:lstStyle/>
+          <a:p>
+            <a:pPr indent="0" marL="0">
+              <a:buNone/>
+            </a:pPr>
+            <a:r>
+              <a:rPr lang="en-US" sz="800" dirty="0">
+                <a:solidFill>
+                  <a:srgbClr val="718096"/>
+                </a:solidFill>
+                <a:latin typeface="Pretendard" pitchFamily="34" charset="0"/>
+                <a:ea typeface="Pretendard" pitchFamily="34" charset="-122"/>
+                <a:cs typeface="Pretendard" pitchFamily="34" charset="-120"/>
+              </a:rPr>
+              <a:t>크리딜   |   </a:t>
+            </a:r>
+            <a:endParaRPr lang="en-US" sz="800" dirty="0"/>
+          </a:p>
+        </p:txBody>
+      </p:sp>
+      <p:sp>
+        <p:nvSpPr>
+          <p:cNvPr id="12" name="Text 10"/>
+          <p:cNvSpPr/>
+          <p:nvPr/>
+        </p:nvSpPr>
+        <p:spPr>
+          <a:xfrm>
+            <a:off x="10774375" y="6382512"/>
+            <a:ext cx="914400" cy="219456"/>
+          </a:xfrm>
+          <a:prstGeom prst="rect">
+            <a:avLst/>
+          </a:prstGeom>
+          <a:noFill/>
+          <a:ln/>
+        </p:spPr>
+        <p:txBody>
+          <a:bodyPr wrap="square" lIns="0" tIns="0" rIns="0" bIns="0" rtlCol="0" anchor="ctr"/>
+          <a:lstStyle/>
+          <a:p>
+            <a:pPr algn="r" indent="0" marL="0">
+              <a:buNone/>
+            </a:pPr>
+            <a:r>
+              <a:rPr lang="en-US" sz="900" b="1" dirty="0">
+                <a:solidFill>
+                  <a:srgbClr val="B98A2E"/>
+                </a:solidFill>
+                <a:latin typeface="Arial" pitchFamily="34" charset="0"/>
+                <a:ea typeface="Arial" pitchFamily="34" charset="-122"/>
+                <a:cs typeface="Arial" pitchFamily="34" charset="-120"/>
+              </a:rPr>
+              <a:t>10</a:t>
+            </a:r>
+            <a:endParaRPr lang="en-US" sz="900" dirty="0"/>
+          </a:p>
+        </p:txBody>
+      </p:sp>
+    </p:spTree>
+  </p:cSld>
+  <p:clrMapOvr>
+    <a:masterClrMapping/>
+  </p:clrMapOvr>
+</p:sld>
+</file>
+
+<file path=ppt/slides/slide11.xml><?xml version="1.0" encoding="utf-8"?>
+<p:sld xmlns:a="http://schemas.openxmlformats.org/drawingml/2006/main" xmlns:r="http://schemas.openxmlformats.org/officeDocument/2006/relationships" xmlns:p="http://schemas.openxmlformats.org/presentationml/2006/main">
+  <p:cSld name="Slide 11">
     <p:bg>
       <p:bgPr>
         <a:solidFill>
@@ -2373,7 +2890,7 @@
         </p:nvSpPr>
         <p:spPr>
           <a:xfrm>
-            <a:off x="566928" y="457200"/>
+            <a:off x="502920" y="457200"/>
             <a:ext cx="384048" cy="384048"/>
           </a:xfrm>
           <a:prstGeom prst="ellipse">
@@ -2393,7 +2910,7 @@
         </p:nvSpPr>
         <p:spPr>
           <a:xfrm>
-            <a:off x="566928" y="457200"/>
+            <a:off x="502920" y="457200"/>
             <a:ext cx="384048" cy="384048"/>
           </a:xfrm>
           <a:prstGeom prst="rect">
@@ -2418,7 +2935,7 @@
                 <a:ea typeface="Arial" pitchFamily="34" charset="-122"/>
                 <a:cs typeface="Arial" pitchFamily="34" charset="-120"/>
               </a:rPr>
-              <a:t>10</a:t>
+              <a:t>11</a:t>
             </a:r>
             <a:endParaRPr lang="en-US" sz="1300" dirty="0"/>
           </a:p>
@@ -2432,7 +2949,7 @@
         </p:nvSpPr>
         <p:spPr>
           <a:xfrm>
-            <a:off x="1133856" y="457200"/>
+            <a:off x="1069848" y="457200"/>
             <a:ext cx="10490911" cy="182880"/>
           </a:xfrm>
           <a:prstGeom prst="rect">
@@ -2471,7 +2988,7 @@
         </p:nvSpPr>
         <p:spPr>
           <a:xfrm>
-            <a:off x="1133856" y="658368"/>
+            <a:off x="1069848" y="658368"/>
             <a:ext cx="10490911" cy="420624"/>
           </a:xfrm>
           <a:prstGeom prst="rect">
@@ -2510,7 +3027,7 @@
         </p:nvSpPr>
         <p:spPr>
           <a:xfrm>
-            <a:off x="566928" y="1463040"/>
+            <a:off x="502920" y="1463040"/>
             <a:ext cx="3588410" cy="658368"/>
           </a:xfrm>
           <a:prstGeom prst="roundRect">
@@ -2532,7 +3049,7 @@
         </p:nvSpPr>
         <p:spPr>
           <a:xfrm>
-            <a:off x="676656" y="1572768"/>
+            <a:off x="612648" y="1572768"/>
             <a:ext cx="438912" cy="438912"/>
           </a:xfrm>
           <a:prstGeom prst="ellipse">
@@ -2552,7 +3069,7 @@
         </p:nvSpPr>
         <p:spPr>
           <a:xfrm>
-            <a:off x="676656" y="1572768"/>
+            <a:off x="612648" y="1572768"/>
             <a:ext cx="438912" cy="438912"/>
           </a:xfrm>
           <a:prstGeom prst="rect">
@@ -2591,7 +3108,7 @@
         </p:nvSpPr>
         <p:spPr>
           <a:xfrm>
-            <a:off x="1225296" y="1554480"/>
+            <a:off x="1161288" y="1554480"/>
             <a:ext cx="2820314" cy="237744"/>
           </a:xfrm>
           <a:prstGeom prst="rect">
@@ -2630,7 +3147,7 @@
         </p:nvSpPr>
         <p:spPr>
           <a:xfrm>
-            <a:off x="1225296" y="1792224"/>
+            <a:off x="1161288" y="1792224"/>
             <a:ext cx="2820314" cy="256032"/>
           </a:xfrm>
           <a:prstGeom prst="rect">
@@ -2669,7 +3186,7 @@
         </p:nvSpPr>
         <p:spPr>
           <a:xfrm>
-            <a:off x="4155338" y="1600200"/>
+            <a:off x="4091330" y="1600200"/>
             <a:ext cx="146304" cy="384048"/>
           </a:xfrm>
           <a:prstGeom prst="rect">
@@ -2708,7 +3225,7 @@
         </p:nvSpPr>
         <p:spPr>
           <a:xfrm>
-            <a:off x="4301642" y="1463040"/>
+            <a:off x="4237634" y="1463040"/>
             <a:ext cx="3588410" cy="658368"/>
           </a:xfrm>
           <a:prstGeom prst="roundRect">
@@ -2730,7 +3247,7 @@
         </p:nvSpPr>
         <p:spPr>
           <a:xfrm>
-            <a:off x="4411370" y="1572768"/>
+            <a:off x="4347362" y="1572768"/>
             <a:ext cx="438912" cy="438912"/>
           </a:xfrm>
           <a:prstGeom prst="ellipse">
@@ -2750,7 +3267,7 @@
         </p:nvSpPr>
         <p:spPr>
           <a:xfrm>
-            <a:off x="4411370" y="1572768"/>
+            <a:off x="4347362" y="1572768"/>
             <a:ext cx="438912" cy="438912"/>
           </a:xfrm>
           <a:prstGeom prst="rect">
@@ -2789,7 +3306,7 @@
         </p:nvSpPr>
         <p:spPr>
           <a:xfrm>
-            <a:off x="4960010" y="1554480"/>
+            <a:off x="4896002" y="1554480"/>
             <a:ext cx="2820314" cy="237744"/>
           </a:xfrm>
           <a:prstGeom prst="rect">
@@ -2828,7 +3345,7 @@
         </p:nvSpPr>
         <p:spPr>
           <a:xfrm>
-            <a:off x="4960010" y="1792224"/>
+            <a:off x="4896002" y="1792224"/>
             <a:ext cx="2820314" cy="256032"/>
           </a:xfrm>
           <a:prstGeom prst="rect">
@@ -2867,7 +3384,7 @@
         </p:nvSpPr>
         <p:spPr>
           <a:xfrm>
-            <a:off x="7890053" y="1600200"/>
+            <a:off x="7826045" y="1600200"/>
             <a:ext cx="146304" cy="384048"/>
           </a:xfrm>
           <a:prstGeom prst="rect">
@@ -2906,7 +3423,7 @@
         </p:nvSpPr>
         <p:spPr>
           <a:xfrm>
-            <a:off x="8036357" y="1463040"/>
+            <a:off x="7972349" y="1463040"/>
             <a:ext cx="3588410" cy="658368"/>
           </a:xfrm>
           <a:prstGeom prst="roundRect">
@@ -2928,7 +3445,7 @@
         </p:nvSpPr>
         <p:spPr>
           <a:xfrm>
-            <a:off x="8146085" y="1572768"/>
+            <a:off x="8082077" y="1572768"/>
             <a:ext cx="438912" cy="438912"/>
           </a:xfrm>
           <a:prstGeom prst="ellipse">
@@ -2948,7 +3465,7 @@
         </p:nvSpPr>
         <p:spPr>
           <a:xfrm>
-            <a:off x="8146085" y="1572768"/>
+            <a:off x="8082077" y="1572768"/>
             <a:ext cx="438912" cy="438912"/>
           </a:xfrm>
           <a:prstGeom prst="rect">
@@ -2987,7 +3504,7 @@
         </p:nvSpPr>
         <p:spPr>
           <a:xfrm>
-            <a:off x="8694725" y="1554480"/>
+            <a:off x="8630717" y="1554480"/>
             <a:ext cx="2820314" cy="237744"/>
           </a:xfrm>
           <a:prstGeom prst="rect">
@@ -3026,7 +3543,7 @@
         </p:nvSpPr>
         <p:spPr>
           <a:xfrm>
-            <a:off x="8694725" y="1792224"/>
+            <a:off x="8630717" y="1792224"/>
             <a:ext cx="2820314" cy="256032"/>
           </a:xfrm>
           <a:prstGeom prst="rect">
@@ -3065,7 +3582,7 @@
         </p:nvSpPr>
         <p:spPr>
           <a:xfrm>
-            <a:off x="566928" y="2395728"/>
+            <a:off x="502920" y="2395728"/>
             <a:ext cx="5486400" cy="237744"/>
           </a:xfrm>
           <a:prstGeom prst="rect">
@@ -3104,7 +3621,7 @@
         </p:nvSpPr>
         <p:spPr>
           <a:xfrm>
-            <a:off x="566928" y="2724912"/>
+            <a:off x="502920" y="2724912"/>
             <a:ext cx="1280160" cy="292608"/>
           </a:xfrm>
           <a:prstGeom prst="roundRect">
@@ -3126,7 +3643,7 @@
         </p:nvSpPr>
         <p:spPr>
           <a:xfrm>
-            <a:off x="566928" y="2724912"/>
+            <a:off x="502920" y="2724912"/>
             <a:ext cx="1280160" cy="292608"/>
           </a:xfrm>
           <a:prstGeom prst="rect">
@@ -3165,7 +3682,7 @@
         </p:nvSpPr>
         <p:spPr>
           <a:xfrm>
-            <a:off x="1993392" y="2706624"/>
+            <a:off x="1929384" y="2706624"/>
             <a:ext cx="3840480" cy="329184"/>
           </a:xfrm>
           <a:prstGeom prst="rect">
@@ -3204,7 +3721,7 @@
         </p:nvSpPr>
         <p:spPr>
           <a:xfrm>
-            <a:off x="566928" y="3200400"/>
+            <a:off x="502920" y="3127248"/>
             <a:ext cx="1280160" cy="292608"/>
           </a:xfrm>
           <a:prstGeom prst="roundRect">
@@ -3226,7 +3743,7 @@
         </p:nvSpPr>
         <p:spPr>
           <a:xfrm>
-            <a:off x="566928" y="3200400"/>
+            <a:off x="502920" y="3127248"/>
             <a:ext cx="1280160" cy="292608"/>
           </a:xfrm>
           <a:prstGeom prst="rect">
@@ -3265,7 +3782,7 @@
         </p:nvSpPr>
         <p:spPr>
           <a:xfrm>
-            <a:off x="1993392" y="3182112"/>
+            <a:off x="1929384" y="3108960"/>
             <a:ext cx="3840480" cy="329184"/>
           </a:xfrm>
           <a:prstGeom prst="rect">
@@ -3304,7 +3821,7 @@
         </p:nvSpPr>
         <p:spPr>
           <a:xfrm>
-            <a:off x="566928" y="3675888"/>
+            <a:off x="502920" y="3529584"/>
             <a:ext cx="1280160" cy="292608"/>
           </a:xfrm>
           <a:prstGeom prst="roundRect">
@@ -3326,7 +3843,7 @@
         </p:nvSpPr>
         <p:spPr>
           <a:xfrm>
-            <a:off x="566928" y="3675888"/>
+            <a:off x="502920" y="3529584"/>
             <a:ext cx="1280160" cy="292608"/>
           </a:xfrm>
           <a:prstGeom prst="rect">
@@ -3365,7 +3882,7 @@
         </p:nvSpPr>
         <p:spPr>
           <a:xfrm>
-            <a:off x="1993392" y="3657600"/>
+            <a:off x="1929384" y="3511296"/>
             <a:ext cx="3840480" cy="329184"/>
           </a:xfrm>
           <a:prstGeom prst="rect">
@@ -3404,7 +3921,7 @@
         </p:nvSpPr>
         <p:spPr>
           <a:xfrm>
-            <a:off x="566928" y="4151376"/>
+            <a:off x="502920" y="3931920"/>
             <a:ext cx="1280160" cy="292608"/>
           </a:xfrm>
           <a:prstGeom prst="roundRect">
@@ -3426,7 +3943,7 @@
         </p:nvSpPr>
         <p:spPr>
           <a:xfrm>
-            <a:off x="566928" y="4151376"/>
+            <a:off x="502920" y="3931920"/>
             <a:ext cx="1280160" cy="292608"/>
           </a:xfrm>
           <a:prstGeom prst="rect">
@@ -3465,7 +3982,7 @@
         </p:nvSpPr>
         <p:spPr>
           <a:xfrm>
-            <a:off x="1993392" y="4133088"/>
+            <a:off x="1929384" y="3913632"/>
             <a:ext cx="3840480" cy="329184"/>
           </a:xfrm>
           <a:prstGeom prst="rect">
@@ -3504,7 +4021,7 @@
         </p:nvSpPr>
         <p:spPr>
           <a:xfrm>
-            <a:off x="566928" y="4626864"/>
+            <a:off x="502920" y="4334256"/>
             <a:ext cx="1280160" cy="292608"/>
           </a:xfrm>
           <a:prstGeom prst="roundRect">
@@ -3526,7 +4043,7 @@
         </p:nvSpPr>
         <p:spPr>
           <a:xfrm>
-            <a:off x="566928" y="4626864"/>
+            <a:off x="502920" y="4334256"/>
             <a:ext cx="1280160" cy="292608"/>
           </a:xfrm>
           <a:prstGeom prst="rect">
@@ -3565,7 +4082,7 @@
         </p:nvSpPr>
         <p:spPr>
           <a:xfrm>
-            <a:off x="1993392" y="4608576"/>
+            <a:off x="1929384" y="4315968"/>
             <a:ext cx="3840480" cy="329184"/>
           </a:xfrm>
           <a:prstGeom prst="rect">
@@ -3707,7 +4224,7 @@
         </p:nvSpPr>
         <p:spPr>
           <a:xfrm>
-            <a:off x="566928" y="5760720"/>
+            <a:off x="502920" y="5760720"/>
             <a:ext cx="11057839" cy="457200"/>
           </a:xfrm>
           <a:prstGeom prst="rect">
@@ -3727,7 +4244,7 @@
         </p:nvSpPr>
         <p:spPr>
           <a:xfrm>
-            <a:off x="749808" y="5806440"/>
+            <a:off x="685800" y="5806440"/>
             <a:ext cx="10692079" cy="365760"/>
           </a:xfrm>
           <a:prstGeom prst="rect">
@@ -3766,7 +4283,7 @@
         </p:nvSpPr>
         <p:spPr>
           <a:xfrm>
-            <a:off x="566928" y="6382512"/>
+            <a:off x="502920" y="6382512"/>
             <a:ext cx="7315200" cy="219456"/>
           </a:xfrm>
           <a:prstGeom prst="rect">
@@ -3805,7 +4322,7 @@
         </p:nvSpPr>
         <p:spPr>
           <a:xfrm>
-            <a:off x="10710367" y="6382512"/>
+            <a:off x="10774375" y="6382512"/>
             <a:ext cx="914400" cy="219456"/>
           </a:xfrm>
           <a:prstGeom prst="rect">
@@ -3830,7 +4347,7 @@
                 <a:ea typeface="Arial" pitchFamily="34" charset="-122"/>
                 <a:cs typeface="Arial" pitchFamily="34" charset="-120"/>
               </a:rPr>
-              <a:t>10</a:t>
+              <a:t>11</a:t>
             </a:r>
             <a:endParaRPr lang="en-US" sz="900" dirty="0"/>
           </a:p>
@@ -3876,7 +4393,7 @@
         </p:nvSpPr>
         <p:spPr>
           <a:xfrm>
-            <a:off x="566928" y="457200"/>
+            <a:off x="502920" y="457200"/>
             <a:ext cx="384048" cy="384048"/>
           </a:xfrm>
           <a:prstGeom prst="ellipse">
@@ -3896,7 +4413,7 @@
         </p:nvSpPr>
         <p:spPr>
           <a:xfrm>
-            <a:off x="566928" y="457200"/>
+            <a:off x="502920" y="457200"/>
             <a:ext cx="384048" cy="384048"/>
           </a:xfrm>
           <a:prstGeom prst="rect">
@@ -3935,7 +4452,7 @@
         </p:nvSpPr>
         <p:spPr>
           <a:xfrm>
-            <a:off x="1133856" y="457200"/>
+            <a:off x="1069848" y="457200"/>
             <a:ext cx="10490911" cy="182880"/>
           </a:xfrm>
           <a:prstGeom prst="rect">
@@ -3974,7 +4491,7 @@
         </p:nvSpPr>
         <p:spPr>
           <a:xfrm>
-            <a:off x="1133856" y="640080"/>
+            <a:off x="1069848" y="640080"/>
             <a:ext cx="10490911" cy="365760"/>
           </a:xfrm>
           <a:prstGeom prst="rect">
@@ -4013,7 +4530,7 @@
         </p:nvSpPr>
         <p:spPr>
           <a:xfrm>
-            <a:off x="566928" y="1188720"/>
+            <a:off x="502920" y="1188720"/>
             <a:ext cx="11057839" cy="457200"/>
           </a:xfrm>
           <a:prstGeom prst="rect">
@@ -4052,7 +4569,7 @@
         </p:nvSpPr>
         <p:spPr>
           <a:xfrm>
-            <a:off x="566928" y="1691640"/>
+            <a:off x="502920" y="1691640"/>
             <a:ext cx="11057839" cy="0"/>
           </a:xfrm>
           <a:prstGeom prst="line">
@@ -4075,7 +4592,7 @@
         </p:nvSpPr>
         <p:spPr>
           <a:xfrm>
-            <a:off x="566928" y="1965960"/>
+            <a:off x="502920" y="1965960"/>
             <a:ext cx="2641016" cy="960120"/>
           </a:xfrm>
           <a:prstGeom prst="roundRect">
@@ -4102,7 +4619,7 @@
         </p:nvSpPr>
         <p:spPr>
           <a:xfrm>
-            <a:off x="731520" y="2093976"/>
+            <a:off x="667512" y="2093976"/>
             <a:ext cx="2311832" cy="201168"/>
           </a:xfrm>
           <a:prstGeom prst="rect">
@@ -4141,7 +4658,7 @@
         </p:nvSpPr>
         <p:spPr>
           <a:xfrm>
-            <a:off x="731520" y="2313432"/>
+            <a:off x="667512" y="2313432"/>
             <a:ext cx="2311832" cy="274320"/>
           </a:xfrm>
           <a:prstGeom prst="rect">
@@ -4182,7 +4699,7 @@
         </p:nvSpPr>
         <p:spPr>
           <a:xfrm>
-            <a:off x="3372536" y="1965960"/>
+            <a:off x="3308528" y="1965960"/>
             <a:ext cx="2641016" cy="960120"/>
           </a:xfrm>
           <a:prstGeom prst="roundRect">
@@ -4209,7 +4726,7 @@
         </p:nvSpPr>
         <p:spPr>
           <a:xfrm>
-            <a:off x="3537128" y="2093976"/>
+            <a:off x="3473120" y="2093976"/>
             <a:ext cx="2311832" cy="201168"/>
           </a:xfrm>
           <a:prstGeom prst="rect">
@@ -4248,7 +4765,7 @@
         </p:nvSpPr>
         <p:spPr>
           <a:xfrm>
-            <a:off x="3537128" y="2313432"/>
+            <a:off x="3473120" y="2313432"/>
             <a:ext cx="2311832" cy="274320"/>
           </a:xfrm>
           <a:prstGeom prst="rect">
@@ -4289,7 +4806,7 @@
         </p:nvSpPr>
         <p:spPr>
           <a:xfrm>
-            <a:off x="6178144" y="1965960"/>
+            <a:off x="6114136" y="1965960"/>
             <a:ext cx="2641016" cy="960120"/>
           </a:xfrm>
           <a:prstGeom prst="roundRect">
@@ -4316,7 +4833,7 @@
         </p:nvSpPr>
         <p:spPr>
           <a:xfrm>
-            <a:off x="6342736" y="2093976"/>
+            <a:off x="6278728" y="2093976"/>
             <a:ext cx="2311832" cy="201168"/>
           </a:xfrm>
           <a:prstGeom prst="rect">
@@ -4355,7 +4872,7 @@
         </p:nvSpPr>
         <p:spPr>
           <a:xfrm>
-            <a:off x="6342736" y="2313432"/>
+            <a:off x="6278728" y="2313432"/>
             <a:ext cx="2311832" cy="274320"/>
           </a:xfrm>
           <a:prstGeom prst="rect">
@@ -4396,7 +4913,7 @@
         </p:nvSpPr>
         <p:spPr>
           <a:xfrm>
-            <a:off x="8983751" y="1965960"/>
+            <a:off x="8919743" y="1965960"/>
             <a:ext cx="2641016" cy="960120"/>
           </a:xfrm>
           <a:prstGeom prst="roundRect">
@@ -4423,7 +4940,7 @@
         </p:nvSpPr>
         <p:spPr>
           <a:xfrm>
-            <a:off x="9148343" y="2093976"/>
+            <a:off x="9084335" y="2093976"/>
             <a:ext cx="2311832" cy="201168"/>
           </a:xfrm>
           <a:prstGeom prst="rect">
@@ -4462,7 +4979,7 @@
         </p:nvSpPr>
         <p:spPr>
           <a:xfrm>
-            <a:off x="9148343" y="2313432"/>
+            <a:off x="9084335" y="2313432"/>
             <a:ext cx="2311832" cy="274320"/>
           </a:xfrm>
           <a:prstGeom prst="rect">
@@ -4503,7 +5020,7 @@
         </p:nvSpPr>
         <p:spPr>
           <a:xfrm>
-            <a:off x="566928" y="3090672"/>
+            <a:off x="502920" y="3090672"/>
             <a:ext cx="2641016" cy="960120"/>
           </a:xfrm>
           <a:prstGeom prst="roundRect">
@@ -4530,7 +5047,7 @@
         </p:nvSpPr>
         <p:spPr>
           <a:xfrm>
-            <a:off x="731520" y="3218688"/>
+            <a:off x="667512" y="3218688"/>
             <a:ext cx="2311832" cy="201168"/>
           </a:xfrm>
           <a:prstGeom prst="rect">
@@ -4569,7 +5086,7 @@
         </p:nvSpPr>
         <p:spPr>
           <a:xfrm>
-            <a:off x="731520" y="3438144"/>
+            <a:off x="667512" y="3438144"/>
             <a:ext cx="2311832" cy="274320"/>
           </a:xfrm>
           <a:prstGeom prst="rect">
@@ -4610,7 +5127,7 @@
         </p:nvSpPr>
         <p:spPr>
           <a:xfrm>
-            <a:off x="3372536" y="3090672"/>
+            <a:off x="3308528" y="3090672"/>
             <a:ext cx="2641016" cy="960120"/>
           </a:xfrm>
           <a:prstGeom prst="roundRect">
@@ -4637,7 +5154,7 @@
         </p:nvSpPr>
         <p:spPr>
           <a:xfrm>
-            <a:off x="3537128" y="3218688"/>
+            <a:off x="3473120" y="3218688"/>
             <a:ext cx="2311832" cy="201168"/>
           </a:xfrm>
           <a:prstGeom prst="rect">
@@ -4676,7 +5193,7 @@
         </p:nvSpPr>
         <p:spPr>
           <a:xfrm>
-            <a:off x="3537128" y="3438144"/>
+            <a:off x="3473120" y="3438144"/>
             <a:ext cx="2311832" cy="274320"/>
           </a:xfrm>
           <a:prstGeom prst="rect">
@@ -4717,7 +5234,7 @@
         </p:nvSpPr>
         <p:spPr>
           <a:xfrm>
-            <a:off x="6178144" y="3090672"/>
+            <a:off x="6114136" y="3090672"/>
             <a:ext cx="2641016" cy="960120"/>
           </a:xfrm>
           <a:prstGeom prst="roundRect">
@@ -4744,7 +5261,7 @@
         </p:nvSpPr>
         <p:spPr>
           <a:xfrm>
-            <a:off x="6342736" y="3218688"/>
+            <a:off x="6278728" y="3218688"/>
             <a:ext cx="2311832" cy="201168"/>
           </a:xfrm>
           <a:prstGeom prst="rect">
@@ -4783,7 +5300,7 @@
         </p:nvSpPr>
         <p:spPr>
           <a:xfrm>
-            <a:off x="6342736" y="3438144"/>
+            <a:off x="6278728" y="3438144"/>
             <a:ext cx="2311832" cy="274320"/>
           </a:xfrm>
           <a:prstGeom prst="rect">
@@ -4824,7 +5341,7 @@
         </p:nvSpPr>
         <p:spPr>
           <a:xfrm>
-            <a:off x="566928" y="4306824"/>
+            <a:off x="502920" y="4306824"/>
             <a:ext cx="11057839" cy="274320"/>
           </a:xfrm>
           <a:prstGeom prst="rect">
@@ -4863,7 +5380,7 @@
         </p:nvSpPr>
         <p:spPr>
           <a:xfrm>
-            <a:off x="566928" y="4636008"/>
+            <a:off x="502920" y="4636008"/>
             <a:ext cx="11057839" cy="396240"/>
           </a:xfrm>
           <a:prstGeom prst="roundRect">
@@ -4890,7 +5407,7 @@
         </p:nvSpPr>
         <p:spPr>
           <a:xfrm>
-            <a:off x="676656" y="4709160"/>
+            <a:off x="612648" y="4709160"/>
             <a:ext cx="411480" cy="249936"/>
           </a:xfrm>
           <a:prstGeom prst="roundRect">
@@ -4917,7 +5434,7 @@
         </p:nvSpPr>
         <p:spPr>
           <a:xfrm>
-            <a:off x="676656" y="4709160"/>
+            <a:off x="612648" y="4709160"/>
             <a:ext cx="411480" cy="249936"/>
           </a:xfrm>
           <a:prstGeom prst="rect">
@@ -4956,7 +5473,7 @@
         </p:nvSpPr>
         <p:spPr>
           <a:xfrm>
-            <a:off x="1207008" y="4672584"/>
+            <a:off x="1143000" y="4672584"/>
             <a:ext cx="10280599" cy="323088"/>
           </a:xfrm>
           <a:prstGeom prst="rect">
@@ -4995,7 +5512,7 @@
         </p:nvSpPr>
         <p:spPr>
           <a:xfrm>
-            <a:off x="566928" y="5114544"/>
+            <a:off x="502920" y="5114544"/>
             <a:ext cx="11057839" cy="396240"/>
           </a:xfrm>
           <a:prstGeom prst="roundRect">
@@ -5022,7 +5539,7 @@
         </p:nvSpPr>
         <p:spPr>
           <a:xfrm>
-            <a:off x="676656" y="5187696"/>
+            <a:off x="612648" y="5187696"/>
             <a:ext cx="411480" cy="249936"/>
           </a:xfrm>
           <a:prstGeom prst="roundRect">
@@ -5049,7 +5566,7 @@
         </p:nvSpPr>
         <p:spPr>
           <a:xfrm>
-            <a:off x="676656" y="5187696"/>
+            <a:off x="612648" y="5187696"/>
             <a:ext cx="411480" cy="249936"/>
           </a:xfrm>
           <a:prstGeom prst="rect">
@@ -5088,7 +5605,7 @@
         </p:nvSpPr>
         <p:spPr>
           <a:xfrm>
-            <a:off x="1207008" y="5151120"/>
+            <a:off x="1143000" y="5151120"/>
             <a:ext cx="10280599" cy="323088"/>
           </a:xfrm>
           <a:prstGeom prst="rect">
@@ -5127,7 +5644,7 @@
         </p:nvSpPr>
         <p:spPr>
           <a:xfrm>
-            <a:off x="566928" y="5593080"/>
+            <a:off x="502920" y="5593080"/>
             <a:ext cx="11057839" cy="396240"/>
           </a:xfrm>
           <a:prstGeom prst="roundRect">
@@ -5154,7 +5671,7 @@
         </p:nvSpPr>
         <p:spPr>
           <a:xfrm>
-            <a:off x="676656" y="5666232"/>
+            <a:off x="612648" y="5666232"/>
             <a:ext cx="411480" cy="249936"/>
           </a:xfrm>
           <a:prstGeom prst="roundRect">
@@ -5181,7 +5698,7 @@
         </p:nvSpPr>
         <p:spPr>
           <a:xfrm>
-            <a:off x="676656" y="5666232"/>
+            <a:off x="612648" y="5666232"/>
             <a:ext cx="411480" cy="249936"/>
           </a:xfrm>
           <a:prstGeom prst="rect">
@@ -5220,7 +5737,7 @@
         </p:nvSpPr>
         <p:spPr>
           <a:xfrm>
-            <a:off x="1207008" y="5629656"/>
+            <a:off x="1143000" y="5629656"/>
             <a:ext cx="10280599" cy="323088"/>
           </a:xfrm>
           <a:prstGeom prst="rect">
@@ -5259,7 +5776,7 @@
         </p:nvSpPr>
         <p:spPr>
           <a:xfrm>
-            <a:off x="566928" y="6382512"/>
+            <a:off x="502920" y="6382512"/>
             <a:ext cx="7315200" cy="219456"/>
           </a:xfrm>
           <a:prstGeom prst="rect">
@@ -5298,7 +5815,7 @@
         </p:nvSpPr>
         <p:spPr>
           <a:xfrm>
-            <a:off x="10710367" y="6382512"/>
+            <a:off x="10774375" y="6382512"/>
             <a:ext cx="914400" cy="219456"/>
           </a:xfrm>
           <a:prstGeom prst="rect">
@@ -5369,7 +5886,7 @@
         </p:nvSpPr>
         <p:spPr>
           <a:xfrm>
-            <a:off x="566928" y="457200"/>
+            <a:off x="502920" y="457200"/>
             <a:ext cx="384048" cy="384048"/>
           </a:xfrm>
           <a:prstGeom prst="ellipse">
@@ -5389,7 +5906,7 @@
         </p:nvSpPr>
         <p:spPr>
           <a:xfrm>
-            <a:off x="566928" y="457200"/>
+            <a:off x="502920" y="457200"/>
             <a:ext cx="384048" cy="384048"/>
           </a:xfrm>
           <a:prstGeom prst="rect">
@@ -5428,7 +5945,7 @@
         </p:nvSpPr>
         <p:spPr>
           <a:xfrm>
-            <a:off x="1133856" y="457200"/>
+            <a:off x="1069848" y="457200"/>
             <a:ext cx="10490911" cy="182880"/>
           </a:xfrm>
           <a:prstGeom prst="rect">
@@ -5453,7 +5970,7 @@
                 <a:ea typeface="Arial" pitchFamily="34" charset="-122"/>
                 <a:cs typeface="Arial" pitchFamily="34" charset="-120"/>
               </a:rPr>
-              <a:t>Land</a:t>
+              <a:t>Location</a:t>
             </a:r>
             <a:endParaRPr lang="en-US" sz="950" dirty="0"/>
           </a:p>
@@ -5467,7 +5984,7 @@
         </p:nvSpPr>
         <p:spPr>
           <a:xfrm>
-            <a:off x="1133856" y="640080"/>
+            <a:off x="1069848" y="640080"/>
             <a:ext cx="10490911" cy="365760"/>
           </a:xfrm>
           <a:prstGeom prst="rect">
@@ -5492,61 +6009,46 @@
                 <a:ea typeface="Pretendard" pitchFamily="34" charset="-122"/>
                 <a:cs typeface="Pretendard" pitchFamily="34" charset="-120"/>
               </a:rPr>
-              <a:t>토지 현황</a:t>
+              <a:t>입지 분석</a:t>
             </a:r>
             <a:endParaRPr lang="en-US" sz="2300" dirty="0"/>
           </a:p>
         </p:txBody>
       </p:sp>
-      <p:sp>
-        <p:nvSpPr>
-          <p:cNvPr id="6" name="Text 4"/>
-          <p:cNvSpPr/>
-          <p:nvPr/>
-        </p:nvSpPr>
-        <p:spPr>
-          <a:xfrm>
-            <a:off x="566928" y="1371600"/>
-            <a:ext cx="6858000" cy="237744"/>
-          </a:xfrm>
-          <a:prstGeom prst="rect">
-            <a:avLst/>
-          </a:prstGeom>
-          <a:noFill/>
-          <a:ln/>
-        </p:spPr>
-        <p:txBody>
-          <a:bodyPr wrap="square" lIns="0" tIns="0" rIns="0" bIns="0" rtlCol="0" anchor="ctr"/>
-          <a:lstStyle/>
-          <a:p>
-            <a:pPr indent="0" marL="0">
-              <a:buNone/>
-            </a:pPr>
-            <a:r>
-              <a:rPr lang="en-US" sz="1100" b="1" dirty="0">
-                <a:solidFill>
-                  <a:srgbClr val="10161F"/>
-                </a:solidFill>
-                <a:latin typeface="Pretendard" pitchFamily="34" charset="0"/>
-                <a:ea typeface="Pretendard" pitchFamily="34" charset="-122"/>
-                <a:cs typeface="Pretendard" pitchFamily="34" charset="-120"/>
-              </a:rPr>
-              <a:t>토지 현황</a:t>
-            </a:r>
-            <a:endParaRPr lang="en-US" sz="1100" dirty="0"/>
-          </a:p>
-        </p:txBody>
-      </p:sp>
-      <p:sp>
-        <p:nvSpPr>
-          <p:cNvPr id="7" name="Text 5"/>
-          <p:cNvSpPr/>
-          <p:nvPr/>
-        </p:nvSpPr>
-        <p:spPr>
-          <a:xfrm>
-            <a:off x="566928" y="1645920"/>
-            <a:ext cx="2606040" cy="438912"/>
+      <p:pic>
+        <p:nvPicPr>
+          <p:cNvPr id="6" name="Image 0" descr="preencoded.png">    </p:cNvPr>
+          <p:cNvPicPr>
+            <a:picLocks noChangeAspect="1"/>
+          </p:cNvPicPr>
+          <p:nvPr/>
+        </p:nvPicPr>
+        <p:blipFill>
+          <a:blip r:embed="rId1"/>
+          <a:stretch>
+            <a:fillRect/>
+          </a:stretch>
+        </p:blipFill>
+        <p:spPr>
+          <a:xfrm>
+            <a:off x="502920" y="1481328"/>
+            <a:ext cx="5120640" cy="4114800"/>
+          </a:xfrm>
+          <a:prstGeom prst="rect">
+            <a:avLst/>
+          </a:prstGeom>
+        </p:spPr>
+      </p:pic>
+      <p:sp>
+        <p:nvSpPr>
+          <p:cNvPr id="7" name="Text 4"/>
+          <p:cNvSpPr/>
+          <p:nvPr/>
+        </p:nvSpPr>
+        <p:spPr>
+          <a:xfrm>
+            <a:off x="5989320" y="1481328"/>
+            <a:ext cx="1560003" cy="493776"/>
           </a:xfrm>
           <a:prstGeom prst="rect">
             <a:avLst/>
@@ -5560,12 +6062,12 @@
           <a:p>
             <a:pPr indent="0" marL="0">
               <a:lnSpc>
-                <a:spcPct val="120000"/>
+                <a:spcPct val="115000"/>
               </a:lnSpc>
               <a:buNone/>
             </a:pPr>
             <a:r>
-              <a:rPr lang="en-US" sz="1350" dirty="0">
+              <a:rPr lang="en-US" sz="1300" dirty="0">
                 <a:solidFill>
                   <a:srgbClr val="718096"/>
                 </a:solidFill>
@@ -5573,22 +6075,22 @@
                 <a:ea typeface="Pretendard" pitchFamily="34" charset="-122"/>
                 <a:cs typeface="Pretendard" pitchFamily="34" charset="-120"/>
               </a:rPr>
-              <a:t>대지면적</a:t>
-            </a:r>
-            <a:endParaRPr lang="en-US" sz="1350" dirty="0"/>
-          </a:p>
-        </p:txBody>
-      </p:sp>
-      <p:sp>
-        <p:nvSpPr>
-          <p:cNvPr id="8" name="Text 6"/>
-          <p:cNvSpPr/>
-          <p:nvPr/>
-        </p:nvSpPr>
-        <p:spPr>
-          <a:xfrm>
-            <a:off x="3172968" y="1645920"/>
-            <a:ext cx="4251960" cy="438912"/>
+              <a:t>대중교통</a:t>
+            </a:r>
+            <a:endParaRPr lang="en-US" sz="1300" dirty="0"/>
+          </a:p>
+        </p:txBody>
+      </p:sp>
+      <p:sp>
+        <p:nvSpPr>
+          <p:cNvPr id="8" name="Text 5"/>
+          <p:cNvSpPr/>
+          <p:nvPr/>
+        </p:nvSpPr>
+        <p:spPr>
+          <a:xfrm>
+            <a:off x="7549323" y="1481328"/>
+            <a:ext cx="4011436" cy="493776"/>
           </a:xfrm>
           <a:prstGeom prst="rect">
             <a:avLst/>
@@ -5602,12 +6104,12 @@
           <a:p>
             <a:pPr indent="0" marL="0">
               <a:lnSpc>
-                <a:spcPct val="120000"/>
+                <a:spcPct val="115000"/>
               </a:lnSpc>
               <a:buNone/>
             </a:pPr>
             <a:r>
-              <a:rPr lang="en-US" sz="1350" b="1" dirty="0">
+              <a:rPr lang="en-US" sz="1300" b="1" dirty="0">
                 <a:solidFill>
                   <a:srgbClr val="10161F"/>
                 </a:solidFill>
@@ -5615,22 +6117,22 @@
                 <a:ea typeface="Pretendard" pitchFamily="34" charset="-122"/>
                 <a:cs typeface="Pretendard" pitchFamily="34" charset="-120"/>
               </a:rPr>
-              <a:t>168.5평</a:t>
-            </a:r>
-            <a:endParaRPr lang="en-US" sz="1350" dirty="0"/>
-          </a:p>
-        </p:txBody>
-      </p:sp>
-      <p:sp>
-        <p:nvSpPr>
-          <p:cNvPr id="9" name="Shape 7"/>
-          <p:cNvSpPr/>
-          <p:nvPr/>
-        </p:nvSpPr>
-        <p:spPr>
-          <a:xfrm>
-            <a:off x="566928" y="2084832"/>
-            <a:ext cx="6858000" cy="0"/>
+              <a:t>인접 지하철역 역세권 (상세 확인 필요)</a:t>
+            </a:r>
+            <a:endParaRPr lang="en-US" sz="1300" dirty="0"/>
+          </a:p>
+        </p:txBody>
+      </p:sp>
+      <p:sp>
+        <p:nvSpPr>
+          <p:cNvPr id="9" name="Shape 6"/>
+          <p:cNvSpPr/>
+          <p:nvPr/>
+        </p:nvSpPr>
+        <p:spPr>
+          <a:xfrm>
+            <a:off x="5989320" y="1975104"/>
+            <a:ext cx="5571439" cy="0"/>
           </a:xfrm>
           <a:prstGeom prst="line">
             <a:avLst/>
@@ -5646,14 +6148,14 @@
       </p:sp>
       <p:sp>
         <p:nvSpPr>
-          <p:cNvPr id="10" name="Text 8"/>
-          <p:cNvSpPr/>
-          <p:nvPr/>
-        </p:nvSpPr>
-        <p:spPr>
-          <a:xfrm>
-            <a:off x="566928" y="2084832"/>
-            <a:ext cx="2606040" cy="438912"/>
+          <p:cNvPr id="10" name="Text 7"/>
+          <p:cNvSpPr/>
+          <p:nvPr/>
+        </p:nvSpPr>
+        <p:spPr>
+          <a:xfrm>
+            <a:off x="5989320" y="1975104"/>
+            <a:ext cx="1560003" cy="493776"/>
           </a:xfrm>
           <a:prstGeom prst="rect">
             <a:avLst/>
@@ -5667,12 +6169,12 @@
           <a:p>
             <a:pPr indent="0" marL="0">
               <a:lnSpc>
-                <a:spcPct val="120000"/>
+                <a:spcPct val="115000"/>
               </a:lnSpc>
               <a:buNone/>
             </a:pPr>
             <a:r>
-              <a:rPr lang="en-US" sz="1350" dirty="0">
+              <a:rPr lang="en-US" sz="1300" dirty="0">
                 <a:solidFill>
                   <a:srgbClr val="718096"/>
                 </a:solidFill>
@@ -5680,22 +6182,22 @@
                 <a:ea typeface="Pretendard" pitchFamily="34" charset="-122"/>
                 <a:cs typeface="Pretendard" pitchFamily="34" charset="-120"/>
               </a:rPr>
-              <a:t>용도지역</a:t>
-            </a:r>
-            <a:endParaRPr lang="en-US" sz="1350" dirty="0"/>
-          </a:p>
-        </p:txBody>
-      </p:sp>
-      <p:sp>
-        <p:nvSpPr>
-          <p:cNvPr id="11" name="Text 9"/>
-          <p:cNvSpPr/>
-          <p:nvPr/>
-        </p:nvSpPr>
-        <p:spPr>
-          <a:xfrm>
-            <a:off x="3172968" y="2084832"/>
-            <a:ext cx="4251960" cy="438912"/>
+              <a:t>상권권역</a:t>
+            </a:r>
+            <a:endParaRPr lang="en-US" sz="1300" dirty="0"/>
+          </a:p>
+        </p:txBody>
+      </p:sp>
+      <p:sp>
+        <p:nvSpPr>
+          <p:cNvPr id="11" name="Text 8"/>
+          <p:cNvSpPr/>
+          <p:nvPr/>
+        </p:nvSpPr>
+        <p:spPr>
+          <a:xfrm>
+            <a:off x="7549323" y="1975104"/>
+            <a:ext cx="4011436" cy="493776"/>
           </a:xfrm>
           <a:prstGeom prst="rect">
             <a:avLst/>
@@ -5709,12 +6211,12 @@
           <a:p>
             <a:pPr indent="0" marL="0">
               <a:lnSpc>
-                <a:spcPct val="120000"/>
+                <a:spcPct val="115000"/>
               </a:lnSpc>
               <a:buNone/>
             </a:pPr>
             <a:r>
-              <a:rPr lang="en-US" sz="1350" b="1" dirty="0">
+              <a:rPr lang="en-US" sz="1300" b="1" dirty="0">
                 <a:solidFill>
                   <a:srgbClr val="10161F"/>
                 </a:solidFill>
@@ -5722,49 +6224,26 @@
                 <a:ea typeface="Pretendard" pitchFamily="34" charset="-122"/>
                 <a:cs typeface="Pretendard" pitchFamily="34" charset="-120"/>
               </a:rPr>
-              <a:t>제3종일반주거</a:t>
-            </a:r>
-            <a:endParaRPr lang="en-US" sz="1350" dirty="0"/>
-          </a:p>
-        </p:txBody>
-      </p:sp>
-      <p:sp>
-        <p:nvSpPr>
-          <p:cNvPr id="12" name="Shape 10"/>
-          <p:cNvSpPr/>
-          <p:nvPr/>
-        </p:nvSpPr>
-        <p:spPr>
-          <a:xfrm>
-            <a:off x="7604608" y="1371600"/>
-            <a:ext cx="0" cy="4754880"/>
-          </a:xfrm>
-          <a:prstGeom prst="line">
-            <a:avLst/>
-          </a:prstGeom>
-          <a:noFill/>
-          <a:ln w="8890">
-            <a:solidFill>
-              <a:srgbClr val="B98A2E"/>
-            </a:solidFill>
-            <a:prstDash val="solid"/>
-          </a:ln>
-        </p:spPr>
-      </p:sp>
-      <p:sp>
-        <p:nvSpPr>
-          <p:cNvPr id="13" name="Shape 11"/>
-          <p:cNvSpPr/>
-          <p:nvPr/>
-        </p:nvSpPr>
-        <p:spPr>
-          <a:xfrm>
-            <a:off x="7784287" y="1645920"/>
-            <a:ext cx="3840480" cy="2103120"/>
+              <a:t>강남권역 주요 상업·업무 권역</a:t>
+            </a:r>
+            <a:endParaRPr lang="en-US" sz="1300" dirty="0"/>
+          </a:p>
+        </p:txBody>
+      </p:sp>
+      <p:sp>
+        <p:nvSpPr>
+          <p:cNvPr id="12" name="Shape 9"/>
+          <p:cNvSpPr/>
+          <p:nvPr/>
+        </p:nvSpPr>
+        <p:spPr>
+          <a:xfrm>
+            <a:off x="5989320" y="2606040"/>
+            <a:ext cx="5571439" cy="658368"/>
           </a:xfrm>
           <a:prstGeom prst="roundRect">
             <a:avLst>
-              <a:gd name="adj" fmla="val 2609"/>
+              <a:gd name="adj" fmla="val 8333"/>
             </a:avLst>
           </a:prstGeom>
           <a:solidFill>
@@ -5775,14 +6254,14 @@
       </p:sp>
       <p:sp>
         <p:nvSpPr>
-          <p:cNvPr id="14" name="Shape 12"/>
-          <p:cNvSpPr/>
-          <p:nvPr/>
-        </p:nvSpPr>
-        <p:spPr>
-          <a:xfrm>
-            <a:off x="7784287" y="1700784"/>
-            <a:ext cx="36576" cy="1993392"/>
+          <p:cNvPr id="13" name="Shape 10"/>
+          <p:cNvSpPr/>
+          <p:nvPr/>
+        </p:nvSpPr>
+        <p:spPr>
+          <a:xfrm>
+            <a:off x="5989320" y="2660904"/>
+            <a:ext cx="36576" cy="548640"/>
           </a:xfrm>
           <a:prstGeom prst="rect">
             <a:avLst/>
@@ -5795,14 +6274,14 @@
       </p:sp>
       <p:sp>
         <p:nvSpPr>
-          <p:cNvPr id="15" name="Text 13"/>
-          <p:cNvSpPr/>
-          <p:nvPr/>
-        </p:nvSpPr>
-        <p:spPr>
-          <a:xfrm>
-            <a:off x="7967167" y="1755648"/>
-            <a:ext cx="3511296" cy="201168"/>
+          <p:cNvPr id="14" name="Text 11"/>
+          <p:cNvSpPr/>
+          <p:nvPr/>
+        </p:nvSpPr>
+        <p:spPr>
+          <a:xfrm>
+            <a:off x="6135624" y="2697480"/>
+            <a:ext cx="5315407" cy="201168"/>
           </a:xfrm>
           <a:prstGeom prst="rect">
             <a:avLst/>
@@ -5826,7 +6305,7 @@
                 <a:ea typeface="Pretendard" pitchFamily="34" charset="-122"/>
                 <a:cs typeface="Pretendard" pitchFamily="34" charset="-120"/>
               </a:rPr>
-              <a:t>토지 및 건축 규제 포인트</a:t>
+              <a:t>입지 종합 분석</a:t>
             </a:r>
             <a:endParaRPr lang="en-US" sz="1050" dirty="0"/>
           </a:p>
@@ -5834,14 +6313,14 @@
       </p:sp>
       <p:sp>
         <p:nvSpPr>
-          <p:cNvPr id="16" name="Text 14"/>
-          <p:cNvSpPr/>
-          <p:nvPr/>
-        </p:nvSpPr>
-        <p:spPr>
-          <a:xfrm>
-            <a:off x="7967167" y="1975104"/>
-            <a:ext cx="3511296" cy="1700784"/>
+          <p:cNvPr id="15" name="Text 12"/>
+          <p:cNvSpPr/>
+          <p:nvPr/>
+        </p:nvSpPr>
+        <p:spPr>
+          <a:xfrm>
+            <a:off x="6135624" y="2898648"/>
+            <a:ext cx="5315407" cy="329184"/>
           </a:xfrm>
           <a:prstGeom prst="rect">
             <a:avLst/>
@@ -5855,13 +6334,13 @@
           <a:p>
             <a:pPr marL="342900" indent="-342900">
               <a:lnSpc>
-                <a:spcPct val="120000"/>
+                <a:spcPct val="108000"/>
               </a:lnSpc>
               <a:buSzPct val="100000"/>
               <a:buChar char="•"/>
             </a:pPr>
             <a:r>
-              <a:rPr lang="en-US" sz="930" dirty="0">
+              <a:rPr lang="en-US" sz="980" dirty="0">
                 <a:solidFill>
                   <a:srgbClr val="10161F"/>
                 </a:solidFill>
@@ -5869,106 +6348,22 @@
                 <a:ea typeface="Pretendard" pitchFamily="34" charset="-122"/>
                 <a:cs typeface="Pretendard" pitchFamily="34" charset="-120"/>
               </a:rPr>
-              <a:t>용도지역·용도지구 기준 건폐율/용적률 상한 확인</a:t>
-            </a:r>
-            <a:endParaRPr lang="en-US" sz="930" dirty="0"/>
-          </a:p>
-          <a:p>
-            <a:pPr marL="342900" indent="-342900">
-              <a:lnSpc>
-                <a:spcPct val="120000"/>
-              </a:lnSpc>
-              <a:buSzPct val="100000"/>
-              <a:buChar char="•"/>
-            </a:pPr>
-            <a:r>
-              <a:rPr lang="en-US" sz="930" dirty="0">
-                <a:solidFill>
-                  <a:srgbClr val="10161F"/>
-                </a:solidFill>
-                <a:latin typeface="Pretendard" pitchFamily="34" charset="0"/>
-                <a:ea typeface="Pretendard" pitchFamily="34" charset="-122"/>
-                <a:cs typeface="Pretendard" pitchFamily="34" charset="-120"/>
-              </a:rPr>
-              <a:t>필지 형상 및 접도 조건에 따른 건축 가능 면적 검토</a:t>
-            </a:r>
-            <a:endParaRPr lang="en-US" sz="930" dirty="0"/>
-          </a:p>
-          <a:p>
-            <a:pPr marL="342900" indent="-342900">
-              <a:lnSpc>
-                <a:spcPct val="120000"/>
-              </a:lnSpc>
-              <a:buSzPct val="100000"/>
-              <a:buChar char="•"/>
-            </a:pPr>
-            <a:r>
-              <a:rPr lang="en-US" sz="930" dirty="0">
-                <a:solidFill>
-                  <a:srgbClr val="10161F"/>
-                </a:solidFill>
-                <a:latin typeface="Pretendard" pitchFamily="34" charset="0"/>
-                <a:ea typeface="Pretendard" pitchFamily="34" charset="-122"/>
-                <a:cs typeface="Pretendard" pitchFamily="34" charset="-120"/>
-              </a:rPr>
-              <a:t>토지이용계획 열람 및 개발행위허가 제한 여부 확인</a:t>
-            </a:r>
-            <a:endParaRPr lang="en-US" sz="930" dirty="0"/>
-          </a:p>
-        </p:txBody>
-      </p:sp>
-      <p:sp>
-        <p:nvSpPr>
-          <p:cNvPr id="17" name="Shape 15"/>
-          <p:cNvSpPr/>
-          <p:nvPr/>
-        </p:nvSpPr>
-        <p:spPr>
-          <a:xfrm>
-            <a:off x="7784287" y="3977640"/>
-            <a:ext cx="3840480" cy="2148840"/>
-          </a:xfrm>
-          <a:prstGeom prst="roundRect">
-            <a:avLst>
-              <a:gd name="adj" fmla="val 2553"/>
-            </a:avLst>
-          </a:prstGeom>
-          <a:solidFill>
-            <a:srgbClr val="BEE3F8"/>
-          </a:solidFill>
-          <a:ln/>
-        </p:spPr>
-      </p:sp>
-      <p:sp>
-        <p:nvSpPr>
-          <p:cNvPr id="18" name="Shape 16"/>
-          <p:cNvSpPr/>
-          <p:nvPr/>
-        </p:nvSpPr>
-        <p:spPr>
-          <a:xfrm>
-            <a:off x="7784287" y="4032504"/>
-            <a:ext cx="36576" cy="2039112"/>
-          </a:xfrm>
-          <a:prstGeom prst="rect">
-            <a:avLst/>
-          </a:prstGeom>
-          <a:solidFill>
-            <a:srgbClr val="2B6CB0"/>
-          </a:solidFill>
-          <a:ln/>
-        </p:spPr>
-      </p:sp>
-      <p:sp>
-        <p:nvSpPr>
-          <p:cNvPr id="19" name="Text 17"/>
-          <p:cNvSpPr/>
-          <p:nvPr/>
-        </p:nvSpPr>
-        <p:spPr>
-          <a:xfrm>
-            <a:off x="7967167" y="4087368"/>
-            <a:ext cx="3511296" cy="201168"/>
+              <a:t>강남권역 배후 상권 기반 안정적 임대 수요</a:t>
+            </a:r>
+            <a:endParaRPr lang="en-US" sz="980" dirty="0"/>
+          </a:p>
+        </p:txBody>
+      </p:sp>
+      <p:sp>
+        <p:nvSpPr>
+          <p:cNvPr id="16" name="Text 13"/>
+          <p:cNvSpPr/>
+          <p:nvPr/>
+        </p:nvSpPr>
+        <p:spPr>
+          <a:xfrm>
+            <a:off x="502920" y="6382512"/>
+            <a:ext cx="7315200" cy="219456"/>
           </a:xfrm>
           <a:prstGeom prst="rect">
             <a:avLst/>
@@ -5984,130 +6379,6 @@
               <a:buNone/>
             </a:pPr>
             <a:r>
-              <a:rPr lang="en-US" sz="1050" b="1" dirty="0">
-                <a:solidFill>
-                  <a:srgbClr val="2B6CB0"/>
-                </a:solidFill>
-                <a:latin typeface="Pretendard" pitchFamily="34" charset="0"/>
-                <a:ea typeface="Pretendard" pitchFamily="34" charset="-122"/>
-                <a:cs typeface="Pretendard" pitchFamily="34" charset="-120"/>
-              </a:rPr>
-              <a:t>권리관계 및 공적장부</a:t>
-            </a:r>
-            <a:endParaRPr lang="en-US" sz="1050" dirty="0"/>
-          </a:p>
-        </p:txBody>
-      </p:sp>
-      <p:sp>
-        <p:nvSpPr>
-          <p:cNvPr id="20" name="Text 18"/>
-          <p:cNvSpPr/>
-          <p:nvPr/>
-        </p:nvSpPr>
-        <p:spPr>
-          <a:xfrm>
-            <a:off x="7967167" y="4306824"/>
-            <a:ext cx="3511296" cy="1746504"/>
-          </a:xfrm>
-          <a:prstGeom prst="rect">
-            <a:avLst/>
-          </a:prstGeom>
-          <a:noFill/>
-          <a:ln/>
-        </p:spPr>
-        <p:txBody>
-          <a:bodyPr wrap="square" lIns="0" tIns="0" rIns="0" bIns="0" rtlCol="0" anchor="t"/>
-          <a:lstStyle/>
-          <a:p>
-            <a:pPr marL="342900" indent="-342900">
-              <a:lnSpc>
-                <a:spcPct val="120000"/>
-              </a:lnSpc>
-              <a:buSzPct val="100000"/>
-              <a:buChar char="•"/>
-            </a:pPr>
-            <a:r>
-              <a:rPr lang="en-US" sz="930" dirty="0">
-                <a:solidFill>
-                  <a:srgbClr val="10161F"/>
-                </a:solidFill>
-                <a:latin typeface="Pretendard" pitchFamily="34" charset="0"/>
-                <a:ea typeface="Pretendard" pitchFamily="34" charset="-122"/>
-                <a:cs typeface="Pretendard" pitchFamily="34" charset="-120"/>
-              </a:rPr>
-              <a:t>등기부등본 갑구 소유권 및 을구 근저당·가압류 확인</a:t>
-            </a:r>
-            <a:endParaRPr lang="en-US" sz="930" dirty="0"/>
-          </a:p>
-          <a:p>
-            <a:pPr marL="342900" indent="-342900">
-              <a:lnSpc>
-                <a:spcPct val="120000"/>
-              </a:lnSpc>
-              <a:buSzPct val="100000"/>
-              <a:buChar char="•"/>
-            </a:pPr>
-            <a:r>
-              <a:rPr lang="en-US" sz="930" dirty="0">
-                <a:solidFill>
-                  <a:srgbClr val="10161F"/>
-                </a:solidFill>
-                <a:latin typeface="Pretendard" pitchFamily="34" charset="0"/>
-                <a:ea typeface="Pretendard" pitchFamily="34" charset="-122"/>
-                <a:cs typeface="Pretendard" pitchFamily="34" charset="-120"/>
-              </a:rPr>
-              <a:t>건축물대장 기재 사항과 실물 현황 대조 점검</a:t>
-            </a:r>
-            <a:endParaRPr lang="en-US" sz="930" dirty="0"/>
-          </a:p>
-          <a:p>
-            <a:pPr marL="342900" indent="-342900">
-              <a:lnSpc>
-                <a:spcPct val="120000"/>
-              </a:lnSpc>
-              <a:buSzPct val="100000"/>
-              <a:buChar char="•"/>
-            </a:pPr>
-            <a:r>
-              <a:rPr lang="en-US" sz="930" dirty="0">
-                <a:solidFill>
-                  <a:srgbClr val="10161F"/>
-                </a:solidFill>
-                <a:latin typeface="Pretendard" pitchFamily="34" charset="0"/>
-                <a:ea typeface="Pretendard" pitchFamily="34" charset="-122"/>
-                <a:cs typeface="Pretendard" pitchFamily="34" charset="-120"/>
-              </a:rPr>
-              <a:t>개별공시지가 및 실거래가 비교 분석</a:t>
-            </a:r>
-            <a:endParaRPr lang="en-US" sz="930" dirty="0"/>
-          </a:p>
-        </p:txBody>
-      </p:sp>
-      <p:sp>
-        <p:nvSpPr>
-          <p:cNvPr id="21" name="Text 19"/>
-          <p:cNvSpPr/>
-          <p:nvPr/>
-        </p:nvSpPr>
-        <p:spPr>
-          <a:xfrm>
-            <a:off x="566928" y="6382512"/>
-            <a:ext cx="7315200" cy="219456"/>
-          </a:xfrm>
-          <a:prstGeom prst="rect">
-            <a:avLst/>
-          </a:prstGeom>
-          <a:noFill/>
-          <a:ln/>
-        </p:spPr>
-        <p:txBody>
-          <a:bodyPr wrap="square" lIns="0" tIns="0" rIns="0" bIns="0" rtlCol="0" anchor="ctr"/>
-          <a:lstStyle/>
-          <a:p>
-            <a:pPr indent="0" marL="0">
-              <a:buNone/>
-            </a:pPr>
-            <a:r>
               <a:rPr lang="en-US" sz="800" dirty="0">
                 <a:solidFill>
                   <a:srgbClr val="718096"/>
@@ -6124,13 +6395,13 @@
       </p:sp>
       <p:sp>
         <p:nvSpPr>
-          <p:cNvPr id="22" name="Text 20"/>
-          <p:cNvSpPr/>
-          <p:nvPr/>
-        </p:nvSpPr>
-        <p:spPr>
-          <a:xfrm>
-            <a:off x="10710367" y="6382512"/>
+          <p:cNvPr id="17" name="Text 14"/>
+          <p:cNvSpPr/>
+          <p:nvPr/>
+        </p:nvSpPr>
+        <p:spPr>
+          <a:xfrm>
+            <a:off x="10774375" y="6382512"/>
             <a:ext cx="914400" cy="219456"/>
           </a:xfrm>
           <a:prstGeom prst="rect">
@@ -6201,7 +6472,7 @@
         </p:nvSpPr>
         <p:spPr>
           <a:xfrm>
-            <a:off x="566928" y="457200"/>
+            <a:off x="502920" y="457200"/>
             <a:ext cx="384048" cy="384048"/>
           </a:xfrm>
           <a:prstGeom prst="ellipse">
@@ -6221,7 +6492,7 @@
         </p:nvSpPr>
         <p:spPr>
           <a:xfrm>
-            <a:off x="566928" y="457200"/>
+            <a:off x="502920" y="457200"/>
             <a:ext cx="384048" cy="384048"/>
           </a:xfrm>
           <a:prstGeom prst="rect">
@@ -6260,7 +6531,7 @@
         </p:nvSpPr>
         <p:spPr>
           <a:xfrm>
-            <a:off x="1133856" y="457200"/>
+            <a:off x="1069848" y="457200"/>
             <a:ext cx="10490911" cy="182880"/>
           </a:xfrm>
           <a:prstGeom prst="rect">
@@ -6285,7 +6556,7 @@
                 <a:ea typeface="Arial" pitchFamily="34" charset="-122"/>
                 <a:cs typeface="Arial" pitchFamily="34" charset="-120"/>
               </a:rPr>
-              <a:t>Building</a:t>
+              <a:t>Land</a:t>
             </a:r>
             <a:endParaRPr lang="en-US" sz="950" dirty="0"/>
           </a:p>
@@ -6299,7 +6570,7 @@
         </p:nvSpPr>
         <p:spPr>
           <a:xfrm>
-            <a:off x="1133856" y="640080"/>
+            <a:off x="1069848" y="640080"/>
             <a:ext cx="10490911" cy="365760"/>
           </a:xfrm>
           <a:prstGeom prst="rect">
@@ -6324,7 +6595,7 @@
                 <a:ea typeface="Pretendard" pitchFamily="34" charset="-122"/>
                 <a:cs typeface="Pretendard" pitchFamily="34" charset="-120"/>
               </a:rPr>
-              <a:t>건물 개요</a:t>
+              <a:t>토지 현황</a:t>
             </a:r>
             <a:endParaRPr lang="en-US" sz="2300" dirty="0"/>
           </a:p>
@@ -6338,7 +6609,7 @@
         </p:nvSpPr>
         <p:spPr>
           <a:xfrm>
-            <a:off x="566928" y="1371600"/>
+            <a:off x="502920" y="1371600"/>
             <a:ext cx="6858000" cy="237744"/>
           </a:xfrm>
           <a:prstGeom prst="rect">
@@ -6363,7 +6634,7 @@
                 <a:ea typeface="Pretendard" pitchFamily="34" charset="-122"/>
                 <a:cs typeface="Pretendard" pitchFamily="34" charset="-120"/>
               </a:rPr>
-              <a:t>건축물 개요 및 물리 스펙</a:t>
+              <a:t>토지 현황</a:t>
             </a:r>
             <a:endParaRPr lang="en-US" sz="1100" dirty="0"/>
           </a:p>
@@ -6377,8 +6648,8 @@
         </p:nvSpPr>
         <p:spPr>
           <a:xfrm>
-            <a:off x="566928" y="1645920"/>
-            <a:ext cx="2606040" cy="438912"/>
+            <a:off x="502920" y="1645920"/>
+            <a:ext cx="1920240" cy="420624"/>
           </a:xfrm>
           <a:prstGeom prst="rect">
             <a:avLst/>
@@ -6392,7 +6663,7 @@
           <a:p>
             <a:pPr indent="0" marL="0">
               <a:lnSpc>
-                <a:spcPct val="120000"/>
+                <a:spcPct val="115000"/>
               </a:lnSpc>
               <a:buNone/>
             </a:pPr>
@@ -6419,8 +6690,8 @@
         </p:nvSpPr>
         <p:spPr>
           <a:xfrm>
-            <a:off x="3172968" y="1645920"/>
-            <a:ext cx="4251960" cy="438912"/>
+            <a:off x="2423160" y="1645920"/>
+            <a:ext cx="4937760" cy="420624"/>
           </a:xfrm>
           <a:prstGeom prst="rect">
             <a:avLst/>
@@ -6434,7 +6705,7 @@
           <a:p>
             <a:pPr indent="0" marL="0">
               <a:lnSpc>
-                <a:spcPct val="120000"/>
+                <a:spcPct val="115000"/>
               </a:lnSpc>
               <a:buNone/>
             </a:pPr>
@@ -6461,7 +6732,7 @@
         </p:nvSpPr>
         <p:spPr>
           <a:xfrm>
-            <a:off x="566928" y="2084832"/>
+            <a:off x="502920" y="2066544"/>
             <a:ext cx="6858000" cy="0"/>
           </a:xfrm>
           <a:prstGeom prst="line">
@@ -6484,8 +6755,8 @@
         </p:nvSpPr>
         <p:spPr>
           <a:xfrm>
-            <a:off x="566928" y="2084832"/>
-            <a:ext cx="2606040" cy="438912"/>
+            <a:off x="502920" y="2066544"/>
+            <a:ext cx="1920240" cy="420624"/>
           </a:xfrm>
           <a:prstGeom prst="rect">
             <a:avLst/>
@@ -6499,7 +6770,7 @@
           <a:p>
             <a:pPr indent="0" marL="0">
               <a:lnSpc>
-                <a:spcPct val="120000"/>
+                <a:spcPct val="115000"/>
               </a:lnSpc>
               <a:buNone/>
             </a:pPr>
@@ -6526,8 +6797,8 @@
         </p:nvSpPr>
         <p:spPr>
           <a:xfrm>
-            <a:off x="3172968" y="2084832"/>
-            <a:ext cx="4251960" cy="438912"/>
+            <a:off x="2423160" y="2066544"/>
+            <a:ext cx="4937760" cy="420624"/>
           </a:xfrm>
           <a:prstGeom prst="rect">
             <a:avLst/>
@@ -6541,7 +6812,7 @@
           <a:p>
             <a:pPr indent="0" marL="0">
               <a:lnSpc>
-                <a:spcPct val="120000"/>
+                <a:spcPct val="115000"/>
               </a:lnSpc>
               <a:buNone/>
             </a:pPr>
@@ -6568,7 +6839,7 @@
         </p:nvSpPr>
         <p:spPr>
           <a:xfrm>
-            <a:off x="7604608" y="1371600"/>
+            <a:off x="7540600" y="1371600"/>
             <a:ext cx="0" cy="4754880"/>
           </a:xfrm>
           <a:prstGeom prst="line">
@@ -6591,16 +6862,16 @@
         </p:nvSpPr>
         <p:spPr>
           <a:xfrm>
-            <a:off x="7784287" y="1645920"/>
-            <a:ext cx="3840480" cy="1645920"/>
+            <a:off x="7720279" y="1645920"/>
+            <a:ext cx="3840480" cy="2103120"/>
           </a:xfrm>
           <a:prstGeom prst="roundRect">
             <a:avLst>
-              <a:gd name="adj" fmla="val 3333"/>
+              <a:gd name="adj" fmla="val 2609"/>
             </a:avLst>
           </a:prstGeom>
           <a:solidFill>
-            <a:srgbClr val="F3EBDA"/>
+            <a:srgbClr val="BEE3F8"/>
           </a:solidFill>
           <a:ln/>
         </p:spPr>
@@ -6613,14 +6884,14 @@
         </p:nvSpPr>
         <p:spPr>
           <a:xfrm>
-            <a:off x="7784287" y="1700784"/>
-            <a:ext cx="36576" cy="1536192"/>
+            <a:off x="7720279" y="1700784"/>
+            <a:ext cx="36576" cy="1993392"/>
           </a:xfrm>
           <a:prstGeom prst="rect">
             <a:avLst/>
           </a:prstGeom>
           <a:solidFill>
-            <a:srgbClr val="977024"/>
+            <a:srgbClr val="2B6CB0"/>
           </a:solidFill>
           <a:ln/>
         </p:spPr>
@@ -6633,8 +6904,8 @@
         </p:nvSpPr>
         <p:spPr>
           <a:xfrm>
-            <a:off x="7967167" y="1755648"/>
-            <a:ext cx="3511296" cy="201168"/>
+            <a:off x="7866583" y="1737360"/>
+            <a:ext cx="3584448" cy="201168"/>
           </a:xfrm>
           <a:prstGeom prst="rect">
             <a:avLst/>
@@ -6649,6 +6920,17 @@
             <a:pPr indent="0" marL="0">
               <a:buNone/>
             </a:pPr>
+            <a:r>
+              <a:rPr lang="en-US" sz="1050" b="1" dirty="0">
+                <a:solidFill>
+                  <a:srgbClr val="2B6CB0"/>
+                </a:solidFill>
+                <a:latin typeface="Pretendard" pitchFamily="34" charset="0"/>
+                <a:ea typeface="Pretendard" pitchFamily="34" charset="-122"/>
+                <a:cs typeface="Pretendard" pitchFamily="34" charset="-120"/>
+              </a:rPr>
+              <a:t>토지 및 건축 규제 포인트</a:t>
+            </a:r>
             <a:endParaRPr lang="en-US" sz="1050" dirty="0"/>
           </a:p>
         </p:txBody>
@@ -6661,8 +6943,8 @@
         </p:nvSpPr>
         <p:spPr>
           <a:xfrm>
-            <a:off x="7967167" y="1975104"/>
-            <a:ext cx="3511296" cy="1243584"/>
+            <a:off x="7866583" y="1938528"/>
+            <a:ext cx="3584448" cy="1773936"/>
           </a:xfrm>
           <a:prstGeom prst="rect">
             <a:avLst/>
@@ -6674,14 +6956,187 @@
           <a:bodyPr wrap="square" lIns="0" tIns="0" rIns="0" bIns="0" rtlCol="0" anchor="t"/>
           <a:lstStyle/>
           <a:p>
+            <a:pPr marL="342900" indent="-342900">
+              <a:lnSpc>
+                <a:spcPct val="108000"/>
+              </a:lnSpc>
+              <a:buSzPct val="100000"/>
+              <a:buChar char="•"/>
+            </a:pPr>
+            <a:r>
+              <a:rPr lang="en-US" sz="980" dirty="0">
+                <a:solidFill>
+                  <a:srgbClr val="10161F"/>
+                </a:solidFill>
+                <a:latin typeface="Pretendard" pitchFamily="34" charset="0"/>
+                <a:ea typeface="Pretendard" pitchFamily="34" charset="-122"/>
+                <a:cs typeface="Pretendard" pitchFamily="34" charset="-120"/>
+              </a:rPr>
+              <a:t>용도지역·용도지구 기준 건폐율/용적률 상한 확인</a:t>
+            </a:r>
+            <a:endParaRPr lang="en-US" sz="980" dirty="0"/>
+          </a:p>
+          <a:p>
+            <a:pPr marL="342900" indent="-342900">
+              <a:lnSpc>
+                <a:spcPct val="108000"/>
+              </a:lnSpc>
+              <a:spcBef>
+                <a:spcPts val="300"/>
+              </a:spcBef>
+              <a:buSzPct val="100000"/>
+              <a:buChar char="•"/>
+            </a:pPr>
+            <a:r>
+              <a:rPr lang="en-US" sz="980" dirty="0">
+                <a:solidFill>
+                  <a:srgbClr val="10161F"/>
+                </a:solidFill>
+                <a:latin typeface="Pretendard" pitchFamily="34" charset="0"/>
+                <a:ea typeface="Pretendard" pitchFamily="34" charset="-122"/>
+                <a:cs typeface="Pretendard" pitchFamily="34" charset="-120"/>
+              </a:rPr>
+              <a:t>필지 형상 및 접도 조건에 따른 건축 가능 면적 검토</a:t>
+            </a:r>
+            <a:endParaRPr lang="en-US" sz="980" dirty="0"/>
+          </a:p>
+          <a:p>
+            <a:pPr marL="342900" indent="-342900">
+              <a:lnSpc>
+                <a:spcPct val="108000"/>
+              </a:lnSpc>
+              <a:spcBef>
+                <a:spcPts val="300"/>
+              </a:spcBef>
+              <a:buSzPct val="100000"/>
+              <a:buChar char="•"/>
+            </a:pPr>
+            <a:r>
+              <a:rPr lang="en-US" sz="980" dirty="0">
+                <a:solidFill>
+                  <a:srgbClr val="10161F"/>
+                </a:solidFill>
+                <a:latin typeface="Pretendard" pitchFamily="34" charset="0"/>
+                <a:ea typeface="Pretendard" pitchFamily="34" charset="-122"/>
+                <a:cs typeface="Pretendard" pitchFamily="34" charset="-120"/>
+              </a:rPr>
+              <a:t>토지이용계획 열람 및 개발행위허가 제한 여부 확인</a:t>
+            </a:r>
+            <a:endParaRPr lang="en-US" sz="980" dirty="0"/>
+          </a:p>
+        </p:txBody>
+      </p:sp>
+      <p:sp>
+        <p:nvSpPr>
+          <p:cNvPr id="17" name="Shape 15"/>
+          <p:cNvSpPr/>
+          <p:nvPr/>
+        </p:nvSpPr>
+        <p:spPr>
+          <a:xfrm>
+            <a:off x="7720279" y="3977640"/>
+            <a:ext cx="3840480" cy="2148840"/>
+          </a:xfrm>
+          <a:prstGeom prst="roundRect">
+            <a:avLst>
+              <a:gd name="adj" fmla="val 2553"/>
+            </a:avLst>
+          </a:prstGeom>
+          <a:solidFill>
+            <a:srgbClr val="BEE3F8"/>
+          </a:solidFill>
+          <a:ln/>
+        </p:spPr>
+      </p:sp>
+      <p:sp>
+        <p:nvSpPr>
+          <p:cNvPr id="18" name="Shape 16"/>
+          <p:cNvSpPr/>
+          <p:nvPr/>
+        </p:nvSpPr>
+        <p:spPr>
+          <a:xfrm>
+            <a:off x="7720279" y="4032504"/>
+            <a:ext cx="36576" cy="2039112"/>
+          </a:xfrm>
+          <a:prstGeom prst="rect">
+            <a:avLst/>
+          </a:prstGeom>
+          <a:solidFill>
+            <a:srgbClr val="2B6CB0"/>
+          </a:solidFill>
+          <a:ln/>
+        </p:spPr>
+      </p:sp>
+      <p:sp>
+        <p:nvSpPr>
+          <p:cNvPr id="19" name="Text 17"/>
+          <p:cNvSpPr/>
+          <p:nvPr/>
+        </p:nvSpPr>
+        <p:spPr>
+          <a:xfrm>
+            <a:off x="7866583" y="4069080"/>
+            <a:ext cx="3584448" cy="201168"/>
+          </a:xfrm>
+          <a:prstGeom prst="rect">
+            <a:avLst/>
+          </a:prstGeom>
+          <a:noFill/>
+          <a:ln/>
+        </p:spPr>
+        <p:txBody>
+          <a:bodyPr wrap="square" lIns="0" tIns="0" rIns="0" bIns="0" rtlCol="0" anchor="ctr"/>
+          <a:lstStyle/>
+          <a:p>
             <a:pPr indent="0" marL="0">
+              <a:buNone/>
+            </a:pPr>
+            <a:r>
+              <a:rPr lang="en-US" sz="1050" b="1" dirty="0">
+                <a:solidFill>
+                  <a:srgbClr val="2B6CB0"/>
+                </a:solidFill>
+                <a:latin typeface="Pretendard" pitchFamily="34" charset="0"/>
+                <a:ea typeface="Pretendard" pitchFamily="34" charset="-122"/>
+                <a:cs typeface="Pretendard" pitchFamily="34" charset="-120"/>
+              </a:rPr>
+              <a:t>권리관계 및 공적장부</a:t>
+            </a:r>
+            <a:endParaRPr lang="en-US" sz="1050" dirty="0"/>
+          </a:p>
+        </p:txBody>
+      </p:sp>
+      <p:sp>
+        <p:nvSpPr>
+          <p:cNvPr id="20" name="Text 18"/>
+          <p:cNvSpPr/>
+          <p:nvPr/>
+        </p:nvSpPr>
+        <p:spPr>
+          <a:xfrm>
+            <a:off x="7866583" y="4270248"/>
+            <a:ext cx="3584448" cy="1819656"/>
+          </a:xfrm>
+          <a:prstGeom prst="rect">
+            <a:avLst/>
+          </a:prstGeom>
+          <a:noFill/>
+          <a:ln/>
+        </p:spPr>
+        <p:txBody>
+          <a:bodyPr wrap="square" lIns="0" tIns="0" rIns="0" bIns="0" rtlCol="0" anchor="t"/>
+          <a:lstStyle/>
+          <a:p>
+            <a:pPr marL="342900" indent="-342900">
               <a:lnSpc>
-                <a:spcPct val="120000"/>
+                <a:spcPct val="108000"/>
               </a:lnSpc>
-              <a:buNone/>
-            </a:pPr>
-            <a:r>
-              <a:rPr lang="en-US" sz="930" dirty="0">
+              <a:buSzPct val="100000"/>
+              <a:buChar char="•"/>
+            </a:pPr>
+            <a:r>
+              <a:rPr lang="en-US" sz="980" dirty="0">
                 <a:solidFill>
                   <a:srgbClr val="10161F"/>
                 </a:solidFill>
@@ -6689,21 +7144,69 @@
                 <a:ea typeface="Pretendard" pitchFamily="34" charset="-122"/>
                 <a:cs typeface="Pretendard" pitchFamily="34" charset="-120"/>
               </a:rPr>
-              <a:t>역삼동 테헤란로 이면 코너 신축 부지입니다.</a:t>
-            </a:r>
-            <a:endParaRPr lang="en-US" sz="930" dirty="0"/>
-          </a:p>
-        </p:txBody>
-      </p:sp>
-      <p:sp>
-        <p:nvSpPr>
-          <p:cNvPr id="17" name="Text 15"/>
-          <p:cNvSpPr/>
-          <p:nvPr/>
-        </p:nvSpPr>
-        <p:spPr>
-          <a:xfrm>
-            <a:off x="566928" y="6382512"/>
+              <a:t>등기부등본 갑구 소유권 및 을구 근저당·가압류 확인</a:t>
+            </a:r>
+            <a:endParaRPr lang="en-US" sz="980" dirty="0"/>
+          </a:p>
+          <a:p>
+            <a:pPr marL="342900" indent="-342900">
+              <a:lnSpc>
+                <a:spcPct val="108000"/>
+              </a:lnSpc>
+              <a:spcBef>
+                <a:spcPts val="300"/>
+              </a:spcBef>
+              <a:buSzPct val="100000"/>
+              <a:buChar char="•"/>
+            </a:pPr>
+            <a:r>
+              <a:rPr lang="en-US" sz="980" dirty="0">
+                <a:solidFill>
+                  <a:srgbClr val="10161F"/>
+                </a:solidFill>
+                <a:latin typeface="Pretendard" pitchFamily="34" charset="0"/>
+                <a:ea typeface="Pretendard" pitchFamily="34" charset="-122"/>
+                <a:cs typeface="Pretendard" pitchFamily="34" charset="-120"/>
+              </a:rPr>
+              <a:t>건축물대장 기재 사항과 실물 현황 대조 점검</a:t>
+            </a:r>
+            <a:endParaRPr lang="en-US" sz="980" dirty="0"/>
+          </a:p>
+          <a:p>
+            <a:pPr marL="342900" indent="-342900">
+              <a:lnSpc>
+                <a:spcPct val="108000"/>
+              </a:lnSpc>
+              <a:spcBef>
+                <a:spcPts val="300"/>
+              </a:spcBef>
+              <a:buSzPct val="100000"/>
+              <a:buChar char="•"/>
+            </a:pPr>
+            <a:r>
+              <a:rPr lang="en-US" sz="980" dirty="0">
+                <a:solidFill>
+                  <a:srgbClr val="10161F"/>
+                </a:solidFill>
+                <a:latin typeface="Pretendard" pitchFamily="34" charset="0"/>
+                <a:ea typeface="Pretendard" pitchFamily="34" charset="-122"/>
+                <a:cs typeface="Pretendard" pitchFamily="34" charset="-120"/>
+              </a:rPr>
+              <a:t>개별공시지가 및 실거래가 비교 분석</a:t>
+            </a:r>
+            <a:endParaRPr lang="en-US" sz="980" dirty="0"/>
+          </a:p>
+        </p:txBody>
+      </p:sp>
+      <p:sp>
+        <p:nvSpPr>
+          <p:cNvPr id="21" name="Text 19"/>
+          <p:cNvSpPr/>
+          <p:nvPr/>
+        </p:nvSpPr>
+        <p:spPr>
+          <a:xfrm>
+            <a:off x="502920" y="6382512"/>
             <a:ext cx="7315200" cy="219456"/>
           </a:xfrm>
           <a:prstGeom prst="rect">
@@ -6736,13 +7239,13 @@
       </p:sp>
       <p:sp>
         <p:nvSpPr>
-          <p:cNvPr id="18" name="Text 16"/>
-          <p:cNvSpPr/>
-          <p:nvPr/>
-        </p:nvSpPr>
-        <p:spPr>
-          <a:xfrm>
-            <a:off x="10710367" y="6382512"/>
+          <p:cNvPr id="22" name="Text 20"/>
+          <p:cNvSpPr/>
+          <p:nvPr/>
+        </p:nvSpPr>
+        <p:spPr>
+          <a:xfrm>
+            <a:off x="10774375" y="6382512"/>
             <a:ext cx="914400" cy="219456"/>
           </a:xfrm>
           <a:prstGeom prst="rect">
@@ -6813,7 +7316,7 @@
         </p:nvSpPr>
         <p:spPr>
           <a:xfrm>
-            <a:off x="566928" y="457200"/>
+            <a:off x="502920" y="457200"/>
             <a:ext cx="384048" cy="384048"/>
           </a:xfrm>
           <a:prstGeom prst="ellipse">
@@ -6833,7 +7336,7 @@
         </p:nvSpPr>
         <p:spPr>
           <a:xfrm>
-            <a:off x="566928" y="457200"/>
+            <a:off x="502920" y="457200"/>
             <a:ext cx="384048" cy="384048"/>
           </a:xfrm>
           <a:prstGeom prst="rect">
@@ -6872,7 +7375,7 @@
         </p:nvSpPr>
         <p:spPr>
           <a:xfrm>
-            <a:off x="1133856" y="457200"/>
+            <a:off x="1069848" y="457200"/>
             <a:ext cx="10490911" cy="182880"/>
           </a:xfrm>
           <a:prstGeom prst="rect">
@@ -6897,6 +7400,618 @@
                 <a:ea typeface="Arial" pitchFamily="34" charset="-122"/>
                 <a:cs typeface="Arial" pitchFamily="34" charset="-120"/>
               </a:rPr>
+              <a:t>Building</a:t>
+            </a:r>
+            <a:endParaRPr lang="en-US" sz="950" dirty="0"/>
+          </a:p>
+        </p:txBody>
+      </p:sp>
+      <p:sp>
+        <p:nvSpPr>
+          <p:cNvPr id="5" name="Text 3"/>
+          <p:cNvSpPr/>
+          <p:nvPr/>
+        </p:nvSpPr>
+        <p:spPr>
+          <a:xfrm>
+            <a:off x="1069848" y="640080"/>
+            <a:ext cx="10490911" cy="365760"/>
+          </a:xfrm>
+          <a:prstGeom prst="rect">
+            <a:avLst/>
+          </a:prstGeom>
+          <a:noFill/>
+          <a:ln/>
+        </p:spPr>
+        <p:txBody>
+          <a:bodyPr wrap="square" lIns="0" tIns="0" rIns="0" bIns="0" rtlCol="0" anchor="ctr"/>
+          <a:lstStyle/>
+          <a:p>
+            <a:pPr indent="0" marL="0">
+              <a:buNone/>
+            </a:pPr>
+            <a:r>
+              <a:rPr lang="en-US" sz="2300" b="1" dirty="0">
+                <a:solidFill>
+                  <a:srgbClr val="10161F"/>
+                </a:solidFill>
+                <a:latin typeface="Pretendard" pitchFamily="34" charset="0"/>
+                <a:ea typeface="Pretendard" pitchFamily="34" charset="-122"/>
+                <a:cs typeface="Pretendard" pitchFamily="34" charset="-120"/>
+              </a:rPr>
+              <a:t>건물 개요</a:t>
+            </a:r>
+            <a:endParaRPr lang="en-US" sz="2300" dirty="0"/>
+          </a:p>
+        </p:txBody>
+      </p:sp>
+      <p:sp>
+        <p:nvSpPr>
+          <p:cNvPr id="6" name="Text 4"/>
+          <p:cNvSpPr/>
+          <p:nvPr/>
+        </p:nvSpPr>
+        <p:spPr>
+          <a:xfrm>
+            <a:off x="502920" y="1371600"/>
+            <a:ext cx="6858000" cy="237744"/>
+          </a:xfrm>
+          <a:prstGeom prst="rect">
+            <a:avLst/>
+          </a:prstGeom>
+          <a:noFill/>
+          <a:ln/>
+        </p:spPr>
+        <p:txBody>
+          <a:bodyPr wrap="square" lIns="0" tIns="0" rIns="0" bIns="0" rtlCol="0" anchor="ctr"/>
+          <a:lstStyle/>
+          <a:p>
+            <a:pPr indent="0" marL="0">
+              <a:buNone/>
+            </a:pPr>
+            <a:r>
+              <a:rPr lang="en-US" sz="1100" b="1" dirty="0">
+                <a:solidFill>
+                  <a:srgbClr val="10161F"/>
+                </a:solidFill>
+                <a:latin typeface="Pretendard" pitchFamily="34" charset="0"/>
+                <a:ea typeface="Pretendard" pitchFamily="34" charset="-122"/>
+                <a:cs typeface="Pretendard" pitchFamily="34" charset="-120"/>
+              </a:rPr>
+              <a:t>건축물 개요 및 물리 스펙</a:t>
+            </a:r>
+            <a:endParaRPr lang="en-US" sz="1100" dirty="0"/>
+          </a:p>
+        </p:txBody>
+      </p:sp>
+      <p:sp>
+        <p:nvSpPr>
+          <p:cNvPr id="7" name="Text 5"/>
+          <p:cNvSpPr/>
+          <p:nvPr/>
+        </p:nvSpPr>
+        <p:spPr>
+          <a:xfrm>
+            <a:off x="502920" y="1645920"/>
+            <a:ext cx="1920240" cy="420624"/>
+          </a:xfrm>
+          <a:prstGeom prst="rect">
+            <a:avLst/>
+          </a:prstGeom>
+          <a:noFill/>
+          <a:ln/>
+        </p:spPr>
+        <p:txBody>
+          <a:bodyPr wrap="square" lIns="0" tIns="0" rIns="0" bIns="0" rtlCol="0" anchor="ctr"/>
+          <a:lstStyle/>
+          <a:p>
+            <a:pPr indent="0" marL="0">
+              <a:lnSpc>
+                <a:spcPct val="115000"/>
+              </a:lnSpc>
+              <a:buNone/>
+            </a:pPr>
+            <a:r>
+              <a:rPr lang="en-US" sz="1350" dirty="0">
+                <a:solidFill>
+                  <a:srgbClr val="718096"/>
+                </a:solidFill>
+                <a:latin typeface="Pretendard" pitchFamily="34" charset="0"/>
+                <a:ea typeface="Pretendard" pitchFamily="34" charset="-122"/>
+                <a:cs typeface="Pretendard" pitchFamily="34" charset="-120"/>
+              </a:rPr>
+              <a:t>대지면적</a:t>
+            </a:r>
+            <a:endParaRPr lang="en-US" sz="1350" dirty="0"/>
+          </a:p>
+        </p:txBody>
+      </p:sp>
+      <p:sp>
+        <p:nvSpPr>
+          <p:cNvPr id="8" name="Text 6"/>
+          <p:cNvSpPr/>
+          <p:nvPr/>
+        </p:nvSpPr>
+        <p:spPr>
+          <a:xfrm>
+            <a:off x="2423160" y="1645920"/>
+            <a:ext cx="4937760" cy="420624"/>
+          </a:xfrm>
+          <a:prstGeom prst="rect">
+            <a:avLst/>
+          </a:prstGeom>
+          <a:noFill/>
+          <a:ln/>
+        </p:spPr>
+        <p:txBody>
+          <a:bodyPr wrap="square" lIns="0" tIns="0" rIns="0" bIns="0" rtlCol="0" anchor="ctr"/>
+          <a:lstStyle/>
+          <a:p>
+            <a:pPr indent="0" marL="0">
+              <a:lnSpc>
+                <a:spcPct val="115000"/>
+              </a:lnSpc>
+              <a:buNone/>
+            </a:pPr>
+            <a:r>
+              <a:rPr lang="en-US" sz="1350" b="1" dirty="0">
+                <a:solidFill>
+                  <a:srgbClr val="10161F"/>
+                </a:solidFill>
+                <a:latin typeface="Pretendard" pitchFamily="34" charset="0"/>
+                <a:ea typeface="Pretendard" pitchFamily="34" charset="-122"/>
+                <a:cs typeface="Pretendard" pitchFamily="34" charset="-120"/>
+              </a:rPr>
+              <a:t>168.5평</a:t>
+            </a:r>
+            <a:endParaRPr lang="en-US" sz="1350" dirty="0"/>
+          </a:p>
+        </p:txBody>
+      </p:sp>
+      <p:sp>
+        <p:nvSpPr>
+          <p:cNvPr id="9" name="Shape 7"/>
+          <p:cNvSpPr/>
+          <p:nvPr/>
+        </p:nvSpPr>
+        <p:spPr>
+          <a:xfrm>
+            <a:off x="502920" y="2066544"/>
+            <a:ext cx="6858000" cy="0"/>
+          </a:xfrm>
+          <a:prstGeom prst="line">
+            <a:avLst/>
+          </a:prstGeom>
+          <a:noFill/>
+          <a:ln w="3810">
+            <a:solidFill>
+              <a:srgbClr val="CBD5E0"/>
+            </a:solidFill>
+            <a:prstDash val="solid"/>
+          </a:ln>
+        </p:spPr>
+      </p:sp>
+      <p:sp>
+        <p:nvSpPr>
+          <p:cNvPr id="10" name="Text 8"/>
+          <p:cNvSpPr/>
+          <p:nvPr/>
+        </p:nvSpPr>
+        <p:spPr>
+          <a:xfrm>
+            <a:off x="502920" y="2066544"/>
+            <a:ext cx="1920240" cy="420624"/>
+          </a:xfrm>
+          <a:prstGeom prst="rect">
+            <a:avLst/>
+          </a:prstGeom>
+          <a:noFill/>
+          <a:ln/>
+        </p:spPr>
+        <p:txBody>
+          <a:bodyPr wrap="square" lIns="0" tIns="0" rIns="0" bIns="0" rtlCol="0" anchor="ctr"/>
+          <a:lstStyle/>
+          <a:p>
+            <a:pPr indent="0" marL="0">
+              <a:lnSpc>
+                <a:spcPct val="115000"/>
+              </a:lnSpc>
+              <a:buNone/>
+            </a:pPr>
+            <a:r>
+              <a:rPr lang="en-US" sz="1350" dirty="0">
+                <a:solidFill>
+                  <a:srgbClr val="718096"/>
+                </a:solidFill>
+                <a:latin typeface="Pretendard" pitchFamily="34" charset="0"/>
+                <a:ea typeface="Pretendard" pitchFamily="34" charset="-122"/>
+                <a:cs typeface="Pretendard" pitchFamily="34" charset="-120"/>
+              </a:rPr>
+              <a:t>용도지역</a:t>
+            </a:r>
+            <a:endParaRPr lang="en-US" sz="1350" dirty="0"/>
+          </a:p>
+        </p:txBody>
+      </p:sp>
+      <p:sp>
+        <p:nvSpPr>
+          <p:cNvPr id="11" name="Text 9"/>
+          <p:cNvSpPr/>
+          <p:nvPr/>
+        </p:nvSpPr>
+        <p:spPr>
+          <a:xfrm>
+            <a:off x="2423160" y="2066544"/>
+            <a:ext cx="4937760" cy="420624"/>
+          </a:xfrm>
+          <a:prstGeom prst="rect">
+            <a:avLst/>
+          </a:prstGeom>
+          <a:noFill/>
+          <a:ln/>
+        </p:spPr>
+        <p:txBody>
+          <a:bodyPr wrap="square" lIns="0" tIns="0" rIns="0" bIns="0" rtlCol="0" anchor="ctr"/>
+          <a:lstStyle/>
+          <a:p>
+            <a:pPr indent="0" marL="0">
+              <a:lnSpc>
+                <a:spcPct val="115000"/>
+              </a:lnSpc>
+              <a:buNone/>
+            </a:pPr>
+            <a:r>
+              <a:rPr lang="en-US" sz="1350" b="1" dirty="0">
+                <a:solidFill>
+                  <a:srgbClr val="10161F"/>
+                </a:solidFill>
+                <a:latin typeface="Pretendard" pitchFamily="34" charset="0"/>
+                <a:ea typeface="Pretendard" pitchFamily="34" charset="-122"/>
+                <a:cs typeface="Pretendard" pitchFamily="34" charset="-120"/>
+              </a:rPr>
+              <a:t>제3종일반주거</a:t>
+            </a:r>
+            <a:endParaRPr lang="en-US" sz="1350" dirty="0"/>
+          </a:p>
+        </p:txBody>
+      </p:sp>
+      <p:sp>
+        <p:nvSpPr>
+          <p:cNvPr id="12" name="Shape 10"/>
+          <p:cNvSpPr/>
+          <p:nvPr/>
+        </p:nvSpPr>
+        <p:spPr>
+          <a:xfrm>
+            <a:off x="7540600" y="1371600"/>
+            <a:ext cx="0" cy="4754880"/>
+          </a:xfrm>
+          <a:prstGeom prst="line">
+            <a:avLst/>
+          </a:prstGeom>
+          <a:noFill/>
+          <a:ln w="8890">
+            <a:solidFill>
+              <a:srgbClr val="B98A2E"/>
+            </a:solidFill>
+            <a:prstDash val="solid"/>
+          </a:ln>
+        </p:spPr>
+      </p:sp>
+      <p:sp>
+        <p:nvSpPr>
+          <p:cNvPr id="13" name="Shape 11"/>
+          <p:cNvSpPr/>
+          <p:nvPr/>
+        </p:nvSpPr>
+        <p:spPr>
+          <a:xfrm>
+            <a:off x="7720279" y="1645920"/>
+            <a:ext cx="3840480" cy="1645920"/>
+          </a:xfrm>
+          <a:prstGeom prst="roundRect">
+            <a:avLst>
+              <a:gd name="adj" fmla="val 3333"/>
+            </a:avLst>
+          </a:prstGeom>
+          <a:solidFill>
+            <a:srgbClr val="F3EBDA"/>
+          </a:solidFill>
+          <a:ln/>
+        </p:spPr>
+      </p:sp>
+      <p:sp>
+        <p:nvSpPr>
+          <p:cNvPr id="14" name="Shape 12"/>
+          <p:cNvSpPr/>
+          <p:nvPr/>
+        </p:nvSpPr>
+        <p:spPr>
+          <a:xfrm>
+            <a:off x="7720279" y="1700784"/>
+            <a:ext cx="36576" cy="1536192"/>
+          </a:xfrm>
+          <a:prstGeom prst="rect">
+            <a:avLst/>
+          </a:prstGeom>
+          <a:solidFill>
+            <a:srgbClr val="977024"/>
+          </a:solidFill>
+          <a:ln/>
+        </p:spPr>
+      </p:sp>
+      <p:sp>
+        <p:nvSpPr>
+          <p:cNvPr id="15" name="Text 13"/>
+          <p:cNvSpPr/>
+          <p:nvPr/>
+        </p:nvSpPr>
+        <p:spPr>
+          <a:xfrm>
+            <a:off x="7866583" y="1737360"/>
+            <a:ext cx="3584448" cy="201168"/>
+          </a:xfrm>
+          <a:prstGeom prst="rect">
+            <a:avLst/>
+          </a:prstGeom>
+          <a:noFill/>
+          <a:ln/>
+        </p:spPr>
+        <p:txBody>
+          <a:bodyPr wrap="square" lIns="0" tIns="0" rIns="0" bIns="0" rtlCol="0" anchor="ctr"/>
+          <a:lstStyle/>
+          <a:p>
+            <a:pPr indent="0" marL="0">
+              <a:buNone/>
+            </a:pPr>
+            <a:endParaRPr lang="en-US" sz="1050" dirty="0"/>
+          </a:p>
+        </p:txBody>
+      </p:sp>
+      <p:sp>
+        <p:nvSpPr>
+          <p:cNvPr id="16" name="Text 14"/>
+          <p:cNvSpPr/>
+          <p:nvPr/>
+        </p:nvSpPr>
+        <p:spPr>
+          <a:xfrm>
+            <a:off x="7866583" y="1938528"/>
+            <a:ext cx="3584448" cy="1316736"/>
+          </a:xfrm>
+          <a:prstGeom prst="rect">
+            <a:avLst/>
+          </a:prstGeom>
+          <a:noFill/>
+          <a:ln/>
+        </p:spPr>
+        <p:txBody>
+          <a:bodyPr wrap="square" lIns="0" tIns="0" rIns="0" bIns="0" rtlCol="0" anchor="t"/>
+          <a:lstStyle/>
+          <a:p>
+            <a:pPr indent="0" marL="0">
+              <a:lnSpc>
+                <a:spcPct val="108000"/>
+              </a:lnSpc>
+              <a:buNone/>
+            </a:pPr>
+            <a:r>
+              <a:rPr lang="en-US" sz="980" dirty="0">
+                <a:solidFill>
+                  <a:srgbClr val="10161F"/>
+                </a:solidFill>
+                <a:latin typeface="Pretendard" pitchFamily="34" charset="0"/>
+                <a:ea typeface="Pretendard" pitchFamily="34" charset="-122"/>
+                <a:cs typeface="Pretendard" pitchFamily="34" charset="-120"/>
+              </a:rPr>
+              <a:t>역삼동 테헤란로 이면 코너 신축 부지입니다.</a:t>
+            </a:r>
+            <a:endParaRPr lang="en-US" sz="980" dirty="0"/>
+          </a:p>
+        </p:txBody>
+      </p:sp>
+      <p:sp>
+        <p:nvSpPr>
+          <p:cNvPr id="17" name="Text 15"/>
+          <p:cNvSpPr/>
+          <p:nvPr/>
+        </p:nvSpPr>
+        <p:spPr>
+          <a:xfrm>
+            <a:off x="502920" y="6382512"/>
+            <a:ext cx="7315200" cy="219456"/>
+          </a:xfrm>
+          <a:prstGeom prst="rect">
+            <a:avLst/>
+          </a:prstGeom>
+          <a:noFill/>
+          <a:ln/>
+        </p:spPr>
+        <p:txBody>
+          <a:bodyPr wrap="square" lIns="0" tIns="0" rIns="0" bIns="0" rtlCol="0" anchor="ctr"/>
+          <a:lstStyle/>
+          <a:p>
+            <a:pPr indent="0" marL="0">
+              <a:buNone/>
+            </a:pPr>
+            <a:r>
+              <a:rPr lang="en-US" sz="800" dirty="0">
+                <a:solidFill>
+                  <a:srgbClr val="718096"/>
+                </a:solidFill>
+                <a:latin typeface="Pretendard" pitchFamily="34" charset="0"/>
+                <a:ea typeface="Pretendard" pitchFamily="34" charset="-122"/>
+                <a:cs typeface="Pretendard" pitchFamily="34" charset="-120"/>
+              </a:rPr>
+              <a:t>크리딜   |   </a:t>
+            </a:r>
+            <a:endParaRPr lang="en-US" sz="800" dirty="0"/>
+          </a:p>
+        </p:txBody>
+      </p:sp>
+      <p:sp>
+        <p:nvSpPr>
+          <p:cNvPr id="18" name="Text 16"/>
+          <p:cNvSpPr/>
+          <p:nvPr/>
+        </p:nvSpPr>
+        <p:spPr>
+          <a:xfrm>
+            <a:off x="10774375" y="6382512"/>
+            <a:ext cx="914400" cy="219456"/>
+          </a:xfrm>
+          <a:prstGeom prst="rect">
+            <a:avLst/>
+          </a:prstGeom>
+          <a:noFill/>
+          <a:ln/>
+        </p:spPr>
+        <p:txBody>
+          <a:bodyPr wrap="square" lIns="0" tIns="0" rIns="0" bIns="0" rtlCol="0" anchor="ctr"/>
+          <a:lstStyle/>
+          <a:p>
+            <a:pPr algn="r" indent="0" marL="0">
+              <a:buNone/>
+            </a:pPr>
+            <a:r>
+              <a:rPr lang="en-US" sz="900" b="1" dirty="0">
+                <a:solidFill>
+                  <a:srgbClr val="B98A2E"/>
+                </a:solidFill>
+                <a:latin typeface="Arial" pitchFamily="34" charset="0"/>
+                <a:ea typeface="Arial" pitchFamily="34" charset="-122"/>
+                <a:cs typeface="Arial" pitchFamily="34" charset="-120"/>
+              </a:rPr>
+              <a:t>5</a:t>
+            </a:r>
+            <a:endParaRPr lang="en-US" sz="900" dirty="0"/>
+          </a:p>
+        </p:txBody>
+      </p:sp>
+    </p:spTree>
+  </p:cSld>
+  <p:clrMapOvr>
+    <a:masterClrMapping/>
+  </p:clrMapOvr>
+</p:sld>
+</file>
+
+<file path=ppt/slides/slide6.xml><?xml version="1.0" encoding="utf-8"?>
+<p:sld xmlns:a="http://schemas.openxmlformats.org/drawingml/2006/main" xmlns:r="http://schemas.openxmlformats.org/officeDocument/2006/relationships" xmlns:p="http://schemas.openxmlformats.org/presentationml/2006/main">
+  <p:cSld name="Slide 6">
+    <p:bg>
+      <p:bgPr>
+        <a:solidFill>
+          <a:srgbClr val="FFFFFF"/>
+        </a:solidFill>
+      </p:bgPr>
+    </p:bg>
+    <p:spTree>
+      <p:nvGrpSpPr>
+        <p:cNvPr id="1" name=""/>
+        <p:cNvGrpSpPr/>
+        <p:nvPr/>
+      </p:nvGrpSpPr>
+      <p:grpSpPr>
+        <a:xfrm>
+          <a:off x="0" y="0"/>
+          <a:ext cx="0" cy="0"/>
+          <a:chOff x="0" y="0"/>
+          <a:chExt cx="0" cy="0"/>
+        </a:xfrm>
+      </p:grpSpPr>
+      <p:sp>
+        <p:nvSpPr>
+          <p:cNvPr id="2" name="Shape 0"/>
+          <p:cNvSpPr/>
+          <p:nvPr/>
+        </p:nvSpPr>
+        <p:spPr>
+          <a:xfrm>
+            <a:off x="502920" y="457200"/>
+            <a:ext cx="384048" cy="384048"/>
+          </a:xfrm>
+          <a:prstGeom prst="ellipse">
+            <a:avLst/>
+          </a:prstGeom>
+          <a:solidFill>
+            <a:srgbClr val="B98A2E"/>
+          </a:solidFill>
+          <a:ln/>
+        </p:spPr>
+      </p:sp>
+      <p:sp>
+        <p:nvSpPr>
+          <p:cNvPr id="3" name="Text 1"/>
+          <p:cNvSpPr/>
+          <p:nvPr/>
+        </p:nvSpPr>
+        <p:spPr>
+          <a:xfrm>
+            <a:off x="502920" y="457200"/>
+            <a:ext cx="384048" cy="384048"/>
+          </a:xfrm>
+          <a:prstGeom prst="rect">
+            <a:avLst/>
+          </a:prstGeom>
+          <a:noFill/>
+          <a:ln/>
+        </p:spPr>
+        <p:txBody>
+          <a:bodyPr wrap="square" lIns="0" tIns="0" rIns="0" bIns="0" rtlCol="0" anchor="ctr"/>
+          <a:lstStyle/>
+          <a:p>
+            <a:pPr algn="ctr" indent="0" marL="0">
+              <a:buNone/>
+            </a:pPr>
+            <a:r>
+              <a:rPr lang="en-US" sz="1300" b="1" dirty="0">
+                <a:solidFill>
+                  <a:srgbClr val="FFFFFF"/>
+                </a:solidFill>
+                <a:latin typeface="Arial" pitchFamily="34" charset="0"/>
+                <a:ea typeface="Arial" pitchFamily="34" charset="-122"/>
+                <a:cs typeface="Arial" pitchFamily="34" charset="-120"/>
+              </a:rPr>
+              <a:t>06</a:t>
+            </a:r>
+            <a:endParaRPr lang="en-US" sz="1300" dirty="0"/>
+          </a:p>
+        </p:txBody>
+      </p:sp>
+      <p:sp>
+        <p:nvSpPr>
+          <p:cNvPr id="4" name="Text 2"/>
+          <p:cNvSpPr/>
+          <p:nvPr/>
+        </p:nvSpPr>
+        <p:spPr>
+          <a:xfrm>
+            <a:off x="1069848" y="457200"/>
+            <a:ext cx="10490911" cy="182880"/>
+          </a:xfrm>
+          <a:prstGeom prst="rect">
+            <a:avLst/>
+          </a:prstGeom>
+          <a:noFill/>
+          <a:ln/>
+        </p:spPr>
+        <p:txBody>
+          <a:bodyPr wrap="square" lIns="0" tIns="0" rIns="0" bIns="0" rtlCol="0" anchor="ctr"/>
+          <a:lstStyle/>
+          <a:p>
+            <a:pPr indent="0" marL="0">
+              <a:buNone/>
+            </a:pPr>
+            <a:r>
+              <a:rPr lang="en-US" sz="950" b="1" spc="200" kern="0" dirty="0">
+                <a:solidFill>
+                  <a:srgbClr val="B98A2E"/>
+                </a:solidFill>
+                <a:latin typeface="Arial" pitchFamily="34" charset="0"/>
+                <a:ea typeface="Arial" pitchFamily="34" charset="-122"/>
+                <a:cs typeface="Arial" pitchFamily="34" charset="-120"/>
+              </a:rPr>
               <a:t>Capital</a:t>
             </a:r>
             <a:endParaRPr lang="en-US" sz="950" dirty="0"/>
@@ -6911,7 +8026,7 @@
         </p:nvSpPr>
         <p:spPr>
           <a:xfrm>
-            <a:off x="1133856" y="640080"/>
+            <a:off x="1069848" y="640080"/>
             <a:ext cx="10490911" cy="365760"/>
           </a:xfrm>
           <a:prstGeom prst="rect">
@@ -6950,7 +8065,7 @@
         </p:nvSpPr>
         <p:spPr>
           <a:xfrm>
-            <a:off x="566928" y="1417320"/>
+            <a:off x="502920" y="1417320"/>
             <a:ext cx="5391760" cy="4389120"/>
           </a:xfrm>
           <a:prstGeom prst="roundRect">
@@ -6977,7 +8092,7 @@
         </p:nvSpPr>
         <p:spPr>
           <a:xfrm>
-            <a:off x="795528" y="1618488"/>
+            <a:off x="731520" y="1618488"/>
             <a:ext cx="4934560" cy="320040"/>
           </a:xfrm>
           <a:prstGeom prst="rect">
@@ -7016,8 +8131,8 @@
         </p:nvSpPr>
         <p:spPr>
           <a:xfrm>
-            <a:off x="795528" y="2011680"/>
-            <a:ext cx="1875133" cy="475488"/>
+            <a:off x="731520" y="2011680"/>
+            <a:ext cx="2269897" cy="475488"/>
           </a:xfrm>
           <a:prstGeom prst="rect">
             <a:avLst/>
@@ -7031,7 +8146,7 @@
           <a:p>
             <a:pPr indent="0" marL="0">
               <a:lnSpc>
-                <a:spcPct val="120000"/>
+                <a:spcPct val="115000"/>
               </a:lnSpc>
               <a:buNone/>
             </a:pPr>
@@ -7058,8 +8173,8 @@
         </p:nvSpPr>
         <p:spPr>
           <a:xfrm>
-            <a:off x="2670661" y="2011680"/>
-            <a:ext cx="3059427" cy="475488"/>
+            <a:off x="3001417" y="2011680"/>
+            <a:ext cx="2664662" cy="475488"/>
           </a:xfrm>
           <a:prstGeom prst="rect">
             <a:avLst/>
@@ -7073,7 +8188,7 @@
           <a:p>
             <a:pPr indent="0" marL="0">
               <a:lnSpc>
-                <a:spcPct val="120000"/>
+                <a:spcPct val="115000"/>
               </a:lnSpc>
               <a:buNone/>
             </a:pPr>
@@ -7100,7 +8215,7 @@
         </p:nvSpPr>
         <p:spPr>
           <a:xfrm>
-            <a:off x="795528" y="2487168"/>
+            <a:off x="731520" y="2487168"/>
             <a:ext cx="4934560" cy="0"/>
           </a:xfrm>
           <a:prstGeom prst="line">
@@ -7123,8 +8238,8 @@
         </p:nvSpPr>
         <p:spPr>
           <a:xfrm>
-            <a:off x="795528" y="2487168"/>
-            <a:ext cx="1875133" cy="475488"/>
+            <a:off x="731520" y="2487168"/>
+            <a:ext cx="2269897" cy="475488"/>
           </a:xfrm>
           <a:prstGeom prst="rect">
             <a:avLst/>
@@ -7138,7 +8253,7 @@
           <a:p>
             <a:pPr indent="0" marL="0">
               <a:lnSpc>
-                <a:spcPct val="120000"/>
+                <a:spcPct val="115000"/>
               </a:lnSpc>
               <a:buNone/>
             </a:pPr>
@@ -7165,8 +8280,8 @@
         </p:nvSpPr>
         <p:spPr>
           <a:xfrm>
-            <a:off x="2670661" y="2487168"/>
-            <a:ext cx="3059427" cy="475488"/>
+            <a:off x="3001417" y="2487168"/>
+            <a:ext cx="2664662" cy="475488"/>
           </a:xfrm>
           <a:prstGeom prst="rect">
             <a:avLst/>
@@ -7180,7 +8295,7 @@
           <a:p>
             <a:pPr indent="0" marL="0">
               <a:lnSpc>
-                <a:spcPct val="120000"/>
+                <a:spcPct val="115000"/>
               </a:lnSpc>
               <a:buNone/>
             </a:pPr>
@@ -7207,7 +8322,7 @@
         </p:nvSpPr>
         <p:spPr>
           <a:xfrm>
-            <a:off x="795528" y="2962656"/>
+            <a:off x="731520" y="2962656"/>
             <a:ext cx="4934560" cy="0"/>
           </a:xfrm>
           <a:prstGeom prst="line">
@@ -7230,8 +8345,8 @@
         </p:nvSpPr>
         <p:spPr>
           <a:xfrm>
-            <a:off x="795528" y="2962656"/>
-            <a:ext cx="1875133" cy="475488"/>
+            <a:off x="731520" y="2962656"/>
+            <a:ext cx="2269897" cy="475488"/>
           </a:xfrm>
           <a:prstGeom prst="rect">
             <a:avLst/>
@@ -7245,7 +8360,7 @@
           <a:p>
             <a:pPr indent="0" marL="0">
               <a:lnSpc>
-                <a:spcPct val="120000"/>
+                <a:spcPct val="115000"/>
               </a:lnSpc>
               <a:buNone/>
             </a:pPr>
@@ -7272,8 +8387,8 @@
         </p:nvSpPr>
         <p:spPr>
           <a:xfrm>
-            <a:off x="2670661" y="2962656"/>
-            <a:ext cx="3059427" cy="475488"/>
+            <a:off x="3001417" y="2962656"/>
+            <a:ext cx="2664662" cy="475488"/>
           </a:xfrm>
           <a:prstGeom prst="rect">
             <a:avLst/>
@@ -7287,7 +8402,7 @@
           <a:p>
             <a:pPr indent="0" marL="0">
               <a:lnSpc>
-                <a:spcPct val="120000"/>
+                <a:spcPct val="115000"/>
               </a:lnSpc>
               <a:buNone/>
             </a:pPr>
@@ -7314,7 +8429,7 @@
         </p:nvSpPr>
         <p:spPr>
           <a:xfrm>
-            <a:off x="795528" y="3438144"/>
+            <a:off x="731520" y="3438144"/>
             <a:ext cx="4934560" cy="0"/>
           </a:xfrm>
           <a:prstGeom prst="line">
@@ -7337,8 +8452,8 @@
         </p:nvSpPr>
         <p:spPr>
           <a:xfrm>
-            <a:off x="795528" y="3438144"/>
-            <a:ext cx="1875133" cy="475488"/>
+            <a:off x="731520" y="3438144"/>
+            <a:ext cx="2269897" cy="475488"/>
           </a:xfrm>
           <a:prstGeom prst="rect">
             <a:avLst/>
@@ -7352,7 +8467,7 @@
           <a:p>
             <a:pPr indent="0" marL="0">
               <a:lnSpc>
-                <a:spcPct val="120000"/>
+                <a:spcPct val="115000"/>
               </a:lnSpc>
               <a:buNone/>
             </a:pPr>
@@ -7379,8 +8494,8 @@
         </p:nvSpPr>
         <p:spPr>
           <a:xfrm>
-            <a:off x="2670661" y="3438144"/>
-            <a:ext cx="3059427" cy="475488"/>
+            <a:off x="3001417" y="3438144"/>
+            <a:ext cx="2664662" cy="475488"/>
           </a:xfrm>
           <a:prstGeom prst="rect">
             <a:avLst/>
@@ -7394,7 +8509,7 @@
           <a:p>
             <a:pPr indent="0" marL="0">
               <a:lnSpc>
-                <a:spcPct val="120000"/>
+                <a:spcPct val="115000"/>
               </a:lnSpc>
               <a:buNone/>
             </a:pPr>
@@ -7421,7 +8536,7 @@
         </p:nvSpPr>
         <p:spPr>
           <a:xfrm>
-            <a:off x="795528" y="3913632"/>
+            <a:off x="731520" y="3913632"/>
             <a:ext cx="4934560" cy="0"/>
           </a:xfrm>
           <a:prstGeom prst="line">
@@ -7444,8 +8559,8 @@
         </p:nvSpPr>
         <p:spPr>
           <a:xfrm>
-            <a:off x="795528" y="3913632"/>
-            <a:ext cx="1875133" cy="475488"/>
+            <a:off x="731520" y="3913632"/>
+            <a:ext cx="2269897" cy="475488"/>
           </a:xfrm>
           <a:prstGeom prst="rect">
             <a:avLst/>
@@ -7459,7 +8574,7 @@
           <a:p>
             <a:pPr indent="0" marL="0">
               <a:lnSpc>
-                <a:spcPct val="120000"/>
+                <a:spcPct val="115000"/>
               </a:lnSpc>
               <a:buNone/>
             </a:pPr>
@@ -7486,8 +8601,8 @@
         </p:nvSpPr>
         <p:spPr>
           <a:xfrm>
-            <a:off x="2670661" y="3913632"/>
-            <a:ext cx="3059427" cy="475488"/>
+            <a:off x="3001417" y="3913632"/>
+            <a:ext cx="2664662" cy="475488"/>
           </a:xfrm>
           <a:prstGeom prst="rect">
             <a:avLst/>
@@ -7501,7 +8616,7 @@
           <a:p>
             <a:pPr indent="0" marL="0">
               <a:lnSpc>
-                <a:spcPct val="120000"/>
+                <a:spcPct val="115000"/>
               </a:lnSpc>
               <a:buNone/>
             </a:pPr>
@@ -7514,7 +8629,7 @@
                 <a:ea typeface="Pretendard" pitchFamily="34" charset="-122"/>
                 <a:cs typeface="Pretendard" pitchFamily="34" charset="-120"/>
               </a:rPr>
-              <a:t>10.5억 원</a:t>
+              <a:t>0.0억 원</a:t>
             </a:r>
             <a:endParaRPr lang="en-US" sz="1150" dirty="0"/>
           </a:p>
@@ -7528,7 +8643,7 @@
         </p:nvSpPr>
         <p:spPr>
           <a:xfrm>
-            <a:off x="795528" y="4389120"/>
+            <a:off x="731520" y="4389120"/>
             <a:ext cx="4934560" cy="0"/>
           </a:xfrm>
           <a:prstGeom prst="line">
@@ -7551,8 +8666,8 @@
         </p:nvSpPr>
         <p:spPr>
           <a:xfrm>
-            <a:off x="795528" y="4389120"/>
-            <a:ext cx="1875133" cy="475488"/>
+            <a:off x="731520" y="4389120"/>
+            <a:ext cx="2269897" cy="475488"/>
           </a:xfrm>
           <a:prstGeom prst="rect">
             <a:avLst/>
@@ -7566,7 +8681,7 @@
           <a:p>
             <a:pPr indent="0" marL="0">
               <a:lnSpc>
-                <a:spcPct val="120000"/>
+                <a:spcPct val="115000"/>
               </a:lnSpc>
               <a:buNone/>
             </a:pPr>
@@ -7593,8 +8708,8 @@
         </p:nvSpPr>
         <p:spPr>
           <a:xfrm>
-            <a:off x="2670661" y="4389120"/>
-            <a:ext cx="3059427" cy="475488"/>
+            <a:off x="3001417" y="4389120"/>
+            <a:ext cx="2664662" cy="475488"/>
           </a:xfrm>
           <a:prstGeom prst="rect">
             <a:avLst/>
@@ -7608,7 +8723,7 @@
           <a:p>
             <a:pPr indent="0" marL="0">
               <a:lnSpc>
-                <a:spcPct val="120000"/>
+                <a:spcPct val="115000"/>
               </a:lnSpc>
               <a:buNone/>
             </a:pPr>
@@ -7635,7 +8750,7 @@
         </p:nvSpPr>
         <p:spPr>
           <a:xfrm>
-            <a:off x="795528" y="4864608"/>
+            <a:off x="731520" y="4864608"/>
             <a:ext cx="4934560" cy="0"/>
           </a:xfrm>
           <a:prstGeom prst="line">
@@ -7658,8 +8773,8 @@
         </p:nvSpPr>
         <p:spPr>
           <a:xfrm>
-            <a:off x="795528" y="4864608"/>
-            <a:ext cx="1875133" cy="475488"/>
+            <a:off x="731520" y="4864608"/>
+            <a:ext cx="2269897" cy="475488"/>
           </a:xfrm>
           <a:prstGeom prst="rect">
             <a:avLst/>
@@ -7673,7 +8788,7 @@
           <a:p>
             <a:pPr indent="0" marL="0">
               <a:lnSpc>
-                <a:spcPct val="120000"/>
+                <a:spcPct val="115000"/>
               </a:lnSpc>
               <a:buNone/>
             </a:pPr>
@@ -7700,8 +8815,8 @@
         </p:nvSpPr>
         <p:spPr>
           <a:xfrm>
-            <a:off x="2670661" y="4864608"/>
-            <a:ext cx="3059427" cy="475488"/>
+            <a:off x="3001417" y="4864608"/>
+            <a:ext cx="2664662" cy="475488"/>
           </a:xfrm>
           <a:prstGeom prst="rect">
             <a:avLst/>
@@ -7715,7 +8830,7 @@
           <a:p>
             <a:pPr indent="0" marL="0">
               <a:lnSpc>
-                <a:spcPct val="120000"/>
+                <a:spcPct val="115000"/>
               </a:lnSpc>
               <a:buNone/>
             </a:pPr>
@@ -7728,7 +8843,7 @@
                 <a:ea typeface="Pretendard" pitchFamily="34" charset="-122"/>
                 <a:cs typeface="Pretendard" pitchFamily="34" charset="-120"/>
               </a:rPr>
-              <a:t>106.0억 원</a:t>
+              <a:t>116.5억 원</a:t>
             </a:r>
             <a:endParaRPr lang="en-US" sz="1150" dirty="0"/>
           </a:p>
@@ -7742,7 +8857,7 @@
         </p:nvSpPr>
         <p:spPr>
           <a:xfrm>
-            <a:off x="6233008" y="1417320"/>
+            <a:off x="6169000" y="1417320"/>
             <a:ext cx="5391760" cy="4389120"/>
           </a:xfrm>
           <a:prstGeom prst="roundRect">
@@ -7769,7 +8884,7 @@
         </p:nvSpPr>
         <p:spPr>
           <a:xfrm>
-            <a:off x="6461608" y="1618488"/>
+            <a:off x="6397600" y="1618488"/>
             <a:ext cx="4934560" cy="320040"/>
           </a:xfrm>
           <a:prstGeom prst="rect">
@@ -7802,7 +8917,7 @@
       </p:sp>
       <p:graphicFrame>
         <p:nvGraphicFramePr>
-          <p:cNvPr id="6" name="Table 0"/>
+          <p:cNvPr id="7" name="Table 0"/>
           <p:cNvGraphicFramePr>
             <a:graphicFrameLocks noGrp="1"/>
           </p:cNvGraphicFramePr>
@@ -7815,7 +8930,7 @@
           </p:nvPr>
         </p:nvGraphicFramePr>
         <p:xfrm>
-          <a:off x="6461608" y="2057400"/>
+          <a:off x="6397600" y="2057400"/>
           <a:ext cx="4934560" cy="914400"/>
         </p:xfrm>
         <a:graphic>
@@ -7840,7 +8955,7 @@
                       <a:r>
                         <a:rPr lang="en-US" sz="1100" b="1" dirty="0">
                           <a:solidFill>
-                            <a:srgbClr val="718096"/>
+                            <a:srgbClr val="FFFFFF"/>
                           </a:solidFill>
                           <a:latin typeface="Pretendard" pitchFamily="34" charset="0"/>
                           <a:ea typeface="Pretendard" pitchFamily="34" charset="-122"/>
@@ -7893,7 +9008,7 @@
                       <a:tailEnd type="none" w="med" len="med"/>
                     </a:lnB>
                     <a:solidFill>
-                      <a:srgbClr val="F7FAFC"/>
+                      <a:srgbClr val="10161F"/>
                     </a:solidFill>
                   </a:tcPr>
                 </a:tc>
@@ -7908,7 +9023,7 @@
                       <a:r>
                         <a:rPr lang="en-US" sz="1100" b="1" dirty="0">
                           <a:solidFill>
-                            <a:srgbClr val="718096"/>
+                            <a:srgbClr val="FFFFFF"/>
                           </a:solidFill>
                           <a:latin typeface="Pretendard" pitchFamily="34" charset="0"/>
                           <a:ea typeface="Pretendard" pitchFamily="34" charset="-122"/>
@@ -7961,7 +9076,7 @@
                       <a:tailEnd type="none" w="med" len="med"/>
                     </a:lnB>
                     <a:solidFill>
-                      <a:srgbClr val="F7FAFC"/>
+                      <a:srgbClr val="10161F"/>
                     </a:solidFill>
                   </a:tcPr>
                 </a:tc>
@@ -7976,7 +9091,7 @@
                       <a:r>
                         <a:rPr lang="en-US" sz="1100" b="1" dirty="0">
                           <a:solidFill>
-                            <a:srgbClr val="718096"/>
+                            <a:srgbClr val="FFFFFF"/>
                           </a:solidFill>
                           <a:latin typeface="Pretendard" pitchFamily="34" charset="0"/>
                           <a:ea typeface="Pretendard" pitchFamily="34" charset="-122"/>
@@ -8029,7 +9144,7 @@
                       <a:tailEnd type="none" w="med" len="med"/>
                     </a:lnB>
                     <a:solidFill>
-                      <a:srgbClr val="F7FAFC"/>
+                      <a:srgbClr val="10161F"/>
                     </a:solidFill>
                   </a:tcPr>
                 </a:tc>
@@ -8044,7 +9159,7 @@
                       <a:r>
                         <a:rPr lang="en-US" sz="1100" b="1" dirty="0">
                           <a:solidFill>
-                            <a:srgbClr val="718096"/>
+                            <a:srgbClr val="FFFFFF"/>
                           </a:solidFill>
                           <a:latin typeface="Pretendard" pitchFamily="34" charset="0"/>
                           <a:ea typeface="Pretendard" pitchFamily="34" charset="-122"/>
@@ -8097,7 +9212,7 @@
                       <a:tailEnd type="none" w="med" len="med"/>
                     </a:lnB>
                     <a:solidFill>
-                      <a:srgbClr val="F7FAFC"/>
+                      <a:srgbClr val="10161F"/>
                     </a:solidFill>
                   </a:tcPr>
                 </a:tc>
@@ -8284,7 +9399,7 @@
                           <a:ea typeface="Pretendard" pitchFamily="34" charset="-122"/>
                           <a:cs typeface="Pretendard" pitchFamily="34" charset="-120"/>
                         </a:rPr>
-                        <a:t>211.1억</a:t>
+                        <a:t>221.6억</a:t>
                       </a:r>
                       <a:endParaRPr lang="en-US" sz="1100" dirty="0">
                         <a:latin typeface="Pretendard" charset="0"/>
@@ -8352,7 +9467,7 @@
                           <a:ea typeface="Pretendard" pitchFamily="34" charset="-122"/>
                           <a:cs typeface="Pretendard" pitchFamily="34" charset="-120"/>
                         </a:rPr>
-                        <a:t>3.78%</a:t>
+                        <a:t>0.00%</a:t>
                       </a:r>
                       <a:endParaRPr lang="en-US" sz="1100" dirty="0">
                         <a:latin typeface="Pretendard" charset="0"/>
@@ -8586,7 +9701,7 @@
                           <a:ea typeface="Pretendard" pitchFamily="34" charset="-122"/>
                           <a:cs typeface="Pretendard" pitchFamily="34" charset="-120"/>
                         </a:rPr>
-                        <a:t>127.0억</a:t>
+                        <a:t>137.6억</a:t>
                       </a:r>
                       <a:endParaRPr lang="en-US" sz="1100" dirty="0">
                         <a:latin typeface="Pretendard" charset="0"/>
@@ -8654,7 +9769,7 @@
                           <a:ea typeface="Pretendard" pitchFamily="34" charset="-122"/>
                           <a:cs typeface="Pretendard" pitchFamily="34" charset="-120"/>
                         </a:rPr>
-                        <a:t>3.11%</a:t>
+                        <a:t>0.00%</a:t>
                       </a:r>
                       <a:endParaRPr lang="en-US" sz="1100" dirty="0">
                         <a:latin typeface="Pretendard" charset="0"/>
@@ -8888,7 +10003,7 @@
                           <a:ea typeface="Pretendard" pitchFamily="34" charset="-122"/>
                           <a:cs typeface="Pretendard" pitchFamily="34" charset="-120"/>
                         </a:rPr>
-                        <a:t>106.0억</a:t>
+                        <a:t>116.5억</a:t>
                       </a:r>
                       <a:endParaRPr lang="en-US" sz="1100" dirty="0">
                         <a:latin typeface="Pretendard" charset="0"/>
@@ -8956,7 +10071,7 @@
                           <a:ea typeface="Pretendard" pitchFamily="34" charset="-122"/>
                           <a:cs typeface="Pretendard" pitchFamily="34" charset="-120"/>
                         </a:rPr>
-                        <a:t>2.77%</a:t>
+                        <a:t>0.00%</a:t>
                       </a:r>
                       <a:endParaRPr lang="en-US" sz="1100" dirty="0">
                         <a:latin typeface="Pretendard" charset="0"/>
@@ -9190,7 +10305,7 @@
                           <a:ea typeface="Pretendard" pitchFamily="34" charset="-122"/>
                           <a:cs typeface="Pretendard" pitchFamily="34" charset="-120"/>
                         </a:rPr>
-                        <a:t>85.0억</a:t>
+                        <a:t>95.5억</a:t>
                       </a:r>
                       <a:endParaRPr lang="en-US" sz="1100" dirty="0">
                         <a:latin typeface="Pretendard" charset="0"/>
@@ -9258,7 +10373,7 @@
                           <a:ea typeface="Pretendard" pitchFamily="34" charset="-122"/>
                           <a:cs typeface="Pretendard" pitchFamily="34" charset="-120"/>
                         </a:rPr>
-                        <a:t>2.27%</a:t>
+                        <a:t>0.00%</a:t>
                       </a:r>
                       <a:endParaRPr lang="en-US" sz="1100" dirty="0">
                         <a:latin typeface="Pretendard" charset="0"/>
@@ -9322,7 +10437,7 @@
         </p:nvSpPr>
         <p:spPr>
           <a:xfrm>
-            <a:off x="6461608" y="4069080"/>
+            <a:off x="6397600" y="4069080"/>
             <a:ext cx="4934560" cy="1463040"/>
           </a:xfrm>
           <a:prstGeom prst="roundRect">
@@ -9344,7 +10459,7 @@
         </p:nvSpPr>
         <p:spPr>
           <a:xfrm>
-            <a:off x="6461608" y="4123944"/>
+            <a:off x="6397600" y="4123944"/>
             <a:ext cx="36576" cy="1353312"/>
           </a:xfrm>
           <a:prstGeom prst="rect">
@@ -9364,8 +10479,8 @@
         </p:nvSpPr>
         <p:spPr>
           <a:xfrm>
-            <a:off x="6644488" y="4178808"/>
-            <a:ext cx="4605376" cy="201168"/>
+            <a:off x="6543904" y="4160520"/>
+            <a:ext cx="4678528" cy="201168"/>
           </a:xfrm>
           <a:prstGeom prst="rect">
             <a:avLst/>
@@ -9403,8 +10518,8 @@
         </p:nvSpPr>
         <p:spPr>
           <a:xfrm>
-            <a:off x="6644488" y="4398264"/>
-            <a:ext cx="4605376" cy="1060704"/>
+            <a:off x="6543904" y="4361688"/>
+            <a:ext cx="4678528" cy="1133856"/>
           </a:xfrm>
           <a:prstGeom prst="rect">
             <a:avLst/>
@@ -9418,12 +10533,12 @@
           <a:p>
             <a:pPr indent="0" marL="0">
               <a:lnSpc>
-                <a:spcPct val="120000"/>
+                <a:spcPct val="108000"/>
               </a:lnSpc>
               <a:buNone/>
             </a:pPr>
             <a:r>
-              <a:rPr lang="en-US" sz="930" dirty="0">
+              <a:rPr lang="en-US" sz="980" dirty="0">
                 <a:solidFill>
                   <a:srgbClr val="10161F"/>
                 </a:solidFill>
@@ -9433,7 +10548,7 @@
               </a:rPr>
               <a:t>차입 금리가 자산 총수익률을 상회하여 대출 실행 시 자기자본수익률이 하락할 수 있습니다. 에쿼티 비중 확대를 권장합니다.</a:t>
             </a:r>
-            <a:endParaRPr lang="en-US" sz="930" dirty="0"/>
+            <a:endParaRPr lang="en-US" sz="980" dirty="0"/>
           </a:p>
         </p:txBody>
       </p:sp>
@@ -9445,7 +10560,7 @@
         </p:nvSpPr>
         <p:spPr>
           <a:xfrm>
-            <a:off x="566928" y="6382512"/>
+            <a:off x="502920" y="6382512"/>
             <a:ext cx="7315200" cy="219456"/>
           </a:xfrm>
           <a:prstGeom prst="rect">
@@ -9484,362 +10599,7 @@
         </p:nvSpPr>
         <p:spPr>
           <a:xfrm>
-            <a:off x="10710367" y="6382512"/>
-            <a:ext cx="914400" cy="219456"/>
-          </a:xfrm>
-          <a:prstGeom prst="rect">
-            <a:avLst/>
-          </a:prstGeom>
-          <a:noFill/>
-          <a:ln/>
-        </p:spPr>
-        <p:txBody>
-          <a:bodyPr wrap="square" lIns="0" tIns="0" rIns="0" bIns="0" rtlCol="0" anchor="ctr"/>
-          <a:lstStyle/>
-          <a:p>
-            <a:pPr algn="r" indent="0" marL="0">
-              <a:buNone/>
-            </a:pPr>
-            <a:r>
-              <a:rPr lang="en-US" sz="900" b="1" dirty="0">
-                <a:solidFill>
-                  <a:srgbClr val="B98A2E"/>
-                </a:solidFill>
-                <a:latin typeface="Arial" pitchFamily="34" charset="0"/>
-                <a:ea typeface="Arial" pitchFamily="34" charset="-122"/>
-                <a:cs typeface="Arial" pitchFamily="34" charset="-120"/>
-              </a:rPr>
-              <a:t>5</a:t>
-            </a:r>
-            <a:endParaRPr lang="en-US" sz="900" dirty="0"/>
-          </a:p>
-        </p:txBody>
-      </p:sp>
-    </p:spTree>
-  </p:cSld>
-  <p:clrMapOvr>
-    <a:masterClrMapping/>
-  </p:clrMapOvr>
-</p:sld>
-</file>
-
-<file path=ppt/slides/slide6.xml><?xml version="1.0" encoding="utf-8"?>
-<p:sld xmlns:a="http://schemas.openxmlformats.org/drawingml/2006/main" xmlns:r="http://schemas.openxmlformats.org/officeDocument/2006/relationships" xmlns:p="http://schemas.openxmlformats.org/presentationml/2006/main">
-  <p:cSld name="Slide 6">
-    <p:bg>
-      <p:bgPr>
-        <a:solidFill>
-          <a:srgbClr val="FFFFFF"/>
-        </a:solidFill>
-      </p:bgPr>
-    </p:bg>
-    <p:spTree>
-      <p:nvGrpSpPr>
-        <p:cNvPr id="1" name=""/>
-        <p:cNvGrpSpPr/>
-        <p:nvPr/>
-      </p:nvGrpSpPr>
-      <p:grpSpPr>
-        <a:xfrm>
-          <a:off x="0" y="0"/>
-          <a:ext cx="0" cy="0"/>
-          <a:chOff x="0" y="0"/>
-          <a:chExt cx="0" cy="0"/>
-        </a:xfrm>
-      </p:grpSpPr>
-      <p:sp>
-        <p:nvSpPr>
-          <p:cNvPr id="2" name="Shape 0"/>
-          <p:cNvSpPr/>
-          <p:nvPr/>
-        </p:nvSpPr>
-        <p:spPr>
-          <a:xfrm>
-            <a:off x="566928" y="457200"/>
-            <a:ext cx="384048" cy="384048"/>
-          </a:xfrm>
-          <a:prstGeom prst="ellipse">
-            <a:avLst/>
-          </a:prstGeom>
-          <a:solidFill>
-            <a:srgbClr val="B98A2E"/>
-          </a:solidFill>
-          <a:ln/>
-        </p:spPr>
-      </p:sp>
-      <p:sp>
-        <p:nvSpPr>
-          <p:cNvPr id="3" name="Text 1"/>
-          <p:cNvSpPr/>
-          <p:nvPr/>
-        </p:nvSpPr>
-        <p:spPr>
-          <a:xfrm>
-            <a:off x="566928" y="457200"/>
-            <a:ext cx="384048" cy="384048"/>
-          </a:xfrm>
-          <a:prstGeom prst="rect">
-            <a:avLst/>
-          </a:prstGeom>
-          <a:noFill/>
-          <a:ln/>
-        </p:spPr>
-        <p:txBody>
-          <a:bodyPr wrap="square" lIns="0" tIns="0" rIns="0" bIns="0" rtlCol="0" anchor="ctr"/>
-          <a:lstStyle/>
-          <a:p>
-            <a:pPr algn="ctr" indent="0" marL="0">
-              <a:buNone/>
-            </a:pPr>
-            <a:r>
-              <a:rPr lang="en-US" sz="1300" b="1" dirty="0">
-                <a:solidFill>
-                  <a:srgbClr val="FFFFFF"/>
-                </a:solidFill>
-                <a:latin typeface="Arial" pitchFamily="34" charset="0"/>
-                <a:ea typeface="Arial" pitchFamily="34" charset="-122"/>
-                <a:cs typeface="Arial" pitchFamily="34" charset="-120"/>
-              </a:rPr>
-              <a:t>06</a:t>
-            </a:r>
-            <a:endParaRPr lang="en-US" sz="1300" dirty="0"/>
-          </a:p>
-        </p:txBody>
-      </p:sp>
-      <p:sp>
-        <p:nvSpPr>
-          <p:cNvPr id="4" name="Text 2"/>
-          <p:cNvSpPr/>
-          <p:nvPr/>
-        </p:nvSpPr>
-        <p:spPr>
-          <a:xfrm>
-            <a:off x="1133856" y="457200"/>
-            <a:ext cx="10490911" cy="182880"/>
-          </a:xfrm>
-          <a:prstGeom prst="rect">
-            <a:avLst/>
-          </a:prstGeom>
-          <a:noFill/>
-          <a:ln/>
-        </p:spPr>
-        <p:txBody>
-          <a:bodyPr wrap="square" lIns="0" tIns="0" rIns="0" bIns="0" rtlCol="0" anchor="ctr"/>
-          <a:lstStyle/>
-          <a:p>
-            <a:pPr indent="0" marL="0">
-              <a:buNone/>
-            </a:pPr>
-            <a:r>
-              <a:rPr lang="en-US" sz="950" b="1" spc="200" kern="0" dirty="0">
-                <a:solidFill>
-                  <a:srgbClr val="B98A2E"/>
-                </a:solidFill>
-                <a:latin typeface="Arial" pitchFamily="34" charset="0"/>
-                <a:ea typeface="Arial" pitchFamily="34" charset="-122"/>
-                <a:cs typeface="Arial" pitchFamily="34" charset="-120"/>
-              </a:rPr>
-              <a:t>Thesis</a:t>
-            </a:r>
-            <a:endParaRPr lang="en-US" sz="950" dirty="0"/>
-          </a:p>
-        </p:txBody>
-      </p:sp>
-      <p:sp>
-        <p:nvSpPr>
-          <p:cNvPr id="5" name="Text 3"/>
-          <p:cNvSpPr/>
-          <p:nvPr/>
-        </p:nvSpPr>
-        <p:spPr>
-          <a:xfrm>
-            <a:off x="1133856" y="640080"/>
-            <a:ext cx="10490911" cy="365760"/>
-          </a:xfrm>
-          <a:prstGeom prst="rect">
-            <a:avLst/>
-          </a:prstGeom>
-          <a:noFill/>
-          <a:ln/>
-        </p:spPr>
-        <p:txBody>
-          <a:bodyPr wrap="square" lIns="0" tIns="0" rIns="0" bIns="0" rtlCol="0" anchor="ctr"/>
-          <a:lstStyle/>
-          <a:p>
-            <a:pPr indent="0" marL="0">
-              <a:buNone/>
-            </a:pPr>
-            <a:r>
-              <a:rPr lang="en-US" sz="2300" b="1" dirty="0">
-                <a:solidFill>
-                  <a:srgbClr val="10161F"/>
-                </a:solidFill>
-                <a:latin typeface="Pretendard" pitchFamily="34" charset="0"/>
-                <a:ea typeface="Pretendard" pitchFamily="34" charset="-122"/>
-                <a:cs typeface="Pretendard" pitchFamily="34" charset="-120"/>
-              </a:rPr>
-              <a:t>투자 논거</a:t>
-            </a:r>
-            <a:endParaRPr lang="en-US" sz="2300" dirty="0"/>
-          </a:p>
-        </p:txBody>
-      </p:sp>
-      <p:sp>
-        <p:nvSpPr>
-          <p:cNvPr id="6" name="Shape 4"/>
-          <p:cNvSpPr/>
-          <p:nvPr/>
-        </p:nvSpPr>
-        <p:spPr>
-          <a:xfrm>
-            <a:off x="566928" y="4983480"/>
-            <a:ext cx="11057839" cy="804672"/>
-          </a:xfrm>
-          <a:prstGeom prst="roundRect">
-            <a:avLst>
-              <a:gd name="adj" fmla="val 6818"/>
-            </a:avLst>
-          </a:prstGeom>
-          <a:solidFill>
-            <a:srgbClr val="F3EBDA"/>
-          </a:solidFill>
-          <a:ln w="10160">
-            <a:solidFill>
-              <a:srgbClr val="D9B668"/>
-            </a:solidFill>
-            <a:prstDash val="solid"/>
-          </a:ln>
-        </p:spPr>
-      </p:sp>
-      <p:sp>
-        <p:nvSpPr>
-          <p:cNvPr id="7" name="Text 5"/>
-          <p:cNvSpPr/>
-          <p:nvPr/>
-        </p:nvSpPr>
-        <p:spPr>
-          <a:xfrm>
-            <a:off x="749808" y="5093208"/>
-            <a:ext cx="1691640" cy="256032"/>
-          </a:xfrm>
-          <a:prstGeom prst="rect">
-            <a:avLst/>
-          </a:prstGeom>
-          <a:noFill/>
-          <a:ln/>
-        </p:spPr>
-        <p:txBody>
-          <a:bodyPr wrap="square" lIns="0" tIns="0" rIns="0" bIns="0" rtlCol="0" anchor="ctr"/>
-          <a:lstStyle/>
-          <a:p>
-            <a:pPr indent="0" marL="0">
-              <a:buNone/>
-            </a:pPr>
-            <a:r>
-              <a:rPr lang="en-US" sz="1050" b="1" dirty="0">
-                <a:solidFill>
-                  <a:srgbClr val="977024"/>
-                </a:solidFill>
-                <a:latin typeface="Pretendard" pitchFamily="34" charset="0"/>
-                <a:ea typeface="Pretendard" pitchFamily="34" charset="-122"/>
-                <a:cs typeface="Pretendard" pitchFamily="34" charset="-120"/>
-              </a:rPr>
-              <a:t>종합 가치 제안</a:t>
-            </a:r>
-            <a:endParaRPr lang="en-US" sz="1050" dirty="0"/>
-          </a:p>
-        </p:txBody>
-      </p:sp>
-      <p:sp>
-        <p:nvSpPr>
-          <p:cNvPr id="8" name="Text 6"/>
-          <p:cNvSpPr/>
-          <p:nvPr/>
-        </p:nvSpPr>
-        <p:spPr>
-          <a:xfrm>
-            <a:off x="2487168" y="5056632"/>
-            <a:ext cx="8954719" cy="658368"/>
-          </a:xfrm>
-          <a:prstGeom prst="rect">
-            <a:avLst/>
-          </a:prstGeom>
-          <a:noFill/>
-          <a:ln/>
-        </p:spPr>
-        <p:txBody>
-          <a:bodyPr wrap="square" lIns="0" tIns="0" rIns="0" bIns="0" rtlCol="0" anchor="ctr"/>
-          <a:lstStyle/>
-          <a:p>
-            <a:pPr indent="0" marL="0">
-              <a:lnSpc>
-                <a:spcPct val="125000"/>
-              </a:lnSpc>
-              <a:buNone/>
-            </a:pPr>
-            <a:r>
-              <a:rPr lang="en-US" sz="1100" dirty="0">
-                <a:solidFill>
-                  <a:srgbClr val="10161F"/>
-                </a:solidFill>
-                <a:latin typeface="Pretendard" pitchFamily="34" charset="0"/>
-                <a:ea typeface="Pretendard" pitchFamily="34" charset="-122"/>
-                <a:cs typeface="Pretendard" pitchFamily="34" charset="-120"/>
-              </a:rPr>
-              <a:t>테헤란로 프라임 입지의 개발 가치와 용적률 잔여 활용 가능성이 핵심입니다.</a:t>
-            </a:r>
-            <a:endParaRPr lang="en-US" sz="1100" dirty="0"/>
-          </a:p>
-        </p:txBody>
-      </p:sp>
-      <p:sp>
-        <p:nvSpPr>
-          <p:cNvPr id="9" name="Text 7"/>
-          <p:cNvSpPr/>
-          <p:nvPr/>
-        </p:nvSpPr>
-        <p:spPr>
-          <a:xfrm>
-            <a:off x="566928" y="6382512"/>
-            <a:ext cx="7315200" cy="219456"/>
-          </a:xfrm>
-          <a:prstGeom prst="rect">
-            <a:avLst/>
-          </a:prstGeom>
-          <a:noFill/>
-          <a:ln/>
-        </p:spPr>
-        <p:txBody>
-          <a:bodyPr wrap="square" lIns="0" tIns="0" rIns="0" bIns="0" rtlCol="0" anchor="ctr"/>
-          <a:lstStyle/>
-          <a:p>
-            <a:pPr indent="0" marL="0">
-              <a:buNone/>
-            </a:pPr>
-            <a:r>
-              <a:rPr lang="en-US" sz="800" dirty="0">
-                <a:solidFill>
-                  <a:srgbClr val="718096"/>
-                </a:solidFill>
-                <a:latin typeface="Pretendard" pitchFamily="34" charset="0"/>
-                <a:ea typeface="Pretendard" pitchFamily="34" charset="-122"/>
-                <a:cs typeface="Pretendard" pitchFamily="34" charset="-120"/>
-              </a:rPr>
-              <a:t>크리딜   |   </a:t>
-            </a:r>
-            <a:endParaRPr lang="en-US" sz="800" dirty="0"/>
-          </a:p>
-        </p:txBody>
-      </p:sp>
-      <p:sp>
-        <p:nvSpPr>
-          <p:cNvPr id="10" name="Text 8"/>
-          <p:cNvSpPr/>
-          <p:nvPr/>
-        </p:nvSpPr>
-        <p:spPr>
-          <a:xfrm>
-            <a:off x="10710367" y="6382512"/>
+            <a:off x="10774375" y="6382512"/>
             <a:ext cx="914400" cy="219456"/>
           </a:xfrm>
           <a:prstGeom prst="rect">
@@ -9910,7 +10670,7 @@
         </p:nvSpPr>
         <p:spPr>
           <a:xfrm>
-            <a:off x="566928" y="457200"/>
+            <a:off x="502920" y="457200"/>
             <a:ext cx="384048" cy="384048"/>
           </a:xfrm>
           <a:prstGeom prst="ellipse">
@@ -9930,7 +10690,7 @@
         </p:nvSpPr>
         <p:spPr>
           <a:xfrm>
-            <a:off x="566928" y="457200"/>
+            <a:off x="502920" y="457200"/>
             <a:ext cx="384048" cy="384048"/>
           </a:xfrm>
           <a:prstGeom prst="rect">
@@ -9969,7 +10729,7 @@
         </p:nvSpPr>
         <p:spPr>
           <a:xfrm>
-            <a:off x="1133856" y="457200"/>
+            <a:off x="1069848" y="457200"/>
             <a:ext cx="10490911" cy="182880"/>
           </a:xfrm>
           <a:prstGeom prst="rect">
@@ -9994,7 +10754,7 @@
                 <a:ea typeface="Arial" pitchFamily="34" charset="-122"/>
                 <a:cs typeface="Arial" pitchFamily="34" charset="-120"/>
               </a:rPr>
-              <a:t>Risk</a:t>
+              <a:t>Thesis</a:t>
             </a:r>
             <a:endParaRPr lang="en-US" sz="950" dirty="0"/>
           </a:p>
@@ -10008,7 +10768,7 @@
         </p:nvSpPr>
         <p:spPr>
           <a:xfrm>
-            <a:off x="1133856" y="640080"/>
+            <a:off x="1069848" y="640080"/>
             <a:ext cx="10490911" cy="365760"/>
           </a:xfrm>
           <a:prstGeom prst="rect">
@@ -10033,7 +10793,7 @@
                 <a:ea typeface="Pretendard" pitchFamily="34" charset="-122"/>
                 <a:cs typeface="Pretendard" pitchFamily="34" charset="-120"/>
               </a:rPr>
-              <a:t>리스크</a:t>
+              <a:t>투자 논거</a:t>
             </a:r>
             <a:endParaRPr lang="en-US" sz="2300" dirty="0"/>
           </a:p>
@@ -10047,20 +10807,20 @@
         </p:nvSpPr>
         <p:spPr>
           <a:xfrm>
-            <a:off x="566928" y="1417320"/>
-            <a:ext cx="11057839" cy="3657600"/>
+            <a:off x="502920" y="4937760"/>
+            <a:ext cx="11057839" cy="804672"/>
           </a:xfrm>
           <a:prstGeom prst="roundRect">
             <a:avLst>
-              <a:gd name="adj" fmla="val 1500"/>
+              <a:gd name="adj" fmla="val 6818"/>
             </a:avLst>
           </a:prstGeom>
           <a:solidFill>
-            <a:srgbClr val="F7FAFC"/>
+            <a:srgbClr val="F3EBDA"/>
           </a:solidFill>
-          <a:ln w="6350">
+          <a:ln w="10160">
             <a:solidFill>
-              <a:srgbClr val="CBD5E0"/>
+              <a:srgbClr val="D9B668"/>
             </a:solidFill>
             <a:prstDash val="solid"/>
           </a:ln>
@@ -10068,23 +10828,42 @@
       </p:sp>
       <p:sp>
         <p:nvSpPr>
-          <p:cNvPr id="7" name="Shape 5"/>
-          <p:cNvSpPr/>
-          <p:nvPr/>
-        </p:nvSpPr>
-        <p:spPr>
-          <a:xfrm>
-            <a:off x="566928" y="1417320"/>
-            <a:ext cx="11057839" cy="45720"/>
-          </a:xfrm>
-          <a:prstGeom prst="rect">
-            <a:avLst/>
-          </a:prstGeom>
-          <a:solidFill>
-            <a:srgbClr val="B98A2E"/>
-          </a:solidFill>
-          <a:ln/>
-        </p:spPr>
+          <p:cNvPr id="7" name="Text 5"/>
+          <p:cNvSpPr/>
+          <p:nvPr/>
+        </p:nvSpPr>
+        <p:spPr>
+          <a:xfrm>
+            <a:off x="685800" y="5047488"/>
+            <a:ext cx="1691640" cy="256032"/>
+          </a:xfrm>
+          <a:prstGeom prst="rect">
+            <a:avLst/>
+          </a:prstGeom>
+          <a:noFill/>
+          <a:ln/>
+        </p:spPr>
+        <p:txBody>
+          <a:bodyPr wrap="square" lIns="0" tIns="0" rIns="0" bIns="0" rtlCol="0" anchor="ctr"/>
+          <a:lstStyle/>
+          <a:p>
+            <a:pPr indent="0" marL="0">
+              <a:buNone/>
+            </a:pPr>
+            <a:r>
+              <a:rPr lang="en-US" sz="1050" b="1" dirty="0">
+                <a:solidFill>
+                  <a:srgbClr val="977024"/>
+                </a:solidFill>
+                <a:latin typeface="Pretendard" pitchFamily="34" charset="0"/>
+                <a:ea typeface="Pretendard" pitchFamily="34" charset="-122"/>
+                <a:cs typeface="Pretendard" pitchFamily="34" charset="-120"/>
+              </a:rPr>
+              <a:t>종합 가치 제안</a:t>
+            </a:r>
+            <a:endParaRPr lang="en-US" sz="1050" dirty="0"/>
+          </a:p>
+        </p:txBody>
       </p:sp>
       <p:sp>
         <p:nvSpPr>
@@ -10094,8 +10873,8 @@
         </p:nvSpPr>
         <p:spPr>
           <a:xfrm>
-            <a:off x="795528" y="1618488"/>
-            <a:ext cx="10600639" cy="292608"/>
+            <a:off x="2423160" y="5010912"/>
+            <a:ext cx="8954719" cy="658368"/>
           </a:xfrm>
           <a:prstGeom prst="rect">
             <a:avLst/>
@@ -10108,93 +10887,10 @@
           <a:lstStyle/>
           <a:p>
             <a:pPr indent="0" marL="0">
-              <a:buNone/>
-            </a:pPr>
-            <a:r>
-              <a:rPr lang="en-US" sz="1350" b="1" dirty="0">
-                <a:solidFill>
-                  <a:srgbClr val="977024"/>
-                </a:solidFill>
-                <a:latin typeface="Pretendard" pitchFamily="34" charset="0"/>
-                <a:ea typeface="Pretendard" pitchFamily="34" charset="-122"/>
-                <a:cs typeface="Pretendard" pitchFamily="34" charset="-120"/>
-              </a:rPr>
-              <a:t>인허가 지연</a:t>
-            </a:r>
-            <a:endParaRPr lang="en-US" sz="1350" dirty="0"/>
-          </a:p>
-        </p:txBody>
-      </p:sp>
-      <p:sp>
-        <p:nvSpPr>
-          <p:cNvPr id="9" name="Text 7"/>
-          <p:cNvSpPr/>
-          <p:nvPr/>
-        </p:nvSpPr>
-        <p:spPr>
-          <a:xfrm>
-            <a:off x="795528" y="1947672"/>
-            <a:ext cx="10600639" cy="365760"/>
-          </a:xfrm>
-          <a:prstGeom prst="rect">
-            <a:avLst/>
-          </a:prstGeom>
-          <a:noFill/>
-          <a:ln/>
-        </p:spPr>
-        <p:txBody>
-          <a:bodyPr wrap="square" lIns="0" tIns="0" rIns="0" bIns="0" rtlCol="0" anchor="ctr">
-            <a:normAutofit/>
-          </a:bodyPr>
-          <a:lstStyle/>
-          <a:p>
-            <a:pPr indent="0" marL="0">
-              <a:buNone/>
-            </a:pPr>
-            <a:r>
-              <a:rPr lang="en-US" sz="1250" b="1" dirty="0">
-                <a:solidFill>
-                  <a:srgbClr val="10161F"/>
-                </a:solidFill>
-                <a:latin typeface="Pretendard" pitchFamily="34" charset="0"/>
-                <a:ea typeface="Pretendard" pitchFamily="34" charset="-122"/>
-                <a:cs typeface="Pretendard" pitchFamily="34" charset="-120"/>
-              </a:rPr>
-              <a:t>사전협의 완료</a:t>
-            </a:r>
-            <a:endParaRPr lang="en-US" sz="1250" dirty="0"/>
-          </a:p>
-        </p:txBody>
-      </p:sp>
-      <p:sp>
-        <p:nvSpPr>
-          <p:cNvPr id="10" name="Text 8"/>
-          <p:cNvSpPr/>
-          <p:nvPr/>
-        </p:nvSpPr>
-        <p:spPr>
-          <a:xfrm>
-            <a:off x="795528" y="2377440"/>
-            <a:ext cx="10600639" cy="2606040"/>
-          </a:xfrm>
-          <a:prstGeom prst="rect">
-            <a:avLst/>
-          </a:prstGeom>
-          <a:noFill/>
-          <a:ln/>
-        </p:spPr>
-        <p:txBody>
-          <a:bodyPr wrap="square" lIns="0" tIns="0" rIns="0" bIns="0" rtlCol="0" anchor="t">
-            <a:normAutofit/>
-          </a:bodyPr>
-          <a:lstStyle/>
-          <a:p>
-            <a:pPr marL="342900" indent="-342900">
               <a:lnSpc>
                 <a:spcPct val="125000"/>
               </a:lnSpc>
-              <a:buSzPct val="100000"/>
-              <a:buChar char="•"/>
+              <a:buNone/>
             </a:pPr>
             <a:r>
               <a:rPr lang="en-US" sz="1100" dirty="0">
@@ -10205,7 +10901,7 @@
                 <a:ea typeface="Pretendard" pitchFamily="34" charset="-122"/>
                 <a:cs typeface="Pretendard" pitchFamily="34" charset="-120"/>
               </a:rPr>
-              <a:t>2개월 내 착수 가능</a:t>
+              <a:t>테헤란로 프라임 입지의 개발 가치와 용적률 잔여 활용 가능성이 핵심입니다.</a:t>
             </a:r>
             <a:endParaRPr lang="en-US" sz="1100" dirty="0"/>
           </a:p>
@@ -10213,41 +10909,14 @@
       </p:sp>
       <p:sp>
         <p:nvSpPr>
-          <p:cNvPr id="11" name="Shape 9"/>
-          <p:cNvSpPr/>
-          <p:nvPr/>
-        </p:nvSpPr>
-        <p:spPr>
-          <a:xfrm>
-            <a:off x="566928" y="5193792"/>
-            <a:ext cx="11057839" cy="621792"/>
-          </a:xfrm>
-          <a:prstGeom prst="roundRect">
-            <a:avLst>
-              <a:gd name="adj" fmla="val 8824"/>
-            </a:avLst>
-          </a:prstGeom>
-          <a:solidFill>
-            <a:srgbClr val="F7FAFC"/>
-          </a:solidFill>
-          <a:ln w="6350">
-            <a:solidFill>
-              <a:srgbClr val="CBD5E0"/>
-            </a:solidFill>
-            <a:prstDash val="solid"/>
-          </a:ln>
-        </p:spPr>
-      </p:sp>
-      <p:sp>
-        <p:nvSpPr>
-          <p:cNvPr id="12" name="Text 10"/>
-          <p:cNvSpPr/>
-          <p:nvPr/>
-        </p:nvSpPr>
-        <p:spPr>
-          <a:xfrm>
-            <a:off x="795528" y="5193792"/>
-            <a:ext cx="10600639" cy="621792"/>
+          <p:cNvPr id="9" name="Text 7"/>
+          <p:cNvSpPr/>
+          <p:nvPr/>
+        </p:nvSpPr>
+        <p:spPr>
+          <a:xfrm>
+            <a:off x="502920" y="6382512"/>
+            <a:ext cx="7315200" cy="219456"/>
           </a:xfrm>
           <a:prstGeom prst="rect">
             <a:avLst/>
@@ -10263,45 +10932,6 @@
               <a:buNone/>
             </a:pPr>
             <a:r>
-              <a:rPr lang="en-US" sz="1100" dirty="0">
-                <a:solidFill>
-                  <a:srgbClr val="10161F"/>
-                </a:solidFill>
-                <a:latin typeface="Pretendard" pitchFamily="34" charset="0"/>
-                <a:ea typeface="Pretendard" pitchFamily="34" charset="-122"/>
-                <a:cs typeface="Pretendard" pitchFamily="34" charset="-120"/>
-              </a:rPr>
-              <a:t>※ 본 리스크 체크는 공부 및 브로커 확인 기반이며, 매수 전 전문 실사팀(변호사/건축사)을 통한 정밀 실사가 필요합니다.</a:t>
-            </a:r>
-            <a:endParaRPr lang="en-US" sz="1100" dirty="0"/>
-          </a:p>
-        </p:txBody>
-      </p:sp>
-      <p:sp>
-        <p:nvSpPr>
-          <p:cNvPr id="13" name="Text 11"/>
-          <p:cNvSpPr/>
-          <p:nvPr/>
-        </p:nvSpPr>
-        <p:spPr>
-          <a:xfrm>
-            <a:off x="566928" y="6382512"/>
-            <a:ext cx="7315200" cy="219456"/>
-          </a:xfrm>
-          <a:prstGeom prst="rect">
-            <a:avLst/>
-          </a:prstGeom>
-          <a:noFill/>
-          <a:ln/>
-        </p:spPr>
-        <p:txBody>
-          <a:bodyPr wrap="square" lIns="0" tIns="0" rIns="0" bIns="0" rtlCol="0" anchor="ctr"/>
-          <a:lstStyle/>
-          <a:p>
-            <a:pPr indent="0" marL="0">
-              <a:buNone/>
-            </a:pPr>
-            <a:r>
               <a:rPr lang="en-US" sz="800" dirty="0">
                 <a:solidFill>
                   <a:srgbClr val="718096"/>
@@ -10318,13 +10948,13 @@
       </p:sp>
       <p:sp>
         <p:nvSpPr>
-          <p:cNvPr id="14" name="Text 12"/>
-          <p:cNvSpPr/>
-          <p:nvPr/>
-        </p:nvSpPr>
-        <p:spPr>
-          <a:xfrm>
-            <a:off x="10710367" y="6382512"/>
+          <p:cNvPr id="10" name="Text 8"/>
+          <p:cNvSpPr/>
+          <p:nvPr/>
+        </p:nvSpPr>
+        <p:spPr>
+          <a:xfrm>
+            <a:off x="10774375" y="6382512"/>
             <a:ext cx="914400" cy="219456"/>
           </a:xfrm>
           <a:prstGeom prst="rect">
@@ -10395,7 +11025,7 @@
         </p:nvSpPr>
         <p:spPr>
           <a:xfrm>
-            <a:off x="566928" y="457200"/>
+            <a:off x="502920" y="457200"/>
             <a:ext cx="384048" cy="384048"/>
           </a:xfrm>
           <a:prstGeom prst="ellipse">
@@ -10415,7 +11045,7 @@
         </p:nvSpPr>
         <p:spPr>
           <a:xfrm>
-            <a:off x="566928" y="457200"/>
+            <a:off x="502920" y="457200"/>
             <a:ext cx="384048" cy="384048"/>
           </a:xfrm>
           <a:prstGeom prst="rect">
@@ -10454,7 +11084,7 @@
         </p:nvSpPr>
         <p:spPr>
           <a:xfrm>
-            <a:off x="1133856" y="457200"/>
+            <a:off x="1069848" y="457200"/>
             <a:ext cx="10490911" cy="182880"/>
           </a:xfrm>
           <a:prstGeom prst="rect">
@@ -10479,7 +11109,7 @@
                 <a:ea typeface="Arial" pitchFamily="34" charset="-122"/>
                 <a:cs typeface="Arial" pitchFamily="34" charset="-120"/>
               </a:rPr>
-              <a:t>Checklist</a:t>
+              <a:t>Risk</a:t>
             </a:r>
             <a:endParaRPr lang="en-US" sz="950" dirty="0"/>
           </a:p>
@@ -10493,7 +11123,7 @@
         </p:nvSpPr>
         <p:spPr>
           <a:xfrm>
-            <a:off x="1133856" y="640080"/>
+            <a:off x="1069848" y="640080"/>
             <a:ext cx="10490911" cy="365760"/>
           </a:xfrm>
           <a:prstGeom prst="rect">
@@ -10518,7 +11148,7 @@
                 <a:ea typeface="Pretendard" pitchFamily="34" charset="-122"/>
                 <a:cs typeface="Pretendard" pitchFamily="34" charset="-120"/>
               </a:rPr>
-              <a:t>실사 체크리스트</a:t>
+              <a:t>리스크</a:t>
             </a:r>
             <a:endParaRPr lang="en-US" sz="2300" dirty="0"/>
           </a:p>
@@ -10526,63 +11156,26 @@
       </p:sp>
       <p:sp>
         <p:nvSpPr>
-          <p:cNvPr id="6" name="Text 4"/>
-          <p:cNvSpPr/>
-          <p:nvPr/>
-        </p:nvSpPr>
-        <p:spPr>
-          <a:xfrm>
-            <a:off x="566928" y="1371600"/>
-            <a:ext cx="11057839" cy="237744"/>
-          </a:xfrm>
-          <a:prstGeom prst="rect">
-            <a:avLst/>
-          </a:prstGeom>
-          <a:noFill/>
-          <a:ln/>
-        </p:spPr>
-        <p:txBody>
-          <a:bodyPr wrap="square" lIns="0" tIns="0" rIns="0" bIns="0" rtlCol="0" anchor="ctr"/>
-          <a:lstStyle/>
-          <a:p>
-            <a:pPr indent="0" marL="0">
-              <a:buNone/>
-            </a:pPr>
-            <a:r>
-              <a:rPr lang="en-US" sz="1100" b="1" dirty="0">
-                <a:solidFill>
-                  <a:srgbClr val="10161F"/>
-                </a:solidFill>
-                <a:latin typeface="Pretendard" pitchFamily="34" charset="0"/>
-                <a:ea typeface="Pretendard" pitchFamily="34" charset="-122"/>
-                <a:cs typeface="Pretendard" pitchFamily="34" charset="-120"/>
-              </a:rPr>
-              <a:t>거래 안정성 확보를 위한 필수 법률·물리·임대차 실사 점검 항목 (총 6건)</a:t>
-            </a:r>
-            <a:endParaRPr lang="en-US" sz="1100" dirty="0"/>
-          </a:p>
-        </p:txBody>
-      </p:sp>
-      <p:sp>
-        <p:nvSpPr>
-          <p:cNvPr id="7" name="Shape 5"/>
-          <p:cNvSpPr/>
-          <p:nvPr/>
-        </p:nvSpPr>
-        <p:spPr>
-          <a:xfrm>
-            <a:off x="566928" y="1719072"/>
-            <a:ext cx="5368900" cy="868680"/>
-          </a:xfrm>
-          <a:prstGeom prst="rect">
-            <a:avLst/>
+          <p:cNvPr id="6" name="Shape 4"/>
+          <p:cNvSpPr/>
+          <p:nvPr/>
+        </p:nvSpPr>
+        <p:spPr>
+          <a:xfrm>
+            <a:off x="502920" y="1417320"/>
+            <a:ext cx="11057839" cy="3657600"/>
+          </a:xfrm>
+          <a:prstGeom prst="roundRect">
+            <a:avLst>
+              <a:gd name="adj" fmla="val 1500"/>
+            </a:avLst>
           </a:prstGeom>
           <a:solidFill>
             <a:srgbClr val="F7FAFC"/>
           </a:solidFill>
           <a:ln w="6350">
             <a:solidFill>
-              <a:srgbClr val="D9B668"/>
+              <a:srgbClr val="CBD5E0"/>
             </a:solidFill>
             <a:prstDash val="solid"/>
           </a:ln>
@@ -10590,58 +11183,144 @@
       </p:sp>
       <p:sp>
         <p:nvSpPr>
-          <p:cNvPr id="8" name="Shape 6"/>
-          <p:cNvSpPr/>
-          <p:nvPr/>
-        </p:nvSpPr>
-        <p:spPr>
-          <a:xfrm>
-            <a:off x="704088" y="1883664"/>
-            <a:ext cx="320040" cy="320040"/>
+          <p:cNvPr id="7" name="Shape 5"/>
+          <p:cNvSpPr/>
+          <p:nvPr/>
+        </p:nvSpPr>
+        <p:spPr>
+          <a:xfrm>
+            <a:off x="502920" y="1417320"/>
+            <a:ext cx="11057839" cy="45720"/>
           </a:xfrm>
           <a:prstGeom prst="rect">
             <a:avLst/>
           </a:prstGeom>
           <a:solidFill>
-            <a:srgbClr val="977024"/>
+            <a:srgbClr val="B98A2E"/>
           </a:solidFill>
           <a:ln/>
         </p:spPr>
       </p:sp>
       <p:sp>
         <p:nvSpPr>
+          <p:cNvPr id="8" name="Text 6"/>
+          <p:cNvSpPr/>
+          <p:nvPr/>
+        </p:nvSpPr>
+        <p:spPr>
+          <a:xfrm>
+            <a:off x="731520" y="1618488"/>
+            <a:ext cx="10600639" cy="292608"/>
+          </a:xfrm>
+          <a:prstGeom prst="rect">
+            <a:avLst/>
+          </a:prstGeom>
+          <a:noFill/>
+          <a:ln/>
+        </p:spPr>
+        <p:txBody>
+          <a:bodyPr wrap="square" lIns="0" tIns="0" rIns="0" bIns="0" rtlCol="0" anchor="ctr"/>
+          <a:lstStyle/>
+          <a:p>
+            <a:pPr indent="0" marL="0">
+              <a:buNone/>
+            </a:pPr>
+            <a:r>
+              <a:rPr lang="en-US" sz="1350" b="1" dirty="0">
+                <a:solidFill>
+                  <a:srgbClr val="977024"/>
+                </a:solidFill>
+                <a:latin typeface="Pretendard" pitchFamily="34" charset="0"/>
+                <a:ea typeface="Pretendard" pitchFamily="34" charset="-122"/>
+                <a:cs typeface="Pretendard" pitchFamily="34" charset="-120"/>
+              </a:rPr>
+              <a:t>인허가 지연</a:t>
+            </a:r>
+            <a:endParaRPr lang="en-US" sz="1350" dirty="0"/>
+          </a:p>
+        </p:txBody>
+      </p:sp>
+      <p:sp>
+        <p:nvSpPr>
           <p:cNvPr id="9" name="Text 7"/>
           <p:cNvSpPr/>
           <p:nvPr/>
         </p:nvSpPr>
         <p:spPr>
           <a:xfrm>
-            <a:off x="704088" y="1883664"/>
-            <a:ext cx="320040" cy="320040"/>
-          </a:xfrm>
-          <a:prstGeom prst="rect">
-            <a:avLst/>
-          </a:prstGeom>
-          <a:noFill/>
-          <a:ln/>
-        </p:spPr>
-        <p:txBody>
-          <a:bodyPr wrap="square" rtlCol="0" anchor="ctr"/>
-          <a:lstStyle/>
-          <a:p>
-            <a:pPr algn="ctr" indent="0" marL="0">
-              <a:buNone/>
-            </a:pPr>
-            <a:r>
-              <a:rPr lang="en-US" sz="1100" b="1" dirty="0">
-                <a:solidFill>
-                  <a:srgbClr val="000000"/>
-                </a:solidFill>
-                <a:latin typeface="Pretendard" pitchFamily="34" charset="0"/>
-                <a:ea typeface="Pretendard" pitchFamily="34" charset="-122"/>
-                <a:cs typeface="Pretendard" pitchFamily="34" charset="-120"/>
-              </a:rPr>
-              <a:t>✓</a:t>
+            <a:off x="731520" y="1947672"/>
+            <a:ext cx="10600639" cy="365760"/>
+          </a:xfrm>
+          <a:prstGeom prst="rect">
+            <a:avLst/>
+          </a:prstGeom>
+          <a:noFill/>
+          <a:ln/>
+        </p:spPr>
+        <p:txBody>
+          <a:bodyPr wrap="square" lIns="0" tIns="0" rIns="0" bIns="0" rtlCol="0" anchor="ctr">
+            <a:normAutofit/>
+          </a:bodyPr>
+          <a:lstStyle/>
+          <a:p>
+            <a:pPr indent="0" marL="0">
+              <a:buNone/>
+            </a:pPr>
+            <a:r>
+              <a:rPr lang="en-US" sz="1250" b="1" dirty="0">
+                <a:solidFill>
+                  <a:srgbClr val="10161F"/>
+                </a:solidFill>
+                <a:latin typeface="Pretendard" pitchFamily="34" charset="0"/>
+                <a:ea typeface="Pretendard" pitchFamily="34" charset="-122"/>
+                <a:cs typeface="Pretendard" pitchFamily="34" charset="-120"/>
+              </a:rPr>
+              <a:t>사전협의 완료</a:t>
+            </a:r>
+            <a:endParaRPr lang="en-US" sz="1250" dirty="0"/>
+          </a:p>
+        </p:txBody>
+      </p:sp>
+      <p:sp>
+        <p:nvSpPr>
+          <p:cNvPr id="10" name="Text 8"/>
+          <p:cNvSpPr/>
+          <p:nvPr/>
+        </p:nvSpPr>
+        <p:spPr>
+          <a:xfrm>
+            <a:off x="731520" y="2377440"/>
+            <a:ext cx="10600639" cy="2606040"/>
+          </a:xfrm>
+          <a:prstGeom prst="rect">
+            <a:avLst/>
+          </a:prstGeom>
+          <a:noFill/>
+          <a:ln/>
+        </p:spPr>
+        <p:txBody>
+          <a:bodyPr wrap="square" lIns="0" tIns="0" rIns="0" bIns="0" rtlCol="0" anchor="t">
+            <a:normAutofit/>
+          </a:bodyPr>
+          <a:lstStyle/>
+          <a:p>
+            <a:pPr marL="342900" indent="-342900">
+              <a:lnSpc>
+                <a:spcPct val="115000"/>
+              </a:lnSpc>
+              <a:buSzPct val="100000"/>
+              <a:buChar char="•"/>
+            </a:pPr>
+            <a:r>
+              <a:rPr lang="en-US" sz="1100" dirty="0">
+                <a:solidFill>
+                  <a:srgbClr val="10161F"/>
+                </a:solidFill>
+                <a:latin typeface="Pretendard" pitchFamily="34" charset="0"/>
+                <a:ea typeface="Pretendard" pitchFamily="34" charset="-122"/>
+                <a:cs typeface="Pretendard" pitchFamily="34" charset="-120"/>
+              </a:rPr>
+              <a:t>2개월 내 착수 가능</a:t>
             </a:r>
             <a:endParaRPr lang="en-US" sz="1100" dirty="0"/>
           </a:p>
@@ -10649,66 +11328,26 @@
       </p:sp>
       <p:sp>
         <p:nvSpPr>
-          <p:cNvPr id="10" name="Text 8"/>
-          <p:cNvSpPr/>
-          <p:nvPr/>
-        </p:nvSpPr>
-        <p:spPr>
-          <a:xfrm>
-            <a:off x="1115568" y="1810512"/>
-            <a:ext cx="4683100" cy="722376"/>
-          </a:xfrm>
-          <a:prstGeom prst="rect">
-            <a:avLst/>
-          </a:prstGeom>
-          <a:noFill/>
-          <a:ln/>
-        </p:spPr>
-        <p:txBody>
-          <a:bodyPr wrap="square" rtlCol="0" anchor="ctr"/>
-          <a:lstStyle/>
-          <a:p>
-            <a:pPr indent="0" marL="0">
-              <a:lnSpc>
-                <a:spcPct val="110000"/>
-              </a:lnSpc>
-              <a:buNone/>
-            </a:pPr>
-            <a:r>
-              <a:rPr lang="en-US" sz="950" dirty="0">
-                <a:solidFill>
-                  <a:srgbClr val="10161F"/>
-                </a:solidFill>
-                <a:latin typeface="Pretendard" pitchFamily="34" charset="0"/>
-                <a:ea typeface="Pretendard" pitchFamily="34" charset="-122"/>
-                <a:cs typeface="Pretendard" pitchFamily="34" charset="-120"/>
-              </a:rPr>
-              <a:t>등기부등본 갑구/을구 권리관계 및 근저당 채권최고액 전액 말소 조건 원본 대조</a:t>
-            </a:r>
-            <a:endParaRPr lang="en-US" sz="950" dirty="0"/>
-          </a:p>
-        </p:txBody>
-      </p:sp>
-      <p:sp>
-        <p:nvSpPr>
           <p:cNvPr id="11" name="Shape 9"/>
           <p:cNvSpPr/>
           <p:nvPr/>
         </p:nvSpPr>
         <p:spPr>
           <a:xfrm>
-            <a:off x="566928" y="2715768"/>
-            <a:ext cx="5368900" cy="868680"/>
-          </a:xfrm>
-          <a:prstGeom prst="rect">
-            <a:avLst/>
+            <a:off x="502920" y="5193792"/>
+            <a:ext cx="11057839" cy="621792"/>
+          </a:xfrm>
+          <a:prstGeom prst="roundRect">
+            <a:avLst>
+              <a:gd name="adj" fmla="val 8824"/>
+            </a:avLst>
           </a:prstGeom>
           <a:solidFill>
             <a:srgbClr val="F7FAFC"/>
           </a:solidFill>
           <a:ln w="6350">
             <a:solidFill>
-              <a:srgbClr val="D9B668"/>
+              <a:srgbClr val="CBD5E0"/>
             </a:solidFill>
             <a:prstDash val="solid"/>
           </a:ln>
@@ -10716,23 +11355,42 @@
       </p:sp>
       <p:sp>
         <p:nvSpPr>
-          <p:cNvPr id="12" name="Shape 10"/>
-          <p:cNvSpPr/>
-          <p:nvPr/>
-        </p:nvSpPr>
-        <p:spPr>
-          <a:xfrm>
-            <a:off x="704088" y="2880360"/>
-            <a:ext cx="320040" cy="320040"/>
-          </a:xfrm>
-          <a:prstGeom prst="rect">
-            <a:avLst/>
-          </a:prstGeom>
-          <a:solidFill>
-            <a:srgbClr val="977024"/>
-          </a:solidFill>
-          <a:ln/>
-        </p:spPr>
+          <p:cNvPr id="12" name="Text 10"/>
+          <p:cNvSpPr/>
+          <p:nvPr/>
+        </p:nvSpPr>
+        <p:spPr>
+          <a:xfrm>
+            <a:off x="731520" y="5193792"/>
+            <a:ext cx="10600639" cy="621792"/>
+          </a:xfrm>
+          <a:prstGeom prst="rect">
+            <a:avLst/>
+          </a:prstGeom>
+          <a:noFill/>
+          <a:ln/>
+        </p:spPr>
+        <p:txBody>
+          <a:bodyPr wrap="square" lIns="0" tIns="0" rIns="0" bIns="0" rtlCol="0" anchor="ctr"/>
+          <a:lstStyle/>
+          <a:p>
+            <a:pPr indent="0" marL="0">
+              <a:buNone/>
+            </a:pPr>
+            <a:r>
+              <a:rPr lang="en-US" sz="1100" dirty="0">
+                <a:solidFill>
+                  <a:srgbClr val="10161F"/>
+                </a:solidFill>
+                <a:latin typeface="Pretendard" pitchFamily="34" charset="0"/>
+                <a:ea typeface="Pretendard" pitchFamily="34" charset="-122"/>
+                <a:cs typeface="Pretendard" pitchFamily="34" charset="-120"/>
+              </a:rPr>
+              <a:t>※ 본 리스크 체크는 공부 및 브로커 확인 기반이며, 매수 전 전문 실사팀(변호사/건축사)을 통한 정밀 실사가 필요합니다.</a:t>
+            </a:r>
+            <a:endParaRPr lang="en-US" sz="1100" dirty="0"/>
+          </a:p>
+        </p:txBody>
       </p:sp>
       <p:sp>
         <p:nvSpPr>
@@ -10742,34 +11400,34 @@
         </p:nvSpPr>
         <p:spPr>
           <a:xfrm>
-            <a:off x="704088" y="2880360"/>
-            <a:ext cx="320040" cy="320040"/>
-          </a:xfrm>
-          <a:prstGeom prst="rect">
-            <a:avLst/>
-          </a:prstGeom>
-          <a:noFill/>
-          <a:ln/>
-        </p:spPr>
-        <p:txBody>
-          <a:bodyPr wrap="square" rtlCol="0" anchor="ctr"/>
-          <a:lstStyle/>
-          <a:p>
-            <a:pPr algn="ctr" indent="0" marL="0">
-              <a:buNone/>
-            </a:pPr>
-            <a:r>
-              <a:rPr lang="en-US" sz="1100" b="1" dirty="0">
-                <a:solidFill>
-                  <a:srgbClr val="000000"/>
-                </a:solidFill>
-                <a:latin typeface="Pretendard" pitchFamily="34" charset="0"/>
-                <a:ea typeface="Pretendard" pitchFamily="34" charset="-122"/>
-                <a:cs typeface="Pretendard" pitchFamily="34" charset="-120"/>
-              </a:rPr>
-              <a:t>✓</a:t>
-            </a:r>
-            <a:endParaRPr lang="en-US" sz="1100" dirty="0"/>
+            <a:off x="502920" y="6382512"/>
+            <a:ext cx="7315200" cy="219456"/>
+          </a:xfrm>
+          <a:prstGeom prst="rect">
+            <a:avLst/>
+          </a:prstGeom>
+          <a:noFill/>
+          <a:ln/>
+        </p:spPr>
+        <p:txBody>
+          <a:bodyPr wrap="square" lIns="0" tIns="0" rIns="0" bIns="0" rtlCol="0" anchor="ctr"/>
+          <a:lstStyle/>
+          <a:p>
+            <a:pPr indent="0" marL="0">
+              <a:buNone/>
+            </a:pPr>
+            <a:r>
+              <a:rPr lang="en-US" sz="800" dirty="0">
+                <a:solidFill>
+                  <a:srgbClr val="718096"/>
+                </a:solidFill>
+                <a:latin typeface="Pretendard" pitchFamily="34" charset="0"/>
+                <a:ea typeface="Pretendard" pitchFamily="34" charset="-122"/>
+                <a:cs typeface="Pretendard" pitchFamily="34" charset="-120"/>
+              </a:rPr>
+              <a:t>크리딜   |   </a:t>
+            </a:r>
+            <a:endParaRPr lang="en-US" sz="800" dirty="0"/>
           </a:p>
         </p:txBody>
       </p:sp>
@@ -10781,651 +11439,7 @@
         </p:nvSpPr>
         <p:spPr>
           <a:xfrm>
-            <a:off x="1115568" y="2807208"/>
-            <a:ext cx="4683100" cy="722376"/>
-          </a:xfrm>
-          <a:prstGeom prst="rect">
-            <a:avLst/>
-          </a:prstGeom>
-          <a:noFill/>
-          <a:ln/>
-        </p:spPr>
-        <p:txBody>
-          <a:bodyPr wrap="square" rtlCol="0" anchor="ctr"/>
-          <a:lstStyle/>
-          <a:p>
-            <a:pPr indent="0" marL="0">
-              <a:lnSpc>
-                <a:spcPct val="110000"/>
-              </a:lnSpc>
-              <a:buNone/>
-            </a:pPr>
-            <a:r>
-              <a:rPr lang="en-US" sz="950" dirty="0">
-                <a:solidFill>
-                  <a:srgbClr val="10161F"/>
-                </a:solidFill>
-                <a:latin typeface="Pretendard" pitchFamily="34" charset="0"/>
-                <a:ea typeface="Pretendard" pitchFamily="34" charset="-122"/>
-                <a:cs typeface="Pretendard" pitchFamily="34" charset="-120"/>
-              </a:rPr>
-              <a:t>임대차 원본 계약서 대조 (보증금, 월임대료, 관리비 실입금 내역 및 제소전화해조서)</a:t>
-            </a:r>
-            <a:endParaRPr lang="en-US" sz="950" dirty="0"/>
-          </a:p>
-        </p:txBody>
-      </p:sp>
-      <p:sp>
-        <p:nvSpPr>
-          <p:cNvPr id="15" name="Shape 13"/>
-          <p:cNvSpPr/>
-          <p:nvPr/>
-        </p:nvSpPr>
-        <p:spPr>
-          <a:xfrm>
-            <a:off x="566928" y="3712464"/>
-            <a:ext cx="5368900" cy="868680"/>
-          </a:xfrm>
-          <a:prstGeom prst="rect">
-            <a:avLst/>
-          </a:prstGeom>
-          <a:solidFill>
-            <a:srgbClr val="F7FAFC"/>
-          </a:solidFill>
-          <a:ln w="6350">
-            <a:solidFill>
-              <a:srgbClr val="D9B668"/>
-            </a:solidFill>
-            <a:prstDash val="solid"/>
-          </a:ln>
-        </p:spPr>
-      </p:sp>
-      <p:sp>
-        <p:nvSpPr>
-          <p:cNvPr id="16" name="Shape 14"/>
-          <p:cNvSpPr/>
-          <p:nvPr/>
-        </p:nvSpPr>
-        <p:spPr>
-          <a:xfrm>
-            <a:off x="704088" y="3877056"/>
-            <a:ext cx="320040" cy="320040"/>
-          </a:xfrm>
-          <a:prstGeom prst="rect">
-            <a:avLst/>
-          </a:prstGeom>
-          <a:solidFill>
-            <a:srgbClr val="977024"/>
-          </a:solidFill>
-          <a:ln/>
-        </p:spPr>
-      </p:sp>
-      <p:sp>
-        <p:nvSpPr>
-          <p:cNvPr id="17" name="Text 15"/>
-          <p:cNvSpPr/>
-          <p:nvPr/>
-        </p:nvSpPr>
-        <p:spPr>
-          <a:xfrm>
-            <a:off x="704088" y="3877056"/>
-            <a:ext cx="320040" cy="320040"/>
-          </a:xfrm>
-          <a:prstGeom prst="rect">
-            <a:avLst/>
-          </a:prstGeom>
-          <a:noFill/>
-          <a:ln/>
-        </p:spPr>
-        <p:txBody>
-          <a:bodyPr wrap="square" rtlCol="0" anchor="ctr"/>
-          <a:lstStyle/>
-          <a:p>
-            <a:pPr algn="ctr" indent="0" marL="0">
-              <a:buNone/>
-            </a:pPr>
-            <a:r>
-              <a:rPr lang="en-US" sz="1100" b="1" dirty="0">
-                <a:solidFill>
-                  <a:srgbClr val="000000"/>
-                </a:solidFill>
-                <a:latin typeface="Pretendard" pitchFamily="34" charset="0"/>
-                <a:ea typeface="Pretendard" pitchFamily="34" charset="-122"/>
-                <a:cs typeface="Pretendard" pitchFamily="34" charset="-120"/>
-              </a:rPr>
-              <a:t>✓</a:t>
-            </a:r>
-            <a:endParaRPr lang="en-US" sz="1100" dirty="0"/>
-          </a:p>
-        </p:txBody>
-      </p:sp>
-      <p:sp>
-        <p:nvSpPr>
-          <p:cNvPr id="18" name="Text 16"/>
-          <p:cNvSpPr/>
-          <p:nvPr/>
-        </p:nvSpPr>
-        <p:spPr>
-          <a:xfrm>
-            <a:off x="1115568" y="3803904"/>
-            <a:ext cx="4683100" cy="722376"/>
-          </a:xfrm>
-          <a:prstGeom prst="rect">
-            <a:avLst/>
-          </a:prstGeom>
-          <a:noFill/>
-          <a:ln/>
-        </p:spPr>
-        <p:txBody>
-          <a:bodyPr wrap="square" rtlCol="0" anchor="ctr"/>
-          <a:lstStyle/>
-          <a:p>
-            <a:pPr indent="0" marL="0">
-              <a:lnSpc>
-                <a:spcPct val="110000"/>
-              </a:lnSpc>
-              <a:buNone/>
-            </a:pPr>
-            <a:r>
-              <a:rPr lang="en-US" sz="950" dirty="0">
-                <a:solidFill>
-                  <a:srgbClr val="10161F"/>
-                </a:solidFill>
-                <a:latin typeface="Pretendard" pitchFamily="34" charset="0"/>
-                <a:ea typeface="Pretendard" pitchFamily="34" charset="-122"/>
-                <a:cs typeface="Pretendard" pitchFamily="34" charset="-120"/>
-              </a:rPr>
-              <a:t>건축물대장상 위반건축물 등재 여부 및 불법 증축·용도변경 이행강제금 납부 이력 점검</a:t>
-            </a:r>
-            <a:endParaRPr lang="en-US" sz="950" dirty="0"/>
-          </a:p>
-        </p:txBody>
-      </p:sp>
-      <p:sp>
-        <p:nvSpPr>
-          <p:cNvPr id="19" name="Shape 17"/>
-          <p:cNvSpPr/>
-          <p:nvPr/>
-        </p:nvSpPr>
-        <p:spPr>
-          <a:xfrm>
-            <a:off x="6255868" y="1719072"/>
-            <a:ext cx="5368900" cy="868680"/>
-          </a:xfrm>
-          <a:prstGeom prst="rect">
-            <a:avLst/>
-          </a:prstGeom>
-          <a:solidFill>
-            <a:srgbClr val="F7FAFC"/>
-          </a:solidFill>
-          <a:ln w="6350">
-            <a:solidFill>
-              <a:srgbClr val="D9B668"/>
-            </a:solidFill>
-            <a:prstDash val="solid"/>
-          </a:ln>
-        </p:spPr>
-      </p:sp>
-      <p:sp>
-        <p:nvSpPr>
-          <p:cNvPr id="20" name="Shape 18"/>
-          <p:cNvSpPr/>
-          <p:nvPr/>
-        </p:nvSpPr>
-        <p:spPr>
-          <a:xfrm>
-            <a:off x="6393028" y="1883664"/>
-            <a:ext cx="320040" cy="320040"/>
-          </a:xfrm>
-          <a:prstGeom prst="rect">
-            <a:avLst/>
-          </a:prstGeom>
-          <a:solidFill>
-            <a:srgbClr val="977024"/>
-          </a:solidFill>
-          <a:ln/>
-        </p:spPr>
-      </p:sp>
-      <p:sp>
-        <p:nvSpPr>
-          <p:cNvPr id="21" name="Text 19"/>
-          <p:cNvSpPr/>
-          <p:nvPr/>
-        </p:nvSpPr>
-        <p:spPr>
-          <a:xfrm>
-            <a:off x="6393028" y="1883664"/>
-            <a:ext cx="320040" cy="320040"/>
-          </a:xfrm>
-          <a:prstGeom prst="rect">
-            <a:avLst/>
-          </a:prstGeom>
-          <a:noFill/>
-          <a:ln/>
-        </p:spPr>
-        <p:txBody>
-          <a:bodyPr wrap="square" rtlCol="0" anchor="ctr"/>
-          <a:lstStyle/>
-          <a:p>
-            <a:pPr algn="ctr" indent="0" marL="0">
-              <a:buNone/>
-            </a:pPr>
-            <a:r>
-              <a:rPr lang="en-US" sz="1100" b="1" dirty="0">
-                <a:solidFill>
-                  <a:srgbClr val="000000"/>
-                </a:solidFill>
-                <a:latin typeface="Pretendard" pitchFamily="34" charset="0"/>
-                <a:ea typeface="Pretendard" pitchFamily="34" charset="-122"/>
-                <a:cs typeface="Pretendard" pitchFamily="34" charset="-120"/>
-              </a:rPr>
-              <a:t>✓</a:t>
-            </a:r>
-            <a:endParaRPr lang="en-US" sz="1100" dirty="0"/>
-          </a:p>
-        </p:txBody>
-      </p:sp>
-      <p:sp>
-        <p:nvSpPr>
-          <p:cNvPr id="22" name="Text 20"/>
-          <p:cNvSpPr/>
-          <p:nvPr/>
-        </p:nvSpPr>
-        <p:spPr>
-          <a:xfrm>
-            <a:off x="6804508" y="1810512"/>
-            <a:ext cx="4683100" cy="722376"/>
-          </a:xfrm>
-          <a:prstGeom prst="rect">
-            <a:avLst/>
-          </a:prstGeom>
-          <a:noFill/>
-          <a:ln/>
-        </p:spPr>
-        <p:txBody>
-          <a:bodyPr wrap="square" rtlCol="0" anchor="ctr"/>
-          <a:lstStyle/>
-          <a:p>
-            <a:pPr indent="0" marL="0">
-              <a:lnSpc>
-                <a:spcPct val="110000"/>
-              </a:lnSpc>
-              <a:buNone/>
-            </a:pPr>
-            <a:r>
-              <a:rPr lang="en-US" sz="950" dirty="0">
-                <a:solidFill>
-                  <a:srgbClr val="10161F"/>
-                </a:solidFill>
-                <a:latin typeface="Pretendard" pitchFamily="34" charset="0"/>
-                <a:ea typeface="Pretendard" pitchFamily="34" charset="-122"/>
-                <a:cs typeface="Pretendard" pitchFamily="34" charset="-120"/>
-              </a:rPr>
-              <a:t>토지이용계획확인원상 도시계획시설 저촉, 건축선 후퇴, 지구단위계획 특별계획구역 확인</a:t>
-            </a:r>
-            <a:endParaRPr lang="en-US" sz="950" dirty="0"/>
-          </a:p>
-        </p:txBody>
-      </p:sp>
-      <p:sp>
-        <p:nvSpPr>
-          <p:cNvPr id="23" name="Shape 21"/>
-          <p:cNvSpPr/>
-          <p:nvPr/>
-        </p:nvSpPr>
-        <p:spPr>
-          <a:xfrm>
-            <a:off x="6255868" y="2715768"/>
-            <a:ext cx="5368900" cy="868680"/>
-          </a:xfrm>
-          <a:prstGeom prst="rect">
-            <a:avLst/>
-          </a:prstGeom>
-          <a:solidFill>
-            <a:srgbClr val="F7FAFC"/>
-          </a:solidFill>
-          <a:ln w="6350">
-            <a:solidFill>
-              <a:srgbClr val="D9B668"/>
-            </a:solidFill>
-            <a:prstDash val="solid"/>
-          </a:ln>
-        </p:spPr>
-      </p:sp>
-      <p:sp>
-        <p:nvSpPr>
-          <p:cNvPr id="24" name="Shape 22"/>
-          <p:cNvSpPr/>
-          <p:nvPr/>
-        </p:nvSpPr>
-        <p:spPr>
-          <a:xfrm>
-            <a:off x="6393028" y="2880360"/>
-            <a:ext cx="320040" cy="320040"/>
-          </a:xfrm>
-          <a:prstGeom prst="rect">
-            <a:avLst/>
-          </a:prstGeom>
-          <a:solidFill>
-            <a:srgbClr val="977024"/>
-          </a:solidFill>
-          <a:ln/>
-        </p:spPr>
-      </p:sp>
-      <p:sp>
-        <p:nvSpPr>
-          <p:cNvPr id="25" name="Text 23"/>
-          <p:cNvSpPr/>
-          <p:nvPr/>
-        </p:nvSpPr>
-        <p:spPr>
-          <a:xfrm>
-            <a:off x="6393028" y="2880360"/>
-            <a:ext cx="320040" cy="320040"/>
-          </a:xfrm>
-          <a:prstGeom prst="rect">
-            <a:avLst/>
-          </a:prstGeom>
-          <a:noFill/>
-          <a:ln/>
-        </p:spPr>
-        <p:txBody>
-          <a:bodyPr wrap="square" rtlCol="0" anchor="ctr"/>
-          <a:lstStyle/>
-          <a:p>
-            <a:pPr algn="ctr" indent="0" marL="0">
-              <a:buNone/>
-            </a:pPr>
-            <a:r>
-              <a:rPr lang="en-US" sz="1100" b="1" dirty="0">
-                <a:solidFill>
-                  <a:srgbClr val="000000"/>
-                </a:solidFill>
-                <a:latin typeface="Pretendard" pitchFamily="34" charset="0"/>
-                <a:ea typeface="Pretendard" pitchFamily="34" charset="-122"/>
-                <a:cs typeface="Pretendard" pitchFamily="34" charset="-120"/>
-              </a:rPr>
-              <a:t>✓</a:t>
-            </a:r>
-            <a:endParaRPr lang="en-US" sz="1100" dirty="0"/>
-          </a:p>
-        </p:txBody>
-      </p:sp>
-      <p:sp>
-        <p:nvSpPr>
-          <p:cNvPr id="26" name="Text 24"/>
-          <p:cNvSpPr/>
-          <p:nvPr/>
-        </p:nvSpPr>
-        <p:spPr>
-          <a:xfrm>
-            <a:off x="6804508" y="2807208"/>
-            <a:ext cx="4683100" cy="722376"/>
-          </a:xfrm>
-          <a:prstGeom prst="rect">
-            <a:avLst/>
-          </a:prstGeom>
-          <a:noFill/>
-          <a:ln/>
-        </p:spPr>
-        <p:txBody>
-          <a:bodyPr wrap="square" rtlCol="0" anchor="ctr"/>
-          <a:lstStyle/>
-          <a:p>
-            <a:pPr indent="0" marL="0">
-              <a:lnSpc>
-                <a:spcPct val="110000"/>
-              </a:lnSpc>
-              <a:buNone/>
-            </a:pPr>
-            <a:r>
-              <a:rPr lang="en-US" sz="950" dirty="0">
-                <a:solidFill>
-                  <a:srgbClr val="10161F"/>
-                </a:solidFill>
-                <a:latin typeface="Pretendard" pitchFamily="34" charset="0"/>
-                <a:ea typeface="Pretendard" pitchFamily="34" charset="-122"/>
-                <a:cs typeface="Pretendard" pitchFamily="34" charset="-120"/>
-              </a:rPr>
-              <a:t>기계식 주차기 정기 안전점검 합격증, 승강기 검사필증, 소방 완비증명서 실물 실사</a:t>
-            </a:r>
-            <a:endParaRPr lang="en-US" sz="950" dirty="0"/>
-          </a:p>
-        </p:txBody>
-      </p:sp>
-      <p:sp>
-        <p:nvSpPr>
-          <p:cNvPr id="27" name="Shape 25"/>
-          <p:cNvSpPr/>
-          <p:nvPr/>
-        </p:nvSpPr>
-        <p:spPr>
-          <a:xfrm>
-            <a:off x="6255868" y="3712464"/>
-            <a:ext cx="5368900" cy="868680"/>
-          </a:xfrm>
-          <a:prstGeom prst="rect">
-            <a:avLst/>
-          </a:prstGeom>
-          <a:solidFill>
-            <a:srgbClr val="F7FAFC"/>
-          </a:solidFill>
-          <a:ln w="6350">
-            <a:solidFill>
-              <a:srgbClr val="D9B668"/>
-            </a:solidFill>
-            <a:prstDash val="solid"/>
-          </a:ln>
-        </p:spPr>
-      </p:sp>
-      <p:sp>
-        <p:nvSpPr>
-          <p:cNvPr id="28" name="Shape 26"/>
-          <p:cNvSpPr/>
-          <p:nvPr/>
-        </p:nvSpPr>
-        <p:spPr>
-          <a:xfrm>
-            <a:off x="6393028" y="3877056"/>
-            <a:ext cx="320040" cy="320040"/>
-          </a:xfrm>
-          <a:prstGeom prst="rect">
-            <a:avLst/>
-          </a:prstGeom>
-          <a:solidFill>
-            <a:srgbClr val="977024"/>
-          </a:solidFill>
-          <a:ln/>
-        </p:spPr>
-      </p:sp>
-      <p:sp>
-        <p:nvSpPr>
-          <p:cNvPr id="29" name="Text 27"/>
-          <p:cNvSpPr/>
-          <p:nvPr/>
-        </p:nvSpPr>
-        <p:spPr>
-          <a:xfrm>
-            <a:off x="6393028" y="3877056"/>
-            <a:ext cx="320040" cy="320040"/>
-          </a:xfrm>
-          <a:prstGeom prst="rect">
-            <a:avLst/>
-          </a:prstGeom>
-          <a:noFill/>
-          <a:ln/>
-        </p:spPr>
-        <p:txBody>
-          <a:bodyPr wrap="square" rtlCol="0" anchor="ctr"/>
-          <a:lstStyle/>
-          <a:p>
-            <a:pPr algn="ctr" indent="0" marL="0">
-              <a:buNone/>
-            </a:pPr>
-            <a:r>
-              <a:rPr lang="en-US" sz="1100" b="1" dirty="0">
-                <a:solidFill>
-                  <a:srgbClr val="000000"/>
-                </a:solidFill>
-                <a:latin typeface="Pretendard" pitchFamily="34" charset="0"/>
-                <a:ea typeface="Pretendard" pitchFamily="34" charset="-122"/>
-                <a:cs typeface="Pretendard" pitchFamily="34" charset="-120"/>
-              </a:rPr>
-              <a:t>✓</a:t>
-            </a:r>
-            <a:endParaRPr lang="en-US" sz="1100" dirty="0"/>
-          </a:p>
-        </p:txBody>
-      </p:sp>
-      <p:sp>
-        <p:nvSpPr>
-          <p:cNvPr id="30" name="Text 28"/>
-          <p:cNvSpPr/>
-          <p:nvPr/>
-        </p:nvSpPr>
-        <p:spPr>
-          <a:xfrm>
-            <a:off x="6804508" y="3803904"/>
-            <a:ext cx="4683100" cy="722376"/>
-          </a:xfrm>
-          <a:prstGeom prst="rect">
-            <a:avLst/>
-          </a:prstGeom>
-          <a:noFill/>
-          <a:ln/>
-        </p:spPr>
-        <p:txBody>
-          <a:bodyPr wrap="square" rtlCol="0" anchor="ctr"/>
-          <a:lstStyle/>
-          <a:p>
-            <a:pPr indent="0" marL="0">
-              <a:lnSpc>
-                <a:spcPct val="110000"/>
-              </a:lnSpc>
-              <a:buNone/>
-            </a:pPr>
-            <a:r>
-              <a:rPr lang="en-US" sz="950" dirty="0">
-                <a:solidFill>
-                  <a:srgbClr val="10161F"/>
-                </a:solidFill>
-                <a:latin typeface="Pretendard" pitchFamily="34" charset="0"/>
-                <a:ea typeface="Pretendard" pitchFamily="34" charset="-122"/>
-                <a:cs typeface="Pretendard" pitchFamily="34" charset="-120"/>
-              </a:rPr>
-              <a:t>정화조 용량 대비 현 업종 적합성 및 하수도 원인자부담금 추가 부과 대상 여부 확인</a:t>
-            </a:r>
-            <a:endParaRPr lang="en-US" sz="950" dirty="0"/>
-          </a:p>
-        </p:txBody>
-      </p:sp>
-      <p:sp>
-        <p:nvSpPr>
-          <p:cNvPr id="31" name="Shape 29"/>
-          <p:cNvSpPr/>
-          <p:nvPr/>
-        </p:nvSpPr>
-        <p:spPr>
-          <a:xfrm>
-            <a:off x="566928" y="5760720"/>
-            <a:ext cx="11057839" cy="594360"/>
-          </a:xfrm>
-          <a:prstGeom prst="rect">
-            <a:avLst/>
-          </a:prstGeom>
-          <a:solidFill>
-            <a:srgbClr val="D9B668"/>
-          </a:solidFill>
-          <a:ln/>
-        </p:spPr>
-      </p:sp>
-      <p:sp>
-        <p:nvSpPr>
-          <p:cNvPr id="32" name="Text 30"/>
-          <p:cNvSpPr/>
-          <p:nvPr/>
-        </p:nvSpPr>
-        <p:spPr>
-          <a:xfrm>
-            <a:off x="749808" y="5833872"/>
-            <a:ext cx="10692079" cy="448056"/>
-          </a:xfrm>
-          <a:prstGeom prst="rect">
-            <a:avLst/>
-          </a:prstGeom>
-          <a:noFill/>
-          <a:ln/>
-        </p:spPr>
-        <p:txBody>
-          <a:bodyPr wrap="square" rtlCol="0" anchor="ctr"/>
-          <a:lstStyle/>
-          <a:p>
-            <a:pPr indent="0" marL="0">
-              <a:buNone/>
-            </a:pPr>
-            <a:r>
-              <a:rPr lang="en-US" sz="950" b="1" dirty="0">
-                <a:solidFill>
-                  <a:srgbClr val="977024"/>
-                </a:solidFill>
-                <a:latin typeface="Pretendard" pitchFamily="34" charset="0"/>
-                <a:ea typeface="Pretendard" pitchFamily="34" charset="-122"/>
-                <a:cs typeface="Pretendard" pitchFamily="34" charset="-120"/>
-              </a:rPr>
-              <a:t>※ 본 체크리스트는 계약 전 매수인의 안전한 자산 인수를 위한 필수 확인 사항이며, 실사(Due Diligence) 결과에 따라 매매 조건 및 잔금 일정이 조정될 수 있습니다.</a:t>
-            </a:r>
-            <a:endParaRPr lang="en-US" sz="950" dirty="0"/>
-          </a:p>
-        </p:txBody>
-      </p:sp>
-      <p:sp>
-        <p:nvSpPr>
-          <p:cNvPr id="33" name="Text 31"/>
-          <p:cNvSpPr/>
-          <p:nvPr/>
-        </p:nvSpPr>
-        <p:spPr>
-          <a:xfrm>
-            <a:off x="566928" y="6382512"/>
-            <a:ext cx="7315200" cy="219456"/>
-          </a:xfrm>
-          <a:prstGeom prst="rect">
-            <a:avLst/>
-          </a:prstGeom>
-          <a:noFill/>
-          <a:ln/>
-        </p:spPr>
-        <p:txBody>
-          <a:bodyPr wrap="square" lIns="0" tIns="0" rIns="0" bIns="0" rtlCol="0" anchor="ctr"/>
-          <a:lstStyle/>
-          <a:p>
-            <a:pPr indent="0" marL="0">
-              <a:buNone/>
-            </a:pPr>
-            <a:r>
-              <a:rPr lang="en-US" sz="800" dirty="0">
-                <a:solidFill>
-                  <a:srgbClr val="718096"/>
-                </a:solidFill>
-                <a:latin typeface="Pretendard" pitchFamily="34" charset="0"/>
-                <a:ea typeface="Pretendard" pitchFamily="34" charset="-122"/>
-                <a:cs typeface="Pretendard" pitchFamily="34" charset="-120"/>
-              </a:rPr>
-              <a:t>크리딜   |   </a:t>
-            </a:r>
-            <a:endParaRPr lang="en-US" sz="800" dirty="0"/>
-          </a:p>
-        </p:txBody>
-      </p:sp>
-      <p:sp>
-        <p:nvSpPr>
-          <p:cNvPr id="34" name="Text 32"/>
-          <p:cNvSpPr/>
-          <p:nvPr/>
-        </p:nvSpPr>
-        <p:spPr>
-          <a:xfrm>
-            <a:off x="10710367" y="6382512"/>
+            <a:off x="10774375" y="6382512"/>
             <a:ext cx="914400" cy="219456"/>
           </a:xfrm>
           <a:prstGeom prst="rect">
@@ -11496,7 +11510,7 @@
         </p:nvSpPr>
         <p:spPr>
           <a:xfrm>
-            <a:off x="566928" y="457200"/>
+            <a:off x="502920" y="457200"/>
             <a:ext cx="384048" cy="384048"/>
           </a:xfrm>
           <a:prstGeom prst="ellipse">
@@ -11516,7 +11530,7 @@
         </p:nvSpPr>
         <p:spPr>
           <a:xfrm>
-            <a:off x="566928" y="457200"/>
+            <a:off x="502920" y="457200"/>
             <a:ext cx="384048" cy="384048"/>
           </a:xfrm>
           <a:prstGeom prst="rect">
@@ -11555,7 +11569,7 @@
         </p:nvSpPr>
         <p:spPr>
           <a:xfrm>
-            <a:off x="1133856" y="457200"/>
+            <a:off x="1069848" y="457200"/>
             <a:ext cx="10490911" cy="182880"/>
           </a:xfrm>
           <a:prstGeom prst="rect">
@@ -11580,7 +11594,7 @@
                 <a:ea typeface="Arial" pitchFamily="34" charset="-122"/>
                 <a:cs typeface="Arial" pitchFamily="34" charset="-120"/>
               </a:rPr>
-              <a:t>Process</a:t>
+              <a:t>Checklist</a:t>
             </a:r>
             <a:endParaRPr lang="en-US" sz="950" dirty="0"/>
           </a:p>
@@ -11594,7 +11608,7 @@
         </p:nvSpPr>
         <p:spPr>
           <a:xfrm>
-            <a:off x="1133856" y="640080"/>
+            <a:off x="1069848" y="640080"/>
             <a:ext cx="10490911" cy="365760"/>
           </a:xfrm>
           <a:prstGeom prst="rect">
@@ -11619,7 +11633,7 @@
                 <a:ea typeface="Pretendard" pitchFamily="34" charset="-122"/>
                 <a:cs typeface="Pretendard" pitchFamily="34" charset="-120"/>
               </a:rPr>
-              <a:t>진행 절차</a:t>
+              <a:t>실사 체크리스트</a:t>
             </a:r>
             <a:endParaRPr lang="en-US" sz="2300" dirty="0"/>
           </a:p>
@@ -11627,26 +11641,63 @@
       </p:sp>
       <p:sp>
         <p:nvSpPr>
-          <p:cNvPr id="6" name="Shape 4"/>
-          <p:cNvSpPr/>
-          <p:nvPr/>
-        </p:nvSpPr>
-        <p:spPr>
-          <a:xfrm>
-            <a:off x="566928" y="1572768"/>
-            <a:ext cx="11057839" cy="3200400"/>
-          </a:xfrm>
-          <a:prstGeom prst="roundRect">
-            <a:avLst>
-              <a:gd name="adj" fmla="val 1714"/>
-            </a:avLst>
+          <p:cNvPr id="6" name="Text 4"/>
+          <p:cNvSpPr/>
+          <p:nvPr/>
+        </p:nvSpPr>
+        <p:spPr>
+          <a:xfrm>
+            <a:off x="502920" y="1371600"/>
+            <a:ext cx="11057839" cy="237744"/>
+          </a:xfrm>
+          <a:prstGeom prst="rect">
+            <a:avLst/>
+          </a:prstGeom>
+          <a:noFill/>
+          <a:ln/>
+        </p:spPr>
+        <p:txBody>
+          <a:bodyPr wrap="square" lIns="0" tIns="0" rIns="0" bIns="0" rtlCol="0" anchor="ctr"/>
+          <a:lstStyle/>
+          <a:p>
+            <a:pPr indent="0" marL="0">
+              <a:buNone/>
+            </a:pPr>
+            <a:r>
+              <a:rPr lang="en-US" sz="1100" b="1" dirty="0">
+                <a:solidFill>
+                  <a:srgbClr val="10161F"/>
+                </a:solidFill>
+                <a:latin typeface="Pretendard" pitchFamily="34" charset="0"/>
+                <a:ea typeface="Pretendard" pitchFamily="34" charset="-122"/>
+                <a:cs typeface="Pretendard" pitchFamily="34" charset="-120"/>
+              </a:rPr>
+              <a:t>거래 안정성 확보를 위한 필수 법률·물리·임대차 실사 점검 항목 (총 6건)</a:t>
+            </a:r>
+            <a:endParaRPr lang="en-US" sz="1100" dirty="0"/>
+          </a:p>
+        </p:txBody>
+      </p:sp>
+      <p:sp>
+        <p:nvSpPr>
+          <p:cNvPr id="7" name="Shape 5"/>
+          <p:cNvSpPr/>
+          <p:nvPr/>
+        </p:nvSpPr>
+        <p:spPr>
+          <a:xfrm>
+            <a:off x="502920" y="1719072"/>
+            <a:ext cx="5368900" cy="868680"/>
+          </a:xfrm>
+          <a:prstGeom prst="rect">
+            <a:avLst/>
           </a:prstGeom>
           <a:solidFill>
             <a:srgbClr val="F7FAFC"/>
           </a:solidFill>
           <a:ln w="6350">
             <a:solidFill>
-              <a:srgbClr val="CBD5E0"/>
+              <a:srgbClr val="D9B668"/>
             </a:solidFill>
             <a:prstDash val="solid"/>
           </a:ln>
@@ -11654,73 +11705,73 @@
       </p:sp>
       <p:sp>
         <p:nvSpPr>
-          <p:cNvPr id="7" name="Shape 5"/>
-          <p:cNvSpPr/>
-          <p:nvPr/>
-        </p:nvSpPr>
-        <p:spPr>
-          <a:xfrm>
-            <a:off x="786384" y="1792224"/>
-            <a:ext cx="438912" cy="438912"/>
-          </a:xfrm>
-          <a:prstGeom prst="ellipse">
+          <p:cNvPr id="8" name="Shape 6"/>
+          <p:cNvSpPr/>
+          <p:nvPr/>
+        </p:nvSpPr>
+        <p:spPr>
+          <a:xfrm>
+            <a:off x="640080" y="1883664"/>
+            <a:ext cx="320040" cy="320040"/>
+          </a:xfrm>
+          <a:prstGeom prst="rect">
             <a:avLst/>
           </a:prstGeom>
           <a:solidFill>
-            <a:srgbClr val="B98A2E"/>
+            <a:srgbClr val="977024"/>
           </a:solidFill>
           <a:ln/>
         </p:spPr>
       </p:sp>
       <p:sp>
         <p:nvSpPr>
-          <p:cNvPr id="8" name="Text 6"/>
-          <p:cNvSpPr/>
-          <p:nvPr/>
-        </p:nvSpPr>
-        <p:spPr>
-          <a:xfrm>
-            <a:off x="786384" y="1792224"/>
-            <a:ext cx="438912" cy="438912"/>
-          </a:xfrm>
-          <a:prstGeom prst="rect">
-            <a:avLst/>
-          </a:prstGeom>
-          <a:noFill/>
-          <a:ln/>
-        </p:spPr>
-        <p:txBody>
-          <a:bodyPr wrap="square" lIns="0" tIns="0" rIns="0" bIns="0" rtlCol="0" anchor="ctr"/>
+          <p:cNvPr id="9" name="Text 7"/>
+          <p:cNvSpPr/>
+          <p:nvPr/>
+        </p:nvSpPr>
+        <p:spPr>
+          <a:xfrm>
+            <a:off x="640080" y="1883664"/>
+            <a:ext cx="320040" cy="320040"/>
+          </a:xfrm>
+          <a:prstGeom prst="rect">
+            <a:avLst/>
+          </a:prstGeom>
+          <a:noFill/>
+          <a:ln/>
+        </p:spPr>
+        <p:txBody>
+          <a:bodyPr wrap="square" rtlCol="0" anchor="ctr"/>
           <a:lstStyle/>
           <a:p>
             <a:pPr algn="ctr" indent="0" marL="0">
               <a:buNone/>
             </a:pPr>
             <a:r>
-              <a:rPr lang="en-US" sz="1400" b="1" dirty="0">
+              <a:rPr lang="en-US" sz="1100" b="1" dirty="0">
                 <a:solidFill>
                   <a:srgbClr val="FFFFFF"/>
                 </a:solidFill>
-                <a:latin typeface="Arial" pitchFamily="34" charset="0"/>
-                <a:ea typeface="Arial" pitchFamily="34" charset="-122"/>
-                <a:cs typeface="Arial" pitchFamily="34" charset="-120"/>
-              </a:rPr>
-              <a:t>01</a:t>
-            </a:r>
-            <a:endParaRPr lang="en-US" sz="1400" dirty="0"/>
-          </a:p>
-        </p:txBody>
-      </p:sp>
-      <p:sp>
-        <p:nvSpPr>
-          <p:cNvPr id="9" name="Text 7"/>
-          <p:cNvSpPr/>
-          <p:nvPr/>
-        </p:nvSpPr>
-        <p:spPr>
-          <a:xfrm>
-            <a:off x="786384" y="2304288"/>
-            <a:ext cx="10618927" cy="365760"/>
+                <a:latin typeface="Pretendard" pitchFamily="34" charset="0"/>
+                <a:ea typeface="Pretendard" pitchFamily="34" charset="-122"/>
+                <a:cs typeface="Pretendard" pitchFamily="34" charset="-120"/>
+              </a:rPr>
+              <a:t>✓</a:t>
+            </a:r>
+            <a:endParaRPr lang="en-US" sz="1100" dirty="0"/>
+          </a:p>
+        </p:txBody>
+      </p:sp>
+      <p:sp>
+        <p:nvSpPr>
+          <p:cNvPr id="10" name="Text 8"/>
+          <p:cNvSpPr/>
+          <p:nvPr/>
+        </p:nvSpPr>
+        <p:spPr>
+          <a:xfrm>
+            <a:off x="1051560" y="1810512"/>
+            <a:ext cx="4683100" cy="722376"/>
           </a:xfrm>
           <a:prstGeom prst="rect">
             <a:avLst/>
@@ -11733,10 +11784,13 @@
           <a:lstStyle/>
           <a:p>
             <a:pPr indent="0" marL="0">
-              <a:buNone/>
-            </a:pPr>
-            <a:r>
-              <a:rPr lang="en-US" sz="1600" b="1" dirty="0">
+              <a:lnSpc>
+                <a:spcPct val="110000"/>
+              </a:lnSpc>
+              <a:buNone/>
+            </a:pPr>
+            <a:r>
+              <a:rPr lang="en-US" sz="950" dirty="0">
                 <a:solidFill>
                   <a:srgbClr val="10161F"/>
                 </a:solidFill>
@@ -11744,38 +11798,125 @@
                 <a:ea typeface="Pretendard" pitchFamily="34" charset="-122"/>
                 <a:cs typeface="Pretendard" pitchFamily="34" charset="-120"/>
               </a:rPr>
-              <a:t>1단계</a:t>
-            </a:r>
-            <a:endParaRPr lang="en-US" sz="1600" dirty="0"/>
-          </a:p>
-        </p:txBody>
-      </p:sp>
-      <p:sp>
-        <p:nvSpPr>
-          <p:cNvPr id="10" name="Text 8"/>
-          <p:cNvSpPr/>
-          <p:nvPr/>
-        </p:nvSpPr>
-        <p:spPr>
-          <a:xfrm>
-            <a:off x="786384" y="2761488"/>
-            <a:ext cx="10618927" cy="1828800"/>
-          </a:xfrm>
-          <a:prstGeom prst="rect">
-            <a:avLst/>
-          </a:prstGeom>
-          <a:noFill/>
-          <a:ln/>
-        </p:spPr>
-        <p:txBody>
-          <a:bodyPr wrap="square" rtlCol="0" anchor="t"/>
+              <a:t>등기부등본 갑구/을구 권리관계 및 근저당 채권최고액 전액 말소 조건 원본 대조</a:t>
+            </a:r>
+            <a:endParaRPr lang="en-US" sz="950" dirty="0"/>
+          </a:p>
+        </p:txBody>
+      </p:sp>
+      <p:sp>
+        <p:nvSpPr>
+          <p:cNvPr id="11" name="Shape 9"/>
+          <p:cNvSpPr/>
+          <p:nvPr/>
+        </p:nvSpPr>
+        <p:spPr>
+          <a:xfrm>
+            <a:off x="502920" y="2715768"/>
+            <a:ext cx="5368900" cy="868680"/>
+          </a:xfrm>
+          <a:prstGeom prst="rect">
+            <a:avLst/>
+          </a:prstGeom>
+          <a:solidFill>
+            <a:srgbClr val="F7FAFC"/>
+          </a:solidFill>
+          <a:ln w="6350">
+            <a:solidFill>
+              <a:srgbClr val="D9B668"/>
+            </a:solidFill>
+            <a:prstDash val="solid"/>
+          </a:ln>
+        </p:spPr>
+      </p:sp>
+      <p:sp>
+        <p:nvSpPr>
+          <p:cNvPr id="12" name="Shape 10"/>
+          <p:cNvSpPr/>
+          <p:nvPr/>
+        </p:nvSpPr>
+        <p:spPr>
+          <a:xfrm>
+            <a:off x="640080" y="2880360"/>
+            <a:ext cx="320040" cy="320040"/>
+          </a:xfrm>
+          <a:prstGeom prst="rect">
+            <a:avLst/>
+          </a:prstGeom>
+          <a:solidFill>
+            <a:srgbClr val="977024"/>
+          </a:solidFill>
+          <a:ln/>
+        </p:spPr>
+      </p:sp>
+      <p:sp>
+        <p:nvSpPr>
+          <p:cNvPr id="13" name="Text 11"/>
+          <p:cNvSpPr/>
+          <p:nvPr/>
+        </p:nvSpPr>
+        <p:spPr>
+          <a:xfrm>
+            <a:off x="640080" y="2880360"/>
+            <a:ext cx="320040" cy="320040"/>
+          </a:xfrm>
+          <a:prstGeom prst="rect">
+            <a:avLst/>
+          </a:prstGeom>
+          <a:noFill/>
+          <a:ln/>
+        </p:spPr>
+        <p:txBody>
+          <a:bodyPr wrap="square" rtlCol="0" anchor="ctr"/>
+          <a:lstStyle/>
+          <a:p>
+            <a:pPr algn="ctr" indent="0" marL="0">
+              <a:buNone/>
+            </a:pPr>
+            <a:r>
+              <a:rPr lang="en-US" sz="1100" b="1" dirty="0">
+                <a:solidFill>
+                  <a:srgbClr val="FFFFFF"/>
+                </a:solidFill>
+                <a:latin typeface="Pretendard" pitchFamily="34" charset="0"/>
+                <a:ea typeface="Pretendard" pitchFamily="34" charset="-122"/>
+                <a:cs typeface="Pretendard" pitchFamily="34" charset="-120"/>
+              </a:rPr>
+              <a:t>✓</a:t>
+            </a:r>
+            <a:endParaRPr lang="en-US" sz="1100" dirty="0"/>
+          </a:p>
+        </p:txBody>
+      </p:sp>
+      <p:sp>
+        <p:nvSpPr>
+          <p:cNvPr id="14" name="Text 12"/>
+          <p:cNvSpPr/>
+          <p:nvPr/>
+        </p:nvSpPr>
+        <p:spPr>
+          <a:xfrm>
+            <a:off x="1051560" y="2807208"/>
+            <a:ext cx="4683100" cy="722376"/>
+          </a:xfrm>
+          <a:prstGeom prst="rect">
+            <a:avLst/>
+          </a:prstGeom>
+          <a:noFill/>
+          <a:ln/>
+        </p:spPr>
+        <p:txBody>
+          <a:bodyPr wrap="square" rtlCol="0" anchor="ctr"/>
           <a:lstStyle/>
           <a:p>
             <a:pPr indent="0" marL="0">
-              <a:buNone/>
-            </a:pPr>
-            <a:r>
-              <a:rPr lang="en-US" sz="1100" dirty="0">
+              <a:lnSpc>
+                <a:spcPct val="110000"/>
+              </a:lnSpc>
+              <a:buNone/>
+            </a:pPr>
+            <a:r>
+              <a:rPr lang="en-US" sz="950" dirty="0">
                 <a:solidFill>
                   <a:srgbClr val="10161F"/>
                 </a:solidFill>
@@ -11783,16 +11924,125 @@
                 <a:ea typeface="Pretendard" pitchFamily="34" charset="-122"/>
                 <a:cs typeface="Pretendard" pitchFamily="34" charset="-120"/>
               </a:rPr>
-              <a:t>건축 설계 발주 및 인허가 일정 협의를 권장합니다.</a:t>
+              <a:t>임대차 원본 계약서 대조 (보증금, 월임대료, 관리비 실입금 내역 및 제소전화해조서)</a:t>
+            </a:r>
+            <a:endParaRPr lang="en-US" sz="950" dirty="0"/>
+          </a:p>
+        </p:txBody>
+      </p:sp>
+      <p:sp>
+        <p:nvSpPr>
+          <p:cNvPr id="15" name="Shape 13"/>
+          <p:cNvSpPr/>
+          <p:nvPr/>
+        </p:nvSpPr>
+        <p:spPr>
+          <a:xfrm>
+            <a:off x="502920" y="3712464"/>
+            <a:ext cx="5368900" cy="868680"/>
+          </a:xfrm>
+          <a:prstGeom prst="rect">
+            <a:avLst/>
+          </a:prstGeom>
+          <a:solidFill>
+            <a:srgbClr val="F7FAFC"/>
+          </a:solidFill>
+          <a:ln w="6350">
+            <a:solidFill>
+              <a:srgbClr val="D9B668"/>
+            </a:solidFill>
+            <a:prstDash val="solid"/>
+          </a:ln>
+        </p:spPr>
+      </p:sp>
+      <p:sp>
+        <p:nvSpPr>
+          <p:cNvPr id="16" name="Shape 14"/>
+          <p:cNvSpPr/>
+          <p:nvPr/>
+        </p:nvSpPr>
+        <p:spPr>
+          <a:xfrm>
+            <a:off x="640080" y="3877056"/>
+            <a:ext cx="320040" cy="320040"/>
+          </a:xfrm>
+          <a:prstGeom prst="rect">
+            <a:avLst/>
+          </a:prstGeom>
+          <a:solidFill>
+            <a:srgbClr val="977024"/>
+          </a:solidFill>
+          <a:ln/>
+        </p:spPr>
+      </p:sp>
+      <p:sp>
+        <p:nvSpPr>
+          <p:cNvPr id="17" name="Text 15"/>
+          <p:cNvSpPr/>
+          <p:nvPr/>
+        </p:nvSpPr>
+        <p:spPr>
+          <a:xfrm>
+            <a:off x="640080" y="3877056"/>
+            <a:ext cx="320040" cy="320040"/>
+          </a:xfrm>
+          <a:prstGeom prst="rect">
+            <a:avLst/>
+          </a:prstGeom>
+          <a:noFill/>
+          <a:ln/>
+        </p:spPr>
+        <p:txBody>
+          <a:bodyPr wrap="square" rtlCol="0" anchor="ctr"/>
+          <a:lstStyle/>
+          <a:p>
+            <a:pPr algn="ctr" indent="0" marL="0">
+              <a:buNone/>
+            </a:pPr>
+            <a:r>
+              <a:rPr lang="en-US" sz="1100" b="1" dirty="0">
+                <a:solidFill>
+                  <a:srgbClr val="FFFFFF"/>
+                </a:solidFill>
+                <a:latin typeface="Pretendard" pitchFamily="34" charset="0"/>
+                <a:ea typeface="Pretendard" pitchFamily="34" charset="-122"/>
+                <a:cs typeface="Pretendard" pitchFamily="34" charset="-120"/>
+              </a:rPr>
+              <a:t>✓</a:t>
             </a:r>
             <a:endParaRPr lang="en-US" sz="1100" dirty="0"/>
           </a:p>
+        </p:txBody>
+      </p:sp>
+      <p:sp>
+        <p:nvSpPr>
+          <p:cNvPr id="18" name="Text 16"/>
+          <p:cNvSpPr/>
+          <p:nvPr/>
+        </p:nvSpPr>
+        <p:spPr>
+          <a:xfrm>
+            <a:off x="1051560" y="3803904"/>
+            <a:ext cx="4683100" cy="722376"/>
+          </a:xfrm>
+          <a:prstGeom prst="rect">
+            <a:avLst/>
+          </a:prstGeom>
+          <a:noFill/>
+          <a:ln/>
+        </p:spPr>
+        <p:txBody>
+          <a:bodyPr wrap="square" rtlCol="0" anchor="ctr"/>
+          <a:lstStyle/>
           <a:p>
             <a:pPr indent="0" marL="0">
-              <a:buNone/>
-            </a:pPr>
-            <a:r>
-              <a:rPr lang="en-US" sz="1100" dirty="0">
+              <a:lnSpc>
+                <a:spcPct val="110000"/>
+              </a:lnSpc>
+              <a:buNone/>
+            </a:pPr>
+            <a:r>
+              <a:rPr lang="en-US" sz="950" dirty="0">
                 <a:solidFill>
                   <a:srgbClr val="10161F"/>
                 </a:solidFill>
@@ -11800,7 +12050,91 @@
                 <a:ea typeface="Pretendard" pitchFamily="34" charset="-122"/>
                 <a:cs typeface="Pretendard" pitchFamily="34" charset="-120"/>
               </a:rPr>
-              <a:t>건축 설계 발주 및 인허가 일정 협의를 권장합니다.</a:t>
+              <a:t>건축물대장상 위반건축물 등재 여부 및 불법 증축·용도변경 이행강제금 납부 이력 점검</a:t>
+            </a:r>
+            <a:endParaRPr lang="en-US" sz="950" dirty="0"/>
+          </a:p>
+        </p:txBody>
+      </p:sp>
+      <p:sp>
+        <p:nvSpPr>
+          <p:cNvPr id="19" name="Shape 17"/>
+          <p:cNvSpPr/>
+          <p:nvPr/>
+        </p:nvSpPr>
+        <p:spPr>
+          <a:xfrm>
+            <a:off x="6191860" y="1719072"/>
+            <a:ext cx="5368900" cy="868680"/>
+          </a:xfrm>
+          <a:prstGeom prst="rect">
+            <a:avLst/>
+          </a:prstGeom>
+          <a:solidFill>
+            <a:srgbClr val="F7FAFC"/>
+          </a:solidFill>
+          <a:ln w="6350">
+            <a:solidFill>
+              <a:srgbClr val="D9B668"/>
+            </a:solidFill>
+            <a:prstDash val="solid"/>
+          </a:ln>
+        </p:spPr>
+      </p:sp>
+      <p:sp>
+        <p:nvSpPr>
+          <p:cNvPr id="20" name="Shape 18"/>
+          <p:cNvSpPr/>
+          <p:nvPr/>
+        </p:nvSpPr>
+        <p:spPr>
+          <a:xfrm>
+            <a:off x="6329020" y="1883664"/>
+            <a:ext cx="320040" cy="320040"/>
+          </a:xfrm>
+          <a:prstGeom prst="rect">
+            <a:avLst/>
+          </a:prstGeom>
+          <a:solidFill>
+            <a:srgbClr val="977024"/>
+          </a:solidFill>
+          <a:ln/>
+        </p:spPr>
+      </p:sp>
+      <p:sp>
+        <p:nvSpPr>
+          <p:cNvPr id="21" name="Text 19"/>
+          <p:cNvSpPr/>
+          <p:nvPr/>
+        </p:nvSpPr>
+        <p:spPr>
+          <a:xfrm>
+            <a:off x="6329020" y="1883664"/>
+            <a:ext cx="320040" cy="320040"/>
+          </a:xfrm>
+          <a:prstGeom prst="rect">
+            <a:avLst/>
+          </a:prstGeom>
+          <a:noFill/>
+          <a:ln/>
+        </p:spPr>
+        <p:txBody>
+          <a:bodyPr wrap="square" rtlCol="0" anchor="ctr"/>
+          <a:lstStyle/>
+          <a:p>
+            <a:pPr algn="ctr" indent="0" marL="0">
+              <a:buNone/>
+            </a:pPr>
+            <a:r>
+              <a:rPr lang="en-US" sz="1100" b="1" dirty="0">
+                <a:solidFill>
+                  <a:srgbClr val="FFFFFF"/>
+                </a:solidFill>
+                <a:latin typeface="Pretendard" pitchFamily="34" charset="0"/>
+                <a:ea typeface="Pretendard" pitchFamily="34" charset="-122"/>
+                <a:cs typeface="Pretendard" pitchFamily="34" charset="-120"/>
+              </a:rPr>
+              <a:t>✓</a:t>
             </a:r>
             <a:endParaRPr lang="en-US" sz="1100" dirty="0"/>
           </a:p>
@@ -11808,13 +12142,366 @@
       </p:sp>
       <p:sp>
         <p:nvSpPr>
-          <p:cNvPr id="11" name="Text 9"/>
-          <p:cNvSpPr/>
-          <p:nvPr/>
-        </p:nvSpPr>
-        <p:spPr>
-          <a:xfrm>
-            <a:off x="566928" y="6382512"/>
+          <p:cNvPr id="22" name="Text 20"/>
+          <p:cNvSpPr/>
+          <p:nvPr/>
+        </p:nvSpPr>
+        <p:spPr>
+          <a:xfrm>
+            <a:off x="6740500" y="1810512"/>
+            <a:ext cx="4683100" cy="722376"/>
+          </a:xfrm>
+          <a:prstGeom prst="rect">
+            <a:avLst/>
+          </a:prstGeom>
+          <a:noFill/>
+          <a:ln/>
+        </p:spPr>
+        <p:txBody>
+          <a:bodyPr wrap="square" rtlCol="0" anchor="ctr"/>
+          <a:lstStyle/>
+          <a:p>
+            <a:pPr indent="0" marL="0">
+              <a:lnSpc>
+                <a:spcPct val="110000"/>
+              </a:lnSpc>
+              <a:buNone/>
+            </a:pPr>
+            <a:r>
+              <a:rPr lang="en-US" sz="950" dirty="0">
+                <a:solidFill>
+                  <a:srgbClr val="10161F"/>
+                </a:solidFill>
+                <a:latin typeface="Pretendard" pitchFamily="34" charset="0"/>
+                <a:ea typeface="Pretendard" pitchFamily="34" charset="-122"/>
+                <a:cs typeface="Pretendard" pitchFamily="34" charset="-120"/>
+              </a:rPr>
+              <a:t>토지이용계획확인원상 도시계획시설 저촉, 건축선 후퇴, 지구단위계획 특별계획구역 확인</a:t>
+            </a:r>
+            <a:endParaRPr lang="en-US" sz="950" dirty="0"/>
+          </a:p>
+        </p:txBody>
+      </p:sp>
+      <p:sp>
+        <p:nvSpPr>
+          <p:cNvPr id="23" name="Shape 21"/>
+          <p:cNvSpPr/>
+          <p:nvPr/>
+        </p:nvSpPr>
+        <p:spPr>
+          <a:xfrm>
+            <a:off x="6191860" y="2715768"/>
+            <a:ext cx="5368900" cy="868680"/>
+          </a:xfrm>
+          <a:prstGeom prst="rect">
+            <a:avLst/>
+          </a:prstGeom>
+          <a:solidFill>
+            <a:srgbClr val="F7FAFC"/>
+          </a:solidFill>
+          <a:ln w="6350">
+            <a:solidFill>
+              <a:srgbClr val="D9B668"/>
+            </a:solidFill>
+            <a:prstDash val="solid"/>
+          </a:ln>
+        </p:spPr>
+      </p:sp>
+      <p:sp>
+        <p:nvSpPr>
+          <p:cNvPr id="24" name="Shape 22"/>
+          <p:cNvSpPr/>
+          <p:nvPr/>
+        </p:nvSpPr>
+        <p:spPr>
+          <a:xfrm>
+            <a:off x="6329020" y="2880360"/>
+            <a:ext cx="320040" cy="320040"/>
+          </a:xfrm>
+          <a:prstGeom prst="rect">
+            <a:avLst/>
+          </a:prstGeom>
+          <a:solidFill>
+            <a:srgbClr val="977024"/>
+          </a:solidFill>
+          <a:ln/>
+        </p:spPr>
+      </p:sp>
+      <p:sp>
+        <p:nvSpPr>
+          <p:cNvPr id="25" name="Text 23"/>
+          <p:cNvSpPr/>
+          <p:nvPr/>
+        </p:nvSpPr>
+        <p:spPr>
+          <a:xfrm>
+            <a:off x="6329020" y="2880360"/>
+            <a:ext cx="320040" cy="320040"/>
+          </a:xfrm>
+          <a:prstGeom prst="rect">
+            <a:avLst/>
+          </a:prstGeom>
+          <a:noFill/>
+          <a:ln/>
+        </p:spPr>
+        <p:txBody>
+          <a:bodyPr wrap="square" rtlCol="0" anchor="ctr"/>
+          <a:lstStyle/>
+          <a:p>
+            <a:pPr algn="ctr" indent="0" marL="0">
+              <a:buNone/>
+            </a:pPr>
+            <a:r>
+              <a:rPr lang="en-US" sz="1100" b="1" dirty="0">
+                <a:solidFill>
+                  <a:srgbClr val="FFFFFF"/>
+                </a:solidFill>
+                <a:latin typeface="Pretendard" pitchFamily="34" charset="0"/>
+                <a:ea typeface="Pretendard" pitchFamily="34" charset="-122"/>
+                <a:cs typeface="Pretendard" pitchFamily="34" charset="-120"/>
+              </a:rPr>
+              <a:t>✓</a:t>
+            </a:r>
+            <a:endParaRPr lang="en-US" sz="1100" dirty="0"/>
+          </a:p>
+        </p:txBody>
+      </p:sp>
+      <p:sp>
+        <p:nvSpPr>
+          <p:cNvPr id="26" name="Text 24"/>
+          <p:cNvSpPr/>
+          <p:nvPr/>
+        </p:nvSpPr>
+        <p:spPr>
+          <a:xfrm>
+            <a:off x="6740500" y="2807208"/>
+            <a:ext cx="4683100" cy="722376"/>
+          </a:xfrm>
+          <a:prstGeom prst="rect">
+            <a:avLst/>
+          </a:prstGeom>
+          <a:noFill/>
+          <a:ln/>
+        </p:spPr>
+        <p:txBody>
+          <a:bodyPr wrap="square" rtlCol="0" anchor="ctr"/>
+          <a:lstStyle/>
+          <a:p>
+            <a:pPr indent="0" marL="0">
+              <a:lnSpc>
+                <a:spcPct val="110000"/>
+              </a:lnSpc>
+              <a:buNone/>
+            </a:pPr>
+            <a:r>
+              <a:rPr lang="en-US" sz="950" dirty="0">
+                <a:solidFill>
+                  <a:srgbClr val="10161F"/>
+                </a:solidFill>
+                <a:latin typeface="Pretendard" pitchFamily="34" charset="0"/>
+                <a:ea typeface="Pretendard" pitchFamily="34" charset="-122"/>
+                <a:cs typeface="Pretendard" pitchFamily="34" charset="-120"/>
+              </a:rPr>
+              <a:t>기계식 주차기 정기 안전점검 합격증, 승강기 검사필증, 소방 완비증명서 실물 실사</a:t>
+            </a:r>
+            <a:endParaRPr lang="en-US" sz="950" dirty="0"/>
+          </a:p>
+        </p:txBody>
+      </p:sp>
+      <p:sp>
+        <p:nvSpPr>
+          <p:cNvPr id="27" name="Shape 25"/>
+          <p:cNvSpPr/>
+          <p:nvPr/>
+        </p:nvSpPr>
+        <p:spPr>
+          <a:xfrm>
+            <a:off x="6191860" y="3712464"/>
+            <a:ext cx="5368900" cy="868680"/>
+          </a:xfrm>
+          <a:prstGeom prst="rect">
+            <a:avLst/>
+          </a:prstGeom>
+          <a:solidFill>
+            <a:srgbClr val="F7FAFC"/>
+          </a:solidFill>
+          <a:ln w="6350">
+            <a:solidFill>
+              <a:srgbClr val="D9B668"/>
+            </a:solidFill>
+            <a:prstDash val="solid"/>
+          </a:ln>
+        </p:spPr>
+      </p:sp>
+      <p:sp>
+        <p:nvSpPr>
+          <p:cNvPr id="28" name="Shape 26"/>
+          <p:cNvSpPr/>
+          <p:nvPr/>
+        </p:nvSpPr>
+        <p:spPr>
+          <a:xfrm>
+            <a:off x="6329020" y="3877056"/>
+            <a:ext cx="320040" cy="320040"/>
+          </a:xfrm>
+          <a:prstGeom prst="rect">
+            <a:avLst/>
+          </a:prstGeom>
+          <a:solidFill>
+            <a:srgbClr val="977024"/>
+          </a:solidFill>
+          <a:ln/>
+        </p:spPr>
+      </p:sp>
+      <p:sp>
+        <p:nvSpPr>
+          <p:cNvPr id="29" name="Text 27"/>
+          <p:cNvSpPr/>
+          <p:nvPr/>
+        </p:nvSpPr>
+        <p:spPr>
+          <a:xfrm>
+            <a:off x="6329020" y="3877056"/>
+            <a:ext cx="320040" cy="320040"/>
+          </a:xfrm>
+          <a:prstGeom prst="rect">
+            <a:avLst/>
+          </a:prstGeom>
+          <a:noFill/>
+          <a:ln/>
+        </p:spPr>
+        <p:txBody>
+          <a:bodyPr wrap="square" rtlCol="0" anchor="ctr"/>
+          <a:lstStyle/>
+          <a:p>
+            <a:pPr algn="ctr" indent="0" marL="0">
+              <a:buNone/>
+            </a:pPr>
+            <a:r>
+              <a:rPr lang="en-US" sz="1100" b="1" dirty="0">
+                <a:solidFill>
+                  <a:srgbClr val="FFFFFF"/>
+                </a:solidFill>
+                <a:latin typeface="Pretendard" pitchFamily="34" charset="0"/>
+                <a:ea typeface="Pretendard" pitchFamily="34" charset="-122"/>
+                <a:cs typeface="Pretendard" pitchFamily="34" charset="-120"/>
+              </a:rPr>
+              <a:t>✓</a:t>
+            </a:r>
+            <a:endParaRPr lang="en-US" sz="1100" dirty="0"/>
+          </a:p>
+        </p:txBody>
+      </p:sp>
+      <p:sp>
+        <p:nvSpPr>
+          <p:cNvPr id="30" name="Text 28"/>
+          <p:cNvSpPr/>
+          <p:nvPr/>
+        </p:nvSpPr>
+        <p:spPr>
+          <a:xfrm>
+            <a:off x="6740500" y="3803904"/>
+            <a:ext cx="4683100" cy="722376"/>
+          </a:xfrm>
+          <a:prstGeom prst="rect">
+            <a:avLst/>
+          </a:prstGeom>
+          <a:noFill/>
+          <a:ln/>
+        </p:spPr>
+        <p:txBody>
+          <a:bodyPr wrap="square" rtlCol="0" anchor="ctr"/>
+          <a:lstStyle/>
+          <a:p>
+            <a:pPr indent="0" marL="0">
+              <a:lnSpc>
+                <a:spcPct val="110000"/>
+              </a:lnSpc>
+              <a:buNone/>
+            </a:pPr>
+            <a:r>
+              <a:rPr lang="en-US" sz="950" dirty="0">
+                <a:solidFill>
+                  <a:srgbClr val="10161F"/>
+                </a:solidFill>
+                <a:latin typeface="Pretendard" pitchFamily="34" charset="0"/>
+                <a:ea typeface="Pretendard" pitchFamily="34" charset="-122"/>
+                <a:cs typeface="Pretendard" pitchFamily="34" charset="-120"/>
+              </a:rPr>
+              <a:t>정화조 용량 대비 현 업종 적합성 및 하수도 원인자부담금 추가 부과 대상 여부 확인</a:t>
+            </a:r>
+            <a:endParaRPr lang="en-US" sz="950" dirty="0"/>
+          </a:p>
+        </p:txBody>
+      </p:sp>
+      <p:sp>
+        <p:nvSpPr>
+          <p:cNvPr id="31" name="Shape 29"/>
+          <p:cNvSpPr/>
+          <p:nvPr/>
+        </p:nvSpPr>
+        <p:spPr>
+          <a:xfrm>
+            <a:off x="502920" y="5349240"/>
+            <a:ext cx="11057839" cy="457200"/>
+          </a:xfrm>
+          <a:prstGeom prst="rect">
+            <a:avLst/>
+          </a:prstGeom>
+          <a:solidFill>
+            <a:srgbClr val="D9B668"/>
+          </a:solidFill>
+          <a:ln/>
+        </p:spPr>
+      </p:sp>
+      <p:sp>
+        <p:nvSpPr>
+          <p:cNvPr id="32" name="Text 30"/>
+          <p:cNvSpPr/>
+          <p:nvPr/>
+        </p:nvSpPr>
+        <p:spPr>
+          <a:xfrm>
+            <a:off x="685800" y="5422392"/>
+            <a:ext cx="10692079" cy="310896"/>
+          </a:xfrm>
+          <a:prstGeom prst="rect">
+            <a:avLst/>
+          </a:prstGeom>
+          <a:noFill/>
+          <a:ln/>
+        </p:spPr>
+        <p:txBody>
+          <a:bodyPr wrap="square" rtlCol="0" anchor="ctr"/>
+          <a:lstStyle/>
+          <a:p>
+            <a:pPr indent="0" marL="0">
+              <a:buNone/>
+            </a:pPr>
+            <a:r>
+              <a:rPr lang="en-US" sz="950" b="1" dirty="0">
+                <a:solidFill>
+                  <a:srgbClr val="977024"/>
+                </a:solidFill>
+                <a:latin typeface="Pretendard" pitchFamily="34" charset="0"/>
+                <a:ea typeface="Pretendard" pitchFamily="34" charset="-122"/>
+                <a:cs typeface="Pretendard" pitchFamily="34" charset="-120"/>
+              </a:rPr>
+              <a:t>※ 본 체크리스트는 계약 전 매수인의 안전한 자산 인수를 위한 필수 확인 사항이며, 실사(Due Diligence) 결과에 따라 매매 조건 및 잔금 일정이 조정될 수 있습니다.</a:t>
+            </a:r>
+            <a:endParaRPr lang="en-US" sz="950" dirty="0"/>
+          </a:p>
+        </p:txBody>
+      </p:sp>
+      <p:sp>
+        <p:nvSpPr>
+          <p:cNvPr id="33" name="Text 31"/>
+          <p:cNvSpPr/>
+          <p:nvPr/>
+        </p:nvSpPr>
+        <p:spPr>
+          <a:xfrm>
+            <a:off x="502920" y="6382512"/>
             <a:ext cx="7315200" cy="219456"/>
           </a:xfrm>
           <a:prstGeom prst="rect">
@@ -11847,13 +12534,13 @@
       </p:sp>
       <p:sp>
         <p:nvSpPr>
-          <p:cNvPr id="12" name="Text 10"/>
-          <p:cNvSpPr/>
-          <p:nvPr/>
-        </p:nvSpPr>
-        <p:spPr>
-          <a:xfrm>
-            <a:off x="10710367" y="6382512"/>
+          <p:cNvPr id="34" name="Text 32"/>
+          <p:cNvSpPr/>
+          <p:nvPr/>
+        </p:nvSpPr>
+        <p:spPr>
+          <a:xfrm>
+            <a:off x="10774375" y="6382512"/>
             <a:ext cx="914400" cy="219456"/>
           </a:xfrm>
           <a:prstGeom prst="rect">

--- a/docs/test/stress/e2e-outputs/development_basic_pr04.pptx
+++ b/docs/test/stress/e2e-outputs/development_basic_pr04.pptx
@@ -2048,7 +2048,7 @@
         <p:spPr>
           <a:xfrm>
             <a:off x="502920" y="3090672"/>
-            <a:ext cx="7315200" cy="365760"/>
+            <a:ext cx="7315200" cy="329184"/>
           </a:xfrm>
           <a:prstGeom prst="rect">
             <a:avLst/>
@@ -2086,7 +2086,7 @@
         </p:nvSpPr>
         <p:spPr>
           <a:xfrm>
-            <a:off x="502920" y="3685032"/>
+            <a:off x="502920" y="3639312"/>
             <a:ext cx="1005840" cy="292608"/>
           </a:xfrm>
           <a:prstGeom prst="roundRect">
@@ -2108,7 +2108,7 @@
         </p:nvSpPr>
         <p:spPr>
           <a:xfrm>
-            <a:off x="502920" y="3685032"/>
+            <a:off x="502920" y="3639312"/>
             <a:ext cx="1005840" cy="292608"/>
           </a:xfrm>
           <a:prstGeom prst="rect">
@@ -2147,7 +2147,7 @@
         </p:nvSpPr>
         <p:spPr>
           <a:xfrm>
-            <a:off x="1600200" y="3685032"/>
+            <a:off x="1600200" y="3639312"/>
             <a:ext cx="1005840" cy="292608"/>
           </a:xfrm>
           <a:prstGeom prst="roundRect">
@@ -2169,7 +2169,7 @@
         </p:nvSpPr>
         <p:spPr>
           <a:xfrm>
-            <a:off x="1600200" y="3685032"/>
+            <a:off x="1600200" y="3639312"/>
             <a:ext cx="1005840" cy="292608"/>
           </a:xfrm>
           <a:prstGeom prst="rect">
@@ -2208,7 +2208,7 @@
         </p:nvSpPr>
         <p:spPr>
           <a:xfrm>
-            <a:off x="502920" y="4187952"/>
+            <a:off x="502920" y="4078224"/>
             <a:ext cx="6858000" cy="1051560"/>
           </a:xfrm>
           <a:prstGeom prst="roundRect">
@@ -2235,7 +2235,7 @@
         </p:nvSpPr>
         <p:spPr>
           <a:xfrm>
-            <a:off x="758952" y="4297680"/>
+            <a:off x="758952" y="4187952"/>
             <a:ext cx="6345936" cy="832104"/>
           </a:xfrm>
           <a:prstGeom prst="rect">
@@ -2377,7 +2377,7 @@
                 <a:ea typeface="Pretendard" pitchFamily="34" charset="-122"/>
                 <a:cs typeface="Pretendard" pitchFamily="34" charset="-120"/>
               </a:rPr>
-              <a:t>크리딜   |   </a:t>
+              <a:t>크리딜</a:t>
             </a:r>
             <a:endParaRPr lang="en-US" sz="800" dirty="0"/>
           </a:p>
@@ -2805,7 +2805,7 @@
                 <a:ea typeface="Pretendard" pitchFamily="34" charset="-122"/>
                 <a:cs typeface="Pretendard" pitchFamily="34" charset="-120"/>
               </a:rPr>
-              <a:t>크리딜   |   </a:t>
+              <a:t>크리딜</a:t>
             </a:r>
             <a:endParaRPr lang="en-US" sz="800" dirty="0"/>
           </a:p>
@@ -4308,7 +4308,7 @@
                 <a:ea typeface="Pretendard" pitchFamily="34" charset="-122"/>
                 <a:cs typeface="Pretendard" pitchFamily="34" charset="-120"/>
               </a:rPr>
-              <a:t>크리딜   |   </a:t>
+              <a:t>크리딜</a:t>
             </a:r>
             <a:endParaRPr lang="en-US" sz="800" dirty="0"/>
           </a:p>
@@ -4674,10 +4674,13 @@
           <a:lstStyle/>
           <a:p>
             <a:pPr indent="0" marL="0">
-              <a:buNone/>
-            </a:pPr>
-            <a:r>
-              <a:rPr lang="en-US" sz="1700" b="1" dirty="0">
+              <a:lnSpc>
+                <a:spcPct val="100000"/>
+              </a:lnSpc>
+              <a:buNone/>
+            </a:pPr>
+            <a:r>
+              <a:rPr lang="en-US" sz="2200" b="1" dirty="0">
                 <a:solidFill>
                   <a:srgbClr val="10161F"/>
                 </a:solidFill>
@@ -4687,7 +4690,7 @@
               </a:rPr>
               <a:t>-</a:t>
             </a:r>
-            <a:endParaRPr lang="en-US" sz="1700" dirty="0"/>
+            <a:endParaRPr lang="en-US" sz="2200" dirty="0"/>
           </a:p>
         </p:txBody>
       </p:sp>
@@ -4781,10 +4784,13 @@
           <a:lstStyle/>
           <a:p>
             <a:pPr indent="0" marL="0">
-              <a:buNone/>
-            </a:pPr>
-            <a:r>
-              <a:rPr lang="en-US" sz="1700" b="1" dirty="0">
+              <a:lnSpc>
+                <a:spcPct val="100000"/>
+              </a:lnSpc>
+              <a:buNone/>
+            </a:pPr>
+            <a:r>
+              <a:rPr lang="en-US" sz="2200" b="1" dirty="0">
                 <a:solidFill>
                   <a:srgbClr val="10161F"/>
                 </a:solidFill>
@@ -4794,7 +4800,7 @@
               </a:rPr>
               <a:t>168.5평</a:t>
             </a:r>
-            <a:endParaRPr lang="en-US" sz="1700" dirty="0"/>
+            <a:endParaRPr lang="en-US" sz="2200" dirty="0"/>
           </a:p>
         </p:txBody>
       </p:sp>
@@ -4888,10 +4894,13 @@
           <a:lstStyle/>
           <a:p>
             <a:pPr indent="0" marL="0">
-              <a:buNone/>
-            </a:pPr>
-            <a:r>
-              <a:rPr lang="en-US" sz="1700" b="1" dirty="0">
+              <a:lnSpc>
+                <a:spcPct val="100000"/>
+              </a:lnSpc>
+              <a:buNone/>
+            </a:pPr>
+            <a:r>
+              <a:rPr lang="en-US" sz="1800" b="1" dirty="0">
                 <a:solidFill>
                   <a:srgbClr val="10161F"/>
                 </a:solidFill>
@@ -4901,7 +4910,7 @@
               </a:rPr>
               <a:t>제3종일반주거</a:t>
             </a:r>
-            <a:endParaRPr lang="en-US" sz="1700" dirty="0"/>
+            <a:endParaRPr lang="en-US" sz="1800" dirty="0"/>
           </a:p>
         </p:txBody>
       </p:sp>
@@ -4957,7 +4966,7 @@
               <a:buNone/>
             </a:pPr>
             <a:r>
-              <a:rPr lang="en-US" sz="950" dirty="0">
+              <a:rPr lang="en-US" sz="850" dirty="0">
                 <a:solidFill>
                   <a:srgbClr val="718096"/>
                 </a:solidFill>
@@ -4967,7 +4976,7 @@
               </a:rPr>
               <a:t>연 수익률(Cap Rate)</a:t>
             </a:r>
-            <a:endParaRPr lang="en-US" sz="950" dirty="0"/>
+            <a:endParaRPr lang="en-US" sz="850" dirty="0"/>
           </a:p>
         </p:txBody>
       </p:sp>
@@ -4995,10 +5004,13 @@
           <a:lstStyle/>
           <a:p>
             <a:pPr indent="0" marL="0">
-              <a:buNone/>
-            </a:pPr>
-            <a:r>
-              <a:rPr lang="en-US" sz="1700" b="1" dirty="0">
+              <a:lnSpc>
+                <a:spcPct val="100000"/>
+              </a:lnSpc>
+              <a:buNone/>
+            </a:pPr>
+            <a:r>
+              <a:rPr lang="en-US" sz="2200" b="1" dirty="0">
                 <a:solidFill>
                   <a:srgbClr val="10161F"/>
                 </a:solidFill>
@@ -5008,7 +5020,7 @@
               </a:rPr>
               <a:t>-</a:t>
             </a:r>
-            <a:endParaRPr lang="en-US" sz="1700" dirty="0"/>
+            <a:endParaRPr lang="en-US" sz="2200" dirty="0"/>
           </a:p>
         </p:txBody>
       </p:sp>
@@ -5102,10 +5114,13 @@
           <a:lstStyle/>
           <a:p>
             <a:pPr indent="0" marL="0">
-              <a:buNone/>
-            </a:pPr>
-            <a:r>
-              <a:rPr lang="en-US" sz="1700" b="1" dirty="0">
+              <a:lnSpc>
+                <a:spcPct val="100000"/>
+              </a:lnSpc>
+              <a:buNone/>
+            </a:pPr>
+            <a:r>
+              <a:rPr lang="en-US" sz="2200" b="1" dirty="0">
                 <a:solidFill>
                   <a:srgbClr val="10161F"/>
                 </a:solidFill>
@@ -5115,7 +5130,7 @@
               </a:rPr>
               <a:t>-</a:t>
             </a:r>
-            <a:endParaRPr lang="en-US" sz="1700" dirty="0"/>
+            <a:endParaRPr lang="en-US" sz="2200" dirty="0"/>
           </a:p>
         </p:txBody>
       </p:sp>
@@ -5209,10 +5224,13 @@
           <a:lstStyle/>
           <a:p>
             <a:pPr indent="0" marL="0">
-              <a:buNone/>
-            </a:pPr>
-            <a:r>
-              <a:rPr lang="en-US" sz="1700" b="1" dirty="0">
+              <a:lnSpc>
+                <a:spcPct val="100000"/>
+              </a:lnSpc>
+              <a:buNone/>
+            </a:pPr>
+            <a:r>
+              <a:rPr lang="en-US" sz="2200" b="1" dirty="0">
                 <a:solidFill>
                   <a:srgbClr val="10161F"/>
                 </a:solidFill>
@@ -5222,7 +5240,7 @@
               </a:rPr>
               <a:t>-</a:t>
             </a:r>
-            <a:endParaRPr lang="en-US" sz="1700" dirty="0"/>
+            <a:endParaRPr lang="en-US" sz="2200" dirty="0"/>
           </a:p>
         </p:txBody>
       </p:sp>
@@ -5316,10 +5334,13 @@
           <a:lstStyle/>
           <a:p>
             <a:pPr indent="0" marL="0">
-              <a:buNone/>
-            </a:pPr>
-            <a:r>
-              <a:rPr lang="en-US" sz="1700" b="1" dirty="0">
+              <a:lnSpc>
+                <a:spcPct val="100000"/>
+              </a:lnSpc>
+              <a:buNone/>
+            </a:pPr>
+            <a:r>
+              <a:rPr lang="en-US" sz="2200" b="1" dirty="0">
                 <a:solidFill>
                   <a:srgbClr val="10161F"/>
                 </a:solidFill>
@@ -5329,7 +5350,7 @@
               </a:rPr>
               <a:t>확인 중</a:t>
             </a:r>
-            <a:endParaRPr lang="en-US" sz="1700" dirty="0"/>
+            <a:endParaRPr lang="en-US" sz="2200" dirty="0"/>
           </a:p>
         </p:txBody>
       </p:sp>
@@ -5801,7 +5822,7 @@
                 <a:ea typeface="Pretendard" pitchFamily="34" charset="-122"/>
                 <a:cs typeface="Pretendard" pitchFamily="34" charset="-120"/>
               </a:rPr>
-              <a:t>크리딜   |   </a:t>
+              <a:t>크리딜</a:t>
             </a:r>
             <a:endParaRPr lang="en-US" sz="800" dirty="0"/>
           </a:p>
@@ -6048,7 +6069,7 @@
         <p:spPr>
           <a:xfrm>
             <a:off x="5989320" y="1481328"/>
-            <a:ext cx="1560003" cy="493776"/>
+            <a:ext cx="1560003" cy="457200"/>
           </a:xfrm>
           <a:prstGeom prst="rect">
             <a:avLst/>
@@ -6067,7 +6088,7 @@
               <a:buNone/>
             </a:pPr>
             <a:r>
-              <a:rPr lang="en-US" sz="1300" dirty="0">
+              <a:rPr lang="en-US" sz="1250" dirty="0">
                 <a:solidFill>
                   <a:srgbClr val="718096"/>
                 </a:solidFill>
@@ -6077,7 +6098,7 @@
               </a:rPr>
               <a:t>대중교통</a:t>
             </a:r>
-            <a:endParaRPr lang="en-US" sz="1300" dirty="0"/>
+            <a:endParaRPr lang="en-US" sz="1250" dirty="0"/>
           </a:p>
         </p:txBody>
       </p:sp>
@@ -6090,7 +6111,7 @@
         <p:spPr>
           <a:xfrm>
             <a:off x="7549323" y="1481328"/>
-            <a:ext cx="4011436" cy="493776"/>
+            <a:ext cx="4011436" cy="457200"/>
           </a:xfrm>
           <a:prstGeom prst="rect">
             <a:avLst/>
@@ -6109,7 +6130,7 @@
               <a:buNone/>
             </a:pPr>
             <a:r>
-              <a:rPr lang="en-US" sz="1300" b="1" dirty="0">
+              <a:rPr lang="en-US" sz="1250" b="1" dirty="0">
                 <a:solidFill>
                   <a:srgbClr val="10161F"/>
                 </a:solidFill>
@@ -6117,9 +6138,9 @@
                 <a:ea typeface="Pretendard" pitchFamily="34" charset="-122"/>
                 <a:cs typeface="Pretendard" pitchFamily="34" charset="-120"/>
               </a:rPr>
-              <a:t>인접 지하철역 역세권 (상세 확인 필요)</a:t>
-            </a:r>
-            <a:endParaRPr lang="en-US" sz="1300" dirty="0"/>
+              <a:t>지하철 및 간선버스 인접</a:t>
+            </a:r>
+            <a:endParaRPr lang="en-US" sz="1250" dirty="0"/>
           </a:p>
         </p:txBody>
       </p:sp>
@@ -6131,7 +6152,7 @@
         </p:nvSpPr>
         <p:spPr>
           <a:xfrm>
-            <a:off x="5989320" y="1975104"/>
+            <a:off x="5989320" y="1938528"/>
             <a:ext cx="5571439" cy="0"/>
           </a:xfrm>
           <a:prstGeom prst="line">
@@ -6154,8 +6175,8 @@
         </p:nvSpPr>
         <p:spPr>
           <a:xfrm>
-            <a:off x="5989320" y="1975104"/>
-            <a:ext cx="1560003" cy="493776"/>
+            <a:off x="5989320" y="1938528"/>
+            <a:ext cx="1560003" cy="457200"/>
           </a:xfrm>
           <a:prstGeom prst="rect">
             <a:avLst/>
@@ -6174,7 +6195,7 @@
               <a:buNone/>
             </a:pPr>
             <a:r>
-              <a:rPr lang="en-US" sz="1300" dirty="0">
+              <a:rPr lang="en-US" sz="1250" dirty="0">
                 <a:solidFill>
                   <a:srgbClr val="718096"/>
                 </a:solidFill>
@@ -6184,7 +6205,7 @@
               </a:rPr>
               <a:t>상권권역</a:t>
             </a:r>
-            <a:endParaRPr lang="en-US" sz="1300" dirty="0"/>
+            <a:endParaRPr lang="en-US" sz="1250" dirty="0"/>
           </a:p>
         </p:txBody>
       </p:sp>
@@ -6196,8 +6217,8 @@
         </p:nvSpPr>
         <p:spPr>
           <a:xfrm>
-            <a:off x="7549323" y="1975104"/>
-            <a:ext cx="4011436" cy="493776"/>
+            <a:off x="7549323" y="1938528"/>
+            <a:ext cx="4011436" cy="457200"/>
           </a:xfrm>
           <a:prstGeom prst="rect">
             <a:avLst/>
@@ -6216,7 +6237,7 @@
               <a:buNone/>
             </a:pPr>
             <a:r>
-              <a:rPr lang="en-US" sz="1300" b="1" dirty="0">
+              <a:rPr lang="en-US" sz="1250" b="1" dirty="0">
                 <a:solidFill>
                   <a:srgbClr val="10161F"/>
                 </a:solidFill>
@@ -6226,7 +6247,7 @@
               </a:rPr>
               <a:t>강남권역 주요 상업·업무 권역</a:t>
             </a:r>
-            <a:endParaRPr lang="en-US" sz="1300" dirty="0"/>
+            <a:endParaRPr lang="en-US" sz="1250" dirty="0"/>
           </a:p>
         </p:txBody>
       </p:sp>
@@ -6238,7 +6259,7 @@
         </p:nvSpPr>
         <p:spPr>
           <a:xfrm>
-            <a:off x="5989320" y="2606040"/>
+            <a:off x="5989320" y="2505456"/>
             <a:ext cx="5571439" cy="658368"/>
           </a:xfrm>
           <a:prstGeom prst="roundRect">
@@ -6260,7 +6281,7 @@
         </p:nvSpPr>
         <p:spPr>
           <a:xfrm>
-            <a:off x="5989320" y="2660904"/>
+            <a:off x="5989320" y="2560320"/>
             <a:ext cx="36576" cy="548640"/>
           </a:xfrm>
           <a:prstGeom prst="rect">
@@ -6280,7 +6301,7 @@
         </p:nvSpPr>
         <p:spPr>
           <a:xfrm>
-            <a:off x="6135624" y="2697480"/>
+            <a:off x="6135624" y="2596896"/>
             <a:ext cx="5315407" cy="201168"/>
           </a:xfrm>
           <a:prstGeom prst="rect">
@@ -6319,7 +6340,7 @@
         </p:nvSpPr>
         <p:spPr>
           <a:xfrm>
-            <a:off x="6135624" y="2898648"/>
+            <a:off x="6135624" y="2798064"/>
             <a:ext cx="5315407" cy="329184"/>
           </a:xfrm>
           <a:prstGeom prst="rect">
@@ -6387,7 +6408,7 @@
                 <a:ea typeface="Pretendard" pitchFamily="34" charset="-122"/>
                 <a:cs typeface="Pretendard" pitchFamily="34" charset="-120"/>
               </a:rPr>
-              <a:t>크리딜   |   </a:t>
+              <a:t>크리딜</a:t>
             </a:r>
             <a:endParaRPr lang="en-US" sz="800" dirty="0"/>
           </a:p>
@@ -6649,7 +6670,7 @@
         <p:spPr>
           <a:xfrm>
             <a:off x="502920" y="1645920"/>
-            <a:ext cx="1920240" cy="420624"/>
+            <a:ext cx="1920240" cy="402336"/>
           </a:xfrm>
           <a:prstGeom prst="rect">
             <a:avLst/>
@@ -6691,7 +6712,7 @@
         <p:spPr>
           <a:xfrm>
             <a:off x="2423160" y="1645920"/>
-            <a:ext cx="4937760" cy="420624"/>
+            <a:ext cx="4937760" cy="402336"/>
           </a:xfrm>
           <a:prstGeom prst="rect">
             <a:avLst/>
@@ -6732,7 +6753,7 @@
         </p:nvSpPr>
         <p:spPr>
           <a:xfrm>
-            <a:off x="502920" y="2066544"/>
+            <a:off x="502920" y="2048256"/>
             <a:ext cx="6858000" cy="0"/>
           </a:xfrm>
           <a:prstGeom prst="line">
@@ -6755,8 +6776,8 @@
         </p:nvSpPr>
         <p:spPr>
           <a:xfrm>
-            <a:off x="502920" y="2066544"/>
-            <a:ext cx="1920240" cy="420624"/>
+            <a:off x="502920" y="2048256"/>
+            <a:ext cx="1920240" cy="402336"/>
           </a:xfrm>
           <a:prstGeom prst="rect">
             <a:avLst/>
@@ -6797,8 +6818,8 @@
         </p:nvSpPr>
         <p:spPr>
           <a:xfrm>
-            <a:off x="2423160" y="2066544"/>
-            <a:ext cx="4937760" cy="420624"/>
+            <a:off x="2423160" y="2048256"/>
+            <a:ext cx="4937760" cy="402336"/>
           </a:xfrm>
           <a:prstGeom prst="rect">
             <a:avLst/>
@@ -6929,7 +6950,7 @@
                 <a:ea typeface="Pretendard" pitchFamily="34" charset="-122"/>
                 <a:cs typeface="Pretendard" pitchFamily="34" charset="-120"/>
               </a:rPr>
-              <a:t>토지 및 건축 규제 포인트</a:t>
+              <a:t>토지 및 건축 규제</a:t>
             </a:r>
             <a:endParaRPr lang="en-US" sz="1050" dirty="0"/>
           </a:p>
@@ -6972,7 +6993,131 @@
                 <a:ea typeface="Pretendard" pitchFamily="34" charset="-122"/>
                 <a:cs typeface="Pretendard" pitchFamily="34" charset="-120"/>
               </a:rPr>
-              <a:t>용도지역·용도지구 기준 건폐율/용적률 상한 확인</a:t>
+              <a:t>토지이용계획 열람 및 건축 규제 확인 필요</a:t>
+            </a:r>
+            <a:endParaRPr lang="en-US" sz="980" dirty="0"/>
+          </a:p>
+        </p:txBody>
+      </p:sp>
+      <p:sp>
+        <p:nvSpPr>
+          <p:cNvPr id="17" name="Shape 15"/>
+          <p:cNvSpPr/>
+          <p:nvPr/>
+        </p:nvSpPr>
+        <p:spPr>
+          <a:xfrm>
+            <a:off x="7720279" y="3977640"/>
+            <a:ext cx="3840480" cy="2148840"/>
+          </a:xfrm>
+          <a:prstGeom prst="roundRect">
+            <a:avLst>
+              <a:gd name="adj" fmla="val 2553"/>
+            </a:avLst>
+          </a:prstGeom>
+          <a:solidFill>
+            <a:srgbClr val="BEE3F8"/>
+          </a:solidFill>
+          <a:ln/>
+        </p:spPr>
+      </p:sp>
+      <p:sp>
+        <p:nvSpPr>
+          <p:cNvPr id="18" name="Shape 16"/>
+          <p:cNvSpPr/>
+          <p:nvPr/>
+        </p:nvSpPr>
+        <p:spPr>
+          <a:xfrm>
+            <a:off x="7720279" y="4032504"/>
+            <a:ext cx="36576" cy="2039112"/>
+          </a:xfrm>
+          <a:prstGeom prst="rect">
+            <a:avLst/>
+          </a:prstGeom>
+          <a:solidFill>
+            <a:srgbClr val="2B6CB0"/>
+          </a:solidFill>
+          <a:ln/>
+        </p:spPr>
+      </p:sp>
+      <p:sp>
+        <p:nvSpPr>
+          <p:cNvPr id="19" name="Text 17"/>
+          <p:cNvSpPr/>
+          <p:nvPr/>
+        </p:nvSpPr>
+        <p:spPr>
+          <a:xfrm>
+            <a:off x="7866583" y="4069080"/>
+            <a:ext cx="3584448" cy="201168"/>
+          </a:xfrm>
+          <a:prstGeom prst="rect">
+            <a:avLst/>
+          </a:prstGeom>
+          <a:noFill/>
+          <a:ln/>
+        </p:spPr>
+        <p:txBody>
+          <a:bodyPr wrap="square" lIns="0" tIns="0" rIns="0" bIns="0" rtlCol="0" anchor="ctr"/>
+          <a:lstStyle/>
+          <a:p>
+            <a:pPr indent="0" marL="0">
+              <a:buNone/>
+            </a:pPr>
+            <a:r>
+              <a:rPr lang="en-US" sz="1050" b="1" dirty="0">
+                <a:solidFill>
+                  <a:srgbClr val="2B6CB0"/>
+                </a:solidFill>
+                <a:latin typeface="Pretendard" pitchFamily="34" charset="0"/>
+                <a:ea typeface="Pretendard" pitchFamily="34" charset="-122"/>
+                <a:cs typeface="Pretendard" pitchFamily="34" charset="-120"/>
+              </a:rPr>
+              <a:t>권리관계 및 공적장부</a:t>
+            </a:r>
+            <a:endParaRPr lang="en-US" sz="1050" dirty="0"/>
+          </a:p>
+        </p:txBody>
+      </p:sp>
+      <p:sp>
+        <p:nvSpPr>
+          <p:cNvPr id="20" name="Text 18"/>
+          <p:cNvSpPr/>
+          <p:nvPr/>
+        </p:nvSpPr>
+        <p:spPr>
+          <a:xfrm>
+            <a:off x="7866583" y="4270248"/>
+            <a:ext cx="3584448" cy="1819656"/>
+          </a:xfrm>
+          <a:prstGeom prst="rect">
+            <a:avLst/>
+          </a:prstGeom>
+          <a:noFill/>
+          <a:ln/>
+        </p:spPr>
+        <p:txBody>
+          <a:bodyPr wrap="square" lIns="0" tIns="0" rIns="0" bIns="0" rtlCol="0" anchor="t"/>
+          <a:lstStyle/>
+          <a:p>
+            <a:pPr marL="342900" indent="-342900">
+              <a:lnSpc>
+                <a:spcPct val="108000"/>
+              </a:lnSpc>
+              <a:buSzPct val="100000"/>
+              <a:buChar char="•"/>
+            </a:pPr>
+            <a:r>
+              <a:rPr lang="en-US" sz="980" dirty="0">
+                <a:solidFill>
+                  <a:srgbClr val="10161F"/>
+                </a:solidFill>
+                <a:latin typeface="Pretendard" pitchFamily="34" charset="0"/>
+                <a:ea typeface="Pretendard" pitchFamily="34" charset="-122"/>
+                <a:cs typeface="Pretendard" pitchFamily="34" charset="-120"/>
+              </a:rPr>
+              <a:t>등기부등본 갑구 소유권 확인</a:t>
             </a:r>
             <a:endParaRPr lang="en-US" sz="980" dirty="0"/>
           </a:p>
@@ -6996,7 +7141,7 @@
                 <a:ea typeface="Pretendard" pitchFamily="34" charset="-122"/>
                 <a:cs typeface="Pretendard" pitchFamily="34" charset="-120"/>
               </a:rPr>
-              <a:t>필지 형상 및 접도 조건에 따른 건축 가능 면적 검토</a:t>
+              <a:t>건축물대장 기재 사항 실물 대조</a:t>
             </a:r>
             <a:endParaRPr lang="en-US" sz="980" dirty="0"/>
           </a:p>
@@ -7020,7 +7165,7 @@
                 <a:ea typeface="Pretendard" pitchFamily="34" charset="-122"/>
                 <a:cs typeface="Pretendard" pitchFamily="34" charset="-120"/>
               </a:rPr>
-              <a:t>토지이용계획 열람 및 개발행위허가 제한 여부 확인</a:t>
+              <a:t>개별공시지가 및 실거래가 비교</a:t>
             </a:r>
             <a:endParaRPr lang="en-US" sz="980" dirty="0"/>
           </a:p>
@@ -7028,56 +7173,14 @@
       </p:sp>
       <p:sp>
         <p:nvSpPr>
-          <p:cNvPr id="17" name="Shape 15"/>
-          <p:cNvSpPr/>
-          <p:nvPr/>
-        </p:nvSpPr>
-        <p:spPr>
-          <a:xfrm>
-            <a:off x="7720279" y="3977640"/>
-            <a:ext cx="3840480" cy="2148840"/>
-          </a:xfrm>
-          <a:prstGeom prst="roundRect">
-            <a:avLst>
-              <a:gd name="adj" fmla="val 2553"/>
-            </a:avLst>
-          </a:prstGeom>
-          <a:solidFill>
-            <a:srgbClr val="BEE3F8"/>
-          </a:solidFill>
-          <a:ln/>
-        </p:spPr>
-      </p:sp>
-      <p:sp>
-        <p:nvSpPr>
-          <p:cNvPr id="18" name="Shape 16"/>
-          <p:cNvSpPr/>
-          <p:nvPr/>
-        </p:nvSpPr>
-        <p:spPr>
-          <a:xfrm>
-            <a:off x="7720279" y="4032504"/>
-            <a:ext cx="36576" cy="2039112"/>
-          </a:xfrm>
-          <a:prstGeom prst="rect">
-            <a:avLst/>
-          </a:prstGeom>
-          <a:solidFill>
-            <a:srgbClr val="2B6CB0"/>
-          </a:solidFill>
-          <a:ln/>
-        </p:spPr>
-      </p:sp>
-      <p:sp>
-        <p:nvSpPr>
-          <p:cNvPr id="19" name="Text 17"/>
-          <p:cNvSpPr/>
-          <p:nvPr/>
-        </p:nvSpPr>
-        <p:spPr>
-          <a:xfrm>
-            <a:off x="7866583" y="4069080"/>
-            <a:ext cx="3584448" cy="201168"/>
+          <p:cNvPr id="21" name="Text 19"/>
+          <p:cNvSpPr/>
+          <p:nvPr/>
+        </p:nvSpPr>
+        <p:spPr>
+          <a:xfrm>
+            <a:off x="502920" y="6382512"/>
+            <a:ext cx="7315200" cy="219456"/>
           </a:xfrm>
           <a:prstGeom prst="rect">
             <a:avLst/>
@@ -7093,145 +7196,15 @@
               <a:buNone/>
             </a:pPr>
             <a:r>
-              <a:rPr lang="en-US" sz="1050" b="1" dirty="0">
-                <a:solidFill>
-                  <a:srgbClr val="2B6CB0"/>
+              <a:rPr lang="en-US" sz="800" dirty="0">
+                <a:solidFill>
+                  <a:srgbClr val="718096"/>
                 </a:solidFill>
                 <a:latin typeface="Pretendard" pitchFamily="34" charset="0"/>
                 <a:ea typeface="Pretendard" pitchFamily="34" charset="-122"/>
                 <a:cs typeface="Pretendard" pitchFamily="34" charset="-120"/>
               </a:rPr>
-              <a:t>권리관계 및 공적장부</a:t>
-            </a:r>
-            <a:endParaRPr lang="en-US" sz="1050" dirty="0"/>
-          </a:p>
-        </p:txBody>
-      </p:sp>
-      <p:sp>
-        <p:nvSpPr>
-          <p:cNvPr id="20" name="Text 18"/>
-          <p:cNvSpPr/>
-          <p:nvPr/>
-        </p:nvSpPr>
-        <p:spPr>
-          <a:xfrm>
-            <a:off x="7866583" y="4270248"/>
-            <a:ext cx="3584448" cy="1819656"/>
-          </a:xfrm>
-          <a:prstGeom prst="rect">
-            <a:avLst/>
-          </a:prstGeom>
-          <a:noFill/>
-          <a:ln/>
-        </p:spPr>
-        <p:txBody>
-          <a:bodyPr wrap="square" lIns="0" tIns="0" rIns="0" bIns="0" rtlCol="0" anchor="t"/>
-          <a:lstStyle/>
-          <a:p>
-            <a:pPr marL="342900" indent="-342900">
-              <a:lnSpc>
-                <a:spcPct val="108000"/>
-              </a:lnSpc>
-              <a:buSzPct val="100000"/>
-              <a:buChar char="•"/>
-            </a:pPr>
-            <a:r>
-              <a:rPr lang="en-US" sz="980" dirty="0">
-                <a:solidFill>
-                  <a:srgbClr val="10161F"/>
-                </a:solidFill>
-                <a:latin typeface="Pretendard" pitchFamily="34" charset="0"/>
-                <a:ea typeface="Pretendard" pitchFamily="34" charset="-122"/>
-                <a:cs typeface="Pretendard" pitchFamily="34" charset="-120"/>
-              </a:rPr>
-              <a:t>등기부등본 갑구 소유권 및 을구 근저당·가압류 확인</a:t>
-            </a:r>
-            <a:endParaRPr lang="en-US" sz="980" dirty="0"/>
-          </a:p>
-          <a:p>
-            <a:pPr marL="342900" indent="-342900">
-              <a:lnSpc>
-                <a:spcPct val="108000"/>
-              </a:lnSpc>
-              <a:spcBef>
-                <a:spcPts val="300"/>
-              </a:spcBef>
-              <a:buSzPct val="100000"/>
-              <a:buChar char="•"/>
-            </a:pPr>
-            <a:r>
-              <a:rPr lang="en-US" sz="980" dirty="0">
-                <a:solidFill>
-                  <a:srgbClr val="10161F"/>
-                </a:solidFill>
-                <a:latin typeface="Pretendard" pitchFamily="34" charset="0"/>
-                <a:ea typeface="Pretendard" pitchFamily="34" charset="-122"/>
-                <a:cs typeface="Pretendard" pitchFamily="34" charset="-120"/>
-              </a:rPr>
-              <a:t>건축물대장 기재 사항과 실물 현황 대조 점검</a:t>
-            </a:r>
-            <a:endParaRPr lang="en-US" sz="980" dirty="0"/>
-          </a:p>
-          <a:p>
-            <a:pPr marL="342900" indent="-342900">
-              <a:lnSpc>
-                <a:spcPct val="108000"/>
-              </a:lnSpc>
-              <a:spcBef>
-                <a:spcPts val="300"/>
-              </a:spcBef>
-              <a:buSzPct val="100000"/>
-              <a:buChar char="•"/>
-            </a:pPr>
-            <a:r>
-              <a:rPr lang="en-US" sz="980" dirty="0">
-                <a:solidFill>
-                  <a:srgbClr val="10161F"/>
-                </a:solidFill>
-                <a:latin typeface="Pretendard" pitchFamily="34" charset="0"/>
-                <a:ea typeface="Pretendard" pitchFamily="34" charset="-122"/>
-                <a:cs typeface="Pretendard" pitchFamily="34" charset="-120"/>
-              </a:rPr>
-              <a:t>개별공시지가 및 실거래가 비교 분석</a:t>
-            </a:r>
-            <a:endParaRPr lang="en-US" sz="980" dirty="0"/>
-          </a:p>
-        </p:txBody>
-      </p:sp>
-      <p:sp>
-        <p:nvSpPr>
-          <p:cNvPr id="21" name="Text 19"/>
-          <p:cNvSpPr/>
-          <p:nvPr/>
-        </p:nvSpPr>
-        <p:spPr>
-          <a:xfrm>
-            <a:off x="502920" y="6382512"/>
-            <a:ext cx="7315200" cy="219456"/>
-          </a:xfrm>
-          <a:prstGeom prst="rect">
-            <a:avLst/>
-          </a:prstGeom>
-          <a:noFill/>
-          <a:ln/>
-        </p:spPr>
-        <p:txBody>
-          <a:bodyPr wrap="square" lIns="0" tIns="0" rIns="0" bIns="0" rtlCol="0" anchor="ctr"/>
-          <a:lstStyle/>
-          <a:p>
-            <a:pPr indent="0" marL="0">
-              <a:buNone/>
-            </a:pPr>
-            <a:r>
-              <a:rPr lang="en-US" sz="800" dirty="0">
-                <a:solidFill>
-                  <a:srgbClr val="718096"/>
-                </a:solidFill>
-                <a:latin typeface="Pretendard" pitchFamily="34" charset="0"/>
-                <a:ea typeface="Pretendard" pitchFamily="34" charset="-122"/>
-                <a:cs typeface="Pretendard" pitchFamily="34" charset="-120"/>
-              </a:rPr>
-              <a:t>크리딜   |   </a:t>
+              <a:t>크리딜</a:t>
             </a:r>
             <a:endParaRPr lang="en-US" sz="800" dirty="0"/>
           </a:p>
@@ -7493,7 +7466,7 @@
         <p:spPr>
           <a:xfrm>
             <a:off x="502920" y="1645920"/>
-            <a:ext cx="1920240" cy="420624"/>
+            <a:ext cx="1920240" cy="402336"/>
           </a:xfrm>
           <a:prstGeom prst="rect">
             <a:avLst/>
@@ -7535,7 +7508,7 @@
         <p:spPr>
           <a:xfrm>
             <a:off x="2423160" y="1645920"/>
-            <a:ext cx="4937760" cy="420624"/>
+            <a:ext cx="4937760" cy="402336"/>
           </a:xfrm>
           <a:prstGeom prst="rect">
             <a:avLst/>
@@ -7576,7 +7549,7 @@
         </p:nvSpPr>
         <p:spPr>
           <a:xfrm>
-            <a:off x="502920" y="2066544"/>
+            <a:off x="502920" y="2048256"/>
             <a:ext cx="6858000" cy="0"/>
           </a:xfrm>
           <a:prstGeom prst="line">
@@ -7599,8 +7572,8 @@
         </p:nvSpPr>
         <p:spPr>
           <a:xfrm>
-            <a:off x="502920" y="2066544"/>
-            <a:ext cx="1920240" cy="420624"/>
+            <a:off x="502920" y="2048256"/>
+            <a:ext cx="1920240" cy="402336"/>
           </a:xfrm>
           <a:prstGeom prst="rect">
             <a:avLst/>
@@ -7641,8 +7614,8 @@
         </p:nvSpPr>
         <p:spPr>
           <a:xfrm>
-            <a:off x="2423160" y="2066544"/>
-            <a:ext cx="4937760" cy="420624"/>
+            <a:off x="2423160" y="2048256"/>
+            <a:ext cx="4937760" cy="402336"/>
           </a:xfrm>
           <a:prstGeom prst="rect">
             <a:avLst/>
@@ -7843,7 +7816,7 @@
                 <a:ea typeface="Pretendard" pitchFamily="34" charset="-122"/>
                 <a:cs typeface="Pretendard" pitchFamily="34" charset="-120"/>
               </a:rPr>
-              <a:t>크리딜   |   </a:t>
+              <a:t>크리딜</a:t>
             </a:r>
             <a:endParaRPr lang="en-US" sz="800" dirty="0"/>
           </a:p>
@@ -8201,7 +8174,7 @@
                 <a:ea typeface="Pretendard" pitchFamily="34" charset="-122"/>
                 <a:cs typeface="Pretendard" pitchFamily="34" charset="-120"/>
               </a:rPr>
-              <a:t>210.0억 원</a:t>
+              <a:t>210억 원</a:t>
             </a:r>
             <a:endParaRPr lang="en-US" sz="1150" dirty="0"/>
           </a:p>
@@ -8629,7 +8602,7 @@
                 <a:ea typeface="Pretendard" pitchFamily="34" charset="-122"/>
                 <a:cs typeface="Pretendard" pitchFamily="34" charset="-120"/>
               </a:rPr>
-              <a:t>0.0억 원</a:t>
+              <a:t>-</a:t>
             </a:r>
             <a:endParaRPr lang="en-US" sz="1150" dirty="0"/>
           </a:p>
@@ -8736,7 +8709,7 @@
                 <a:ea typeface="Pretendard" pitchFamily="34" charset="-122"/>
                 <a:cs typeface="Pretendard" pitchFamily="34" charset="-120"/>
               </a:rPr>
-              <a:t>105.0억 원</a:t>
+              <a:t>105억 원</a:t>
             </a:r>
             <a:endParaRPr lang="en-US" sz="1150" dirty="0"/>
           </a:p>
@@ -9467,7 +9440,7 @@
                           <a:ea typeface="Pretendard" pitchFamily="34" charset="-122"/>
                           <a:cs typeface="Pretendard" pitchFamily="34" charset="-120"/>
                         </a:rPr>
-                        <a:t>0.00%</a:t>
+                        <a:t>-</a:t>
                       </a:r>
                       <a:endParaRPr lang="en-US" sz="1100" dirty="0">
                         <a:latin typeface="Pretendard" charset="0"/>
@@ -9769,7 +9742,7 @@
                           <a:ea typeface="Pretendard" pitchFamily="34" charset="-122"/>
                           <a:cs typeface="Pretendard" pitchFamily="34" charset="-120"/>
                         </a:rPr>
-                        <a:t>0.00%</a:t>
+                        <a:t>-</a:t>
                       </a:r>
                       <a:endParaRPr lang="en-US" sz="1100" dirty="0">
                         <a:latin typeface="Pretendard" charset="0"/>
@@ -10071,7 +10044,7 @@
                           <a:ea typeface="Pretendard" pitchFamily="34" charset="-122"/>
                           <a:cs typeface="Pretendard" pitchFamily="34" charset="-120"/>
                         </a:rPr>
-                        <a:t>0.00%</a:t>
+                        <a:t>-</a:t>
                       </a:r>
                       <a:endParaRPr lang="en-US" sz="1100" dirty="0">
                         <a:latin typeface="Pretendard" charset="0"/>
@@ -10373,7 +10346,7 @@
                           <a:ea typeface="Pretendard" pitchFamily="34" charset="-122"/>
                           <a:cs typeface="Pretendard" pitchFamily="34" charset="-120"/>
                         </a:rPr>
-                        <a:t>0.00%</a:t>
+                        <a:t>-</a:t>
                       </a:r>
                       <a:endParaRPr lang="en-US" sz="1100" dirty="0">
                         <a:latin typeface="Pretendard" charset="0"/>
@@ -10585,7 +10558,7 @@
                 <a:ea typeface="Pretendard" pitchFamily="34" charset="-122"/>
                 <a:cs typeface="Pretendard" pitchFamily="34" charset="-120"/>
               </a:rPr>
-              <a:t>크리딜   |   </a:t>
+              <a:t>크리딜</a:t>
             </a:r>
             <a:endParaRPr lang="en-US" sz="800" dirty="0"/>
           </a:p>
@@ -10940,7 +10913,7 @@
                 <a:ea typeface="Pretendard" pitchFamily="34" charset="-122"/>
                 <a:cs typeface="Pretendard" pitchFamily="34" charset="-120"/>
               </a:rPr>
-              <a:t>크리딜   |   </a:t>
+              <a:t>크리딜</a:t>
             </a:r>
             <a:endParaRPr lang="en-US" sz="800" dirty="0"/>
           </a:p>
@@ -11425,7 +11398,7 @@
                 <a:ea typeface="Pretendard" pitchFamily="34" charset="-122"/>
                 <a:cs typeface="Pretendard" pitchFamily="34" charset="-120"/>
               </a:rPr>
-              <a:t>크리딜   |   </a:t>
+              <a:t>크리딜</a:t>
             </a:r>
             <a:endParaRPr lang="en-US" sz="800" dirty="0"/>
           </a:p>
@@ -11687,7 +11660,7 @@
         <p:spPr>
           <a:xfrm>
             <a:off x="502920" y="1719072"/>
-            <a:ext cx="5368900" cy="868680"/>
+            <a:ext cx="5368900" cy="749808"/>
           </a:xfrm>
           <a:prstGeom prst="rect">
             <a:avLst/>
@@ -11711,8 +11684,8 @@
         </p:nvSpPr>
         <p:spPr>
           <a:xfrm>
-            <a:off x="640080" y="1883664"/>
-            <a:ext cx="320040" cy="320040"/>
+            <a:off x="640080" y="1947672"/>
+            <a:ext cx="292608" cy="292608"/>
           </a:xfrm>
           <a:prstGeom prst="rect">
             <a:avLst/>
@@ -11731,8 +11704,8 @@
         </p:nvSpPr>
         <p:spPr>
           <a:xfrm>
-            <a:off x="640080" y="1883664"/>
-            <a:ext cx="320040" cy="320040"/>
+            <a:off x="640080" y="1947672"/>
+            <a:ext cx="292608" cy="292608"/>
           </a:xfrm>
           <a:prstGeom prst="rect">
             <a:avLst/>
@@ -11748,7 +11721,7 @@
               <a:buNone/>
             </a:pPr>
             <a:r>
-              <a:rPr lang="en-US" sz="1100" b="1" dirty="0">
+              <a:rPr lang="en-US" sz="1050" b="1" dirty="0">
                 <a:solidFill>
                   <a:srgbClr val="FFFFFF"/>
                 </a:solidFill>
@@ -11758,7 +11731,7 @@
               </a:rPr>
               <a:t>✓</a:t>
             </a:r>
-            <a:endParaRPr lang="en-US" sz="1100" dirty="0"/>
+            <a:endParaRPr lang="en-US" sz="1050" dirty="0"/>
           </a:p>
         </p:txBody>
       </p:sp>
@@ -11770,8 +11743,8 @@
         </p:nvSpPr>
         <p:spPr>
           <a:xfrm>
-            <a:off x="1051560" y="1810512"/>
-            <a:ext cx="4683100" cy="722376"/>
+            <a:off x="1033272" y="1792224"/>
+            <a:ext cx="4710532" cy="603504"/>
           </a:xfrm>
           <a:prstGeom prst="rect">
             <a:avLst/>
@@ -11812,8 +11785,8 @@
         </p:nvSpPr>
         <p:spPr>
           <a:xfrm>
-            <a:off x="502920" y="2715768"/>
-            <a:ext cx="5368900" cy="868680"/>
+            <a:off x="502920" y="2542032"/>
+            <a:ext cx="5368900" cy="749808"/>
           </a:xfrm>
           <a:prstGeom prst="rect">
             <a:avLst/>
@@ -11837,8 +11810,8 @@
         </p:nvSpPr>
         <p:spPr>
           <a:xfrm>
-            <a:off x="640080" y="2880360"/>
-            <a:ext cx="320040" cy="320040"/>
+            <a:off x="640080" y="2770632"/>
+            <a:ext cx="292608" cy="292608"/>
           </a:xfrm>
           <a:prstGeom prst="rect">
             <a:avLst/>
@@ -11857,8 +11830,8 @@
         </p:nvSpPr>
         <p:spPr>
           <a:xfrm>
-            <a:off x="640080" y="2880360"/>
-            <a:ext cx="320040" cy="320040"/>
+            <a:off x="640080" y="2770632"/>
+            <a:ext cx="292608" cy="292608"/>
           </a:xfrm>
           <a:prstGeom prst="rect">
             <a:avLst/>
@@ -11874,7 +11847,7 @@
               <a:buNone/>
             </a:pPr>
             <a:r>
-              <a:rPr lang="en-US" sz="1100" b="1" dirty="0">
+              <a:rPr lang="en-US" sz="1050" b="1" dirty="0">
                 <a:solidFill>
                   <a:srgbClr val="FFFFFF"/>
                 </a:solidFill>
@@ -11884,7 +11857,7 @@
               </a:rPr>
               <a:t>✓</a:t>
             </a:r>
-            <a:endParaRPr lang="en-US" sz="1100" dirty="0"/>
+            <a:endParaRPr lang="en-US" sz="1050" dirty="0"/>
           </a:p>
         </p:txBody>
       </p:sp>
@@ -11896,8 +11869,8 @@
         </p:nvSpPr>
         <p:spPr>
           <a:xfrm>
-            <a:off x="1051560" y="2807208"/>
-            <a:ext cx="4683100" cy="722376"/>
+            <a:off x="1033272" y="2615184"/>
+            <a:ext cx="4710532" cy="603504"/>
           </a:xfrm>
           <a:prstGeom prst="rect">
             <a:avLst/>
@@ -11938,8 +11911,8 @@
         </p:nvSpPr>
         <p:spPr>
           <a:xfrm>
-            <a:off x="502920" y="3712464"/>
-            <a:ext cx="5368900" cy="868680"/>
+            <a:off x="502920" y="3364992"/>
+            <a:ext cx="5368900" cy="749808"/>
           </a:xfrm>
           <a:prstGeom prst="rect">
             <a:avLst/>
@@ -11963,8 +11936,8 @@
         </p:nvSpPr>
         <p:spPr>
           <a:xfrm>
-            <a:off x="640080" y="3877056"/>
-            <a:ext cx="320040" cy="320040"/>
+            <a:off x="640080" y="3593592"/>
+            <a:ext cx="292608" cy="292608"/>
           </a:xfrm>
           <a:prstGeom prst="rect">
             <a:avLst/>
@@ -11983,8 +11956,8 @@
         </p:nvSpPr>
         <p:spPr>
           <a:xfrm>
-            <a:off x="640080" y="3877056"/>
-            <a:ext cx="320040" cy="320040"/>
+            <a:off x="640080" y="3593592"/>
+            <a:ext cx="292608" cy="292608"/>
           </a:xfrm>
           <a:prstGeom prst="rect">
             <a:avLst/>
@@ -12000,7 +11973,7 @@
               <a:buNone/>
             </a:pPr>
             <a:r>
-              <a:rPr lang="en-US" sz="1100" b="1" dirty="0">
+              <a:rPr lang="en-US" sz="1050" b="1" dirty="0">
                 <a:solidFill>
                   <a:srgbClr val="FFFFFF"/>
                 </a:solidFill>
@@ -12010,7 +11983,7 @@
               </a:rPr>
               <a:t>✓</a:t>
             </a:r>
-            <a:endParaRPr lang="en-US" sz="1100" dirty="0"/>
+            <a:endParaRPr lang="en-US" sz="1050" dirty="0"/>
           </a:p>
         </p:txBody>
       </p:sp>
@@ -12022,8 +11995,8 @@
         </p:nvSpPr>
         <p:spPr>
           <a:xfrm>
-            <a:off x="1051560" y="3803904"/>
-            <a:ext cx="4683100" cy="722376"/>
+            <a:off x="1033272" y="3438144"/>
+            <a:ext cx="4710532" cy="603504"/>
           </a:xfrm>
           <a:prstGeom prst="rect">
             <a:avLst/>
@@ -12065,7 +12038,7 @@
         <p:spPr>
           <a:xfrm>
             <a:off x="6191860" y="1719072"/>
-            <a:ext cx="5368900" cy="868680"/>
+            <a:ext cx="5368900" cy="749808"/>
           </a:xfrm>
           <a:prstGeom prst="rect">
             <a:avLst/>
@@ -12089,8 +12062,8 @@
         </p:nvSpPr>
         <p:spPr>
           <a:xfrm>
-            <a:off x="6329020" y="1883664"/>
-            <a:ext cx="320040" cy="320040"/>
+            <a:off x="6329020" y="1947672"/>
+            <a:ext cx="292608" cy="292608"/>
           </a:xfrm>
           <a:prstGeom prst="rect">
             <a:avLst/>
@@ -12109,8 +12082,8 @@
         </p:nvSpPr>
         <p:spPr>
           <a:xfrm>
-            <a:off x="6329020" y="1883664"/>
-            <a:ext cx="320040" cy="320040"/>
+            <a:off x="6329020" y="1947672"/>
+            <a:ext cx="292608" cy="292608"/>
           </a:xfrm>
           <a:prstGeom prst="rect">
             <a:avLst/>
@@ -12126,7 +12099,7 @@
               <a:buNone/>
             </a:pPr>
             <a:r>
-              <a:rPr lang="en-US" sz="1100" b="1" dirty="0">
+              <a:rPr lang="en-US" sz="1050" b="1" dirty="0">
                 <a:solidFill>
                   <a:srgbClr val="FFFFFF"/>
                 </a:solidFill>
@@ -12136,7 +12109,7 @@
               </a:rPr>
               <a:t>✓</a:t>
             </a:r>
-            <a:endParaRPr lang="en-US" sz="1100" dirty="0"/>
+            <a:endParaRPr lang="en-US" sz="1050" dirty="0"/>
           </a:p>
         </p:txBody>
       </p:sp>
@@ -12148,8 +12121,8 @@
         </p:nvSpPr>
         <p:spPr>
           <a:xfrm>
-            <a:off x="6740500" y="1810512"/>
-            <a:ext cx="4683100" cy="722376"/>
+            <a:off x="6722212" y="1792224"/>
+            <a:ext cx="4710532" cy="603504"/>
           </a:xfrm>
           <a:prstGeom prst="rect">
             <a:avLst/>
@@ -12190,8 +12163,8 @@
         </p:nvSpPr>
         <p:spPr>
           <a:xfrm>
-            <a:off x="6191860" y="2715768"/>
-            <a:ext cx="5368900" cy="868680"/>
+            <a:off x="6191860" y="2542032"/>
+            <a:ext cx="5368900" cy="749808"/>
           </a:xfrm>
           <a:prstGeom prst="rect">
             <a:avLst/>
@@ -12215,8 +12188,8 @@
         </p:nvSpPr>
         <p:spPr>
           <a:xfrm>
-            <a:off x="6329020" y="2880360"/>
-            <a:ext cx="320040" cy="320040"/>
+            <a:off x="6329020" y="2770632"/>
+            <a:ext cx="292608" cy="292608"/>
           </a:xfrm>
           <a:prstGeom prst="rect">
             <a:avLst/>
@@ -12235,8 +12208,8 @@
         </p:nvSpPr>
         <p:spPr>
           <a:xfrm>
-            <a:off x="6329020" y="2880360"/>
-            <a:ext cx="320040" cy="320040"/>
+            <a:off x="6329020" y="2770632"/>
+            <a:ext cx="292608" cy="292608"/>
           </a:xfrm>
           <a:prstGeom prst="rect">
             <a:avLst/>
@@ -12252,7 +12225,7 @@
               <a:buNone/>
             </a:pPr>
             <a:r>
-              <a:rPr lang="en-US" sz="1100" b="1" dirty="0">
+              <a:rPr lang="en-US" sz="1050" b="1" dirty="0">
                 <a:solidFill>
                   <a:srgbClr val="FFFFFF"/>
                 </a:solidFill>
@@ -12262,7 +12235,7 @@
               </a:rPr>
               <a:t>✓</a:t>
             </a:r>
-            <a:endParaRPr lang="en-US" sz="1100" dirty="0"/>
+            <a:endParaRPr lang="en-US" sz="1050" dirty="0"/>
           </a:p>
         </p:txBody>
       </p:sp>
@@ -12274,8 +12247,8 @@
         </p:nvSpPr>
         <p:spPr>
           <a:xfrm>
-            <a:off x="6740500" y="2807208"/>
-            <a:ext cx="4683100" cy="722376"/>
+            <a:off x="6722212" y="2615184"/>
+            <a:ext cx="4710532" cy="603504"/>
           </a:xfrm>
           <a:prstGeom prst="rect">
             <a:avLst/>
@@ -12316,8 +12289,8 @@
         </p:nvSpPr>
         <p:spPr>
           <a:xfrm>
-            <a:off x="6191860" y="3712464"/>
-            <a:ext cx="5368900" cy="868680"/>
+            <a:off x="6191860" y="3364992"/>
+            <a:ext cx="5368900" cy="749808"/>
           </a:xfrm>
           <a:prstGeom prst="rect">
             <a:avLst/>
@@ -12341,8 +12314,8 @@
         </p:nvSpPr>
         <p:spPr>
           <a:xfrm>
-            <a:off x="6329020" y="3877056"/>
-            <a:ext cx="320040" cy="320040"/>
+            <a:off x="6329020" y="3593592"/>
+            <a:ext cx="292608" cy="292608"/>
           </a:xfrm>
           <a:prstGeom prst="rect">
             <a:avLst/>
@@ -12361,8 +12334,8 @@
         </p:nvSpPr>
         <p:spPr>
           <a:xfrm>
-            <a:off x="6329020" y="3877056"/>
-            <a:ext cx="320040" cy="320040"/>
+            <a:off x="6329020" y="3593592"/>
+            <a:ext cx="292608" cy="292608"/>
           </a:xfrm>
           <a:prstGeom prst="rect">
             <a:avLst/>
@@ -12378,7 +12351,7 @@
               <a:buNone/>
             </a:pPr>
             <a:r>
-              <a:rPr lang="en-US" sz="1100" b="1" dirty="0">
+              <a:rPr lang="en-US" sz="1050" b="1" dirty="0">
                 <a:solidFill>
                   <a:srgbClr val="FFFFFF"/>
                 </a:solidFill>
@@ -12388,7 +12361,7 @@
               </a:rPr>
               <a:t>✓</a:t>
             </a:r>
-            <a:endParaRPr lang="en-US" sz="1100" dirty="0"/>
+            <a:endParaRPr lang="en-US" sz="1050" dirty="0"/>
           </a:p>
         </p:txBody>
       </p:sp>
@@ -12400,8 +12373,8 @@
         </p:nvSpPr>
         <p:spPr>
           <a:xfrm>
-            <a:off x="6740500" y="3803904"/>
-            <a:ext cx="4683100" cy="722376"/>
+            <a:off x="6722212" y="3438144"/>
+            <a:ext cx="4710532" cy="603504"/>
           </a:xfrm>
           <a:prstGeom prst="rect">
             <a:avLst/>
@@ -12526,7 +12499,7 @@
                 <a:ea typeface="Pretendard" pitchFamily="34" charset="-122"/>
                 <a:cs typeface="Pretendard" pitchFamily="34" charset="-120"/>
               </a:rPr>
-              <a:t>크리딜   |   </a:t>
+              <a:t>크리딜</a:t>
             </a:r>
             <a:endParaRPr lang="en-US" sz="800" dirty="0"/>
           </a:p>

--- a/docs/test/stress/e2e-outputs/development_basic_pr04.pptx
+++ b/docs/test/stress/e2e-outputs/development_basic_pr04.pptx
@@ -11897,7 +11897,7 @@
                 <a:ea typeface="Pretendard" pitchFamily="34" charset="-122"/>
                 <a:cs typeface="Pretendard" pitchFamily="34" charset="-120"/>
               </a:rPr>
-              <a:t>임대차 원본 계약서 대조 (보증금, 월임대료, 관리비 실입금 내역 및 제소전화해조서)</a:t>
+              <a:t>임대차 원본 계약서 검토 (보증금, 월임대료, 관리비 실입금 내역 및 제소전화해조서)</a:t>
             </a:r>
             <a:endParaRPr lang="en-US" sz="950" dirty="0"/>
           </a:p>

--- a/docs/test/stress/e2e-outputs/development_basic_pr04.pptx
+++ b/docs/test/stress/e2e-outputs/development_basic_pr04.pptx
@@ -1916,7 +1916,7 @@
         </p:nvSpPr>
         <p:spPr>
           <a:xfrm>
-            <a:off x="502920" y="475488"/>
+            <a:off x="566928" y="475488"/>
             <a:ext cx="2743200" cy="365760"/>
           </a:xfrm>
           <a:prstGeom prst="rect">
@@ -1969,7 +1969,7 @@
         </p:nvSpPr>
         <p:spPr>
           <a:xfrm>
-            <a:off x="502920" y="2029968"/>
+            <a:off x="566928" y="2029968"/>
             <a:ext cx="7315200" cy="274320"/>
           </a:xfrm>
           <a:prstGeom prst="rect">
@@ -2008,8 +2008,8 @@
         </p:nvSpPr>
         <p:spPr>
           <a:xfrm>
-            <a:off x="502920" y="2304288"/>
-            <a:ext cx="7315200" cy="731520"/>
+            <a:off x="566928" y="2304288"/>
+            <a:ext cx="7315200" cy="1051560"/>
           </a:xfrm>
           <a:prstGeom prst="rect">
             <a:avLst/>
@@ -2025,7 +2025,7 @@
               <a:buNone/>
             </a:pPr>
             <a:r>
-              <a:rPr lang="en-US" sz="3000" b="1" dirty="0">
+              <a:rPr lang="en-US" sz="2600" b="1" dirty="0">
                 <a:solidFill>
                   <a:srgbClr val="FFFFFF"/>
                 </a:solidFill>
@@ -2035,7 +2035,7 @@
               </a:rPr>
               <a:t>development 포스처 테스트 문서</a:t>
             </a:r>
-            <a:endParaRPr lang="en-US" sz="3000" dirty="0"/>
+            <a:endParaRPr lang="en-US" sz="2600" dirty="0"/>
           </a:p>
         </p:txBody>
       </p:sp>
@@ -2047,7 +2047,7 @@
         </p:nvSpPr>
         <p:spPr>
           <a:xfrm>
-            <a:off x="502920" y="3090672"/>
+            <a:off x="566928" y="3410712"/>
             <a:ext cx="7315200" cy="329184"/>
           </a:xfrm>
           <a:prstGeom prst="rect">
@@ -2086,7 +2086,7 @@
         </p:nvSpPr>
         <p:spPr>
           <a:xfrm>
-            <a:off x="502920" y="3639312"/>
+            <a:off x="566928" y="3959352"/>
             <a:ext cx="1005840" cy="292608"/>
           </a:xfrm>
           <a:prstGeom prst="roundRect">
@@ -2108,7 +2108,7 @@
         </p:nvSpPr>
         <p:spPr>
           <a:xfrm>
-            <a:off x="502920" y="3639312"/>
+            <a:off x="566928" y="3959352"/>
             <a:ext cx="1005840" cy="292608"/>
           </a:xfrm>
           <a:prstGeom prst="rect">
@@ -2147,7 +2147,7 @@
         </p:nvSpPr>
         <p:spPr>
           <a:xfrm>
-            <a:off x="1600200" y="3639312"/>
+            <a:off x="1664208" y="3959352"/>
             <a:ext cx="1005840" cy="292608"/>
           </a:xfrm>
           <a:prstGeom prst="roundRect">
@@ -2169,7 +2169,7 @@
         </p:nvSpPr>
         <p:spPr>
           <a:xfrm>
-            <a:off x="1600200" y="3639312"/>
+            <a:off x="1664208" y="3959352"/>
             <a:ext cx="1005840" cy="292608"/>
           </a:xfrm>
           <a:prstGeom prst="rect">
@@ -2208,7 +2208,7 @@
         </p:nvSpPr>
         <p:spPr>
           <a:xfrm>
-            <a:off x="502920" y="4078224"/>
+            <a:off x="566928" y="4398264"/>
             <a:ext cx="6858000" cy="1051560"/>
           </a:xfrm>
           <a:prstGeom prst="roundRect">
@@ -2235,7 +2235,7 @@
         </p:nvSpPr>
         <p:spPr>
           <a:xfrm>
-            <a:off x="758952" y="4187952"/>
+            <a:off x="822960" y="4507992"/>
             <a:ext cx="6345936" cy="832104"/>
           </a:xfrm>
           <a:prstGeom prst="rect">
@@ -2274,7 +2274,7 @@
         </p:nvSpPr>
         <p:spPr>
           <a:xfrm>
-            <a:off x="502920" y="1700784"/>
+            <a:off x="566928" y="1700784"/>
             <a:ext cx="7315200" cy="256032"/>
           </a:xfrm>
           <a:prstGeom prst="rect">
@@ -2313,8 +2313,8 @@
         </p:nvSpPr>
         <p:spPr>
           <a:xfrm>
-            <a:off x="502920" y="6035040"/>
-            <a:ext cx="11057839" cy="274320"/>
+            <a:off x="566928" y="5943600"/>
+            <a:ext cx="11057839" cy="201168"/>
           </a:xfrm>
           <a:prstGeom prst="rect">
             <a:avLst/>
@@ -2352,7 +2352,7 @@
         </p:nvSpPr>
         <p:spPr>
           <a:xfrm>
-            <a:off x="502920" y="6382512"/>
+            <a:off x="566928" y="6382512"/>
             <a:ext cx="7315200" cy="219456"/>
           </a:xfrm>
           <a:prstGeom prst="rect">
@@ -2391,7 +2391,7 @@
         </p:nvSpPr>
         <p:spPr>
           <a:xfrm>
-            <a:off x="10774375" y="6382512"/>
+            <a:off x="10710367" y="6382512"/>
             <a:ext cx="914400" cy="219456"/>
           </a:xfrm>
           <a:prstGeom prst="rect">
@@ -2462,7 +2462,7 @@
         </p:nvSpPr>
         <p:spPr>
           <a:xfrm>
-            <a:off x="502920" y="457200"/>
+            <a:off x="566928" y="457200"/>
             <a:ext cx="384048" cy="384048"/>
           </a:xfrm>
           <a:prstGeom prst="ellipse">
@@ -2482,7 +2482,7 @@
         </p:nvSpPr>
         <p:spPr>
           <a:xfrm>
-            <a:off x="502920" y="457200"/>
+            <a:off x="566928" y="457200"/>
             <a:ext cx="384048" cy="384048"/>
           </a:xfrm>
           <a:prstGeom prst="rect">
@@ -2521,7 +2521,7 @@
         </p:nvSpPr>
         <p:spPr>
           <a:xfrm>
-            <a:off x="1069848" y="457200"/>
+            <a:off x="1133856" y="457200"/>
             <a:ext cx="10490911" cy="182880"/>
           </a:xfrm>
           <a:prstGeom prst="rect">
@@ -2560,7 +2560,7 @@
         </p:nvSpPr>
         <p:spPr>
           <a:xfrm>
-            <a:off x="1069848" y="640080"/>
+            <a:off x="1133856" y="640080"/>
             <a:ext cx="10490911" cy="365760"/>
           </a:xfrm>
           <a:prstGeom prst="rect">
@@ -2570,7 +2570,9 @@
           <a:ln/>
         </p:spPr>
         <p:txBody>
-          <a:bodyPr wrap="square" lIns="0" tIns="0" rIns="0" bIns="0" rtlCol="0" anchor="ctr"/>
+          <a:bodyPr wrap="square" lIns="0" tIns="0" rIns="0" bIns="0" rtlCol="0" anchor="ctr">
+            <a:normAutofit/>
+          </a:bodyPr>
           <a:lstStyle/>
           <a:p>
             <a:pPr indent="0" marL="0">
@@ -2599,7 +2601,7 @@
         </p:nvSpPr>
         <p:spPr>
           <a:xfrm>
-            <a:off x="502920" y="1572768"/>
+            <a:off x="566928" y="1572768"/>
             <a:ext cx="11057839" cy="3200400"/>
           </a:xfrm>
           <a:prstGeom prst="roundRect">
@@ -2626,7 +2628,7 @@
         </p:nvSpPr>
         <p:spPr>
           <a:xfrm>
-            <a:off x="722376" y="1792224"/>
+            <a:off x="786384" y="1792224"/>
             <a:ext cx="438912" cy="438912"/>
           </a:xfrm>
           <a:prstGeom prst="ellipse">
@@ -2646,7 +2648,7 @@
         </p:nvSpPr>
         <p:spPr>
           <a:xfrm>
-            <a:off x="722376" y="1792224"/>
+            <a:off x="786384" y="1792224"/>
             <a:ext cx="438912" cy="438912"/>
           </a:xfrm>
           <a:prstGeom prst="rect">
@@ -2685,7 +2687,7 @@
         </p:nvSpPr>
         <p:spPr>
           <a:xfrm>
-            <a:off x="722376" y="2304288"/>
+            <a:off x="786384" y="2304288"/>
             <a:ext cx="10618927" cy="365760"/>
           </a:xfrm>
           <a:prstGeom prst="rect">
@@ -2724,7 +2726,7 @@
         </p:nvSpPr>
         <p:spPr>
           <a:xfrm>
-            <a:off x="722376" y="2761488"/>
+            <a:off x="786384" y="2761488"/>
             <a:ext cx="10618927" cy="1828800"/>
           </a:xfrm>
           <a:prstGeom prst="rect">
@@ -2780,7 +2782,7 @@
         </p:nvSpPr>
         <p:spPr>
           <a:xfrm>
-            <a:off x="502920" y="6382512"/>
+            <a:off x="566928" y="6382512"/>
             <a:ext cx="7315200" cy="219456"/>
           </a:xfrm>
           <a:prstGeom prst="rect">
@@ -2819,7 +2821,7 @@
         </p:nvSpPr>
         <p:spPr>
           <a:xfrm>
-            <a:off x="10774375" y="6382512"/>
+            <a:off x="10710367" y="6382512"/>
             <a:ext cx="914400" cy="219456"/>
           </a:xfrm>
           <a:prstGeom prst="rect">
@@ -2890,7 +2892,7 @@
         </p:nvSpPr>
         <p:spPr>
           <a:xfrm>
-            <a:off x="502920" y="457200"/>
+            <a:off x="566928" y="457200"/>
             <a:ext cx="384048" cy="384048"/>
           </a:xfrm>
           <a:prstGeom prst="ellipse">
@@ -2910,7 +2912,7 @@
         </p:nvSpPr>
         <p:spPr>
           <a:xfrm>
-            <a:off x="502920" y="457200"/>
+            <a:off x="566928" y="457200"/>
             <a:ext cx="384048" cy="384048"/>
           </a:xfrm>
           <a:prstGeom prst="rect">
@@ -2949,7 +2951,7 @@
         </p:nvSpPr>
         <p:spPr>
           <a:xfrm>
-            <a:off x="1069848" y="457200"/>
+            <a:off x="1133856" y="457200"/>
             <a:ext cx="10490911" cy="182880"/>
           </a:xfrm>
           <a:prstGeom prst="rect">
@@ -2988,7 +2990,7 @@
         </p:nvSpPr>
         <p:spPr>
           <a:xfrm>
-            <a:off x="1069848" y="658368"/>
+            <a:off x="1133856" y="658368"/>
             <a:ext cx="10490911" cy="420624"/>
           </a:xfrm>
           <a:prstGeom prst="rect">
@@ -2998,7 +3000,9 @@
           <a:ln/>
         </p:spPr>
         <p:txBody>
-          <a:bodyPr wrap="square" lIns="0" tIns="0" rIns="0" bIns="0" rtlCol="0" anchor="ctr"/>
+          <a:bodyPr wrap="square" lIns="0" tIns="0" rIns="0" bIns="0" rtlCol="0" anchor="ctr">
+            <a:normAutofit/>
+          </a:bodyPr>
           <a:lstStyle/>
           <a:p>
             <a:pPr indent="0" marL="0">
@@ -3027,7 +3031,7 @@
         </p:nvSpPr>
         <p:spPr>
           <a:xfrm>
-            <a:off x="502920" y="1463040"/>
+            <a:off x="566928" y="1463040"/>
             <a:ext cx="3588410" cy="658368"/>
           </a:xfrm>
           <a:prstGeom prst="roundRect">
@@ -3049,7 +3053,7 @@
         </p:nvSpPr>
         <p:spPr>
           <a:xfrm>
-            <a:off x="612648" y="1572768"/>
+            <a:off x="676656" y="1572768"/>
             <a:ext cx="438912" cy="438912"/>
           </a:xfrm>
           <a:prstGeom prst="ellipse">
@@ -3069,7 +3073,7 @@
         </p:nvSpPr>
         <p:spPr>
           <a:xfrm>
-            <a:off x="612648" y="1572768"/>
+            <a:off x="676656" y="1572768"/>
             <a:ext cx="438912" cy="438912"/>
           </a:xfrm>
           <a:prstGeom prst="rect">
@@ -3108,7 +3112,7 @@
         </p:nvSpPr>
         <p:spPr>
           <a:xfrm>
-            <a:off x="1161288" y="1554480"/>
+            <a:off x="1225296" y="1554480"/>
             <a:ext cx="2820314" cy="237744"/>
           </a:xfrm>
           <a:prstGeom prst="rect">
@@ -3147,7 +3151,7 @@
         </p:nvSpPr>
         <p:spPr>
           <a:xfrm>
-            <a:off x="1161288" y="1792224"/>
+            <a:off x="1225296" y="1792224"/>
             <a:ext cx="2820314" cy="256032"/>
           </a:xfrm>
           <a:prstGeom prst="rect">
@@ -3186,7 +3190,7 @@
         </p:nvSpPr>
         <p:spPr>
           <a:xfrm>
-            <a:off x="4091330" y="1600200"/>
+            <a:off x="4155338" y="1600200"/>
             <a:ext cx="146304" cy="384048"/>
           </a:xfrm>
           <a:prstGeom prst="rect">
@@ -3225,7 +3229,7 @@
         </p:nvSpPr>
         <p:spPr>
           <a:xfrm>
-            <a:off x="4237634" y="1463040"/>
+            <a:off x="4301642" y="1463040"/>
             <a:ext cx="3588410" cy="658368"/>
           </a:xfrm>
           <a:prstGeom prst="roundRect">
@@ -3247,7 +3251,7 @@
         </p:nvSpPr>
         <p:spPr>
           <a:xfrm>
-            <a:off x="4347362" y="1572768"/>
+            <a:off x="4411370" y="1572768"/>
             <a:ext cx="438912" cy="438912"/>
           </a:xfrm>
           <a:prstGeom prst="ellipse">
@@ -3267,7 +3271,7 @@
         </p:nvSpPr>
         <p:spPr>
           <a:xfrm>
-            <a:off x="4347362" y="1572768"/>
+            <a:off x="4411370" y="1572768"/>
             <a:ext cx="438912" cy="438912"/>
           </a:xfrm>
           <a:prstGeom prst="rect">
@@ -3306,7 +3310,7 @@
         </p:nvSpPr>
         <p:spPr>
           <a:xfrm>
-            <a:off x="4896002" y="1554480"/>
+            <a:off x="4960010" y="1554480"/>
             <a:ext cx="2820314" cy="237744"/>
           </a:xfrm>
           <a:prstGeom prst="rect">
@@ -3345,7 +3349,7 @@
         </p:nvSpPr>
         <p:spPr>
           <a:xfrm>
-            <a:off x="4896002" y="1792224"/>
+            <a:off x="4960010" y="1792224"/>
             <a:ext cx="2820314" cy="256032"/>
           </a:xfrm>
           <a:prstGeom prst="rect">
@@ -3384,7 +3388,7 @@
         </p:nvSpPr>
         <p:spPr>
           <a:xfrm>
-            <a:off x="7826045" y="1600200"/>
+            <a:off x="7890053" y="1600200"/>
             <a:ext cx="146304" cy="384048"/>
           </a:xfrm>
           <a:prstGeom prst="rect">
@@ -3423,7 +3427,7 @@
         </p:nvSpPr>
         <p:spPr>
           <a:xfrm>
-            <a:off x="7972349" y="1463040"/>
+            <a:off x="8036357" y="1463040"/>
             <a:ext cx="3588410" cy="658368"/>
           </a:xfrm>
           <a:prstGeom prst="roundRect">
@@ -3445,7 +3449,7 @@
         </p:nvSpPr>
         <p:spPr>
           <a:xfrm>
-            <a:off x="8082077" y="1572768"/>
+            <a:off x="8146085" y="1572768"/>
             <a:ext cx="438912" cy="438912"/>
           </a:xfrm>
           <a:prstGeom prst="ellipse">
@@ -3465,7 +3469,7 @@
         </p:nvSpPr>
         <p:spPr>
           <a:xfrm>
-            <a:off x="8082077" y="1572768"/>
+            <a:off x="8146085" y="1572768"/>
             <a:ext cx="438912" cy="438912"/>
           </a:xfrm>
           <a:prstGeom prst="rect">
@@ -3504,7 +3508,7 @@
         </p:nvSpPr>
         <p:spPr>
           <a:xfrm>
-            <a:off x="8630717" y="1554480"/>
+            <a:off x="8694725" y="1554480"/>
             <a:ext cx="2820314" cy="237744"/>
           </a:xfrm>
           <a:prstGeom prst="rect">
@@ -3543,7 +3547,7 @@
         </p:nvSpPr>
         <p:spPr>
           <a:xfrm>
-            <a:off x="8630717" y="1792224"/>
+            <a:off x="8694725" y="1792224"/>
             <a:ext cx="2820314" cy="256032"/>
           </a:xfrm>
           <a:prstGeom prst="rect">
@@ -3582,7 +3586,7 @@
         </p:nvSpPr>
         <p:spPr>
           <a:xfrm>
-            <a:off x="502920" y="2395728"/>
+            <a:off x="566928" y="2395728"/>
             <a:ext cx="5486400" cy="237744"/>
           </a:xfrm>
           <a:prstGeom prst="rect">
@@ -3621,7 +3625,7 @@
         </p:nvSpPr>
         <p:spPr>
           <a:xfrm>
-            <a:off x="502920" y="2724912"/>
+            <a:off x="566928" y="2724912"/>
             <a:ext cx="1280160" cy="292608"/>
           </a:xfrm>
           <a:prstGeom prst="roundRect">
@@ -3643,7 +3647,7 @@
         </p:nvSpPr>
         <p:spPr>
           <a:xfrm>
-            <a:off x="502920" y="2724912"/>
+            <a:off x="566928" y="2724912"/>
             <a:ext cx="1280160" cy="292608"/>
           </a:xfrm>
           <a:prstGeom prst="rect">
@@ -3682,7 +3686,7 @@
         </p:nvSpPr>
         <p:spPr>
           <a:xfrm>
-            <a:off x="1929384" y="2706624"/>
+            <a:off x="1993392" y="2706624"/>
             <a:ext cx="3840480" cy="329184"/>
           </a:xfrm>
           <a:prstGeom prst="rect">
@@ -3721,7 +3725,7 @@
         </p:nvSpPr>
         <p:spPr>
           <a:xfrm>
-            <a:off x="502920" y="3127248"/>
+            <a:off x="566928" y="3127248"/>
             <a:ext cx="1280160" cy="292608"/>
           </a:xfrm>
           <a:prstGeom prst="roundRect">
@@ -3743,7 +3747,7 @@
         </p:nvSpPr>
         <p:spPr>
           <a:xfrm>
-            <a:off x="502920" y="3127248"/>
+            <a:off x="566928" y="3127248"/>
             <a:ext cx="1280160" cy="292608"/>
           </a:xfrm>
           <a:prstGeom prst="rect">
@@ -3782,7 +3786,7 @@
         </p:nvSpPr>
         <p:spPr>
           <a:xfrm>
-            <a:off x="1929384" y="3108960"/>
+            <a:off x="1993392" y="3108960"/>
             <a:ext cx="3840480" cy="329184"/>
           </a:xfrm>
           <a:prstGeom prst="rect">
@@ -3821,7 +3825,7 @@
         </p:nvSpPr>
         <p:spPr>
           <a:xfrm>
-            <a:off x="502920" y="3529584"/>
+            <a:off x="566928" y="3529584"/>
             <a:ext cx="1280160" cy="292608"/>
           </a:xfrm>
           <a:prstGeom prst="roundRect">
@@ -3843,7 +3847,7 @@
         </p:nvSpPr>
         <p:spPr>
           <a:xfrm>
-            <a:off x="502920" y="3529584"/>
+            <a:off x="566928" y="3529584"/>
             <a:ext cx="1280160" cy="292608"/>
           </a:xfrm>
           <a:prstGeom prst="rect">
@@ -3882,7 +3886,7 @@
         </p:nvSpPr>
         <p:spPr>
           <a:xfrm>
-            <a:off x="1929384" y="3511296"/>
+            <a:off x="1993392" y="3511296"/>
             <a:ext cx="3840480" cy="329184"/>
           </a:xfrm>
           <a:prstGeom prst="rect">
@@ -3921,7 +3925,7 @@
         </p:nvSpPr>
         <p:spPr>
           <a:xfrm>
-            <a:off x="502920" y="3931920"/>
+            <a:off x="566928" y="3931920"/>
             <a:ext cx="1280160" cy="292608"/>
           </a:xfrm>
           <a:prstGeom prst="roundRect">
@@ -3943,7 +3947,7 @@
         </p:nvSpPr>
         <p:spPr>
           <a:xfrm>
-            <a:off x="502920" y="3931920"/>
+            <a:off x="566928" y="3931920"/>
             <a:ext cx="1280160" cy="292608"/>
           </a:xfrm>
           <a:prstGeom prst="rect">
@@ -3982,7 +3986,7 @@
         </p:nvSpPr>
         <p:spPr>
           <a:xfrm>
-            <a:off x="1929384" y="3913632"/>
+            <a:off x="1993392" y="3913632"/>
             <a:ext cx="3840480" cy="329184"/>
           </a:xfrm>
           <a:prstGeom prst="rect">
@@ -4021,7 +4025,7 @@
         </p:nvSpPr>
         <p:spPr>
           <a:xfrm>
-            <a:off x="502920" y="4334256"/>
+            <a:off x="566928" y="4334256"/>
             <a:ext cx="1280160" cy="292608"/>
           </a:xfrm>
           <a:prstGeom prst="roundRect">
@@ -4043,7 +4047,7 @@
         </p:nvSpPr>
         <p:spPr>
           <a:xfrm>
-            <a:off x="502920" y="4334256"/>
+            <a:off x="566928" y="4334256"/>
             <a:ext cx="1280160" cy="292608"/>
           </a:xfrm>
           <a:prstGeom prst="rect">
@@ -4082,7 +4086,7 @@
         </p:nvSpPr>
         <p:spPr>
           <a:xfrm>
-            <a:off x="1929384" y="4315968"/>
+            <a:off x="1993392" y="4315968"/>
             <a:ext cx="3840480" cy="329184"/>
           </a:xfrm>
           <a:prstGeom prst="rect">
@@ -4224,7 +4228,7 @@
         </p:nvSpPr>
         <p:spPr>
           <a:xfrm>
-            <a:off x="502920" y="5760720"/>
+            <a:off x="566928" y="5760720"/>
             <a:ext cx="11057839" cy="457200"/>
           </a:xfrm>
           <a:prstGeom prst="rect">
@@ -4244,7 +4248,7 @@
         </p:nvSpPr>
         <p:spPr>
           <a:xfrm>
-            <a:off x="685800" y="5806440"/>
+            <a:off x="749808" y="5806440"/>
             <a:ext cx="10692079" cy="365760"/>
           </a:xfrm>
           <a:prstGeom prst="rect">
@@ -4283,7 +4287,7 @@
         </p:nvSpPr>
         <p:spPr>
           <a:xfrm>
-            <a:off x="502920" y="6382512"/>
+            <a:off x="566928" y="6382512"/>
             <a:ext cx="7315200" cy="219456"/>
           </a:xfrm>
           <a:prstGeom prst="rect">
@@ -4322,7 +4326,7 @@
         </p:nvSpPr>
         <p:spPr>
           <a:xfrm>
-            <a:off x="10774375" y="6382512"/>
+            <a:off x="10710367" y="6382512"/>
             <a:ext cx="914400" cy="219456"/>
           </a:xfrm>
           <a:prstGeom prst="rect">
@@ -4393,7 +4397,7 @@
         </p:nvSpPr>
         <p:spPr>
           <a:xfrm>
-            <a:off x="502920" y="457200"/>
+            <a:off x="566928" y="457200"/>
             <a:ext cx="384048" cy="384048"/>
           </a:xfrm>
           <a:prstGeom prst="ellipse">
@@ -4413,7 +4417,7 @@
         </p:nvSpPr>
         <p:spPr>
           <a:xfrm>
-            <a:off x="502920" y="457200"/>
+            <a:off x="566928" y="457200"/>
             <a:ext cx="384048" cy="384048"/>
           </a:xfrm>
           <a:prstGeom prst="rect">
@@ -4452,7 +4456,7 @@
         </p:nvSpPr>
         <p:spPr>
           <a:xfrm>
-            <a:off x="1069848" y="457200"/>
+            <a:off x="1133856" y="457200"/>
             <a:ext cx="10490911" cy="182880"/>
           </a:xfrm>
           <a:prstGeom prst="rect">
@@ -4491,7 +4495,7 @@
         </p:nvSpPr>
         <p:spPr>
           <a:xfrm>
-            <a:off x="1069848" y="640080"/>
+            <a:off x="1133856" y="640080"/>
             <a:ext cx="10490911" cy="365760"/>
           </a:xfrm>
           <a:prstGeom prst="rect">
@@ -4501,7 +4505,9 @@
           <a:ln/>
         </p:spPr>
         <p:txBody>
-          <a:bodyPr wrap="square" lIns="0" tIns="0" rIns="0" bIns="0" rtlCol="0" anchor="ctr"/>
+          <a:bodyPr wrap="square" lIns="0" tIns="0" rIns="0" bIns="0" rtlCol="0" anchor="ctr">
+            <a:normAutofit/>
+          </a:bodyPr>
           <a:lstStyle/>
           <a:p>
             <a:pPr indent="0" marL="0">
@@ -4530,17 +4536,19 @@
         </p:nvSpPr>
         <p:spPr>
           <a:xfrm>
-            <a:off x="502920" y="1188720"/>
-            <a:ext cx="11057839" cy="457200"/>
-          </a:xfrm>
-          <a:prstGeom prst="rect">
-            <a:avLst/>
-          </a:prstGeom>
-          <a:noFill/>
-          <a:ln/>
-        </p:spPr>
-        <p:txBody>
-          <a:bodyPr wrap="square" rtlCol="0" anchor="ctr"/>
+            <a:off x="566928" y="1188720"/>
+            <a:ext cx="11057839" cy="219075"/>
+          </a:xfrm>
+          <a:prstGeom prst="rect">
+            <a:avLst/>
+          </a:prstGeom>
+          <a:noFill/>
+          <a:ln/>
+        </p:spPr>
+        <p:txBody>
+          <a:bodyPr wrap="square" lIns="0" tIns="0" rIns="0" bIns="0" rtlCol="0" anchor="ctr">
+            <a:normAutofit/>
+          </a:bodyPr>
           <a:lstStyle/>
           <a:p>
             <a:pPr indent="0" marL="0">
@@ -4569,7 +4577,7 @@
         </p:nvSpPr>
         <p:spPr>
           <a:xfrm>
-            <a:off x="502920" y="1691640"/>
+            <a:off x="566928" y="1480947"/>
             <a:ext cx="11057839" cy="0"/>
           </a:xfrm>
           <a:prstGeom prst="line">
@@ -4592,7 +4600,7 @@
         </p:nvSpPr>
         <p:spPr>
           <a:xfrm>
-            <a:off x="502920" y="1965960"/>
+            <a:off x="566928" y="1618107"/>
             <a:ext cx="2641016" cy="960120"/>
           </a:xfrm>
           <a:prstGeom prst="roundRect">
@@ -4619,7 +4627,7 @@
         </p:nvSpPr>
         <p:spPr>
           <a:xfrm>
-            <a:off x="667512" y="2093976"/>
+            <a:off x="731520" y="1746123"/>
             <a:ext cx="2311832" cy="201168"/>
           </a:xfrm>
           <a:prstGeom prst="rect">
@@ -4629,7 +4637,9 @@
           <a:ln/>
         </p:spPr>
         <p:txBody>
-          <a:bodyPr wrap="square" lIns="0" tIns="0" rIns="0" bIns="0" rtlCol="0" anchor="ctr"/>
+          <a:bodyPr wrap="square" lIns="0" tIns="0" rIns="0" bIns="0" rtlCol="0" anchor="ctr">
+            <a:normAutofit/>
+          </a:bodyPr>
           <a:lstStyle/>
           <a:p>
             <a:pPr indent="0" marL="0">
@@ -4658,8 +4668,8 @@
         </p:nvSpPr>
         <p:spPr>
           <a:xfrm>
-            <a:off x="667512" y="2313432"/>
-            <a:ext cx="2311832" cy="274320"/>
+            <a:off x="731520" y="1965579"/>
+            <a:ext cx="2311832" cy="279400"/>
           </a:xfrm>
           <a:prstGeom prst="rect">
             <a:avLst/>
@@ -4702,7 +4712,7 @@
         </p:nvSpPr>
         <p:spPr>
           <a:xfrm>
-            <a:off x="3308528" y="1965960"/>
+            <a:off x="3372536" y="1618107"/>
             <a:ext cx="2641016" cy="960120"/>
           </a:xfrm>
           <a:prstGeom prst="roundRect">
@@ -4729,7 +4739,7 @@
         </p:nvSpPr>
         <p:spPr>
           <a:xfrm>
-            <a:off x="3473120" y="2093976"/>
+            <a:off x="3537128" y="1746123"/>
             <a:ext cx="2311832" cy="201168"/>
           </a:xfrm>
           <a:prstGeom prst="rect">
@@ -4739,7 +4749,9 @@
           <a:ln/>
         </p:spPr>
         <p:txBody>
-          <a:bodyPr wrap="square" lIns="0" tIns="0" rIns="0" bIns="0" rtlCol="0" anchor="ctr"/>
+          <a:bodyPr wrap="square" lIns="0" tIns="0" rIns="0" bIns="0" rtlCol="0" anchor="ctr">
+            <a:normAutofit/>
+          </a:bodyPr>
           <a:lstStyle/>
           <a:p>
             <a:pPr indent="0" marL="0">
@@ -4768,8 +4780,8 @@
         </p:nvSpPr>
         <p:spPr>
           <a:xfrm>
-            <a:off x="3473120" y="2313432"/>
-            <a:ext cx="2311832" cy="274320"/>
+            <a:off x="3537128" y="1965579"/>
+            <a:ext cx="2311832" cy="279400"/>
           </a:xfrm>
           <a:prstGeom prst="rect">
             <a:avLst/>
@@ -4812,7 +4824,7 @@
         </p:nvSpPr>
         <p:spPr>
           <a:xfrm>
-            <a:off x="6114136" y="1965960"/>
+            <a:off x="6178144" y="1618107"/>
             <a:ext cx="2641016" cy="960120"/>
           </a:xfrm>
           <a:prstGeom prst="roundRect">
@@ -4839,7 +4851,7 @@
         </p:nvSpPr>
         <p:spPr>
           <a:xfrm>
-            <a:off x="6278728" y="2093976"/>
+            <a:off x="6342736" y="1746123"/>
             <a:ext cx="2311832" cy="201168"/>
           </a:xfrm>
           <a:prstGeom prst="rect">
@@ -4849,7 +4861,9 @@
           <a:ln/>
         </p:spPr>
         <p:txBody>
-          <a:bodyPr wrap="square" lIns="0" tIns="0" rIns="0" bIns="0" rtlCol="0" anchor="ctr"/>
+          <a:bodyPr wrap="square" lIns="0" tIns="0" rIns="0" bIns="0" rtlCol="0" anchor="ctr">
+            <a:normAutofit/>
+          </a:bodyPr>
           <a:lstStyle/>
           <a:p>
             <a:pPr indent="0" marL="0">
@@ -4878,8 +4892,8 @@
         </p:nvSpPr>
         <p:spPr>
           <a:xfrm>
-            <a:off x="6278728" y="2313432"/>
-            <a:ext cx="2311832" cy="274320"/>
+            <a:off x="6342736" y="1965579"/>
+            <a:ext cx="2311832" cy="279400"/>
           </a:xfrm>
           <a:prstGeom prst="rect">
             <a:avLst/>
@@ -4900,7 +4914,7 @@
               <a:buNone/>
             </a:pPr>
             <a:r>
-              <a:rPr lang="en-US" sz="1800" b="1" dirty="0">
+              <a:rPr lang="en-US" sz="2200" b="1" dirty="0">
                 <a:solidFill>
                   <a:srgbClr val="10161F"/>
                 </a:solidFill>
@@ -4910,7 +4924,7 @@
               </a:rPr>
               <a:t>제3종일반주거</a:t>
             </a:r>
-            <a:endParaRPr lang="en-US" sz="1800" dirty="0"/>
+            <a:endParaRPr lang="en-US" sz="2200" dirty="0"/>
           </a:p>
         </p:txBody>
       </p:sp>
@@ -4922,7 +4936,7 @@
         </p:nvSpPr>
         <p:spPr>
           <a:xfrm>
-            <a:off x="8919743" y="1965960"/>
+            <a:off x="8983751" y="1618107"/>
             <a:ext cx="2641016" cy="960120"/>
           </a:xfrm>
           <a:prstGeom prst="roundRect">
@@ -4949,7 +4963,7 @@
         </p:nvSpPr>
         <p:spPr>
           <a:xfrm>
-            <a:off x="9084335" y="2093976"/>
+            <a:off x="9148343" y="1746123"/>
             <a:ext cx="2311832" cy="201168"/>
           </a:xfrm>
           <a:prstGeom prst="rect">
@@ -4959,7 +4973,9 @@
           <a:ln/>
         </p:spPr>
         <p:txBody>
-          <a:bodyPr wrap="square" lIns="0" tIns="0" rIns="0" bIns="0" rtlCol="0" anchor="ctr"/>
+          <a:bodyPr wrap="square" lIns="0" tIns="0" rIns="0" bIns="0" rtlCol="0" anchor="ctr">
+            <a:normAutofit/>
+          </a:bodyPr>
           <a:lstStyle/>
           <a:p>
             <a:pPr indent="0" marL="0">
@@ -4988,8 +5004,8 @@
         </p:nvSpPr>
         <p:spPr>
           <a:xfrm>
-            <a:off x="9084335" y="2313432"/>
-            <a:ext cx="2311832" cy="274320"/>
+            <a:off x="9148343" y="1965579"/>
+            <a:ext cx="2311832" cy="279400"/>
           </a:xfrm>
           <a:prstGeom prst="rect">
             <a:avLst/>
@@ -5032,7 +5048,7 @@
         </p:nvSpPr>
         <p:spPr>
           <a:xfrm>
-            <a:off x="502920" y="3090672"/>
+            <a:off x="566928" y="2742819"/>
             <a:ext cx="2641016" cy="960120"/>
           </a:xfrm>
           <a:prstGeom prst="roundRect">
@@ -5059,7 +5075,7 @@
         </p:nvSpPr>
         <p:spPr>
           <a:xfrm>
-            <a:off x="667512" y="3218688"/>
+            <a:off x="731520" y="2870835"/>
             <a:ext cx="2311832" cy="201168"/>
           </a:xfrm>
           <a:prstGeom prst="rect">
@@ -5069,7 +5085,9 @@
           <a:ln/>
         </p:spPr>
         <p:txBody>
-          <a:bodyPr wrap="square" lIns="0" tIns="0" rIns="0" bIns="0" rtlCol="0" anchor="ctr"/>
+          <a:bodyPr wrap="square" lIns="0" tIns="0" rIns="0" bIns="0" rtlCol="0" anchor="ctr">
+            <a:normAutofit/>
+          </a:bodyPr>
           <a:lstStyle/>
           <a:p>
             <a:pPr indent="0" marL="0">
@@ -5098,8 +5116,8 @@
         </p:nvSpPr>
         <p:spPr>
           <a:xfrm>
-            <a:off x="667512" y="3438144"/>
-            <a:ext cx="2311832" cy="274320"/>
+            <a:off x="731520" y="3090291"/>
+            <a:ext cx="2311832" cy="279400"/>
           </a:xfrm>
           <a:prstGeom prst="rect">
             <a:avLst/>
@@ -5142,7 +5160,7 @@
         </p:nvSpPr>
         <p:spPr>
           <a:xfrm>
-            <a:off x="3308528" y="3090672"/>
+            <a:off x="3372536" y="2742819"/>
             <a:ext cx="2641016" cy="960120"/>
           </a:xfrm>
           <a:prstGeom prst="roundRect">
@@ -5169,7 +5187,7 @@
         </p:nvSpPr>
         <p:spPr>
           <a:xfrm>
-            <a:off x="3473120" y="3218688"/>
+            <a:off x="3537128" y="2870835"/>
             <a:ext cx="2311832" cy="201168"/>
           </a:xfrm>
           <a:prstGeom prst="rect">
@@ -5179,7 +5197,9 @@
           <a:ln/>
         </p:spPr>
         <p:txBody>
-          <a:bodyPr wrap="square" lIns="0" tIns="0" rIns="0" bIns="0" rtlCol="0" anchor="ctr"/>
+          <a:bodyPr wrap="square" lIns="0" tIns="0" rIns="0" bIns="0" rtlCol="0" anchor="ctr">
+            <a:normAutofit/>
+          </a:bodyPr>
           <a:lstStyle/>
           <a:p>
             <a:pPr indent="0" marL="0">
@@ -5208,8 +5228,8 @@
         </p:nvSpPr>
         <p:spPr>
           <a:xfrm>
-            <a:off x="3473120" y="3438144"/>
-            <a:ext cx="2311832" cy="274320"/>
+            <a:off x="3537128" y="3090291"/>
+            <a:ext cx="2311832" cy="279400"/>
           </a:xfrm>
           <a:prstGeom prst="rect">
             <a:avLst/>
@@ -5252,7 +5272,7 @@
         </p:nvSpPr>
         <p:spPr>
           <a:xfrm>
-            <a:off x="6114136" y="3090672"/>
+            <a:off x="6178144" y="2742819"/>
             <a:ext cx="2641016" cy="960120"/>
           </a:xfrm>
           <a:prstGeom prst="roundRect">
@@ -5279,7 +5299,7 @@
         </p:nvSpPr>
         <p:spPr>
           <a:xfrm>
-            <a:off x="6278728" y="3218688"/>
+            <a:off x="6342736" y="2870835"/>
             <a:ext cx="2311832" cy="201168"/>
           </a:xfrm>
           <a:prstGeom prst="rect">
@@ -5289,7 +5309,9 @@
           <a:ln/>
         </p:spPr>
         <p:txBody>
-          <a:bodyPr wrap="square" lIns="0" tIns="0" rIns="0" bIns="0" rtlCol="0" anchor="ctr"/>
+          <a:bodyPr wrap="square" lIns="0" tIns="0" rIns="0" bIns="0" rtlCol="0" anchor="ctr">
+            <a:normAutofit/>
+          </a:bodyPr>
           <a:lstStyle/>
           <a:p>
             <a:pPr indent="0" marL="0">
@@ -5318,8 +5340,8 @@
         </p:nvSpPr>
         <p:spPr>
           <a:xfrm>
-            <a:off x="6278728" y="3438144"/>
-            <a:ext cx="2311832" cy="274320"/>
+            <a:off x="6342736" y="3090291"/>
+            <a:ext cx="2311832" cy="279400"/>
           </a:xfrm>
           <a:prstGeom prst="rect">
             <a:avLst/>
@@ -5362,7 +5384,7 @@
         </p:nvSpPr>
         <p:spPr>
           <a:xfrm>
-            <a:off x="502920" y="4306824"/>
+            <a:off x="566928" y="3958971"/>
             <a:ext cx="11057839" cy="274320"/>
           </a:xfrm>
           <a:prstGeom prst="rect">
@@ -5401,12 +5423,12 @@
         </p:nvSpPr>
         <p:spPr>
           <a:xfrm>
-            <a:off x="502920" y="4636008"/>
-            <a:ext cx="11057839" cy="396240"/>
+            <a:off x="566928" y="4288155"/>
+            <a:ext cx="11057839" cy="512191"/>
           </a:xfrm>
           <a:prstGeom prst="roundRect">
             <a:avLst>
-              <a:gd name="adj" fmla="val 11538"/>
+              <a:gd name="adj" fmla="val 8926"/>
             </a:avLst>
           </a:prstGeom>
           <a:solidFill>
@@ -5428,12 +5450,12 @@
         </p:nvSpPr>
         <p:spPr>
           <a:xfrm>
-            <a:off x="612648" y="4709160"/>
-            <a:ext cx="411480" cy="249936"/>
+            <a:off x="676656" y="4361371"/>
+            <a:ext cx="411480" cy="365760"/>
           </a:xfrm>
           <a:prstGeom prst="roundRect">
             <a:avLst>
-              <a:gd name="adj" fmla="val 14634"/>
+              <a:gd name="adj" fmla="val 10000"/>
             </a:avLst>
           </a:prstGeom>
           <a:solidFill>
@@ -5455,8 +5477,8 @@
         </p:nvSpPr>
         <p:spPr>
           <a:xfrm>
-            <a:off x="612648" y="4709160"/>
-            <a:ext cx="411480" cy="249936"/>
+            <a:off x="676656" y="4361371"/>
+            <a:ext cx="411480" cy="365760"/>
           </a:xfrm>
           <a:prstGeom prst="rect">
             <a:avLst/>
@@ -5494,8 +5516,8 @@
         </p:nvSpPr>
         <p:spPr>
           <a:xfrm>
-            <a:off x="1143000" y="4672584"/>
-            <a:ext cx="10280599" cy="323088"/>
+            <a:off x="1207008" y="4324731"/>
+            <a:ext cx="10280599" cy="439039"/>
           </a:xfrm>
           <a:prstGeom prst="rect">
             <a:avLst/>
@@ -5511,7 +5533,7 @@
               <a:buNone/>
             </a:pPr>
             <a:r>
-              <a:rPr lang="en-US" sz="1000" dirty="0">
+              <a:rPr lang="en-US" sz="1150" dirty="0">
                 <a:solidFill>
                   <a:srgbClr val="10161F"/>
                 </a:solidFill>
@@ -5521,7 +5543,7 @@
               </a:rPr>
               <a:t>입지 가치: 대중교통 역세권 입지, 해당 권역 업무·상업 중심지 배후 수요 확보</a:t>
             </a:r>
-            <a:endParaRPr lang="en-US" sz="1000" dirty="0"/>
+            <a:endParaRPr lang="en-US" sz="1150" dirty="0"/>
           </a:p>
         </p:txBody>
       </p:sp>
@@ -5533,12 +5555,12 @@
         </p:nvSpPr>
         <p:spPr>
           <a:xfrm>
-            <a:off x="502920" y="5114544"/>
-            <a:ext cx="11057839" cy="396240"/>
+            <a:off x="566928" y="4882642"/>
+            <a:ext cx="11057839" cy="512191"/>
           </a:xfrm>
           <a:prstGeom prst="roundRect">
             <a:avLst>
-              <a:gd name="adj" fmla="val 11538"/>
+              <a:gd name="adj" fmla="val 8926"/>
             </a:avLst>
           </a:prstGeom>
           <a:solidFill>
@@ -5560,12 +5582,12 @@
         </p:nvSpPr>
         <p:spPr>
           <a:xfrm>
-            <a:off x="612648" y="5187696"/>
-            <a:ext cx="411480" cy="249936"/>
+            <a:off x="676656" y="4955858"/>
+            <a:ext cx="411480" cy="365760"/>
           </a:xfrm>
           <a:prstGeom prst="roundRect">
             <a:avLst>
-              <a:gd name="adj" fmla="val 14634"/>
+              <a:gd name="adj" fmla="val 10000"/>
             </a:avLst>
           </a:prstGeom>
           <a:solidFill>
@@ -5587,8 +5609,8 @@
         </p:nvSpPr>
         <p:spPr>
           <a:xfrm>
-            <a:off x="612648" y="5187696"/>
-            <a:ext cx="411480" cy="249936"/>
+            <a:off x="676656" y="4955858"/>
+            <a:ext cx="411480" cy="365760"/>
           </a:xfrm>
           <a:prstGeom prst="rect">
             <a:avLst/>
@@ -5626,8 +5648,8 @@
         </p:nvSpPr>
         <p:spPr>
           <a:xfrm>
-            <a:off x="1143000" y="5151120"/>
-            <a:ext cx="10280599" cy="323088"/>
+            <a:off x="1207008" y="4919218"/>
+            <a:ext cx="10280599" cy="439039"/>
           </a:xfrm>
           <a:prstGeom prst="rect">
             <a:avLst/>
@@ -5643,7 +5665,7 @@
               <a:buNone/>
             </a:pPr>
             <a:r>
-              <a:rPr lang="en-US" sz="1000" dirty="0">
+              <a:rPr lang="en-US" sz="1150" dirty="0">
                 <a:solidFill>
                   <a:srgbClr val="10161F"/>
                 </a:solidFill>
@@ -5653,7 +5675,7 @@
               </a:rPr>
               <a:t>자산 규모: 해당 권역 소재 단독 빌딩 매입 기회</a:t>
             </a:r>
-            <a:endParaRPr lang="en-US" sz="1000" dirty="0"/>
+            <a:endParaRPr lang="en-US" sz="1150" dirty="0"/>
           </a:p>
         </p:txBody>
       </p:sp>
@@ -5665,12 +5687,12 @@
         </p:nvSpPr>
         <p:spPr>
           <a:xfrm>
-            <a:off x="502920" y="5593080"/>
-            <a:ext cx="11057839" cy="396240"/>
+            <a:off x="566928" y="5477129"/>
+            <a:ext cx="11057839" cy="512191"/>
           </a:xfrm>
           <a:prstGeom prst="roundRect">
             <a:avLst>
-              <a:gd name="adj" fmla="val 11538"/>
+              <a:gd name="adj" fmla="val 8926"/>
             </a:avLst>
           </a:prstGeom>
           <a:solidFill>
@@ -5692,12 +5714,12 @@
         </p:nvSpPr>
         <p:spPr>
           <a:xfrm>
-            <a:off x="612648" y="5666232"/>
-            <a:ext cx="411480" cy="249936"/>
+            <a:off x="676656" y="5550345"/>
+            <a:ext cx="411480" cy="365760"/>
           </a:xfrm>
           <a:prstGeom prst="roundRect">
             <a:avLst>
-              <a:gd name="adj" fmla="val 14634"/>
+              <a:gd name="adj" fmla="val 10000"/>
             </a:avLst>
           </a:prstGeom>
           <a:solidFill>
@@ -5719,8 +5741,8 @@
         </p:nvSpPr>
         <p:spPr>
           <a:xfrm>
-            <a:off x="612648" y="5666232"/>
-            <a:ext cx="411480" cy="249936"/>
+            <a:off x="676656" y="5550345"/>
+            <a:ext cx="411480" cy="365760"/>
           </a:xfrm>
           <a:prstGeom prst="rect">
             <a:avLst/>
@@ -5758,8 +5780,8 @@
         </p:nvSpPr>
         <p:spPr>
           <a:xfrm>
-            <a:off x="1143000" y="5629656"/>
-            <a:ext cx="10280599" cy="323088"/>
+            <a:off x="1207008" y="5513705"/>
+            <a:ext cx="10280599" cy="439039"/>
           </a:xfrm>
           <a:prstGeom prst="rect">
             <a:avLst/>
@@ -5775,7 +5797,7 @@
               <a:buNone/>
             </a:pPr>
             <a:r>
-              <a:rPr lang="en-US" sz="1000" dirty="0">
+              <a:rPr lang="en-US" sz="1150" dirty="0">
                 <a:solidFill>
                   <a:srgbClr val="10161F"/>
                 </a:solidFill>
@@ -5785,7 +5807,7 @@
               </a:rPr>
               <a:t>수익 안정성: 안정적 임대수익 기반 투자 매물</a:t>
             </a:r>
-            <a:endParaRPr lang="en-US" sz="1000" dirty="0"/>
+            <a:endParaRPr lang="en-US" sz="1150" dirty="0"/>
           </a:p>
         </p:txBody>
       </p:sp>
@@ -5797,7 +5819,7 @@
         </p:nvSpPr>
         <p:spPr>
           <a:xfrm>
-            <a:off x="502920" y="6382512"/>
+            <a:off x="566928" y="6382512"/>
             <a:ext cx="7315200" cy="219456"/>
           </a:xfrm>
           <a:prstGeom prst="rect">
@@ -5836,7 +5858,7 @@
         </p:nvSpPr>
         <p:spPr>
           <a:xfrm>
-            <a:off x="10774375" y="6382512"/>
+            <a:off x="10710367" y="6382512"/>
             <a:ext cx="914400" cy="219456"/>
           </a:xfrm>
           <a:prstGeom prst="rect">
@@ -5907,7 +5929,7 @@
         </p:nvSpPr>
         <p:spPr>
           <a:xfrm>
-            <a:off x="502920" y="457200"/>
+            <a:off x="566928" y="457200"/>
             <a:ext cx="384048" cy="384048"/>
           </a:xfrm>
           <a:prstGeom prst="ellipse">
@@ -5927,7 +5949,7 @@
         </p:nvSpPr>
         <p:spPr>
           <a:xfrm>
-            <a:off x="502920" y="457200"/>
+            <a:off x="566928" y="457200"/>
             <a:ext cx="384048" cy="384048"/>
           </a:xfrm>
           <a:prstGeom prst="rect">
@@ -5966,7 +5988,7 @@
         </p:nvSpPr>
         <p:spPr>
           <a:xfrm>
-            <a:off x="1069848" y="457200"/>
+            <a:off x="1133856" y="457200"/>
             <a:ext cx="10490911" cy="182880"/>
           </a:xfrm>
           <a:prstGeom prst="rect">
@@ -6005,7 +6027,7 @@
         </p:nvSpPr>
         <p:spPr>
           <a:xfrm>
-            <a:off x="1069848" y="640080"/>
+            <a:off x="1133856" y="640080"/>
             <a:ext cx="10490911" cy="365760"/>
           </a:xfrm>
           <a:prstGeom prst="rect">
@@ -6015,7 +6037,9 @@
           <a:ln/>
         </p:spPr>
         <p:txBody>
-          <a:bodyPr wrap="square" lIns="0" tIns="0" rIns="0" bIns="0" rtlCol="0" anchor="ctr"/>
+          <a:bodyPr wrap="square" lIns="0" tIns="0" rIns="0" bIns="0" rtlCol="0" anchor="ctr">
+            <a:normAutofit/>
+          </a:bodyPr>
           <a:lstStyle/>
           <a:p>
             <a:pPr indent="0" marL="0">
@@ -6052,7 +6076,7 @@
         </p:blipFill>
         <p:spPr>
           <a:xfrm>
-            <a:off x="502920" y="1481328"/>
+            <a:off x="566928" y="1481328"/>
             <a:ext cx="5120640" cy="4114800"/>
           </a:xfrm>
           <a:prstGeom prst="rect">
@@ -6068,7 +6092,7 @@
         </p:nvSpPr>
         <p:spPr>
           <a:xfrm>
-            <a:off x="5989320" y="1481328"/>
+            <a:off x="6053328" y="1481328"/>
             <a:ext cx="1560003" cy="457200"/>
           </a:xfrm>
           <a:prstGeom prst="rect">
@@ -6078,7 +6102,9 @@
           <a:ln/>
         </p:spPr>
         <p:txBody>
-          <a:bodyPr wrap="square" lIns="0" tIns="0" rIns="0" bIns="0" rtlCol="0" anchor="ctr"/>
+          <a:bodyPr wrap="square" lIns="0" tIns="0" rIns="0" bIns="0" rtlCol="0" anchor="ctr">
+            <a:normAutofit/>
+          </a:bodyPr>
           <a:lstStyle/>
           <a:p>
             <a:pPr indent="0" marL="0">
@@ -6110,7 +6136,7 @@
         </p:nvSpPr>
         <p:spPr>
           <a:xfrm>
-            <a:off x="7549323" y="1481328"/>
+            <a:off x="7613331" y="1481328"/>
             <a:ext cx="4011436" cy="457200"/>
           </a:xfrm>
           <a:prstGeom prst="rect">
@@ -6120,7 +6146,9 @@
           <a:ln/>
         </p:spPr>
         <p:txBody>
-          <a:bodyPr wrap="square" lIns="0" tIns="0" rIns="0" bIns="0" rtlCol="0" anchor="ctr"/>
+          <a:bodyPr wrap="square" lIns="0" tIns="0" rIns="0" bIns="0" rtlCol="0" anchor="ctr">
+            <a:normAutofit/>
+          </a:bodyPr>
           <a:lstStyle/>
           <a:p>
             <a:pPr indent="0" marL="0">
@@ -6152,7 +6180,7 @@
         </p:nvSpPr>
         <p:spPr>
           <a:xfrm>
-            <a:off x="5989320" y="1938528"/>
+            <a:off x="6053328" y="1938528"/>
             <a:ext cx="5571439" cy="0"/>
           </a:xfrm>
           <a:prstGeom prst="line">
@@ -6175,7 +6203,7 @@
         </p:nvSpPr>
         <p:spPr>
           <a:xfrm>
-            <a:off x="5989320" y="1938528"/>
+            <a:off x="6053328" y="1938528"/>
             <a:ext cx="1560003" cy="457200"/>
           </a:xfrm>
           <a:prstGeom prst="rect">
@@ -6185,7 +6213,9 @@
           <a:ln/>
         </p:spPr>
         <p:txBody>
-          <a:bodyPr wrap="square" lIns="0" tIns="0" rIns="0" bIns="0" rtlCol="0" anchor="ctr"/>
+          <a:bodyPr wrap="square" lIns="0" tIns="0" rIns="0" bIns="0" rtlCol="0" anchor="ctr">
+            <a:normAutofit/>
+          </a:bodyPr>
           <a:lstStyle/>
           <a:p>
             <a:pPr indent="0" marL="0">
@@ -6217,7 +6247,7 @@
         </p:nvSpPr>
         <p:spPr>
           <a:xfrm>
-            <a:off x="7549323" y="1938528"/>
+            <a:off x="7613331" y="1938528"/>
             <a:ext cx="4011436" cy="457200"/>
           </a:xfrm>
           <a:prstGeom prst="rect">
@@ -6227,7 +6257,9 @@
           <a:ln/>
         </p:spPr>
         <p:txBody>
-          <a:bodyPr wrap="square" lIns="0" tIns="0" rIns="0" bIns="0" rtlCol="0" anchor="ctr"/>
+          <a:bodyPr wrap="square" lIns="0" tIns="0" rIns="0" bIns="0" rtlCol="0" anchor="ctr">
+            <a:normAutofit/>
+          </a:bodyPr>
           <a:lstStyle/>
           <a:p>
             <a:pPr indent="0" marL="0">
@@ -6259,7 +6291,7 @@
         </p:nvSpPr>
         <p:spPr>
           <a:xfrm>
-            <a:off x="5989320" y="2505456"/>
+            <a:off x="6053328" y="2505456"/>
             <a:ext cx="5571439" cy="658368"/>
           </a:xfrm>
           <a:prstGeom prst="roundRect">
@@ -6281,7 +6313,7 @@
         </p:nvSpPr>
         <p:spPr>
           <a:xfrm>
-            <a:off x="5989320" y="2560320"/>
+            <a:off x="6053328" y="2560320"/>
             <a:ext cx="36576" cy="548640"/>
           </a:xfrm>
           <a:prstGeom prst="rect">
@@ -6301,7 +6333,7 @@
         </p:nvSpPr>
         <p:spPr>
           <a:xfrm>
-            <a:off x="6135624" y="2596896"/>
+            <a:off x="6199632" y="2596896"/>
             <a:ext cx="5315407" cy="201168"/>
           </a:xfrm>
           <a:prstGeom prst="rect">
@@ -6340,7 +6372,7 @@
         </p:nvSpPr>
         <p:spPr>
           <a:xfrm>
-            <a:off x="6135624" y="2798064"/>
+            <a:off x="6199632" y="2798064"/>
             <a:ext cx="5315407" cy="329184"/>
           </a:xfrm>
           <a:prstGeom prst="rect">
@@ -6383,7 +6415,7 @@
         </p:nvSpPr>
         <p:spPr>
           <a:xfrm>
-            <a:off x="502920" y="6382512"/>
+            <a:off x="566928" y="6382512"/>
             <a:ext cx="7315200" cy="219456"/>
           </a:xfrm>
           <a:prstGeom prst="rect">
@@ -6422,7 +6454,7 @@
         </p:nvSpPr>
         <p:spPr>
           <a:xfrm>
-            <a:off x="10774375" y="6382512"/>
+            <a:off x="10710367" y="6382512"/>
             <a:ext cx="914400" cy="219456"/>
           </a:xfrm>
           <a:prstGeom prst="rect">
@@ -6493,7 +6525,7 @@
         </p:nvSpPr>
         <p:spPr>
           <a:xfrm>
-            <a:off x="502920" y="457200"/>
+            <a:off x="566928" y="457200"/>
             <a:ext cx="384048" cy="384048"/>
           </a:xfrm>
           <a:prstGeom prst="ellipse">
@@ -6513,7 +6545,7 @@
         </p:nvSpPr>
         <p:spPr>
           <a:xfrm>
-            <a:off x="502920" y="457200"/>
+            <a:off x="566928" y="457200"/>
             <a:ext cx="384048" cy="384048"/>
           </a:xfrm>
           <a:prstGeom prst="rect">
@@ -6552,7 +6584,7 @@
         </p:nvSpPr>
         <p:spPr>
           <a:xfrm>
-            <a:off x="1069848" y="457200"/>
+            <a:off x="1133856" y="457200"/>
             <a:ext cx="10490911" cy="182880"/>
           </a:xfrm>
           <a:prstGeom prst="rect">
@@ -6591,7 +6623,7 @@
         </p:nvSpPr>
         <p:spPr>
           <a:xfrm>
-            <a:off x="1069848" y="640080"/>
+            <a:off x="1133856" y="640080"/>
             <a:ext cx="10490911" cy="365760"/>
           </a:xfrm>
           <a:prstGeom prst="rect">
@@ -6601,7 +6633,9 @@
           <a:ln/>
         </p:spPr>
         <p:txBody>
-          <a:bodyPr wrap="square" lIns="0" tIns="0" rIns="0" bIns="0" rtlCol="0" anchor="ctr"/>
+          <a:bodyPr wrap="square" lIns="0" tIns="0" rIns="0" bIns="0" rtlCol="0" anchor="ctr">
+            <a:normAutofit/>
+          </a:bodyPr>
           <a:lstStyle/>
           <a:p>
             <a:pPr indent="0" marL="0">
@@ -6630,7 +6664,7 @@
         </p:nvSpPr>
         <p:spPr>
           <a:xfrm>
-            <a:off x="502920" y="1371600"/>
+            <a:off x="566928" y="1371600"/>
             <a:ext cx="6858000" cy="237744"/>
           </a:xfrm>
           <a:prstGeom prst="rect">
@@ -6669,7 +6703,7 @@
         </p:nvSpPr>
         <p:spPr>
           <a:xfrm>
-            <a:off x="502920" y="1645920"/>
+            <a:off x="566928" y="1645920"/>
             <a:ext cx="1920240" cy="402336"/>
           </a:xfrm>
           <a:prstGeom prst="rect">
@@ -6679,7 +6713,9 @@
           <a:ln/>
         </p:spPr>
         <p:txBody>
-          <a:bodyPr wrap="square" lIns="0" tIns="0" rIns="0" bIns="0" rtlCol="0" anchor="ctr"/>
+          <a:bodyPr wrap="square" lIns="0" tIns="0" rIns="0" bIns="0" rtlCol="0" anchor="ctr">
+            <a:normAutofit/>
+          </a:bodyPr>
           <a:lstStyle/>
           <a:p>
             <a:pPr indent="0" marL="0">
@@ -6711,7 +6747,7 @@
         </p:nvSpPr>
         <p:spPr>
           <a:xfrm>
-            <a:off x="2423160" y="1645920"/>
+            <a:off x="2487168" y="1645920"/>
             <a:ext cx="4937760" cy="402336"/>
           </a:xfrm>
           <a:prstGeom prst="rect">
@@ -6721,7 +6757,9 @@
           <a:ln/>
         </p:spPr>
         <p:txBody>
-          <a:bodyPr wrap="square" lIns="0" tIns="0" rIns="0" bIns="0" rtlCol="0" anchor="ctr"/>
+          <a:bodyPr wrap="square" lIns="0" tIns="0" rIns="0" bIns="0" rtlCol="0" anchor="ctr">
+            <a:normAutofit/>
+          </a:bodyPr>
           <a:lstStyle/>
           <a:p>
             <a:pPr indent="0" marL="0">
@@ -6753,7 +6791,7 @@
         </p:nvSpPr>
         <p:spPr>
           <a:xfrm>
-            <a:off x="502920" y="2048256"/>
+            <a:off x="566928" y="2048256"/>
             <a:ext cx="6858000" cy="0"/>
           </a:xfrm>
           <a:prstGeom prst="line">
@@ -6776,7 +6814,7 @@
         </p:nvSpPr>
         <p:spPr>
           <a:xfrm>
-            <a:off x="502920" y="2048256"/>
+            <a:off x="566928" y="2048256"/>
             <a:ext cx="1920240" cy="402336"/>
           </a:xfrm>
           <a:prstGeom prst="rect">
@@ -6786,7 +6824,9 @@
           <a:ln/>
         </p:spPr>
         <p:txBody>
-          <a:bodyPr wrap="square" lIns="0" tIns="0" rIns="0" bIns="0" rtlCol="0" anchor="ctr"/>
+          <a:bodyPr wrap="square" lIns="0" tIns="0" rIns="0" bIns="0" rtlCol="0" anchor="ctr">
+            <a:normAutofit/>
+          </a:bodyPr>
           <a:lstStyle/>
           <a:p>
             <a:pPr indent="0" marL="0">
@@ -6818,7 +6858,7 @@
         </p:nvSpPr>
         <p:spPr>
           <a:xfrm>
-            <a:off x="2423160" y="2048256"/>
+            <a:off x="2487168" y="2048256"/>
             <a:ext cx="4937760" cy="402336"/>
           </a:xfrm>
           <a:prstGeom prst="rect">
@@ -6828,7 +6868,9 @@
           <a:ln/>
         </p:spPr>
         <p:txBody>
-          <a:bodyPr wrap="square" lIns="0" tIns="0" rIns="0" bIns="0" rtlCol="0" anchor="ctr"/>
+          <a:bodyPr wrap="square" lIns="0" tIns="0" rIns="0" bIns="0" rtlCol="0" anchor="ctr">
+            <a:normAutofit/>
+          </a:bodyPr>
           <a:lstStyle/>
           <a:p>
             <a:pPr indent="0" marL="0">
@@ -6860,7 +6902,7 @@
         </p:nvSpPr>
         <p:spPr>
           <a:xfrm>
-            <a:off x="7540600" y="1371600"/>
+            <a:off x="7604608" y="1371600"/>
             <a:ext cx="0" cy="4754880"/>
           </a:xfrm>
           <a:prstGeom prst="line">
@@ -6883,7 +6925,7 @@
         </p:nvSpPr>
         <p:spPr>
           <a:xfrm>
-            <a:off x="7720279" y="1645920"/>
+            <a:off x="7784287" y="1645920"/>
             <a:ext cx="3840480" cy="2103120"/>
           </a:xfrm>
           <a:prstGeom prst="roundRect">
@@ -6905,7 +6947,7 @@
         </p:nvSpPr>
         <p:spPr>
           <a:xfrm>
-            <a:off x="7720279" y="1700784"/>
+            <a:off x="7784287" y="1700784"/>
             <a:ext cx="36576" cy="1993392"/>
           </a:xfrm>
           <a:prstGeom prst="rect">
@@ -6925,7 +6967,7 @@
         </p:nvSpPr>
         <p:spPr>
           <a:xfrm>
-            <a:off x="7866583" y="1737360"/>
+            <a:off x="7930591" y="1737360"/>
             <a:ext cx="3584448" cy="201168"/>
           </a:xfrm>
           <a:prstGeom prst="rect">
@@ -6964,7 +7006,7 @@
         </p:nvSpPr>
         <p:spPr>
           <a:xfrm>
-            <a:off x="7866583" y="1938528"/>
+            <a:off x="7930591" y="1938528"/>
             <a:ext cx="3584448" cy="1773936"/>
           </a:xfrm>
           <a:prstGeom prst="rect">
@@ -7007,7 +7049,7 @@
         </p:nvSpPr>
         <p:spPr>
           <a:xfrm>
-            <a:off x="7720279" y="3977640"/>
+            <a:off x="7784287" y="3977640"/>
             <a:ext cx="3840480" cy="2148840"/>
           </a:xfrm>
           <a:prstGeom prst="roundRect">
@@ -7029,7 +7071,7 @@
         </p:nvSpPr>
         <p:spPr>
           <a:xfrm>
-            <a:off x="7720279" y="4032504"/>
+            <a:off x="7784287" y="4032504"/>
             <a:ext cx="36576" cy="2039112"/>
           </a:xfrm>
           <a:prstGeom prst="rect">
@@ -7049,7 +7091,7 @@
         </p:nvSpPr>
         <p:spPr>
           <a:xfrm>
-            <a:off x="7866583" y="4069080"/>
+            <a:off x="7930591" y="4069080"/>
             <a:ext cx="3584448" cy="201168"/>
           </a:xfrm>
           <a:prstGeom prst="rect">
@@ -7088,7 +7130,7 @@
         </p:nvSpPr>
         <p:spPr>
           <a:xfrm>
-            <a:off x="7866583" y="4270248"/>
+            <a:off x="7930591" y="4270248"/>
             <a:ext cx="3584448" cy="1819656"/>
           </a:xfrm>
           <a:prstGeom prst="rect">
@@ -7179,7 +7221,7 @@
         </p:nvSpPr>
         <p:spPr>
           <a:xfrm>
-            <a:off x="502920" y="6382512"/>
+            <a:off x="566928" y="6382512"/>
             <a:ext cx="7315200" cy="219456"/>
           </a:xfrm>
           <a:prstGeom prst="rect">
@@ -7218,7 +7260,7 @@
         </p:nvSpPr>
         <p:spPr>
           <a:xfrm>
-            <a:off x="10774375" y="6382512"/>
+            <a:off x="10710367" y="6382512"/>
             <a:ext cx="914400" cy="219456"/>
           </a:xfrm>
           <a:prstGeom prst="rect">
@@ -7289,7 +7331,7 @@
         </p:nvSpPr>
         <p:spPr>
           <a:xfrm>
-            <a:off x="502920" y="457200"/>
+            <a:off x="566928" y="457200"/>
             <a:ext cx="384048" cy="384048"/>
           </a:xfrm>
           <a:prstGeom prst="ellipse">
@@ -7309,7 +7351,7 @@
         </p:nvSpPr>
         <p:spPr>
           <a:xfrm>
-            <a:off x="502920" y="457200"/>
+            <a:off x="566928" y="457200"/>
             <a:ext cx="384048" cy="384048"/>
           </a:xfrm>
           <a:prstGeom prst="rect">
@@ -7348,7 +7390,7 @@
         </p:nvSpPr>
         <p:spPr>
           <a:xfrm>
-            <a:off x="1069848" y="457200"/>
+            <a:off x="1133856" y="457200"/>
             <a:ext cx="10490911" cy="182880"/>
           </a:xfrm>
           <a:prstGeom prst="rect">
@@ -7387,7 +7429,7 @@
         </p:nvSpPr>
         <p:spPr>
           <a:xfrm>
-            <a:off x="1069848" y="640080"/>
+            <a:off x="1133856" y="640080"/>
             <a:ext cx="10490911" cy="365760"/>
           </a:xfrm>
           <a:prstGeom prst="rect">
@@ -7397,7 +7439,9 @@
           <a:ln/>
         </p:spPr>
         <p:txBody>
-          <a:bodyPr wrap="square" lIns="0" tIns="0" rIns="0" bIns="0" rtlCol="0" anchor="ctr"/>
+          <a:bodyPr wrap="square" lIns="0" tIns="0" rIns="0" bIns="0" rtlCol="0" anchor="ctr">
+            <a:normAutofit/>
+          </a:bodyPr>
           <a:lstStyle/>
           <a:p>
             <a:pPr indent="0" marL="0">
@@ -7426,7 +7470,7 @@
         </p:nvSpPr>
         <p:spPr>
           <a:xfrm>
-            <a:off x="502920" y="1371600"/>
+            <a:off x="566928" y="1371600"/>
             <a:ext cx="6858000" cy="237744"/>
           </a:xfrm>
           <a:prstGeom prst="rect">
@@ -7465,7 +7509,7 @@
         </p:nvSpPr>
         <p:spPr>
           <a:xfrm>
-            <a:off x="502920" y="1645920"/>
+            <a:off x="566928" y="1645920"/>
             <a:ext cx="1920240" cy="402336"/>
           </a:xfrm>
           <a:prstGeom prst="rect">
@@ -7475,7 +7519,9 @@
           <a:ln/>
         </p:spPr>
         <p:txBody>
-          <a:bodyPr wrap="square" lIns="0" tIns="0" rIns="0" bIns="0" rtlCol="0" anchor="ctr"/>
+          <a:bodyPr wrap="square" lIns="0" tIns="0" rIns="0" bIns="0" rtlCol="0" anchor="ctr">
+            <a:normAutofit/>
+          </a:bodyPr>
           <a:lstStyle/>
           <a:p>
             <a:pPr indent="0" marL="0">
@@ -7507,7 +7553,7 @@
         </p:nvSpPr>
         <p:spPr>
           <a:xfrm>
-            <a:off x="2423160" y="1645920"/>
+            <a:off x="2487168" y="1645920"/>
             <a:ext cx="4937760" cy="402336"/>
           </a:xfrm>
           <a:prstGeom prst="rect">
@@ -7517,7 +7563,9 @@
           <a:ln/>
         </p:spPr>
         <p:txBody>
-          <a:bodyPr wrap="square" lIns="0" tIns="0" rIns="0" bIns="0" rtlCol="0" anchor="ctr"/>
+          <a:bodyPr wrap="square" lIns="0" tIns="0" rIns="0" bIns="0" rtlCol="0" anchor="ctr">
+            <a:normAutofit/>
+          </a:bodyPr>
           <a:lstStyle/>
           <a:p>
             <a:pPr indent="0" marL="0">
@@ -7549,7 +7597,7 @@
         </p:nvSpPr>
         <p:spPr>
           <a:xfrm>
-            <a:off x="502920" y="2048256"/>
+            <a:off x="566928" y="2048256"/>
             <a:ext cx="6858000" cy="0"/>
           </a:xfrm>
           <a:prstGeom prst="line">
@@ -7572,7 +7620,7 @@
         </p:nvSpPr>
         <p:spPr>
           <a:xfrm>
-            <a:off x="502920" y="2048256"/>
+            <a:off x="566928" y="2048256"/>
             <a:ext cx="1920240" cy="402336"/>
           </a:xfrm>
           <a:prstGeom prst="rect">
@@ -7582,7 +7630,9 @@
           <a:ln/>
         </p:spPr>
         <p:txBody>
-          <a:bodyPr wrap="square" lIns="0" tIns="0" rIns="0" bIns="0" rtlCol="0" anchor="ctr"/>
+          <a:bodyPr wrap="square" lIns="0" tIns="0" rIns="0" bIns="0" rtlCol="0" anchor="ctr">
+            <a:normAutofit/>
+          </a:bodyPr>
           <a:lstStyle/>
           <a:p>
             <a:pPr indent="0" marL="0">
@@ -7614,7 +7664,7 @@
         </p:nvSpPr>
         <p:spPr>
           <a:xfrm>
-            <a:off x="2423160" y="2048256"/>
+            <a:off x="2487168" y="2048256"/>
             <a:ext cx="4937760" cy="402336"/>
           </a:xfrm>
           <a:prstGeom prst="rect">
@@ -7624,7 +7674,9 @@
           <a:ln/>
         </p:spPr>
         <p:txBody>
-          <a:bodyPr wrap="square" lIns="0" tIns="0" rIns="0" bIns="0" rtlCol="0" anchor="ctr"/>
+          <a:bodyPr wrap="square" lIns="0" tIns="0" rIns="0" bIns="0" rtlCol="0" anchor="ctr">
+            <a:normAutofit/>
+          </a:bodyPr>
           <a:lstStyle/>
           <a:p>
             <a:pPr indent="0" marL="0">
@@ -7656,7 +7708,7 @@
         </p:nvSpPr>
         <p:spPr>
           <a:xfrm>
-            <a:off x="7540600" y="1371600"/>
+            <a:off x="7604608" y="1371600"/>
             <a:ext cx="0" cy="4754880"/>
           </a:xfrm>
           <a:prstGeom prst="line">
@@ -7679,7 +7731,7 @@
         </p:nvSpPr>
         <p:spPr>
           <a:xfrm>
-            <a:off x="7720279" y="1645920"/>
+            <a:off x="7784287" y="1645920"/>
             <a:ext cx="3840480" cy="1645920"/>
           </a:xfrm>
           <a:prstGeom prst="roundRect">
@@ -7701,7 +7753,7 @@
         </p:nvSpPr>
         <p:spPr>
           <a:xfrm>
-            <a:off x="7720279" y="1700784"/>
+            <a:off x="7784287" y="1700784"/>
             <a:ext cx="36576" cy="1536192"/>
           </a:xfrm>
           <a:prstGeom prst="rect">
@@ -7721,7 +7773,7 @@
         </p:nvSpPr>
         <p:spPr>
           <a:xfrm>
-            <a:off x="7866583" y="1737360"/>
+            <a:off x="7930591" y="1737360"/>
             <a:ext cx="3584448" cy="201168"/>
           </a:xfrm>
           <a:prstGeom prst="rect">
@@ -7749,7 +7801,7 @@
         </p:nvSpPr>
         <p:spPr>
           <a:xfrm>
-            <a:off x="7866583" y="1938528"/>
+            <a:off x="7930591" y="1938528"/>
             <a:ext cx="3584448" cy="1316736"/>
           </a:xfrm>
           <a:prstGeom prst="rect">
@@ -7791,7 +7843,7 @@
         </p:nvSpPr>
         <p:spPr>
           <a:xfrm>
-            <a:off x="502920" y="6382512"/>
+            <a:off x="566928" y="6382512"/>
             <a:ext cx="7315200" cy="219456"/>
           </a:xfrm>
           <a:prstGeom prst="rect">
@@ -7830,7 +7882,7 @@
         </p:nvSpPr>
         <p:spPr>
           <a:xfrm>
-            <a:off x="10774375" y="6382512"/>
+            <a:off x="10710367" y="6382512"/>
             <a:ext cx="914400" cy="219456"/>
           </a:xfrm>
           <a:prstGeom prst="rect">
@@ -7901,7 +7953,7 @@
         </p:nvSpPr>
         <p:spPr>
           <a:xfrm>
-            <a:off x="502920" y="457200"/>
+            <a:off x="566928" y="457200"/>
             <a:ext cx="384048" cy="384048"/>
           </a:xfrm>
           <a:prstGeom prst="ellipse">
@@ -7921,7 +7973,7 @@
         </p:nvSpPr>
         <p:spPr>
           <a:xfrm>
-            <a:off x="502920" y="457200"/>
+            <a:off x="566928" y="457200"/>
             <a:ext cx="384048" cy="384048"/>
           </a:xfrm>
           <a:prstGeom prst="rect">
@@ -7960,7 +8012,7 @@
         </p:nvSpPr>
         <p:spPr>
           <a:xfrm>
-            <a:off x="1069848" y="457200"/>
+            <a:off x="1133856" y="457200"/>
             <a:ext cx="10490911" cy="182880"/>
           </a:xfrm>
           <a:prstGeom prst="rect">
@@ -7999,7 +8051,7 @@
         </p:nvSpPr>
         <p:spPr>
           <a:xfrm>
-            <a:off x="1069848" y="640080"/>
+            <a:off x="1133856" y="640080"/>
             <a:ext cx="10490911" cy="365760"/>
           </a:xfrm>
           <a:prstGeom prst="rect">
@@ -8009,7 +8061,9 @@
           <a:ln/>
         </p:spPr>
         <p:txBody>
-          <a:bodyPr wrap="square" lIns="0" tIns="0" rIns="0" bIns="0" rtlCol="0" anchor="ctr"/>
+          <a:bodyPr wrap="square" lIns="0" tIns="0" rIns="0" bIns="0" rtlCol="0" anchor="ctr">
+            <a:normAutofit/>
+          </a:bodyPr>
           <a:lstStyle/>
           <a:p>
             <a:pPr indent="0" marL="0">
@@ -8038,7 +8092,7 @@
         </p:nvSpPr>
         <p:spPr>
           <a:xfrm>
-            <a:off x="502920" y="1417320"/>
+            <a:off x="566928" y="1417320"/>
             <a:ext cx="5391760" cy="4389120"/>
           </a:xfrm>
           <a:prstGeom prst="roundRect">
@@ -8065,7 +8119,7 @@
         </p:nvSpPr>
         <p:spPr>
           <a:xfrm>
-            <a:off x="731520" y="1618488"/>
+            <a:off x="795528" y="1618488"/>
             <a:ext cx="4934560" cy="320040"/>
           </a:xfrm>
           <a:prstGeom prst="rect">
@@ -8104,7 +8158,7 @@
         </p:nvSpPr>
         <p:spPr>
           <a:xfrm>
-            <a:off x="731520" y="2011680"/>
+            <a:off x="795528" y="2011680"/>
             <a:ext cx="2269897" cy="475488"/>
           </a:xfrm>
           <a:prstGeom prst="rect">
@@ -8114,7 +8168,9 @@
           <a:ln/>
         </p:spPr>
         <p:txBody>
-          <a:bodyPr wrap="square" lIns="0" tIns="0" rIns="0" bIns="0" rtlCol="0" anchor="ctr"/>
+          <a:bodyPr wrap="square" lIns="0" tIns="0" rIns="0" bIns="0" rtlCol="0" anchor="ctr">
+            <a:normAutofit/>
+          </a:bodyPr>
           <a:lstStyle/>
           <a:p>
             <a:pPr indent="0" marL="0">
@@ -8146,7 +8202,7 @@
         </p:nvSpPr>
         <p:spPr>
           <a:xfrm>
-            <a:off x="3001417" y="2011680"/>
+            <a:off x="3065425" y="2011680"/>
             <a:ext cx="2664662" cy="475488"/>
           </a:xfrm>
           <a:prstGeom prst="rect">
@@ -8156,7 +8212,9 @@
           <a:ln/>
         </p:spPr>
         <p:txBody>
-          <a:bodyPr wrap="square" lIns="0" tIns="0" rIns="0" bIns="0" rtlCol="0" anchor="ctr"/>
+          <a:bodyPr wrap="square" lIns="0" tIns="0" rIns="0" bIns="0" rtlCol="0" anchor="ctr">
+            <a:normAutofit/>
+          </a:bodyPr>
           <a:lstStyle/>
           <a:p>
             <a:pPr indent="0" marL="0">
@@ -8188,7 +8246,7 @@
         </p:nvSpPr>
         <p:spPr>
           <a:xfrm>
-            <a:off x="731520" y="2487168"/>
+            <a:off x="795528" y="2487168"/>
             <a:ext cx="4934560" cy="0"/>
           </a:xfrm>
           <a:prstGeom prst="line">
@@ -8211,7 +8269,7 @@
         </p:nvSpPr>
         <p:spPr>
           <a:xfrm>
-            <a:off x="731520" y="2487168"/>
+            <a:off x="795528" y="2487168"/>
             <a:ext cx="2269897" cy="475488"/>
           </a:xfrm>
           <a:prstGeom prst="rect">
@@ -8221,7 +8279,9 @@
           <a:ln/>
         </p:spPr>
         <p:txBody>
-          <a:bodyPr wrap="square" lIns="0" tIns="0" rIns="0" bIns="0" rtlCol="0" anchor="ctr"/>
+          <a:bodyPr wrap="square" lIns="0" tIns="0" rIns="0" bIns="0" rtlCol="0" anchor="ctr">
+            <a:normAutofit/>
+          </a:bodyPr>
           <a:lstStyle/>
           <a:p>
             <a:pPr indent="0" marL="0">
@@ -8253,7 +8313,7 @@
         </p:nvSpPr>
         <p:spPr>
           <a:xfrm>
-            <a:off x="3001417" y="2487168"/>
+            <a:off x="3065425" y="2487168"/>
             <a:ext cx="2664662" cy="475488"/>
           </a:xfrm>
           <a:prstGeom prst="rect">
@@ -8263,7 +8323,9 @@
           <a:ln/>
         </p:spPr>
         <p:txBody>
-          <a:bodyPr wrap="square" lIns="0" tIns="0" rIns="0" bIns="0" rtlCol="0" anchor="ctr"/>
+          <a:bodyPr wrap="square" lIns="0" tIns="0" rIns="0" bIns="0" rtlCol="0" anchor="ctr">
+            <a:normAutofit/>
+          </a:bodyPr>
           <a:lstStyle/>
           <a:p>
             <a:pPr indent="0" marL="0">
@@ -8295,7 +8357,7 @@
         </p:nvSpPr>
         <p:spPr>
           <a:xfrm>
-            <a:off x="731520" y="2962656"/>
+            <a:off x="795528" y="2962656"/>
             <a:ext cx="4934560" cy="0"/>
           </a:xfrm>
           <a:prstGeom prst="line">
@@ -8318,7 +8380,7 @@
         </p:nvSpPr>
         <p:spPr>
           <a:xfrm>
-            <a:off x="731520" y="2962656"/>
+            <a:off x="795528" y="2962656"/>
             <a:ext cx="2269897" cy="475488"/>
           </a:xfrm>
           <a:prstGeom prst="rect">
@@ -8328,7 +8390,9 @@
           <a:ln/>
         </p:spPr>
         <p:txBody>
-          <a:bodyPr wrap="square" lIns="0" tIns="0" rIns="0" bIns="0" rtlCol="0" anchor="ctr"/>
+          <a:bodyPr wrap="square" lIns="0" tIns="0" rIns="0" bIns="0" rtlCol="0" anchor="ctr">
+            <a:normAutofit/>
+          </a:bodyPr>
           <a:lstStyle/>
           <a:p>
             <a:pPr indent="0" marL="0">
@@ -8360,7 +8424,7 @@
         </p:nvSpPr>
         <p:spPr>
           <a:xfrm>
-            <a:off x="3001417" y="2962656"/>
+            <a:off x="3065425" y="2962656"/>
             <a:ext cx="2664662" cy="475488"/>
           </a:xfrm>
           <a:prstGeom prst="rect">
@@ -8370,7 +8434,9 @@
           <a:ln/>
         </p:spPr>
         <p:txBody>
-          <a:bodyPr wrap="square" lIns="0" tIns="0" rIns="0" bIns="0" rtlCol="0" anchor="ctr"/>
+          <a:bodyPr wrap="square" lIns="0" tIns="0" rIns="0" bIns="0" rtlCol="0" anchor="ctr">
+            <a:normAutofit/>
+          </a:bodyPr>
           <a:lstStyle/>
           <a:p>
             <a:pPr indent="0" marL="0">
@@ -8402,7 +8468,7 @@
         </p:nvSpPr>
         <p:spPr>
           <a:xfrm>
-            <a:off x="731520" y="3438144"/>
+            <a:off x="795528" y="3438144"/>
             <a:ext cx="4934560" cy="0"/>
           </a:xfrm>
           <a:prstGeom prst="line">
@@ -8425,7 +8491,7 @@
         </p:nvSpPr>
         <p:spPr>
           <a:xfrm>
-            <a:off x="731520" y="3438144"/>
+            <a:off x="795528" y="3438144"/>
             <a:ext cx="2269897" cy="475488"/>
           </a:xfrm>
           <a:prstGeom prst="rect">
@@ -8435,7 +8501,9 @@
           <a:ln/>
         </p:spPr>
         <p:txBody>
-          <a:bodyPr wrap="square" lIns="0" tIns="0" rIns="0" bIns="0" rtlCol="0" anchor="ctr"/>
+          <a:bodyPr wrap="square" lIns="0" tIns="0" rIns="0" bIns="0" rtlCol="0" anchor="ctr">
+            <a:normAutofit/>
+          </a:bodyPr>
           <a:lstStyle/>
           <a:p>
             <a:pPr indent="0" marL="0">
@@ -8467,7 +8535,7 @@
         </p:nvSpPr>
         <p:spPr>
           <a:xfrm>
-            <a:off x="3001417" y="3438144"/>
+            <a:off x="3065425" y="3438144"/>
             <a:ext cx="2664662" cy="475488"/>
           </a:xfrm>
           <a:prstGeom prst="rect">
@@ -8477,7 +8545,9 @@
           <a:ln/>
         </p:spPr>
         <p:txBody>
-          <a:bodyPr wrap="square" lIns="0" tIns="0" rIns="0" bIns="0" rtlCol="0" anchor="ctr"/>
+          <a:bodyPr wrap="square" lIns="0" tIns="0" rIns="0" bIns="0" rtlCol="0" anchor="ctr">
+            <a:normAutofit/>
+          </a:bodyPr>
           <a:lstStyle/>
           <a:p>
             <a:pPr indent="0" marL="0">
@@ -8509,7 +8579,7 @@
         </p:nvSpPr>
         <p:spPr>
           <a:xfrm>
-            <a:off x="731520" y="3913632"/>
+            <a:off x="795528" y="3913632"/>
             <a:ext cx="4934560" cy="0"/>
           </a:xfrm>
           <a:prstGeom prst="line">
@@ -8532,7 +8602,7 @@
         </p:nvSpPr>
         <p:spPr>
           <a:xfrm>
-            <a:off x="731520" y="3913632"/>
+            <a:off x="795528" y="3913632"/>
             <a:ext cx="2269897" cy="475488"/>
           </a:xfrm>
           <a:prstGeom prst="rect">
@@ -8542,7 +8612,9 @@
           <a:ln/>
         </p:spPr>
         <p:txBody>
-          <a:bodyPr wrap="square" lIns="0" tIns="0" rIns="0" bIns="0" rtlCol="0" anchor="ctr"/>
+          <a:bodyPr wrap="square" lIns="0" tIns="0" rIns="0" bIns="0" rtlCol="0" anchor="ctr">
+            <a:normAutofit/>
+          </a:bodyPr>
           <a:lstStyle/>
           <a:p>
             <a:pPr indent="0" marL="0">
@@ -8574,7 +8646,7 @@
         </p:nvSpPr>
         <p:spPr>
           <a:xfrm>
-            <a:off x="3001417" y="3913632"/>
+            <a:off x="3065425" y="3913632"/>
             <a:ext cx="2664662" cy="475488"/>
           </a:xfrm>
           <a:prstGeom prst="rect">
@@ -8584,7 +8656,9 @@
           <a:ln/>
         </p:spPr>
         <p:txBody>
-          <a:bodyPr wrap="square" lIns="0" tIns="0" rIns="0" bIns="0" rtlCol="0" anchor="ctr"/>
+          <a:bodyPr wrap="square" lIns="0" tIns="0" rIns="0" bIns="0" rtlCol="0" anchor="ctr">
+            <a:normAutofit/>
+          </a:bodyPr>
           <a:lstStyle/>
           <a:p>
             <a:pPr indent="0" marL="0">
@@ -8616,7 +8690,7 @@
         </p:nvSpPr>
         <p:spPr>
           <a:xfrm>
-            <a:off x="731520" y="4389120"/>
+            <a:off x="795528" y="4389120"/>
             <a:ext cx="4934560" cy="0"/>
           </a:xfrm>
           <a:prstGeom prst="line">
@@ -8639,7 +8713,7 @@
         </p:nvSpPr>
         <p:spPr>
           <a:xfrm>
-            <a:off x="731520" y="4389120"/>
+            <a:off x="795528" y="4389120"/>
             <a:ext cx="2269897" cy="475488"/>
           </a:xfrm>
           <a:prstGeom prst="rect">
@@ -8649,7 +8723,9 @@
           <a:ln/>
         </p:spPr>
         <p:txBody>
-          <a:bodyPr wrap="square" lIns="0" tIns="0" rIns="0" bIns="0" rtlCol="0" anchor="ctr"/>
+          <a:bodyPr wrap="square" lIns="0" tIns="0" rIns="0" bIns="0" rtlCol="0" anchor="ctr">
+            <a:normAutofit/>
+          </a:bodyPr>
           <a:lstStyle/>
           <a:p>
             <a:pPr indent="0" marL="0">
@@ -8681,7 +8757,7 @@
         </p:nvSpPr>
         <p:spPr>
           <a:xfrm>
-            <a:off x="3001417" y="4389120"/>
+            <a:off x="3065425" y="4389120"/>
             <a:ext cx="2664662" cy="475488"/>
           </a:xfrm>
           <a:prstGeom prst="rect">
@@ -8691,7 +8767,9 @@
           <a:ln/>
         </p:spPr>
         <p:txBody>
-          <a:bodyPr wrap="square" lIns="0" tIns="0" rIns="0" bIns="0" rtlCol="0" anchor="ctr"/>
+          <a:bodyPr wrap="square" lIns="0" tIns="0" rIns="0" bIns="0" rtlCol="0" anchor="ctr">
+            <a:normAutofit/>
+          </a:bodyPr>
           <a:lstStyle/>
           <a:p>
             <a:pPr indent="0" marL="0">
@@ -8723,7 +8801,7 @@
         </p:nvSpPr>
         <p:spPr>
           <a:xfrm>
-            <a:off x="731520" y="4864608"/>
+            <a:off x="795528" y="4864608"/>
             <a:ext cx="4934560" cy="0"/>
           </a:xfrm>
           <a:prstGeom prst="line">
@@ -8746,7 +8824,7 @@
         </p:nvSpPr>
         <p:spPr>
           <a:xfrm>
-            <a:off x="731520" y="4864608"/>
+            <a:off x="795528" y="4864608"/>
             <a:ext cx="2269897" cy="475488"/>
           </a:xfrm>
           <a:prstGeom prst="rect">
@@ -8756,7 +8834,9 @@
           <a:ln/>
         </p:spPr>
         <p:txBody>
-          <a:bodyPr wrap="square" lIns="0" tIns="0" rIns="0" bIns="0" rtlCol="0" anchor="ctr"/>
+          <a:bodyPr wrap="square" lIns="0" tIns="0" rIns="0" bIns="0" rtlCol="0" anchor="ctr">
+            <a:normAutofit/>
+          </a:bodyPr>
           <a:lstStyle/>
           <a:p>
             <a:pPr indent="0" marL="0">
@@ -8788,7 +8868,7 @@
         </p:nvSpPr>
         <p:spPr>
           <a:xfrm>
-            <a:off x="3001417" y="4864608"/>
+            <a:off x="3065425" y="4864608"/>
             <a:ext cx="2664662" cy="475488"/>
           </a:xfrm>
           <a:prstGeom prst="rect">
@@ -8798,7 +8878,9 @@
           <a:ln/>
         </p:spPr>
         <p:txBody>
-          <a:bodyPr wrap="square" lIns="0" tIns="0" rIns="0" bIns="0" rtlCol="0" anchor="ctr"/>
+          <a:bodyPr wrap="square" lIns="0" tIns="0" rIns="0" bIns="0" rtlCol="0" anchor="ctr">
+            <a:normAutofit/>
+          </a:bodyPr>
           <a:lstStyle/>
           <a:p>
             <a:pPr indent="0" marL="0">
@@ -8830,7 +8912,7 @@
         </p:nvSpPr>
         <p:spPr>
           <a:xfrm>
-            <a:off x="6169000" y="1417320"/>
+            <a:off x="6233008" y="1417320"/>
             <a:ext cx="5391760" cy="4389120"/>
           </a:xfrm>
           <a:prstGeom prst="roundRect">
@@ -8857,7 +8939,7 @@
         </p:nvSpPr>
         <p:spPr>
           <a:xfrm>
-            <a:off x="6397600" y="1618488"/>
+            <a:off x="6461608" y="1618488"/>
             <a:ext cx="4934560" cy="320040"/>
           </a:xfrm>
           <a:prstGeom prst="rect">
@@ -8903,7 +8985,7 @@
           </p:nvPr>
         </p:nvGraphicFramePr>
         <p:xfrm>
-          <a:off x="6397600" y="2057400"/>
+          <a:off x="6461608" y="2057400"/>
           <a:ext cx="4934560" cy="914400"/>
         </p:xfrm>
         <a:graphic>
@@ -10410,7 +10492,7 @@
         </p:nvSpPr>
         <p:spPr>
           <a:xfrm>
-            <a:off x="6397600" y="4069080"/>
+            <a:off x="6461608" y="4069080"/>
             <a:ext cx="4934560" cy="1463040"/>
           </a:xfrm>
           <a:prstGeom prst="roundRect">
@@ -10432,7 +10514,7 @@
         </p:nvSpPr>
         <p:spPr>
           <a:xfrm>
-            <a:off x="6397600" y="4123944"/>
+            <a:off x="6461608" y="4123944"/>
             <a:ext cx="36576" cy="1353312"/>
           </a:xfrm>
           <a:prstGeom prst="rect">
@@ -10452,7 +10534,7 @@
         </p:nvSpPr>
         <p:spPr>
           <a:xfrm>
-            <a:off x="6543904" y="4160520"/>
+            <a:off x="6607912" y="4160520"/>
             <a:ext cx="4678528" cy="201168"/>
           </a:xfrm>
           <a:prstGeom prst="rect">
@@ -10491,7 +10573,7 @@
         </p:nvSpPr>
         <p:spPr>
           <a:xfrm>
-            <a:off x="6543904" y="4361688"/>
+            <a:off x="6607912" y="4361688"/>
             <a:ext cx="4678528" cy="1133856"/>
           </a:xfrm>
           <a:prstGeom prst="rect">
@@ -10533,7 +10615,7 @@
         </p:nvSpPr>
         <p:spPr>
           <a:xfrm>
-            <a:off x="502920" y="6382512"/>
+            <a:off x="566928" y="6382512"/>
             <a:ext cx="7315200" cy="219456"/>
           </a:xfrm>
           <a:prstGeom prst="rect">
@@ -10572,7 +10654,7 @@
         </p:nvSpPr>
         <p:spPr>
           <a:xfrm>
-            <a:off x="10774375" y="6382512"/>
+            <a:off x="10710367" y="6382512"/>
             <a:ext cx="914400" cy="219456"/>
           </a:xfrm>
           <a:prstGeom prst="rect">
@@ -10643,7 +10725,7 @@
         </p:nvSpPr>
         <p:spPr>
           <a:xfrm>
-            <a:off x="502920" y="457200"/>
+            <a:off x="566928" y="457200"/>
             <a:ext cx="384048" cy="384048"/>
           </a:xfrm>
           <a:prstGeom prst="ellipse">
@@ -10663,7 +10745,7 @@
         </p:nvSpPr>
         <p:spPr>
           <a:xfrm>
-            <a:off x="502920" y="457200"/>
+            <a:off x="566928" y="457200"/>
             <a:ext cx="384048" cy="384048"/>
           </a:xfrm>
           <a:prstGeom prst="rect">
@@ -10702,7 +10784,7 @@
         </p:nvSpPr>
         <p:spPr>
           <a:xfrm>
-            <a:off x="1069848" y="457200"/>
+            <a:off x="1133856" y="457200"/>
             <a:ext cx="10490911" cy="182880"/>
           </a:xfrm>
           <a:prstGeom prst="rect">
@@ -10741,7 +10823,7 @@
         </p:nvSpPr>
         <p:spPr>
           <a:xfrm>
-            <a:off x="1069848" y="640080"/>
+            <a:off x="1133856" y="640080"/>
             <a:ext cx="10490911" cy="365760"/>
           </a:xfrm>
           <a:prstGeom prst="rect">
@@ -10751,7 +10833,9 @@
           <a:ln/>
         </p:spPr>
         <p:txBody>
-          <a:bodyPr wrap="square" lIns="0" tIns="0" rIns="0" bIns="0" rtlCol="0" anchor="ctr"/>
+          <a:bodyPr wrap="square" lIns="0" tIns="0" rIns="0" bIns="0" rtlCol="0" anchor="ctr">
+            <a:normAutofit/>
+          </a:bodyPr>
           <a:lstStyle/>
           <a:p>
             <a:pPr indent="0" marL="0">
@@ -10780,7 +10864,7 @@
         </p:nvSpPr>
         <p:spPr>
           <a:xfrm>
-            <a:off x="502920" y="4937760"/>
+            <a:off x="566928" y="4937760"/>
             <a:ext cx="11057839" cy="804672"/>
           </a:xfrm>
           <a:prstGeom prst="roundRect">
@@ -10807,7 +10891,7 @@
         </p:nvSpPr>
         <p:spPr>
           <a:xfrm>
-            <a:off x="685800" y="5047488"/>
+            <a:off x="749808" y="5047488"/>
             <a:ext cx="1691640" cy="256032"/>
           </a:xfrm>
           <a:prstGeom prst="rect">
@@ -10846,7 +10930,7 @@
         </p:nvSpPr>
         <p:spPr>
           <a:xfrm>
-            <a:off x="2423160" y="5010912"/>
+            <a:off x="2487168" y="5010912"/>
             <a:ext cx="8954719" cy="658368"/>
           </a:xfrm>
           <a:prstGeom prst="rect">
@@ -10888,7 +10972,7 @@
         </p:nvSpPr>
         <p:spPr>
           <a:xfrm>
-            <a:off x="502920" y="6382512"/>
+            <a:off x="566928" y="6382512"/>
             <a:ext cx="7315200" cy="219456"/>
           </a:xfrm>
           <a:prstGeom prst="rect">
@@ -10927,7 +11011,7 @@
         </p:nvSpPr>
         <p:spPr>
           <a:xfrm>
-            <a:off x="10774375" y="6382512"/>
+            <a:off x="10710367" y="6382512"/>
             <a:ext cx="914400" cy="219456"/>
           </a:xfrm>
           <a:prstGeom prst="rect">
@@ -10998,7 +11082,7 @@
         </p:nvSpPr>
         <p:spPr>
           <a:xfrm>
-            <a:off x="502920" y="457200"/>
+            <a:off x="566928" y="457200"/>
             <a:ext cx="384048" cy="384048"/>
           </a:xfrm>
           <a:prstGeom prst="ellipse">
@@ -11018,7 +11102,7 @@
         </p:nvSpPr>
         <p:spPr>
           <a:xfrm>
-            <a:off x="502920" y="457200"/>
+            <a:off x="566928" y="457200"/>
             <a:ext cx="384048" cy="384048"/>
           </a:xfrm>
           <a:prstGeom prst="rect">
@@ -11057,7 +11141,7 @@
         </p:nvSpPr>
         <p:spPr>
           <a:xfrm>
-            <a:off x="1069848" y="457200"/>
+            <a:off x="1133856" y="457200"/>
             <a:ext cx="10490911" cy="182880"/>
           </a:xfrm>
           <a:prstGeom prst="rect">
@@ -11096,7 +11180,7 @@
         </p:nvSpPr>
         <p:spPr>
           <a:xfrm>
-            <a:off x="1069848" y="640080"/>
+            <a:off x="1133856" y="640080"/>
             <a:ext cx="10490911" cy="365760"/>
           </a:xfrm>
           <a:prstGeom prst="rect">
@@ -11106,7 +11190,9 @@
           <a:ln/>
         </p:spPr>
         <p:txBody>
-          <a:bodyPr wrap="square" lIns="0" tIns="0" rIns="0" bIns="0" rtlCol="0" anchor="ctr"/>
+          <a:bodyPr wrap="square" lIns="0" tIns="0" rIns="0" bIns="0" rtlCol="0" anchor="ctr">
+            <a:normAutofit/>
+          </a:bodyPr>
           <a:lstStyle/>
           <a:p>
             <a:pPr indent="0" marL="0">
@@ -11135,7 +11221,7 @@
         </p:nvSpPr>
         <p:spPr>
           <a:xfrm>
-            <a:off x="502920" y="1417320"/>
+            <a:off x="566928" y="1417320"/>
             <a:ext cx="11057839" cy="3657600"/>
           </a:xfrm>
           <a:prstGeom prst="roundRect">
@@ -11162,7 +11248,7 @@
         </p:nvSpPr>
         <p:spPr>
           <a:xfrm>
-            <a:off x="502920" y="1417320"/>
+            <a:off x="566928" y="1417320"/>
             <a:ext cx="11057839" cy="45720"/>
           </a:xfrm>
           <a:prstGeom prst="rect">
@@ -11182,7 +11268,7 @@
         </p:nvSpPr>
         <p:spPr>
           <a:xfrm>
-            <a:off x="731520" y="1618488"/>
+            <a:off x="795528" y="1618488"/>
             <a:ext cx="10600639" cy="292608"/>
           </a:xfrm>
           <a:prstGeom prst="rect">
@@ -11221,7 +11307,7 @@
         </p:nvSpPr>
         <p:spPr>
           <a:xfrm>
-            <a:off x="731520" y="1947672"/>
+            <a:off x="795528" y="1947672"/>
             <a:ext cx="10600639" cy="365760"/>
           </a:xfrm>
           <a:prstGeom prst="rect">
@@ -11262,7 +11348,7 @@
         </p:nvSpPr>
         <p:spPr>
           <a:xfrm>
-            <a:off x="731520" y="2377440"/>
+            <a:off x="795528" y="2377440"/>
             <a:ext cx="10600639" cy="2606040"/>
           </a:xfrm>
           <a:prstGeom prst="rect">
@@ -11307,7 +11393,7 @@
         </p:nvSpPr>
         <p:spPr>
           <a:xfrm>
-            <a:off x="502920" y="5193792"/>
+            <a:off x="566928" y="5193792"/>
             <a:ext cx="11057839" cy="621792"/>
           </a:xfrm>
           <a:prstGeom prst="roundRect">
@@ -11334,7 +11420,7 @@
         </p:nvSpPr>
         <p:spPr>
           <a:xfrm>
-            <a:off x="731520" y="5193792"/>
+            <a:off x="795528" y="5193792"/>
             <a:ext cx="10600639" cy="621792"/>
           </a:xfrm>
           <a:prstGeom prst="rect">
@@ -11373,7 +11459,7 @@
         </p:nvSpPr>
         <p:spPr>
           <a:xfrm>
-            <a:off x="502920" y="6382512"/>
+            <a:off x="566928" y="6382512"/>
             <a:ext cx="7315200" cy="219456"/>
           </a:xfrm>
           <a:prstGeom prst="rect">
@@ -11412,7 +11498,7 @@
         </p:nvSpPr>
         <p:spPr>
           <a:xfrm>
-            <a:off x="10774375" y="6382512"/>
+            <a:off x="10710367" y="6382512"/>
             <a:ext cx="914400" cy="219456"/>
           </a:xfrm>
           <a:prstGeom prst="rect">
@@ -11483,7 +11569,7 @@
         </p:nvSpPr>
         <p:spPr>
           <a:xfrm>
-            <a:off x="502920" y="457200"/>
+            <a:off x="566928" y="457200"/>
             <a:ext cx="384048" cy="384048"/>
           </a:xfrm>
           <a:prstGeom prst="ellipse">
@@ -11503,7 +11589,7 @@
         </p:nvSpPr>
         <p:spPr>
           <a:xfrm>
-            <a:off x="502920" y="457200"/>
+            <a:off x="566928" y="457200"/>
             <a:ext cx="384048" cy="384048"/>
           </a:xfrm>
           <a:prstGeom prst="rect">
@@ -11542,7 +11628,7 @@
         </p:nvSpPr>
         <p:spPr>
           <a:xfrm>
-            <a:off x="1069848" y="457200"/>
+            <a:off x="1133856" y="457200"/>
             <a:ext cx="10490911" cy="182880"/>
           </a:xfrm>
           <a:prstGeom prst="rect">
@@ -11581,7 +11667,7 @@
         </p:nvSpPr>
         <p:spPr>
           <a:xfrm>
-            <a:off x="1069848" y="640080"/>
+            <a:off x="1133856" y="640080"/>
             <a:ext cx="10490911" cy="365760"/>
           </a:xfrm>
           <a:prstGeom prst="rect">
@@ -11591,7 +11677,9 @@
           <a:ln/>
         </p:spPr>
         <p:txBody>
-          <a:bodyPr wrap="square" lIns="0" tIns="0" rIns="0" bIns="0" rtlCol="0" anchor="ctr"/>
+          <a:bodyPr wrap="square" lIns="0" tIns="0" rIns="0" bIns="0" rtlCol="0" anchor="ctr">
+            <a:normAutofit/>
+          </a:bodyPr>
           <a:lstStyle/>
           <a:p>
             <a:pPr indent="0" marL="0">
@@ -11620,7 +11708,7 @@
         </p:nvSpPr>
         <p:spPr>
           <a:xfrm>
-            <a:off x="502920" y="1371600"/>
+            <a:off x="566928" y="1371600"/>
             <a:ext cx="11057839" cy="237744"/>
           </a:xfrm>
           <a:prstGeom prst="rect">
@@ -11659,7 +11747,7 @@
         </p:nvSpPr>
         <p:spPr>
           <a:xfrm>
-            <a:off x="502920" y="1719072"/>
+            <a:off x="566928" y="1719072"/>
             <a:ext cx="5368900" cy="749808"/>
           </a:xfrm>
           <a:prstGeom prst="rect">
@@ -11684,7 +11772,7 @@
         </p:nvSpPr>
         <p:spPr>
           <a:xfrm>
-            <a:off x="640080" y="1947672"/>
+            <a:off x="704088" y="1947672"/>
             <a:ext cx="292608" cy="292608"/>
           </a:xfrm>
           <a:prstGeom prst="rect">
@@ -11704,7 +11792,7 @@
         </p:nvSpPr>
         <p:spPr>
           <a:xfrm>
-            <a:off x="640080" y="1947672"/>
+            <a:off x="704088" y="1947672"/>
             <a:ext cx="292608" cy="292608"/>
           </a:xfrm>
           <a:prstGeom prst="rect">
@@ -11743,7 +11831,7 @@
         </p:nvSpPr>
         <p:spPr>
           <a:xfrm>
-            <a:off x="1033272" y="1792224"/>
+            <a:off x="1097280" y="1792224"/>
             <a:ext cx="4710532" cy="603504"/>
           </a:xfrm>
           <a:prstGeom prst="rect">
@@ -11785,7 +11873,7 @@
         </p:nvSpPr>
         <p:spPr>
           <a:xfrm>
-            <a:off x="502920" y="2542032"/>
+            <a:off x="566928" y="2542032"/>
             <a:ext cx="5368900" cy="749808"/>
           </a:xfrm>
           <a:prstGeom prst="rect">
@@ -11810,7 +11898,7 @@
         </p:nvSpPr>
         <p:spPr>
           <a:xfrm>
-            <a:off x="640080" y="2770632"/>
+            <a:off x="704088" y="2770632"/>
             <a:ext cx="292608" cy="292608"/>
           </a:xfrm>
           <a:prstGeom prst="rect">
@@ -11830,7 +11918,7 @@
         </p:nvSpPr>
         <p:spPr>
           <a:xfrm>
-            <a:off x="640080" y="2770632"/>
+            <a:off x="704088" y="2770632"/>
             <a:ext cx="292608" cy="292608"/>
           </a:xfrm>
           <a:prstGeom prst="rect">
@@ -11869,7 +11957,7 @@
         </p:nvSpPr>
         <p:spPr>
           <a:xfrm>
-            <a:off x="1033272" y="2615184"/>
+            <a:off x="1097280" y="2615184"/>
             <a:ext cx="4710532" cy="603504"/>
           </a:xfrm>
           <a:prstGeom prst="rect">
@@ -11911,7 +11999,7 @@
         </p:nvSpPr>
         <p:spPr>
           <a:xfrm>
-            <a:off x="502920" y="3364992"/>
+            <a:off x="566928" y="3364992"/>
             <a:ext cx="5368900" cy="749808"/>
           </a:xfrm>
           <a:prstGeom prst="rect">
@@ -11936,7 +12024,7 @@
         </p:nvSpPr>
         <p:spPr>
           <a:xfrm>
-            <a:off x="640080" y="3593592"/>
+            <a:off x="704088" y="3593592"/>
             <a:ext cx="292608" cy="292608"/>
           </a:xfrm>
           <a:prstGeom prst="rect">
@@ -11956,7 +12044,7 @@
         </p:nvSpPr>
         <p:spPr>
           <a:xfrm>
-            <a:off x="640080" y="3593592"/>
+            <a:off x="704088" y="3593592"/>
             <a:ext cx="292608" cy="292608"/>
           </a:xfrm>
           <a:prstGeom prst="rect">
@@ -11995,7 +12083,7 @@
         </p:nvSpPr>
         <p:spPr>
           <a:xfrm>
-            <a:off x="1033272" y="3438144"/>
+            <a:off x="1097280" y="3438144"/>
             <a:ext cx="4710532" cy="603504"/>
           </a:xfrm>
           <a:prstGeom prst="rect">
@@ -12037,7 +12125,7 @@
         </p:nvSpPr>
         <p:spPr>
           <a:xfrm>
-            <a:off x="6191860" y="1719072"/>
+            <a:off x="6255868" y="1719072"/>
             <a:ext cx="5368900" cy="749808"/>
           </a:xfrm>
           <a:prstGeom prst="rect">
@@ -12062,7 +12150,7 @@
         </p:nvSpPr>
         <p:spPr>
           <a:xfrm>
-            <a:off x="6329020" y="1947672"/>
+            <a:off x="6393028" y="1947672"/>
             <a:ext cx="292608" cy="292608"/>
           </a:xfrm>
           <a:prstGeom prst="rect">
@@ -12082,7 +12170,7 @@
         </p:nvSpPr>
         <p:spPr>
           <a:xfrm>
-            <a:off x="6329020" y="1947672"/>
+            <a:off x="6393028" y="1947672"/>
             <a:ext cx="292608" cy="292608"/>
           </a:xfrm>
           <a:prstGeom prst="rect">
@@ -12121,7 +12209,7 @@
         </p:nvSpPr>
         <p:spPr>
           <a:xfrm>
-            <a:off x="6722212" y="1792224"/>
+            <a:off x="6786220" y="1792224"/>
             <a:ext cx="4710532" cy="603504"/>
           </a:xfrm>
           <a:prstGeom prst="rect">
@@ -12163,7 +12251,7 @@
         </p:nvSpPr>
         <p:spPr>
           <a:xfrm>
-            <a:off x="6191860" y="2542032"/>
+            <a:off x="6255868" y="2542032"/>
             <a:ext cx="5368900" cy="749808"/>
           </a:xfrm>
           <a:prstGeom prst="rect">
@@ -12188,7 +12276,7 @@
         </p:nvSpPr>
         <p:spPr>
           <a:xfrm>
-            <a:off x="6329020" y="2770632"/>
+            <a:off x="6393028" y="2770632"/>
             <a:ext cx="292608" cy="292608"/>
           </a:xfrm>
           <a:prstGeom prst="rect">
@@ -12208,7 +12296,7 @@
         </p:nvSpPr>
         <p:spPr>
           <a:xfrm>
-            <a:off x="6329020" y="2770632"/>
+            <a:off x="6393028" y="2770632"/>
             <a:ext cx="292608" cy="292608"/>
           </a:xfrm>
           <a:prstGeom prst="rect">
@@ -12247,7 +12335,7 @@
         </p:nvSpPr>
         <p:spPr>
           <a:xfrm>
-            <a:off x="6722212" y="2615184"/>
+            <a:off x="6786220" y="2615184"/>
             <a:ext cx="4710532" cy="603504"/>
           </a:xfrm>
           <a:prstGeom prst="rect">
@@ -12289,7 +12377,7 @@
         </p:nvSpPr>
         <p:spPr>
           <a:xfrm>
-            <a:off x="6191860" y="3364992"/>
+            <a:off x="6255868" y="3364992"/>
             <a:ext cx="5368900" cy="749808"/>
           </a:xfrm>
           <a:prstGeom prst="rect">
@@ -12314,7 +12402,7 @@
         </p:nvSpPr>
         <p:spPr>
           <a:xfrm>
-            <a:off x="6329020" y="3593592"/>
+            <a:off x="6393028" y="3593592"/>
             <a:ext cx="292608" cy="292608"/>
           </a:xfrm>
           <a:prstGeom prst="rect">
@@ -12334,7 +12422,7 @@
         </p:nvSpPr>
         <p:spPr>
           <a:xfrm>
-            <a:off x="6329020" y="3593592"/>
+            <a:off x="6393028" y="3593592"/>
             <a:ext cx="292608" cy="292608"/>
           </a:xfrm>
           <a:prstGeom prst="rect">
@@ -12373,7 +12461,7 @@
         </p:nvSpPr>
         <p:spPr>
           <a:xfrm>
-            <a:off x="6722212" y="3438144"/>
+            <a:off x="6786220" y="3438144"/>
             <a:ext cx="4710532" cy="603504"/>
           </a:xfrm>
           <a:prstGeom prst="rect">
@@ -12415,7 +12503,7 @@
         </p:nvSpPr>
         <p:spPr>
           <a:xfrm>
-            <a:off x="502920" y="5349240"/>
+            <a:off x="566928" y="5349240"/>
             <a:ext cx="11057839" cy="457200"/>
           </a:xfrm>
           <a:prstGeom prst="rect">
@@ -12435,7 +12523,7 @@
         </p:nvSpPr>
         <p:spPr>
           <a:xfrm>
-            <a:off x="685800" y="5422392"/>
+            <a:off x="749808" y="5422392"/>
             <a:ext cx="10692079" cy="310896"/>
           </a:xfrm>
           <a:prstGeom prst="rect">
@@ -12474,7 +12562,7 @@
         </p:nvSpPr>
         <p:spPr>
           <a:xfrm>
-            <a:off x="502920" y="6382512"/>
+            <a:off x="566928" y="6382512"/>
             <a:ext cx="7315200" cy="219456"/>
           </a:xfrm>
           <a:prstGeom prst="rect">
@@ -12513,7 +12601,7 @@
         </p:nvSpPr>
         <p:spPr>
           <a:xfrm>
-            <a:off x="10774375" y="6382512"/>
+            <a:off x="10710367" y="6382512"/>
             <a:ext cx="914400" cy="219456"/>
           </a:xfrm>
           <a:prstGeom prst="rect">

--- a/docs/test/stress/e2e-outputs/development_basic_pr04.pptx
+++ b/docs/test/stress/e2e-outputs/development_basic_pr04.pptx
@@ -16,9 +16,10 @@
     <p:sldId id="264" r:id="rId10"/>
     <p:sldId id="265" r:id="rId11"/>
     <p:sldId id="266" r:id="rId12"/>
+    <p:sldId id="267" r:id="rId13"/>
   </p:sldIdLst>
   <p:notesMasterIdLst>
-    <p:notesMasterId r:id="rId13"/>
+    <p:notesMasterId r:id="rId14"/>
   </p:notesMasterIdLst>
   <p:sldSz cx="12192000" cy="6858000"/>
   <p:notesSz cx="6858000" cy="12192000"/>
@@ -712,6 +713,94 @@
             <a:fld id="{F7021451-1387-4CA6-816F-3879F97B5CBC}" type="slidenum">
               <a:rPr lang="en-US"/>
               <a:t>11</a:t>
+            </a:fld>
+            <a:endParaRPr lang="en-US"/>
+          </a:p>
+        </p:txBody>
+      </p:sp>
+    </p:spTree>
+    <p:extLst>
+      <p:ext uri="{BB962C8B-B14F-4D97-AF65-F5344CB8AC3E}">
+        <p14:creationId xmlns:p14="http://schemas.microsoft.com/office/powerpoint/2010/main" val="1024086991"/>
+      </p:ext>
+    </p:extLst>
+  </p:cSld>
+  <p:clrMapOvr>
+    <a:masterClrMapping/>
+  </p:clrMapOvr>
+</p:notes>
+</file>
+
+<file path=ppt/notesSlides/notesSlide12.xml><?xml version="1.0" encoding="utf-8"?>
+<p:notes xmlns:a="http://schemas.openxmlformats.org/drawingml/2006/main" xmlns:r="http://schemas.openxmlformats.org/officeDocument/2006/relationships" xmlns:p="http://schemas.openxmlformats.org/presentationml/2006/main">
+  <p:cSld>
+    <p:spTree>
+      <p:nvGrpSpPr>
+        <p:cNvPr id="1" name=""/>
+        <p:cNvGrpSpPr/>
+        <p:nvPr/>
+      </p:nvGrpSpPr>
+      <p:grpSpPr>
+        <a:xfrm>
+          <a:off x="0" y="0"/>
+          <a:ext cx="0" cy="0"/>
+          <a:chOff x="0" y="0"/>
+          <a:chExt cx="0" cy="0"/>
+        </a:xfrm>
+      </p:grpSpPr>
+      <p:sp>
+        <p:nvSpPr>
+          <p:cNvPr id="2" name="Slide Image Placeholder 1"/>
+          <p:cNvSpPr>
+            <a:spLocks noGrp="1" noRot="1" noChangeAspect="1"/>
+          </p:cNvSpPr>
+          <p:nvPr>
+            <p:ph type="sldImg"/>
+          </p:nvPr>
+        </p:nvSpPr>
+        <p:spPr/>
+      </p:sp>
+      <p:sp>
+        <p:nvSpPr>
+          <p:cNvPr id="3" name="Notes Placeholder 2"/>
+          <p:cNvSpPr>
+            <a:spLocks noGrp="1"/>
+          </p:cNvSpPr>
+          <p:nvPr>
+            <p:ph type="body" idx="1"/>
+          </p:nvPr>
+        </p:nvSpPr>
+        <p:spPr/>
+        <p:txBody>
+          <a:bodyPr/>
+          <a:lstStyle/>
+          <a:p>
+            <a:r>
+              <a:rPr lang="en-US" dirty="0"/>
+              <a:t/>
+            </a:r>
+            <a:endParaRPr lang="en-US" dirty="0"/>
+          </a:p>
+        </p:txBody>
+      </p:sp>
+      <p:sp>
+        <p:nvSpPr>
+          <p:cNvPr id="4" name="Slide Number Placeholder 3"/>
+          <p:cNvSpPr>
+            <a:spLocks noGrp="1"/>
+          </p:cNvSpPr>
+          <p:nvPr>
+            <p:ph type="sldNum" sz="quarter" idx="10"/>
+          </p:nvPr>
+        </p:nvSpPr>
+        <p:spPr/>
+        <p:txBody>
+          <a:bodyPr/>
+          <a:lstStyle/>
+          <a:p>
+            <a:fld id="{F7021451-1387-4CA6-816F-3879F97B5CBC}" type="slidenum">
+              <a:rPr lang="en-US"/>
+              <a:t>12</a:t>
             </a:fld>
             <a:endParaRPr lang="en-US"/>
           </a:p>
@@ -2018,10 +2107,15 @@
           <a:ln/>
         </p:spPr>
         <p:txBody>
-          <a:bodyPr wrap="square" lIns="0" tIns="0" rIns="0" bIns="0" rtlCol="0" anchor="ctr"/>
+          <a:bodyPr wrap="square" lIns="0" tIns="0" rIns="0" bIns="0" rtlCol="0" anchor="ctr">
+            <a:normAutofit/>
+          </a:bodyPr>
           <a:lstStyle/>
           <a:p>
             <a:pPr algn="l" indent="0" marL="0">
+              <a:lnSpc>
+                <a:spcPct val="100000"/>
+              </a:lnSpc>
               <a:buNone/>
             </a:pPr>
             <a:r>
@@ -2546,7 +2640,7 @@
                 <a:ea typeface="Arial" pitchFamily="34" charset="-122"/>
                 <a:cs typeface="Arial" pitchFamily="34" charset="-120"/>
               </a:rPr>
-              <a:t>Process</a:t>
+              <a:t>Checklist</a:t>
             </a:r>
             <a:endParaRPr lang="en-US" sz="950" dirty="0"/>
           </a:p>
@@ -2587,7 +2681,7 @@
                 <a:ea typeface="Pretendard" pitchFamily="34" charset="-122"/>
                 <a:cs typeface="Pretendard" pitchFamily="34" charset="-120"/>
               </a:rPr>
-              <a:t>진행 절차</a:t>
+              <a:t>실사 체크리스트</a:t>
             </a:r>
             <a:endParaRPr lang="en-US" sz="2300" dirty="0"/>
           </a:p>
@@ -2595,26 +2689,63 @@
       </p:sp>
       <p:sp>
         <p:nvSpPr>
-          <p:cNvPr id="6" name="Shape 4"/>
-          <p:cNvSpPr/>
-          <p:nvPr/>
-        </p:nvSpPr>
-        <p:spPr>
-          <a:xfrm>
-            <a:off x="566928" y="1572768"/>
-            <a:ext cx="11057839" cy="3200400"/>
-          </a:xfrm>
-          <a:prstGeom prst="roundRect">
-            <a:avLst>
-              <a:gd name="adj" fmla="val 1714"/>
-            </a:avLst>
+          <p:cNvPr id="6" name="Text 4"/>
+          <p:cNvSpPr/>
+          <p:nvPr/>
+        </p:nvSpPr>
+        <p:spPr>
+          <a:xfrm>
+            <a:off x="566928" y="1371600"/>
+            <a:ext cx="11057839" cy="237744"/>
+          </a:xfrm>
+          <a:prstGeom prst="rect">
+            <a:avLst/>
+          </a:prstGeom>
+          <a:noFill/>
+          <a:ln/>
+        </p:spPr>
+        <p:txBody>
+          <a:bodyPr wrap="square" lIns="0" tIns="0" rIns="0" bIns="0" rtlCol="0" anchor="ctr"/>
+          <a:lstStyle/>
+          <a:p>
+            <a:pPr indent="0" marL="0">
+              <a:buNone/>
+            </a:pPr>
+            <a:r>
+              <a:rPr lang="en-US" sz="1100" b="1" dirty="0">
+                <a:solidFill>
+                  <a:srgbClr val="10161F"/>
+                </a:solidFill>
+                <a:latin typeface="Pretendard" pitchFamily="34" charset="0"/>
+                <a:ea typeface="Pretendard" pitchFamily="34" charset="-122"/>
+                <a:cs typeface="Pretendard" pitchFamily="34" charset="-120"/>
+              </a:rPr>
+              <a:t>거래 안정성 확보를 위한 필수 법률·물리·임대차 실사 점검 항목 (총 6건)</a:t>
+            </a:r>
+            <a:endParaRPr lang="en-US" sz="1100" dirty="0"/>
+          </a:p>
+        </p:txBody>
+      </p:sp>
+      <p:sp>
+        <p:nvSpPr>
+          <p:cNvPr id="7" name="Shape 5"/>
+          <p:cNvSpPr/>
+          <p:nvPr/>
+        </p:nvSpPr>
+        <p:spPr>
+          <a:xfrm>
+            <a:off x="566928" y="1719072"/>
+            <a:ext cx="5368900" cy="749808"/>
+          </a:xfrm>
+          <a:prstGeom prst="rect">
+            <a:avLst/>
           </a:prstGeom>
           <a:solidFill>
             <a:srgbClr val="F7FAFC"/>
           </a:solidFill>
           <a:ln w="6350">
             <a:solidFill>
-              <a:srgbClr val="CBD5E0"/>
+              <a:srgbClr val="D9B668"/>
             </a:solidFill>
             <a:prstDash val="solid"/>
           </a:ln>
@@ -2622,73 +2753,73 @@
       </p:sp>
       <p:sp>
         <p:nvSpPr>
-          <p:cNvPr id="7" name="Shape 5"/>
-          <p:cNvSpPr/>
-          <p:nvPr/>
-        </p:nvSpPr>
-        <p:spPr>
-          <a:xfrm>
-            <a:off x="786384" y="1792224"/>
-            <a:ext cx="438912" cy="438912"/>
-          </a:xfrm>
-          <a:prstGeom prst="ellipse">
+          <p:cNvPr id="8" name="Shape 6"/>
+          <p:cNvSpPr/>
+          <p:nvPr/>
+        </p:nvSpPr>
+        <p:spPr>
+          <a:xfrm>
+            <a:off x="704088" y="1947672"/>
+            <a:ext cx="292608" cy="292608"/>
+          </a:xfrm>
+          <a:prstGeom prst="rect">
             <a:avLst/>
           </a:prstGeom>
           <a:solidFill>
-            <a:srgbClr val="B98A2E"/>
+            <a:srgbClr val="977024"/>
           </a:solidFill>
           <a:ln/>
         </p:spPr>
       </p:sp>
       <p:sp>
         <p:nvSpPr>
-          <p:cNvPr id="8" name="Text 6"/>
-          <p:cNvSpPr/>
-          <p:nvPr/>
-        </p:nvSpPr>
-        <p:spPr>
-          <a:xfrm>
-            <a:off x="786384" y="1792224"/>
-            <a:ext cx="438912" cy="438912"/>
-          </a:xfrm>
-          <a:prstGeom prst="rect">
-            <a:avLst/>
-          </a:prstGeom>
-          <a:noFill/>
-          <a:ln/>
-        </p:spPr>
-        <p:txBody>
-          <a:bodyPr wrap="square" lIns="0" tIns="0" rIns="0" bIns="0" rtlCol="0" anchor="ctr"/>
+          <p:cNvPr id="9" name="Text 7"/>
+          <p:cNvSpPr/>
+          <p:nvPr/>
+        </p:nvSpPr>
+        <p:spPr>
+          <a:xfrm>
+            <a:off x="704088" y="1947672"/>
+            <a:ext cx="292608" cy="292608"/>
+          </a:xfrm>
+          <a:prstGeom prst="rect">
+            <a:avLst/>
+          </a:prstGeom>
+          <a:noFill/>
+          <a:ln/>
+        </p:spPr>
+        <p:txBody>
+          <a:bodyPr wrap="square" rtlCol="0" anchor="ctr"/>
           <a:lstStyle/>
           <a:p>
             <a:pPr algn="ctr" indent="0" marL="0">
               <a:buNone/>
             </a:pPr>
             <a:r>
-              <a:rPr lang="en-US" sz="1400" b="1" dirty="0">
+              <a:rPr lang="en-US" sz="1050" b="1" dirty="0">
                 <a:solidFill>
                   <a:srgbClr val="FFFFFF"/>
                 </a:solidFill>
-                <a:latin typeface="Arial" pitchFamily="34" charset="0"/>
-                <a:ea typeface="Arial" pitchFamily="34" charset="-122"/>
-                <a:cs typeface="Arial" pitchFamily="34" charset="-120"/>
-              </a:rPr>
-              <a:t>01</a:t>
-            </a:r>
-            <a:endParaRPr lang="en-US" sz="1400" dirty="0"/>
-          </a:p>
-        </p:txBody>
-      </p:sp>
-      <p:sp>
-        <p:nvSpPr>
-          <p:cNvPr id="9" name="Text 7"/>
-          <p:cNvSpPr/>
-          <p:nvPr/>
-        </p:nvSpPr>
-        <p:spPr>
-          <a:xfrm>
-            <a:off x="786384" y="2304288"/>
-            <a:ext cx="10618927" cy="365760"/>
+                <a:latin typeface="Pretendard" pitchFamily="34" charset="0"/>
+                <a:ea typeface="Pretendard" pitchFamily="34" charset="-122"/>
+                <a:cs typeface="Pretendard" pitchFamily="34" charset="-120"/>
+              </a:rPr>
+              <a:t>✓</a:t>
+            </a:r>
+            <a:endParaRPr lang="en-US" sz="1050" dirty="0"/>
+          </a:p>
+        </p:txBody>
+      </p:sp>
+      <p:sp>
+        <p:nvSpPr>
+          <p:cNvPr id="10" name="Text 8"/>
+          <p:cNvSpPr/>
+          <p:nvPr/>
+        </p:nvSpPr>
+        <p:spPr>
+          <a:xfrm>
+            <a:off x="1097280" y="1792224"/>
+            <a:ext cx="4710532" cy="603504"/>
           </a:xfrm>
           <a:prstGeom prst="rect">
             <a:avLst/>
@@ -2701,10 +2832,13 @@
           <a:lstStyle/>
           <a:p>
             <a:pPr indent="0" marL="0">
-              <a:buNone/>
-            </a:pPr>
-            <a:r>
-              <a:rPr lang="en-US" sz="1600" b="1" dirty="0">
+              <a:lnSpc>
+                <a:spcPct val="110000"/>
+              </a:lnSpc>
+              <a:buNone/>
+            </a:pPr>
+            <a:r>
+              <a:rPr lang="en-US" sz="950" dirty="0">
                 <a:solidFill>
                   <a:srgbClr val="10161F"/>
                 </a:solidFill>
@@ -2712,38 +2846,125 @@
                 <a:ea typeface="Pretendard" pitchFamily="34" charset="-122"/>
                 <a:cs typeface="Pretendard" pitchFamily="34" charset="-120"/>
               </a:rPr>
-              <a:t>1단계</a:t>
-            </a:r>
-            <a:endParaRPr lang="en-US" sz="1600" dirty="0"/>
-          </a:p>
-        </p:txBody>
-      </p:sp>
-      <p:sp>
-        <p:nvSpPr>
-          <p:cNvPr id="10" name="Text 8"/>
-          <p:cNvSpPr/>
-          <p:nvPr/>
-        </p:nvSpPr>
-        <p:spPr>
-          <a:xfrm>
-            <a:off x="786384" y="2761488"/>
-            <a:ext cx="10618927" cy="1828800"/>
-          </a:xfrm>
-          <a:prstGeom prst="rect">
-            <a:avLst/>
-          </a:prstGeom>
-          <a:noFill/>
-          <a:ln/>
-        </p:spPr>
-        <p:txBody>
-          <a:bodyPr wrap="square" rtlCol="0" anchor="t"/>
-          <a:lstStyle/>
-          <a:p>
-            <a:pPr indent="0" marL="0">
-              <a:buNone/>
-            </a:pPr>
-            <a:r>
-              <a:rPr lang="en-US" sz="1100" dirty="0">
+              <a:t>등기부등본 갑구/을구 권리관계 및 근저당 채권최고액 전액 말소 조건 원본 대조</a:t>
+            </a:r>
+            <a:endParaRPr lang="en-US" sz="950" dirty="0"/>
+          </a:p>
+        </p:txBody>
+      </p:sp>
+      <p:sp>
+        <p:nvSpPr>
+          <p:cNvPr id="11" name="Shape 9"/>
+          <p:cNvSpPr/>
+          <p:nvPr/>
+        </p:nvSpPr>
+        <p:spPr>
+          <a:xfrm>
+            <a:off x="566928" y="2542032"/>
+            <a:ext cx="5368900" cy="749808"/>
+          </a:xfrm>
+          <a:prstGeom prst="rect">
+            <a:avLst/>
+          </a:prstGeom>
+          <a:solidFill>
+            <a:srgbClr val="F7FAFC"/>
+          </a:solidFill>
+          <a:ln w="6350">
+            <a:solidFill>
+              <a:srgbClr val="D9B668"/>
+            </a:solidFill>
+            <a:prstDash val="solid"/>
+          </a:ln>
+        </p:spPr>
+      </p:sp>
+      <p:sp>
+        <p:nvSpPr>
+          <p:cNvPr id="12" name="Shape 10"/>
+          <p:cNvSpPr/>
+          <p:nvPr/>
+        </p:nvSpPr>
+        <p:spPr>
+          <a:xfrm>
+            <a:off x="704088" y="2770632"/>
+            <a:ext cx="292608" cy="292608"/>
+          </a:xfrm>
+          <a:prstGeom prst="rect">
+            <a:avLst/>
+          </a:prstGeom>
+          <a:solidFill>
+            <a:srgbClr val="977024"/>
+          </a:solidFill>
+          <a:ln/>
+        </p:spPr>
+      </p:sp>
+      <p:sp>
+        <p:nvSpPr>
+          <p:cNvPr id="13" name="Text 11"/>
+          <p:cNvSpPr/>
+          <p:nvPr/>
+        </p:nvSpPr>
+        <p:spPr>
+          <a:xfrm>
+            <a:off x="704088" y="2770632"/>
+            <a:ext cx="292608" cy="292608"/>
+          </a:xfrm>
+          <a:prstGeom prst="rect">
+            <a:avLst/>
+          </a:prstGeom>
+          <a:noFill/>
+          <a:ln/>
+        </p:spPr>
+        <p:txBody>
+          <a:bodyPr wrap="square" rtlCol="0" anchor="ctr"/>
+          <a:lstStyle/>
+          <a:p>
+            <a:pPr algn="ctr" indent="0" marL="0">
+              <a:buNone/>
+            </a:pPr>
+            <a:r>
+              <a:rPr lang="en-US" sz="1050" b="1" dirty="0">
+                <a:solidFill>
+                  <a:srgbClr val="FFFFFF"/>
+                </a:solidFill>
+                <a:latin typeface="Pretendard" pitchFamily="34" charset="0"/>
+                <a:ea typeface="Pretendard" pitchFamily="34" charset="-122"/>
+                <a:cs typeface="Pretendard" pitchFamily="34" charset="-120"/>
+              </a:rPr>
+              <a:t>✓</a:t>
+            </a:r>
+            <a:endParaRPr lang="en-US" sz="1050" dirty="0"/>
+          </a:p>
+        </p:txBody>
+      </p:sp>
+      <p:sp>
+        <p:nvSpPr>
+          <p:cNvPr id="14" name="Text 12"/>
+          <p:cNvSpPr/>
+          <p:nvPr/>
+        </p:nvSpPr>
+        <p:spPr>
+          <a:xfrm>
+            <a:off x="1097280" y="2615184"/>
+            <a:ext cx="4710532" cy="603504"/>
+          </a:xfrm>
+          <a:prstGeom prst="rect">
+            <a:avLst/>
+          </a:prstGeom>
+          <a:noFill/>
+          <a:ln/>
+        </p:spPr>
+        <p:txBody>
+          <a:bodyPr wrap="square" rtlCol="0" anchor="ctr"/>
+          <a:lstStyle/>
+          <a:p>
+            <a:pPr indent="0" marL="0">
+              <a:lnSpc>
+                <a:spcPct val="110000"/>
+              </a:lnSpc>
+              <a:buNone/>
+            </a:pPr>
+            <a:r>
+              <a:rPr lang="en-US" sz="950" dirty="0">
                 <a:solidFill>
                   <a:srgbClr val="10161F"/>
                 </a:solidFill>
@@ -2751,16 +2972,125 @@
                 <a:ea typeface="Pretendard" pitchFamily="34" charset="-122"/>
                 <a:cs typeface="Pretendard" pitchFamily="34" charset="-120"/>
               </a:rPr>
-              <a:t>건축 설계 발주 및 인허가 일정 협의를 권장합니다.</a:t>
-            </a:r>
-            <a:endParaRPr lang="en-US" sz="1100" dirty="0"/>
-          </a:p>
-          <a:p>
-            <a:pPr indent="0" marL="0">
-              <a:buNone/>
-            </a:pPr>
-            <a:r>
-              <a:rPr lang="en-US" sz="1100" dirty="0">
+              <a:t>임대차 원본 계약서 검토 (보증금, 월임대료, 관리비 실입금 내역 및 제소전화해조서)</a:t>
+            </a:r>
+            <a:endParaRPr lang="en-US" sz="950" dirty="0"/>
+          </a:p>
+        </p:txBody>
+      </p:sp>
+      <p:sp>
+        <p:nvSpPr>
+          <p:cNvPr id="15" name="Shape 13"/>
+          <p:cNvSpPr/>
+          <p:nvPr/>
+        </p:nvSpPr>
+        <p:spPr>
+          <a:xfrm>
+            <a:off x="566928" y="3364992"/>
+            <a:ext cx="5368900" cy="749808"/>
+          </a:xfrm>
+          <a:prstGeom prst="rect">
+            <a:avLst/>
+          </a:prstGeom>
+          <a:solidFill>
+            <a:srgbClr val="F7FAFC"/>
+          </a:solidFill>
+          <a:ln w="6350">
+            <a:solidFill>
+              <a:srgbClr val="D9B668"/>
+            </a:solidFill>
+            <a:prstDash val="solid"/>
+          </a:ln>
+        </p:spPr>
+      </p:sp>
+      <p:sp>
+        <p:nvSpPr>
+          <p:cNvPr id="16" name="Shape 14"/>
+          <p:cNvSpPr/>
+          <p:nvPr/>
+        </p:nvSpPr>
+        <p:spPr>
+          <a:xfrm>
+            <a:off x="704088" y="3593592"/>
+            <a:ext cx="292608" cy="292608"/>
+          </a:xfrm>
+          <a:prstGeom prst="rect">
+            <a:avLst/>
+          </a:prstGeom>
+          <a:solidFill>
+            <a:srgbClr val="977024"/>
+          </a:solidFill>
+          <a:ln/>
+        </p:spPr>
+      </p:sp>
+      <p:sp>
+        <p:nvSpPr>
+          <p:cNvPr id="17" name="Text 15"/>
+          <p:cNvSpPr/>
+          <p:nvPr/>
+        </p:nvSpPr>
+        <p:spPr>
+          <a:xfrm>
+            <a:off x="704088" y="3593592"/>
+            <a:ext cx="292608" cy="292608"/>
+          </a:xfrm>
+          <a:prstGeom prst="rect">
+            <a:avLst/>
+          </a:prstGeom>
+          <a:noFill/>
+          <a:ln/>
+        </p:spPr>
+        <p:txBody>
+          <a:bodyPr wrap="square" rtlCol="0" anchor="ctr"/>
+          <a:lstStyle/>
+          <a:p>
+            <a:pPr algn="ctr" indent="0" marL="0">
+              <a:buNone/>
+            </a:pPr>
+            <a:r>
+              <a:rPr lang="en-US" sz="1050" b="1" dirty="0">
+                <a:solidFill>
+                  <a:srgbClr val="FFFFFF"/>
+                </a:solidFill>
+                <a:latin typeface="Pretendard" pitchFamily="34" charset="0"/>
+                <a:ea typeface="Pretendard" pitchFamily="34" charset="-122"/>
+                <a:cs typeface="Pretendard" pitchFamily="34" charset="-120"/>
+              </a:rPr>
+              <a:t>✓</a:t>
+            </a:r>
+            <a:endParaRPr lang="en-US" sz="1050" dirty="0"/>
+          </a:p>
+        </p:txBody>
+      </p:sp>
+      <p:sp>
+        <p:nvSpPr>
+          <p:cNvPr id="18" name="Text 16"/>
+          <p:cNvSpPr/>
+          <p:nvPr/>
+        </p:nvSpPr>
+        <p:spPr>
+          <a:xfrm>
+            <a:off x="1097280" y="3438144"/>
+            <a:ext cx="4710532" cy="603504"/>
+          </a:xfrm>
+          <a:prstGeom prst="rect">
+            <a:avLst/>
+          </a:prstGeom>
+          <a:noFill/>
+          <a:ln/>
+        </p:spPr>
+        <p:txBody>
+          <a:bodyPr wrap="square" rtlCol="0" anchor="ctr"/>
+          <a:lstStyle/>
+          <a:p>
+            <a:pPr indent="0" marL="0">
+              <a:lnSpc>
+                <a:spcPct val="110000"/>
+              </a:lnSpc>
+              <a:buNone/>
+            </a:pPr>
+            <a:r>
+              <a:rPr lang="en-US" sz="950" dirty="0">
                 <a:solidFill>
                   <a:srgbClr val="10161F"/>
                 </a:solidFill>
@@ -2768,15 +3098,452 @@
                 <a:ea typeface="Pretendard" pitchFamily="34" charset="-122"/>
                 <a:cs typeface="Pretendard" pitchFamily="34" charset="-120"/>
               </a:rPr>
-              <a:t>건축 설계 발주 및 인허가 일정 협의를 권장합니다.</a:t>
-            </a:r>
-            <a:endParaRPr lang="en-US" sz="1100" dirty="0"/>
-          </a:p>
-        </p:txBody>
-      </p:sp>
-      <p:sp>
-        <p:nvSpPr>
-          <p:cNvPr id="11" name="Text 9"/>
+              <a:t>건축물대장상 위반건축물 등재 여부 및 불법 증축·용도변경 이행강제금 납부 이력 점검</a:t>
+            </a:r>
+            <a:endParaRPr lang="en-US" sz="950" dirty="0"/>
+          </a:p>
+        </p:txBody>
+      </p:sp>
+      <p:sp>
+        <p:nvSpPr>
+          <p:cNvPr id="19" name="Shape 17"/>
+          <p:cNvSpPr/>
+          <p:nvPr/>
+        </p:nvSpPr>
+        <p:spPr>
+          <a:xfrm>
+            <a:off x="6255868" y="1719072"/>
+            <a:ext cx="5368900" cy="749808"/>
+          </a:xfrm>
+          <a:prstGeom prst="rect">
+            <a:avLst/>
+          </a:prstGeom>
+          <a:solidFill>
+            <a:srgbClr val="F7FAFC"/>
+          </a:solidFill>
+          <a:ln w="6350">
+            <a:solidFill>
+              <a:srgbClr val="D9B668"/>
+            </a:solidFill>
+            <a:prstDash val="solid"/>
+          </a:ln>
+        </p:spPr>
+      </p:sp>
+      <p:sp>
+        <p:nvSpPr>
+          <p:cNvPr id="20" name="Shape 18"/>
+          <p:cNvSpPr/>
+          <p:nvPr/>
+        </p:nvSpPr>
+        <p:spPr>
+          <a:xfrm>
+            <a:off x="6393028" y="1947672"/>
+            <a:ext cx="292608" cy="292608"/>
+          </a:xfrm>
+          <a:prstGeom prst="rect">
+            <a:avLst/>
+          </a:prstGeom>
+          <a:solidFill>
+            <a:srgbClr val="977024"/>
+          </a:solidFill>
+          <a:ln/>
+        </p:spPr>
+      </p:sp>
+      <p:sp>
+        <p:nvSpPr>
+          <p:cNvPr id="21" name="Text 19"/>
+          <p:cNvSpPr/>
+          <p:nvPr/>
+        </p:nvSpPr>
+        <p:spPr>
+          <a:xfrm>
+            <a:off x="6393028" y="1947672"/>
+            <a:ext cx="292608" cy="292608"/>
+          </a:xfrm>
+          <a:prstGeom prst="rect">
+            <a:avLst/>
+          </a:prstGeom>
+          <a:noFill/>
+          <a:ln/>
+        </p:spPr>
+        <p:txBody>
+          <a:bodyPr wrap="square" rtlCol="0" anchor="ctr"/>
+          <a:lstStyle/>
+          <a:p>
+            <a:pPr algn="ctr" indent="0" marL="0">
+              <a:buNone/>
+            </a:pPr>
+            <a:r>
+              <a:rPr lang="en-US" sz="1050" b="1" dirty="0">
+                <a:solidFill>
+                  <a:srgbClr val="FFFFFF"/>
+                </a:solidFill>
+                <a:latin typeface="Pretendard" pitchFamily="34" charset="0"/>
+                <a:ea typeface="Pretendard" pitchFamily="34" charset="-122"/>
+                <a:cs typeface="Pretendard" pitchFamily="34" charset="-120"/>
+              </a:rPr>
+              <a:t>✓</a:t>
+            </a:r>
+            <a:endParaRPr lang="en-US" sz="1050" dirty="0"/>
+          </a:p>
+        </p:txBody>
+      </p:sp>
+      <p:sp>
+        <p:nvSpPr>
+          <p:cNvPr id="22" name="Text 20"/>
+          <p:cNvSpPr/>
+          <p:nvPr/>
+        </p:nvSpPr>
+        <p:spPr>
+          <a:xfrm>
+            <a:off x="6786220" y="1792224"/>
+            <a:ext cx="4710532" cy="603504"/>
+          </a:xfrm>
+          <a:prstGeom prst="rect">
+            <a:avLst/>
+          </a:prstGeom>
+          <a:noFill/>
+          <a:ln/>
+        </p:spPr>
+        <p:txBody>
+          <a:bodyPr wrap="square" rtlCol="0" anchor="ctr"/>
+          <a:lstStyle/>
+          <a:p>
+            <a:pPr indent="0" marL="0">
+              <a:lnSpc>
+                <a:spcPct val="110000"/>
+              </a:lnSpc>
+              <a:buNone/>
+            </a:pPr>
+            <a:r>
+              <a:rPr lang="en-US" sz="950" dirty="0">
+                <a:solidFill>
+                  <a:srgbClr val="10161F"/>
+                </a:solidFill>
+                <a:latin typeface="Pretendard" pitchFamily="34" charset="0"/>
+                <a:ea typeface="Pretendard" pitchFamily="34" charset="-122"/>
+                <a:cs typeface="Pretendard" pitchFamily="34" charset="-120"/>
+              </a:rPr>
+              <a:t>토지이용계획확인원상 도시계획시설 저촉, 건축선 후퇴, 지구단위계획 특별계획구역 확인</a:t>
+            </a:r>
+            <a:endParaRPr lang="en-US" sz="950" dirty="0"/>
+          </a:p>
+        </p:txBody>
+      </p:sp>
+      <p:sp>
+        <p:nvSpPr>
+          <p:cNvPr id="23" name="Shape 21"/>
+          <p:cNvSpPr/>
+          <p:nvPr/>
+        </p:nvSpPr>
+        <p:spPr>
+          <a:xfrm>
+            <a:off x="6255868" y="2542032"/>
+            <a:ext cx="5368900" cy="749808"/>
+          </a:xfrm>
+          <a:prstGeom prst="rect">
+            <a:avLst/>
+          </a:prstGeom>
+          <a:solidFill>
+            <a:srgbClr val="F7FAFC"/>
+          </a:solidFill>
+          <a:ln w="6350">
+            <a:solidFill>
+              <a:srgbClr val="D9B668"/>
+            </a:solidFill>
+            <a:prstDash val="solid"/>
+          </a:ln>
+        </p:spPr>
+      </p:sp>
+      <p:sp>
+        <p:nvSpPr>
+          <p:cNvPr id="24" name="Shape 22"/>
+          <p:cNvSpPr/>
+          <p:nvPr/>
+        </p:nvSpPr>
+        <p:spPr>
+          <a:xfrm>
+            <a:off x="6393028" y="2770632"/>
+            <a:ext cx="292608" cy="292608"/>
+          </a:xfrm>
+          <a:prstGeom prst="rect">
+            <a:avLst/>
+          </a:prstGeom>
+          <a:solidFill>
+            <a:srgbClr val="977024"/>
+          </a:solidFill>
+          <a:ln/>
+        </p:spPr>
+      </p:sp>
+      <p:sp>
+        <p:nvSpPr>
+          <p:cNvPr id="25" name="Text 23"/>
+          <p:cNvSpPr/>
+          <p:nvPr/>
+        </p:nvSpPr>
+        <p:spPr>
+          <a:xfrm>
+            <a:off x="6393028" y="2770632"/>
+            <a:ext cx="292608" cy="292608"/>
+          </a:xfrm>
+          <a:prstGeom prst="rect">
+            <a:avLst/>
+          </a:prstGeom>
+          <a:noFill/>
+          <a:ln/>
+        </p:spPr>
+        <p:txBody>
+          <a:bodyPr wrap="square" rtlCol="0" anchor="ctr"/>
+          <a:lstStyle/>
+          <a:p>
+            <a:pPr algn="ctr" indent="0" marL="0">
+              <a:buNone/>
+            </a:pPr>
+            <a:r>
+              <a:rPr lang="en-US" sz="1050" b="1" dirty="0">
+                <a:solidFill>
+                  <a:srgbClr val="FFFFFF"/>
+                </a:solidFill>
+                <a:latin typeface="Pretendard" pitchFamily="34" charset="0"/>
+                <a:ea typeface="Pretendard" pitchFamily="34" charset="-122"/>
+                <a:cs typeface="Pretendard" pitchFamily="34" charset="-120"/>
+              </a:rPr>
+              <a:t>✓</a:t>
+            </a:r>
+            <a:endParaRPr lang="en-US" sz="1050" dirty="0"/>
+          </a:p>
+        </p:txBody>
+      </p:sp>
+      <p:sp>
+        <p:nvSpPr>
+          <p:cNvPr id="26" name="Text 24"/>
+          <p:cNvSpPr/>
+          <p:nvPr/>
+        </p:nvSpPr>
+        <p:spPr>
+          <a:xfrm>
+            <a:off x="6786220" y="2615184"/>
+            <a:ext cx="4710532" cy="603504"/>
+          </a:xfrm>
+          <a:prstGeom prst="rect">
+            <a:avLst/>
+          </a:prstGeom>
+          <a:noFill/>
+          <a:ln/>
+        </p:spPr>
+        <p:txBody>
+          <a:bodyPr wrap="square" rtlCol="0" anchor="ctr"/>
+          <a:lstStyle/>
+          <a:p>
+            <a:pPr indent="0" marL="0">
+              <a:lnSpc>
+                <a:spcPct val="110000"/>
+              </a:lnSpc>
+              <a:buNone/>
+            </a:pPr>
+            <a:r>
+              <a:rPr lang="en-US" sz="950" dirty="0">
+                <a:solidFill>
+                  <a:srgbClr val="10161F"/>
+                </a:solidFill>
+                <a:latin typeface="Pretendard" pitchFamily="34" charset="0"/>
+                <a:ea typeface="Pretendard" pitchFamily="34" charset="-122"/>
+                <a:cs typeface="Pretendard" pitchFamily="34" charset="-120"/>
+              </a:rPr>
+              <a:t>기계식 주차기 정기 안전점검 합격증, 승강기 검사필증, 소방 완비증명서 실물 실사</a:t>
+            </a:r>
+            <a:endParaRPr lang="en-US" sz="950" dirty="0"/>
+          </a:p>
+        </p:txBody>
+      </p:sp>
+      <p:sp>
+        <p:nvSpPr>
+          <p:cNvPr id="27" name="Shape 25"/>
+          <p:cNvSpPr/>
+          <p:nvPr/>
+        </p:nvSpPr>
+        <p:spPr>
+          <a:xfrm>
+            <a:off x="6255868" y="3364992"/>
+            <a:ext cx="5368900" cy="749808"/>
+          </a:xfrm>
+          <a:prstGeom prst="rect">
+            <a:avLst/>
+          </a:prstGeom>
+          <a:solidFill>
+            <a:srgbClr val="F7FAFC"/>
+          </a:solidFill>
+          <a:ln w="6350">
+            <a:solidFill>
+              <a:srgbClr val="D9B668"/>
+            </a:solidFill>
+            <a:prstDash val="solid"/>
+          </a:ln>
+        </p:spPr>
+      </p:sp>
+      <p:sp>
+        <p:nvSpPr>
+          <p:cNvPr id="28" name="Shape 26"/>
+          <p:cNvSpPr/>
+          <p:nvPr/>
+        </p:nvSpPr>
+        <p:spPr>
+          <a:xfrm>
+            <a:off x="6393028" y="3593592"/>
+            <a:ext cx="292608" cy="292608"/>
+          </a:xfrm>
+          <a:prstGeom prst="rect">
+            <a:avLst/>
+          </a:prstGeom>
+          <a:solidFill>
+            <a:srgbClr val="977024"/>
+          </a:solidFill>
+          <a:ln/>
+        </p:spPr>
+      </p:sp>
+      <p:sp>
+        <p:nvSpPr>
+          <p:cNvPr id="29" name="Text 27"/>
+          <p:cNvSpPr/>
+          <p:nvPr/>
+        </p:nvSpPr>
+        <p:spPr>
+          <a:xfrm>
+            <a:off x="6393028" y="3593592"/>
+            <a:ext cx="292608" cy="292608"/>
+          </a:xfrm>
+          <a:prstGeom prst="rect">
+            <a:avLst/>
+          </a:prstGeom>
+          <a:noFill/>
+          <a:ln/>
+        </p:spPr>
+        <p:txBody>
+          <a:bodyPr wrap="square" rtlCol="0" anchor="ctr"/>
+          <a:lstStyle/>
+          <a:p>
+            <a:pPr algn="ctr" indent="0" marL="0">
+              <a:buNone/>
+            </a:pPr>
+            <a:r>
+              <a:rPr lang="en-US" sz="1050" b="1" dirty="0">
+                <a:solidFill>
+                  <a:srgbClr val="FFFFFF"/>
+                </a:solidFill>
+                <a:latin typeface="Pretendard" pitchFamily="34" charset="0"/>
+                <a:ea typeface="Pretendard" pitchFamily="34" charset="-122"/>
+                <a:cs typeface="Pretendard" pitchFamily="34" charset="-120"/>
+              </a:rPr>
+              <a:t>✓</a:t>
+            </a:r>
+            <a:endParaRPr lang="en-US" sz="1050" dirty="0"/>
+          </a:p>
+        </p:txBody>
+      </p:sp>
+      <p:sp>
+        <p:nvSpPr>
+          <p:cNvPr id="30" name="Text 28"/>
+          <p:cNvSpPr/>
+          <p:nvPr/>
+        </p:nvSpPr>
+        <p:spPr>
+          <a:xfrm>
+            <a:off x="6786220" y="3438144"/>
+            <a:ext cx="4710532" cy="603504"/>
+          </a:xfrm>
+          <a:prstGeom prst="rect">
+            <a:avLst/>
+          </a:prstGeom>
+          <a:noFill/>
+          <a:ln/>
+        </p:spPr>
+        <p:txBody>
+          <a:bodyPr wrap="square" rtlCol="0" anchor="ctr"/>
+          <a:lstStyle/>
+          <a:p>
+            <a:pPr indent="0" marL="0">
+              <a:lnSpc>
+                <a:spcPct val="110000"/>
+              </a:lnSpc>
+              <a:buNone/>
+            </a:pPr>
+            <a:r>
+              <a:rPr lang="en-US" sz="950" dirty="0">
+                <a:solidFill>
+                  <a:srgbClr val="10161F"/>
+                </a:solidFill>
+                <a:latin typeface="Pretendard" pitchFamily="34" charset="0"/>
+                <a:ea typeface="Pretendard" pitchFamily="34" charset="-122"/>
+                <a:cs typeface="Pretendard" pitchFamily="34" charset="-120"/>
+              </a:rPr>
+              <a:t>정화조 용량 대비 현 업종 적합성 및 하수도 원인자부담금 추가 부과 대상 여부 확인</a:t>
+            </a:r>
+            <a:endParaRPr lang="en-US" sz="950" dirty="0"/>
+          </a:p>
+        </p:txBody>
+      </p:sp>
+      <p:sp>
+        <p:nvSpPr>
+          <p:cNvPr id="31" name="Shape 29"/>
+          <p:cNvSpPr/>
+          <p:nvPr/>
+        </p:nvSpPr>
+        <p:spPr>
+          <a:xfrm>
+            <a:off x="566928" y="5349240"/>
+            <a:ext cx="11057839" cy="457200"/>
+          </a:xfrm>
+          <a:prstGeom prst="rect">
+            <a:avLst/>
+          </a:prstGeom>
+          <a:solidFill>
+            <a:srgbClr val="D9B668"/>
+          </a:solidFill>
+          <a:ln/>
+        </p:spPr>
+      </p:sp>
+      <p:sp>
+        <p:nvSpPr>
+          <p:cNvPr id="32" name="Text 30"/>
+          <p:cNvSpPr/>
+          <p:nvPr/>
+        </p:nvSpPr>
+        <p:spPr>
+          <a:xfrm>
+            <a:off x="749808" y="5422392"/>
+            <a:ext cx="10692079" cy="310896"/>
+          </a:xfrm>
+          <a:prstGeom prst="rect">
+            <a:avLst/>
+          </a:prstGeom>
+          <a:noFill/>
+          <a:ln/>
+        </p:spPr>
+        <p:txBody>
+          <a:bodyPr wrap="square" rtlCol="0" anchor="ctr"/>
+          <a:lstStyle/>
+          <a:p>
+            <a:pPr indent="0" marL="0">
+              <a:buNone/>
+            </a:pPr>
+            <a:r>
+              <a:rPr lang="en-US" sz="950" b="1" dirty="0">
+                <a:solidFill>
+                  <a:srgbClr val="977024"/>
+                </a:solidFill>
+                <a:latin typeface="Pretendard" pitchFamily="34" charset="0"/>
+                <a:ea typeface="Pretendard" pitchFamily="34" charset="-122"/>
+                <a:cs typeface="Pretendard" pitchFamily="34" charset="-120"/>
+              </a:rPr>
+              <a:t>※ 본 체크리스트는 계약 전 매수인의 안전한 자산 인수를 위한 필수 확인 사항이며, 실사(Due Diligence) 결과에 따라 매매 조건 및 잔금 일정이 조정될 수 있습니다.</a:t>
+            </a:r>
+            <a:endParaRPr lang="en-US" sz="950" dirty="0"/>
+          </a:p>
+        </p:txBody>
+      </p:sp>
+      <p:sp>
+        <p:nvSpPr>
+          <p:cNvPr id="33" name="Text 31"/>
           <p:cNvSpPr/>
           <p:nvPr/>
         </p:nvSpPr>
@@ -2815,7 +3582,7 @@
       </p:sp>
       <p:sp>
         <p:nvSpPr>
-          <p:cNvPr id="12" name="Text 10"/>
+          <p:cNvPr id="34" name="Text 32"/>
           <p:cNvSpPr/>
           <p:nvPr/>
         </p:nvSpPr>
@@ -2863,6 +3630,436 @@
 <file path=ppt/slides/slide11.xml><?xml version="1.0" encoding="utf-8"?>
 <p:sld xmlns:a="http://schemas.openxmlformats.org/drawingml/2006/main" xmlns:r="http://schemas.openxmlformats.org/officeDocument/2006/relationships" xmlns:p="http://schemas.openxmlformats.org/presentationml/2006/main">
   <p:cSld name="Slide 11">
+    <p:bg>
+      <p:bgPr>
+        <a:solidFill>
+          <a:srgbClr val="FFFFFF"/>
+        </a:solidFill>
+      </p:bgPr>
+    </p:bg>
+    <p:spTree>
+      <p:nvGrpSpPr>
+        <p:cNvPr id="1" name=""/>
+        <p:cNvGrpSpPr/>
+        <p:nvPr/>
+      </p:nvGrpSpPr>
+      <p:grpSpPr>
+        <a:xfrm>
+          <a:off x="0" y="0"/>
+          <a:ext cx="0" cy="0"/>
+          <a:chOff x="0" y="0"/>
+          <a:chExt cx="0" cy="0"/>
+        </a:xfrm>
+      </p:grpSpPr>
+      <p:sp>
+        <p:nvSpPr>
+          <p:cNvPr id="2" name="Shape 0"/>
+          <p:cNvSpPr/>
+          <p:nvPr/>
+        </p:nvSpPr>
+        <p:spPr>
+          <a:xfrm>
+            <a:off x="566928" y="457200"/>
+            <a:ext cx="384048" cy="384048"/>
+          </a:xfrm>
+          <a:prstGeom prst="ellipse">
+            <a:avLst/>
+          </a:prstGeom>
+          <a:solidFill>
+            <a:srgbClr val="B98A2E"/>
+          </a:solidFill>
+          <a:ln/>
+        </p:spPr>
+      </p:sp>
+      <p:sp>
+        <p:nvSpPr>
+          <p:cNvPr id="3" name="Text 1"/>
+          <p:cNvSpPr/>
+          <p:nvPr/>
+        </p:nvSpPr>
+        <p:spPr>
+          <a:xfrm>
+            <a:off x="566928" y="457200"/>
+            <a:ext cx="384048" cy="384048"/>
+          </a:xfrm>
+          <a:prstGeom prst="rect">
+            <a:avLst/>
+          </a:prstGeom>
+          <a:noFill/>
+          <a:ln/>
+        </p:spPr>
+        <p:txBody>
+          <a:bodyPr wrap="square" lIns="0" tIns="0" rIns="0" bIns="0" rtlCol="0" anchor="ctr"/>
+          <a:lstStyle/>
+          <a:p>
+            <a:pPr algn="ctr" indent="0" marL="0">
+              <a:buNone/>
+            </a:pPr>
+            <a:r>
+              <a:rPr lang="en-US" sz="1300" b="1" dirty="0">
+                <a:solidFill>
+                  <a:srgbClr val="FFFFFF"/>
+                </a:solidFill>
+                <a:latin typeface="Arial" pitchFamily="34" charset="0"/>
+                <a:ea typeface="Arial" pitchFamily="34" charset="-122"/>
+                <a:cs typeface="Arial" pitchFamily="34" charset="-120"/>
+              </a:rPr>
+              <a:t>11</a:t>
+            </a:r>
+            <a:endParaRPr lang="en-US" sz="1300" dirty="0"/>
+          </a:p>
+        </p:txBody>
+      </p:sp>
+      <p:sp>
+        <p:nvSpPr>
+          <p:cNvPr id="4" name="Text 2"/>
+          <p:cNvSpPr/>
+          <p:nvPr/>
+        </p:nvSpPr>
+        <p:spPr>
+          <a:xfrm>
+            <a:off x="1133856" y="457200"/>
+            <a:ext cx="10490911" cy="182880"/>
+          </a:xfrm>
+          <a:prstGeom prst="rect">
+            <a:avLst/>
+          </a:prstGeom>
+          <a:noFill/>
+          <a:ln/>
+        </p:spPr>
+        <p:txBody>
+          <a:bodyPr wrap="square" lIns="0" tIns="0" rIns="0" bIns="0" rtlCol="0" anchor="ctr"/>
+          <a:lstStyle/>
+          <a:p>
+            <a:pPr indent="0" marL="0">
+              <a:buNone/>
+            </a:pPr>
+            <a:r>
+              <a:rPr lang="en-US" sz="950" b="1" spc="200" kern="0" dirty="0">
+                <a:solidFill>
+                  <a:srgbClr val="B98A2E"/>
+                </a:solidFill>
+                <a:latin typeface="Arial" pitchFamily="34" charset="0"/>
+                <a:ea typeface="Arial" pitchFamily="34" charset="-122"/>
+                <a:cs typeface="Arial" pitchFamily="34" charset="-120"/>
+              </a:rPr>
+              <a:t>Process</a:t>
+            </a:r>
+            <a:endParaRPr lang="en-US" sz="950" dirty="0"/>
+          </a:p>
+        </p:txBody>
+      </p:sp>
+      <p:sp>
+        <p:nvSpPr>
+          <p:cNvPr id="5" name="Text 3"/>
+          <p:cNvSpPr/>
+          <p:nvPr/>
+        </p:nvSpPr>
+        <p:spPr>
+          <a:xfrm>
+            <a:off x="1133856" y="640080"/>
+            <a:ext cx="10490911" cy="365760"/>
+          </a:xfrm>
+          <a:prstGeom prst="rect">
+            <a:avLst/>
+          </a:prstGeom>
+          <a:noFill/>
+          <a:ln/>
+        </p:spPr>
+        <p:txBody>
+          <a:bodyPr wrap="square" lIns="0" tIns="0" rIns="0" bIns="0" rtlCol="0" anchor="ctr">
+            <a:normAutofit/>
+          </a:bodyPr>
+          <a:lstStyle/>
+          <a:p>
+            <a:pPr indent="0" marL="0">
+              <a:buNone/>
+            </a:pPr>
+            <a:r>
+              <a:rPr lang="en-US" sz="2300" b="1" dirty="0">
+                <a:solidFill>
+                  <a:srgbClr val="10161F"/>
+                </a:solidFill>
+                <a:latin typeface="Pretendard" pitchFamily="34" charset="0"/>
+                <a:ea typeface="Pretendard" pitchFamily="34" charset="-122"/>
+                <a:cs typeface="Pretendard" pitchFamily="34" charset="-120"/>
+              </a:rPr>
+              <a:t>진행 절차</a:t>
+            </a:r>
+            <a:endParaRPr lang="en-US" sz="2300" dirty="0"/>
+          </a:p>
+        </p:txBody>
+      </p:sp>
+      <p:sp>
+        <p:nvSpPr>
+          <p:cNvPr id="6" name="Shape 4"/>
+          <p:cNvSpPr/>
+          <p:nvPr/>
+        </p:nvSpPr>
+        <p:spPr>
+          <a:xfrm>
+            <a:off x="566928" y="1572768"/>
+            <a:ext cx="11057839" cy="3200400"/>
+          </a:xfrm>
+          <a:prstGeom prst="roundRect">
+            <a:avLst>
+              <a:gd name="adj" fmla="val 1714"/>
+            </a:avLst>
+          </a:prstGeom>
+          <a:solidFill>
+            <a:srgbClr val="F7FAFC"/>
+          </a:solidFill>
+          <a:ln w="6350">
+            <a:solidFill>
+              <a:srgbClr val="CBD5E0"/>
+            </a:solidFill>
+            <a:prstDash val="solid"/>
+          </a:ln>
+        </p:spPr>
+      </p:sp>
+      <p:sp>
+        <p:nvSpPr>
+          <p:cNvPr id="7" name="Shape 5"/>
+          <p:cNvSpPr/>
+          <p:nvPr/>
+        </p:nvSpPr>
+        <p:spPr>
+          <a:xfrm>
+            <a:off x="786384" y="1792224"/>
+            <a:ext cx="438912" cy="438912"/>
+          </a:xfrm>
+          <a:prstGeom prst="ellipse">
+            <a:avLst/>
+          </a:prstGeom>
+          <a:solidFill>
+            <a:srgbClr val="B98A2E"/>
+          </a:solidFill>
+          <a:ln/>
+        </p:spPr>
+      </p:sp>
+      <p:sp>
+        <p:nvSpPr>
+          <p:cNvPr id="8" name="Text 6"/>
+          <p:cNvSpPr/>
+          <p:nvPr/>
+        </p:nvSpPr>
+        <p:spPr>
+          <a:xfrm>
+            <a:off x="786384" y="1792224"/>
+            <a:ext cx="438912" cy="438912"/>
+          </a:xfrm>
+          <a:prstGeom prst="rect">
+            <a:avLst/>
+          </a:prstGeom>
+          <a:noFill/>
+          <a:ln/>
+        </p:spPr>
+        <p:txBody>
+          <a:bodyPr wrap="square" lIns="0" tIns="0" rIns="0" bIns="0" rtlCol="0" anchor="ctr"/>
+          <a:lstStyle/>
+          <a:p>
+            <a:pPr algn="ctr" indent="0" marL="0">
+              <a:buNone/>
+            </a:pPr>
+            <a:r>
+              <a:rPr lang="en-US" sz="1400" b="1" dirty="0">
+                <a:solidFill>
+                  <a:srgbClr val="FFFFFF"/>
+                </a:solidFill>
+                <a:latin typeface="Arial" pitchFamily="34" charset="0"/>
+                <a:ea typeface="Arial" pitchFamily="34" charset="-122"/>
+                <a:cs typeface="Arial" pitchFamily="34" charset="-120"/>
+              </a:rPr>
+              <a:t>01</a:t>
+            </a:r>
+            <a:endParaRPr lang="en-US" sz="1400" dirty="0"/>
+          </a:p>
+        </p:txBody>
+      </p:sp>
+      <p:sp>
+        <p:nvSpPr>
+          <p:cNvPr id="9" name="Text 7"/>
+          <p:cNvSpPr/>
+          <p:nvPr/>
+        </p:nvSpPr>
+        <p:spPr>
+          <a:xfrm>
+            <a:off x="786384" y="2304288"/>
+            <a:ext cx="10618927" cy="365760"/>
+          </a:xfrm>
+          <a:prstGeom prst="rect">
+            <a:avLst/>
+          </a:prstGeom>
+          <a:noFill/>
+          <a:ln/>
+        </p:spPr>
+        <p:txBody>
+          <a:bodyPr wrap="square" rtlCol="0" anchor="ctr"/>
+          <a:lstStyle/>
+          <a:p>
+            <a:pPr indent="0" marL="0">
+              <a:buNone/>
+            </a:pPr>
+            <a:r>
+              <a:rPr lang="en-US" sz="1600" b="1" dirty="0">
+                <a:solidFill>
+                  <a:srgbClr val="10161F"/>
+                </a:solidFill>
+                <a:latin typeface="Pretendard" pitchFamily="34" charset="0"/>
+                <a:ea typeface="Pretendard" pitchFamily="34" charset="-122"/>
+                <a:cs typeface="Pretendard" pitchFamily="34" charset="-120"/>
+              </a:rPr>
+              <a:t>1단계</a:t>
+            </a:r>
+            <a:endParaRPr lang="en-US" sz="1600" dirty="0"/>
+          </a:p>
+        </p:txBody>
+      </p:sp>
+      <p:sp>
+        <p:nvSpPr>
+          <p:cNvPr id="10" name="Text 8"/>
+          <p:cNvSpPr/>
+          <p:nvPr/>
+        </p:nvSpPr>
+        <p:spPr>
+          <a:xfrm>
+            <a:off x="786384" y="2761488"/>
+            <a:ext cx="10618927" cy="1828800"/>
+          </a:xfrm>
+          <a:prstGeom prst="rect">
+            <a:avLst/>
+          </a:prstGeom>
+          <a:noFill/>
+          <a:ln/>
+        </p:spPr>
+        <p:txBody>
+          <a:bodyPr wrap="square" rtlCol="0" anchor="t"/>
+          <a:lstStyle/>
+          <a:p>
+            <a:pPr indent="0" marL="0">
+              <a:buNone/>
+            </a:pPr>
+            <a:r>
+              <a:rPr lang="en-US" sz="1100" dirty="0">
+                <a:solidFill>
+                  <a:srgbClr val="10161F"/>
+                </a:solidFill>
+                <a:latin typeface="Pretendard" pitchFamily="34" charset="0"/>
+                <a:ea typeface="Pretendard" pitchFamily="34" charset="-122"/>
+                <a:cs typeface="Pretendard" pitchFamily="34" charset="-120"/>
+              </a:rPr>
+              <a:t>건축 설계 발주 및 인허가 일정 협의를 권장합니다.</a:t>
+            </a:r>
+            <a:endParaRPr lang="en-US" sz="1100" dirty="0"/>
+          </a:p>
+          <a:p>
+            <a:pPr indent="0" marL="0">
+              <a:buNone/>
+            </a:pPr>
+            <a:r>
+              <a:rPr lang="en-US" sz="1100" dirty="0">
+                <a:solidFill>
+                  <a:srgbClr val="10161F"/>
+                </a:solidFill>
+                <a:latin typeface="Pretendard" pitchFamily="34" charset="0"/>
+                <a:ea typeface="Pretendard" pitchFamily="34" charset="-122"/>
+                <a:cs typeface="Pretendard" pitchFamily="34" charset="-120"/>
+              </a:rPr>
+              <a:t>건축 설계 발주 및 인허가 일정 협의를 권장합니다.</a:t>
+            </a:r>
+            <a:endParaRPr lang="en-US" sz="1100" dirty="0"/>
+          </a:p>
+        </p:txBody>
+      </p:sp>
+      <p:sp>
+        <p:nvSpPr>
+          <p:cNvPr id="11" name="Text 9"/>
+          <p:cNvSpPr/>
+          <p:nvPr/>
+        </p:nvSpPr>
+        <p:spPr>
+          <a:xfrm>
+            <a:off x="566928" y="6382512"/>
+            <a:ext cx="7315200" cy="219456"/>
+          </a:xfrm>
+          <a:prstGeom prst="rect">
+            <a:avLst/>
+          </a:prstGeom>
+          <a:noFill/>
+          <a:ln/>
+        </p:spPr>
+        <p:txBody>
+          <a:bodyPr wrap="square" lIns="0" tIns="0" rIns="0" bIns="0" rtlCol="0" anchor="ctr"/>
+          <a:lstStyle/>
+          <a:p>
+            <a:pPr indent="0" marL="0">
+              <a:buNone/>
+            </a:pPr>
+            <a:r>
+              <a:rPr lang="en-US" sz="800" dirty="0">
+                <a:solidFill>
+                  <a:srgbClr val="718096"/>
+                </a:solidFill>
+                <a:latin typeface="Pretendard" pitchFamily="34" charset="0"/>
+                <a:ea typeface="Pretendard" pitchFamily="34" charset="-122"/>
+                <a:cs typeface="Pretendard" pitchFamily="34" charset="-120"/>
+              </a:rPr>
+              <a:t>크리딜</a:t>
+            </a:r>
+            <a:endParaRPr lang="en-US" sz="800" dirty="0"/>
+          </a:p>
+        </p:txBody>
+      </p:sp>
+      <p:sp>
+        <p:nvSpPr>
+          <p:cNvPr id="12" name="Text 10"/>
+          <p:cNvSpPr/>
+          <p:nvPr/>
+        </p:nvSpPr>
+        <p:spPr>
+          <a:xfrm>
+            <a:off x="10710367" y="6382512"/>
+            <a:ext cx="914400" cy="219456"/>
+          </a:xfrm>
+          <a:prstGeom prst="rect">
+            <a:avLst/>
+          </a:prstGeom>
+          <a:noFill/>
+          <a:ln/>
+        </p:spPr>
+        <p:txBody>
+          <a:bodyPr wrap="square" lIns="0" tIns="0" rIns="0" bIns="0" rtlCol="0" anchor="ctr"/>
+          <a:lstStyle/>
+          <a:p>
+            <a:pPr algn="r" indent="0" marL="0">
+              <a:buNone/>
+            </a:pPr>
+            <a:r>
+              <a:rPr lang="en-US" sz="900" b="1" dirty="0">
+                <a:solidFill>
+                  <a:srgbClr val="B98A2E"/>
+                </a:solidFill>
+                <a:latin typeface="Arial" pitchFamily="34" charset="0"/>
+                <a:ea typeface="Arial" pitchFamily="34" charset="-122"/>
+                <a:cs typeface="Arial" pitchFamily="34" charset="-120"/>
+              </a:rPr>
+              <a:t>11</a:t>
+            </a:r>
+            <a:endParaRPr lang="en-US" sz="900" dirty="0"/>
+          </a:p>
+        </p:txBody>
+      </p:sp>
+    </p:spTree>
+  </p:cSld>
+  <p:clrMapOvr>
+    <a:masterClrMapping/>
+  </p:clrMapOvr>
+</p:sld>
+</file>
+
+<file path=ppt/slides/slide12.xml><?xml version="1.0" encoding="utf-8"?>
+<p:sld xmlns:a="http://schemas.openxmlformats.org/drawingml/2006/main" xmlns:r="http://schemas.openxmlformats.org/officeDocument/2006/relationships" xmlns:p="http://schemas.openxmlformats.org/presentationml/2006/main">
+  <p:cSld name="Slide 12">
     <p:bg>
       <p:bgPr>
         <a:solidFill>
@@ -2937,7 +4134,7 @@
                 <a:ea typeface="Arial" pitchFamily="34" charset="-122"/>
                 <a:cs typeface="Arial" pitchFamily="34" charset="-120"/>
               </a:rPr>
-              <a:t>11</a:t>
+              <a:t>12</a:t>
             </a:r>
             <a:endParaRPr lang="en-US" sz="1300" dirty="0"/>
           </a:p>
@@ -4351,7 +5548,7 @@
                 <a:ea typeface="Arial" pitchFamily="34" charset="-122"/>
                 <a:cs typeface="Arial" pitchFamily="34" charset="-120"/>
               </a:rPr>
-              <a:t>11</a:t>
+              <a:t>12</a:t>
             </a:r>
             <a:endParaRPr lang="en-US" sz="900" dirty="0"/>
           </a:p>
@@ -4982,7 +6179,7 @@
               <a:buNone/>
             </a:pPr>
             <a:r>
-              <a:rPr lang="en-US" sz="850" dirty="0">
+              <a:rPr lang="en-US" sz="950" dirty="0">
                 <a:solidFill>
                   <a:srgbClr val="718096"/>
                 </a:solidFill>
@@ -4990,9 +6187,9 @@
                 <a:ea typeface="Pretendard" pitchFamily="34" charset="-122"/>
                 <a:cs typeface="Pretendard" pitchFamily="34" charset="-120"/>
               </a:rPr>
-              <a:t>연 수익률(Cap Rate)</a:t>
-            </a:r>
-            <a:endParaRPr lang="en-US" sz="850" dirty="0"/>
+              <a:t>연 수익률</a:t>
+            </a:r>
+            <a:endParaRPr lang="en-US" sz="950" dirty="0"/>
           </a:p>
         </p:txBody>
       </p:sp>
@@ -5094,7 +6291,7 @@
               <a:buNone/>
             </a:pPr>
             <a:r>
-              <a:rPr lang="en-US" sz="950" dirty="0">
+              <a:rPr lang="en-US" sz="850" dirty="0">
                 <a:solidFill>
                   <a:srgbClr val="718096"/>
                 </a:solidFill>
@@ -5102,9 +6299,9 @@
                 <a:ea typeface="Pretendard" pitchFamily="34" charset="-122"/>
                 <a:cs typeface="Pretendard" pitchFamily="34" charset="-120"/>
               </a:rPr>
-              <a:t>실투자금</a:t>
-            </a:r>
-            <a:endParaRPr lang="en-US" sz="950" dirty="0"/>
+              <a:t>실투자금 (취득비용 포함)</a:t>
+            </a:r>
+            <a:endParaRPr lang="en-US" sz="850" dirty="0"/>
           </a:p>
         </p:txBody>
       </p:sp>
@@ -5366,11 +6563,11 @@
                 <a:solidFill>
                   <a:srgbClr val="10161F"/>
                 </a:solidFill>
-                <a:latin typeface="Pretendard" pitchFamily="34" charset="0"/>
-                <a:ea typeface="Pretendard" pitchFamily="34" charset="-122"/>
-                <a:cs typeface="Pretendard" pitchFamily="34" charset="-120"/>
-              </a:rPr>
-              <a:t>확인 중</a:t>
+                <a:latin typeface="Arial" pitchFamily="34" charset="0"/>
+                <a:ea typeface="Arial" pitchFamily="34" charset="-122"/>
+                <a:cs typeface="Arial" pitchFamily="34" charset="-120"/>
+              </a:rPr>
+              <a:t>-</a:t>
             </a:r>
             <a:endParaRPr lang="en-US" sz="2200" dirty="0"/>
           </a:p>
@@ -5526,7 +6723,9 @@
           <a:ln/>
         </p:spPr>
         <p:txBody>
-          <a:bodyPr wrap="square" lIns="0" tIns="0" rIns="0" bIns="0" rtlCol="0" anchor="ctr"/>
+          <a:bodyPr wrap="square" lIns="0" tIns="0" rIns="0" bIns="0" rtlCol="0" anchor="ctr">
+            <a:normAutofit/>
+          </a:bodyPr>
           <a:lstStyle/>
           <a:p>
             <a:pPr indent="0" marL="0">
@@ -5658,7 +6857,9 @@
           <a:ln/>
         </p:spPr>
         <p:txBody>
-          <a:bodyPr wrap="square" lIns="0" tIns="0" rIns="0" bIns="0" rtlCol="0" anchor="ctr"/>
+          <a:bodyPr wrap="square" lIns="0" tIns="0" rIns="0" bIns="0" rtlCol="0" anchor="ctr">
+            <a:normAutofit/>
+          </a:bodyPr>
           <a:lstStyle/>
           <a:p>
             <a:pPr indent="0" marL="0">
@@ -5673,7 +6874,7 @@
                 <a:ea typeface="Pretendard" pitchFamily="34" charset="-122"/>
                 <a:cs typeface="Pretendard" pitchFamily="34" charset="-120"/>
               </a:rPr>
-              <a:t>자산 규모: 해당 권역 소재 단독 빌딩 매입 기회</a:t>
+              <a:t>안정적 현금흐름: 전 층 임차인 운영 기반의 안정적 월 임대수익 창출</a:t>
             </a:r>
             <a:endParaRPr lang="en-US" sz="1150" dirty="0"/>
           </a:p>
@@ -5790,7 +6991,9 @@
           <a:ln/>
         </p:spPr>
         <p:txBody>
-          <a:bodyPr wrap="square" lIns="0" tIns="0" rIns="0" bIns="0" rtlCol="0" anchor="ctr"/>
+          <a:bodyPr wrap="square" lIns="0" tIns="0" rIns="0" bIns="0" rtlCol="0" anchor="ctr">
+            <a:normAutofit/>
+          </a:bodyPr>
           <a:lstStyle/>
           <a:p>
             <a:pPr indent="0" marL="0">
@@ -5805,7 +7008,7 @@
                 <a:ea typeface="Pretendard" pitchFamily="34" charset="-122"/>
                 <a:cs typeface="Pretendard" pitchFamily="34" charset="-120"/>
               </a:rPr>
-              <a:t>수익 안정성: 안정적 임대수익 기반 투자 매물</a:t>
+              <a:t>자산 규모: 해당 권역 소재 단독 빌딩 매입 기회</a:t>
             </a:r>
             <a:endParaRPr lang="en-US" sz="1150" dirty="0"/>
           </a:p>
@@ -6086,7 +7289,183 @@
       </p:pic>
       <p:sp>
         <p:nvSpPr>
-          <p:cNvPr id="7" name="Text 4"/>
+          <p:cNvPr id="7" name="Shape 4"/>
+          <p:cNvSpPr/>
+          <p:nvPr/>
+        </p:nvSpPr>
+        <p:spPr>
+          <a:xfrm>
+            <a:off x="704088" y="5184648"/>
+            <a:ext cx="3200400" cy="320040"/>
+          </a:xfrm>
+          <a:prstGeom prst="roundRect">
+            <a:avLst>
+              <a:gd name="adj" fmla="val 11429"/>
+            </a:avLst>
+          </a:prstGeom>
+          <a:solidFill>
+            <a:srgbClr val="FFFFFF">
+              <a:alpha val="90000"/>
+            </a:srgbClr>
+          </a:solidFill>
+          <a:ln w="10160">
+            <a:solidFill>
+              <a:srgbClr val="CBD5E1"/>
+            </a:solidFill>
+            <a:prstDash val="solid"/>
+          </a:ln>
+        </p:spPr>
+      </p:sp>
+      <p:sp>
+        <p:nvSpPr>
+          <p:cNvPr id="8" name="Text 5"/>
+          <p:cNvSpPr/>
+          <p:nvPr/>
+        </p:nvSpPr>
+        <p:spPr>
+          <a:xfrm>
+            <a:off x="749808" y="5202936"/>
+            <a:ext cx="3108960" cy="274320"/>
+          </a:xfrm>
+          <a:prstGeom prst="rect">
+            <a:avLst/>
+          </a:prstGeom>
+          <a:noFill/>
+          <a:ln/>
+        </p:spPr>
+        <p:txBody>
+          <a:bodyPr wrap="square" rtlCol="0" anchor="ctr"/>
+          <a:lstStyle/>
+          <a:p>
+            <a:pPr indent="0" marL="0">
+              <a:buNone/>
+            </a:pPr>
+            <a:r>
+              <a:rPr lang="en-US" sz="900" b="1" dirty="0">
+                <a:solidFill>
+                  <a:srgbClr val="B8860B"/>
+                </a:solidFill>
+                <a:latin typeface="Pretendard" pitchFamily="34" charset="0"/>
+                <a:ea typeface="Pretendard" pitchFamily="34" charset="-122"/>
+                <a:cs typeface="Pretendard" pitchFamily="34" charset="-120"/>
+              </a:rPr>
+              <a:t>★ </a:t>
+            </a:r>
+            <a:pPr indent="0" marL="0">
+              <a:buNone/>
+            </a:pPr>
+            <a:r>
+              <a:rPr lang="en-US" sz="850" b="1" dirty="0">
+                <a:solidFill>
+                  <a:srgbClr val="1E293B"/>
+                </a:solidFill>
+                <a:latin typeface="Pretendard" pitchFamily="34" charset="0"/>
+                <a:ea typeface="Pretendard" pitchFamily="34" charset="-122"/>
+                <a:cs typeface="Pretendard" pitchFamily="34" charset="-120"/>
+              </a:rPr>
+              <a:t>대상 자산(본건)   </a:t>
+            </a:r>
+            <a:pPr indent="0" marL="0">
+              <a:buNone/>
+            </a:pPr>
+            <a:r>
+              <a:rPr lang="en-US" sz="1000" b="1" dirty="0">
+                <a:solidFill>
+                  <a:srgbClr val="B8860B"/>
+                </a:solidFill>
+                <a:latin typeface="Pretendard" pitchFamily="34" charset="0"/>
+                <a:ea typeface="Pretendard" pitchFamily="34" charset="-122"/>
+                <a:cs typeface="Pretendard" pitchFamily="34" charset="-120"/>
+              </a:rPr>
+              <a:t>╌ </a:t>
+            </a:r>
+            <a:pPr indent="0" marL="0">
+              <a:buNone/>
+            </a:pPr>
+            <a:r>
+              <a:rPr lang="en-US" sz="850" dirty="0">
+                <a:solidFill>
+                  <a:srgbClr val="475569"/>
+                </a:solidFill>
+                <a:latin typeface="Pretendard" pitchFamily="34" charset="0"/>
+                <a:ea typeface="Pretendard" pitchFamily="34" charset="-122"/>
+                <a:cs typeface="Pretendard" pitchFamily="34" charset="-120"/>
+              </a:rPr>
+              <a:t>도보 5분 반경 (약 400m)</a:t>
+            </a:r>
+            <a:endParaRPr lang="en-US" sz="900" dirty="0"/>
+          </a:p>
+        </p:txBody>
+      </p:sp>
+      <p:sp>
+        <p:nvSpPr>
+          <p:cNvPr id="9" name="Shape 6"/>
+          <p:cNvSpPr/>
+          <p:nvPr/>
+        </p:nvSpPr>
+        <p:spPr>
+          <a:xfrm>
+            <a:off x="2715768" y="3739896"/>
+            <a:ext cx="822960" cy="219456"/>
+          </a:xfrm>
+          <a:prstGeom prst="roundRect">
+            <a:avLst>
+              <a:gd name="adj" fmla="val 16667"/>
+            </a:avLst>
+          </a:prstGeom>
+          <a:solidFill>
+            <a:srgbClr val="132A3A"/>
+          </a:solidFill>
+          <a:ln w="12700">
+            <a:solidFill>
+              <a:srgbClr val="FFFFFF"/>
+            </a:solidFill>
+            <a:prstDash val="solid"/>
+          </a:ln>
+        </p:spPr>
+      </p:sp>
+      <p:sp>
+        <p:nvSpPr>
+          <p:cNvPr id="10" name="Text 7"/>
+          <p:cNvSpPr/>
+          <p:nvPr/>
+        </p:nvSpPr>
+        <p:spPr>
+          <a:xfrm>
+            <a:off x="2715768" y="3739896"/>
+            <a:ext cx="822960" cy="219456"/>
+          </a:xfrm>
+          <a:prstGeom prst="rect">
+            <a:avLst/>
+          </a:prstGeom>
+          <a:noFill/>
+          <a:ln/>
+        </p:spPr>
+        <p:txBody>
+          <a:bodyPr wrap="square" rtlCol="0" anchor="ctr"/>
+          <a:lstStyle/>
+          <a:p>
+            <a:pPr algn="ctr" indent="0" marL="0">
+              <a:buNone/>
+            </a:pPr>
+            <a:r>
+              <a:rPr lang="en-US" sz="900" b="1" dirty="0">
+                <a:solidFill>
+                  <a:srgbClr val="FFFFFF"/>
+                </a:solidFill>
+                <a:latin typeface="Pretendard" pitchFamily="34" charset="0"/>
+                <a:ea typeface="Pretendard" pitchFamily="34" charset="-122"/>
+                <a:cs typeface="Pretendard" pitchFamily="34" charset="-120"/>
+              </a:rPr>
+              <a:t>★ 본건</a:t>
+            </a:r>
+            <a:endParaRPr lang="en-US" sz="900" dirty="0"/>
+          </a:p>
+        </p:txBody>
+      </p:sp>
+      <p:sp>
+        <p:nvSpPr>
+          <p:cNvPr id="11" name="Text 8"/>
           <p:cNvSpPr/>
           <p:nvPr/>
         </p:nvSpPr>
@@ -6130,7 +7509,7 @@
       </p:sp>
       <p:sp>
         <p:nvSpPr>
-          <p:cNvPr id="8" name="Text 5"/>
+          <p:cNvPr id="12" name="Text 9"/>
           <p:cNvSpPr/>
           <p:nvPr/>
         </p:nvSpPr>
@@ -6174,7 +7553,7 @@
       </p:sp>
       <p:sp>
         <p:nvSpPr>
-          <p:cNvPr id="9" name="Shape 6"/>
+          <p:cNvPr id="13" name="Shape 10"/>
           <p:cNvSpPr/>
           <p:nvPr/>
         </p:nvSpPr>
@@ -6197,7 +7576,7 @@
       </p:sp>
       <p:sp>
         <p:nvSpPr>
-          <p:cNvPr id="10" name="Text 7"/>
+          <p:cNvPr id="14" name="Text 11"/>
           <p:cNvSpPr/>
           <p:nvPr/>
         </p:nvSpPr>
@@ -6241,7 +7620,7 @@
       </p:sp>
       <p:sp>
         <p:nvSpPr>
-          <p:cNvPr id="11" name="Text 8"/>
+          <p:cNvPr id="15" name="Text 12"/>
           <p:cNvSpPr/>
           <p:nvPr/>
         </p:nvSpPr>
@@ -6285,7 +7664,7 @@
       </p:sp>
       <p:sp>
         <p:nvSpPr>
-          <p:cNvPr id="12" name="Shape 9"/>
+          <p:cNvPr id="16" name="Shape 13"/>
           <p:cNvSpPr/>
           <p:nvPr/>
         </p:nvSpPr>
@@ -6307,7 +7686,7 @@
       </p:sp>
       <p:sp>
         <p:nvSpPr>
-          <p:cNvPr id="13" name="Shape 10"/>
+          <p:cNvPr id="17" name="Shape 14"/>
           <p:cNvSpPr/>
           <p:nvPr/>
         </p:nvSpPr>
@@ -6327,7 +7706,7 @@
       </p:sp>
       <p:sp>
         <p:nvSpPr>
-          <p:cNvPr id="14" name="Text 11"/>
+          <p:cNvPr id="18" name="Text 15"/>
           <p:cNvSpPr/>
           <p:nvPr/>
         </p:nvSpPr>
@@ -6366,7 +7745,7 @@
       </p:sp>
       <p:sp>
         <p:nvSpPr>
-          <p:cNvPr id="15" name="Text 12"/>
+          <p:cNvPr id="19" name="Text 16"/>
           <p:cNvSpPr/>
           <p:nvPr/>
         </p:nvSpPr>
@@ -6409,7 +7788,7 @@
       </p:sp>
       <p:sp>
         <p:nvSpPr>
-          <p:cNvPr id="16" name="Text 13"/>
+          <p:cNvPr id="20" name="Text 17"/>
           <p:cNvSpPr/>
           <p:nvPr/>
         </p:nvSpPr>
@@ -6448,7 +7827,7 @@
       </p:sp>
       <p:sp>
         <p:nvSpPr>
-          <p:cNvPr id="17" name="Text 14"/>
+          <p:cNvPr id="21" name="Text 18"/>
           <p:cNvSpPr/>
           <p:nvPr/>
         </p:nvSpPr>
@@ -8037,7 +9416,7 @@
                 <a:ea typeface="Arial" pitchFamily="34" charset="-122"/>
                 <a:cs typeface="Arial" pitchFamily="34" charset="-120"/>
               </a:rPr>
-              <a:t>Capital</a:t>
+              <a:t>Land Detail</a:t>
             </a:r>
             <a:endParaRPr lang="en-US" sz="950" dirty="0"/>
           </a:p>
@@ -8078,7 +9457,7 @@
                 <a:ea typeface="Pretendard" pitchFamily="34" charset="-122"/>
                 <a:cs typeface="Pretendard" pitchFamily="34" charset="-120"/>
               </a:rPr>
-              <a:t>자본구조</a:t>
+              <a:t>토지상세</a:t>
             </a:r>
             <a:endParaRPr lang="en-US" sz="2300" dirty="0"/>
           </a:p>
@@ -8086,26 +9465,233 @@
       </p:sp>
       <p:sp>
         <p:nvSpPr>
-          <p:cNvPr id="6" name="Shape 4"/>
-          <p:cNvSpPr/>
-          <p:nvPr/>
-        </p:nvSpPr>
-        <p:spPr>
-          <a:xfrm>
-            <a:off x="566928" y="1417320"/>
-            <a:ext cx="5391760" cy="4389120"/>
+          <p:cNvPr id="6" name="Text 4"/>
+          <p:cNvSpPr/>
+          <p:nvPr/>
+        </p:nvSpPr>
+        <p:spPr>
+          <a:xfrm>
+            <a:off x="566928" y="1371600"/>
+            <a:ext cx="6858000" cy="237744"/>
+          </a:xfrm>
+          <a:prstGeom prst="rect">
+            <a:avLst/>
+          </a:prstGeom>
+          <a:noFill/>
+          <a:ln/>
+        </p:spPr>
+        <p:txBody>
+          <a:bodyPr wrap="square" lIns="0" tIns="0" rIns="0" bIns="0" rtlCol="0" anchor="ctr"/>
+          <a:lstStyle/>
+          <a:p>
+            <a:pPr indent="0" marL="0">
+              <a:buNone/>
+            </a:pPr>
+            <a:r>
+              <a:rPr lang="en-US" sz="1100" b="1" dirty="0">
+                <a:solidFill>
+                  <a:srgbClr val="10161F"/>
+                </a:solidFill>
+                <a:latin typeface="Pretendard" pitchFamily="34" charset="0"/>
+                <a:ea typeface="Pretendard" pitchFamily="34" charset="-122"/>
+                <a:cs typeface="Pretendard" pitchFamily="34" charset="-120"/>
+              </a:rPr>
+              <a:t>건축물 개요 및 물리 스펙</a:t>
+            </a:r>
+            <a:endParaRPr lang="en-US" sz="1100" dirty="0"/>
+          </a:p>
+        </p:txBody>
+      </p:sp>
+      <p:sp>
+        <p:nvSpPr>
+          <p:cNvPr id="7" name="Shape 5"/>
+          <p:cNvSpPr/>
+          <p:nvPr/>
+        </p:nvSpPr>
+        <p:spPr>
+          <a:xfrm>
+            <a:off x="566928" y="1645920"/>
+            <a:ext cx="6858000" cy="1645920"/>
           </a:xfrm>
           <a:prstGeom prst="roundRect">
             <a:avLst>
-              <a:gd name="adj" fmla="val 1250"/>
+              <a:gd name="adj" fmla="val 3333"/>
             </a:avLst>
           </a:prstGeom>
           <a:solidFill>
-            <a:srgbClr val="F7FAFC"/>
+            <a:srgbClr val="BEE3F8"/>
           </a:solidFill>
-          <a:ln w="6350">
+          <a:ln/>
+        </p:spPr>
+      </p:sp>
+      <p:sp>
+        <p:nvSpPr>
+          <p:cNvPr id="8" name="Shape 6"/>
+          <p:cNvSpPr/>
+          <p:nvPr/>
+        </p:nvSpPr>
+        <p:spPr>
+          <a:xfrm>
+            <a:off x="566928" y="1700784"/>
+            <a:ext cx="36576" cy="1536192"/>
+          </a:xfrm>
+          <a:prstGeom prst="rect">
+            <a:avLst/>
+          </a:prstGeom>
+          <a:solidFill>
+            <a:srgbClr val="2B6CB0"/>
+          </a:solidFill>
+          <a:ln/>
+        </p:spPr>
+      </p:sp>
+      <p:sp>
+        <p:nvSpPr>
+          <p:cNvPr id="9" name="Text 7"/>
+          <p:cNvSpPr/>
+          <p:nvPr/>
+        </p:nvSpPr>
+        <p:spPr>
+          <a:xfrm>
+            <a:off x="713232" y="1737360"/>
+            <a:ext cx="6601968" cy="201168"/>
+          </a:xfrm>
+          <a:prstGeom prst="rect">
+            <a:avLst/>
+          </a:prstGeom>
+          <a:noFill/>
+          <a:ln/>
+        </p:spPr>
+        <p:txBody>
+          <a:bodyPr wrap="square" lIns="0" tIns="0" rIns="0" bIns="0" rtlCol="0" anchor="ctr"/>
+          <a:lstStyle/>
+          <a:p>
+            <a:pPr indent="0" marL="0">
+              <a:buNone/>
+            </a:pPr>
+            <a:r>
+              <a:rPr lang="en-US" sz="1050" b="1" dirty="0">
+                <a:solidFill>
+                  <a:srgbClr val="2B6CB0"/>
+                </a:solidFill>
+                <a:latin typeface="Pretendard" pitchFamily="34" charset="0"/>
+                <a:ea typeface="Pretendard" pitchFamily="34" charset="-122"/>
+                <a:cs typeface="Pretendard" pitchFamily="34" charset="-120"/>
+              </a:rPr>
+              <a:t>토지상세 요약</a:t>
+            </a:r>
+            <a:endParaRPr lang="en-US" sz="1050" dirty="0"/>
+          </a:p>
+        </p:txBody>
+      </p:sp>
+      <p:sp>
+        <p:nvSpPr>
+          <p:cNvPr id="10" name="Text 8"/>
+          <p:cNvSpPr/>
+          <p:nvPr/>
+        </p:nvSpPr>
+        <p:spPr>
+          <a:xfrm>
+            <a:off x="713232" y="1938528"/>
+            <a:ext cx="6601968" cy="1316736"/>
+          </a:xfrm>
+          <a:prstGeom prst="rect">
+            <a:avLst/>
+          </a:prstGeom>
+          <a:noFill/>
+          <a:ln/>
+        </p:spPr>
+        <p:txBody>
+          <a:bodyPr wrap="square" lIns="0" tIns="0" rIns="0" bIns="0" rtlCol="0" anchor="t"/>
+          <a:lstStyle/>
+          <a:p>
+            <a:pPr marL="342900" indent="-342900">
+              <a:lnSpc>
+                <a:spcPct val="108000"/>
+              </a:lnSpc>
+              <a:buSzPct val="100000"/>
+              <a:buChar char="•"/>
+            </a:pPr>
+            <a:r>
+              <a:rPr lang="en-US" sz="980" dirty="0">
+                <a:solidFill>
+                  <a:srgbClr val="10161F"/>
+                </a:solidFill>
+                <a:latin typeface="Pretendard" pitchFamily="34" charset="0"/>
+                <a:ea typeface="Pretendard" pitchFamily="34" charset="-122"/>
+                <a:cs typeface="Pretendard" pitchFamily="34" charset="-120"/>
+              </a:rPr>
+              <a:t>등기부등본 갑구·을구 권리관계 공적장부 대조</a:t>
+            </a:r>
+            <a:endParaRPr lang="en-US" sz="980" dirty="0"/>
+          </a:p>
+          <a:p>
+            <a:pPr marL="342900" indent="-342900">
+              <a:lnSpc>
+                <a:spcPct val="108000"/>
+              </a:lnSpc>
+              <a:spcBef>
+                <a:spcPts val="300"/>
+              </a:spcBef>
+              <a:buSzPct val="100000"/>
+              <a:buChar char="•"/>
+            </a:pPr>
+            <a:r>
+              <a:rPr lang="en-US" sz="980" dirty="0">
+                <a:solidFill>
+                  <a:srgbClr val="10161F"/>
+                </a:solidFill>
+                <a:latin typeface="Pretendard" pitchFamily="34" charset="0"/>
+                <a:ea typeface="Pretendard" pitchFamily="34" charset="-122"/>
+                <a:cs typeface="Pretendard" pitchFamily="34" charset="-120"/>
+              </a:rPr>
+              <a:t>건축물대장 주요 용도 및 위반건축물 여부 확인</a:t>
+            </a:r>
+            <a:endParaRPr lang="en-US" sz="980" dirty="0"/>
+          </a:p>
+          <a:p>
+            <a:pPr marL="342900" indent="-342900">
+              <a:lnSpc>
+                <a:spcPct val="108000"/>
+              </a:lnSpc>
+              <a:spcBef>
+                <a:spcPts val="300"/>
+              </a:spcBef>
+              <a:buSzPct val="100000"/>
+              <a:buChar char="•"/>
+            </a:pPr>
+            <a:r>
+              <a:rPr lang="en-US" sz="980" dirty="0">
+                <a:solidFill>
+                  <a:srgbClr val="10161F"/>
+                </a:solidFill>
+                <a:latin typeface="Pretendard" pitchFamily="34" charset="0"/>
+                <a:ea typeface="Pretendard" pitchFamily="34" charset="-122"/>
+                <a:cs typeface="Pretendard" pitchFamily="34" charset="-120"/>
+              </a:rPr>
+              <a:t>현장 실사를 통한 물리적 하자 및 하자보수 이력 점검</a:t>
+            </a:r>
+            <a:endParaRPr lang="en-US" sz="980" dirty="0"/>
+          </a:p>
+        </p:txBody>
+      </p:sp>
+      <p:sp>
+        <p:nvSpPr>
+          <p:cNvPr id="11" name="Shape 9"/>
+          <p:cNvSpPr/>
+          <p:nvPr/>
+        </p:nvSpPr>
+        <p:spPr>
+          <a:xfrm>
+            <a:off x="7604608" y="1371600"/>
+            <a:ext cx="0" cy="4754880"/>
+          </a:xfrm>
+          <a:prstGeom prst="line">
+            <a:avLst/>
+          </a:prstGeom>
+          <a:noFill/>
+          <a:ln w="8890">
             <a:solidFill>
-              <a:srgbClr val="CBD5E0"/>
+              <a:srgbClr val="B98A2E"/>
             </a:solidFill>
             <a:prstDash val="solid"/>
           </a:ln>
@@ -8113,834 +9699,56 @@
       </p:sp>
       <p:sp>
         <p:nvSpPr>
-          <p:cNvPr id="7" name="Text 5"/>
-          <p:cNvSpPr/>
-          <p:nvPr/>
-        </p:nvSpPr>
-        <p:spPr>
-          <a:xfrm>
-            <a:off x="795528" y="1618488"/>
-            <a:ext cx="4934560" cy="320040"/>
-          </a:xfrm>
-          <a:prstGeom prst="rect">
-            <a:avLst/>
-          </a:prstGeom>
-          <a:noFill/>
-          <a:ln/>
-        </p:spPr>
-        <p:txBody>
-          <a:bodyPr wrap="square" lIns="0" tIns="0" rIns="0" bIns="0" rtlCol="0" anchor="ctr"/>
-          <a:lstStyle/>
-          <a:p>
-            <a:pPr indent="0" marL="0">
-              <a:buNone/>
-            </a:pPr>
-            <a:r>
-              <a:rPr lang="en-US" sz="1350" b="1" dirty="0">
-                <a:solidFill>
-                  <a:srgbClr val="977024"/>
-                </a:solidFill>
-                <a:latin typeface="Pretendard" pitchFamily="34" charset="0"/>
-                <a:ea typeface="Pretendard" pitchFamily="34" charset="-122"/>
-                <a:cs typeface="Pretendard" pitchFamily="34" charset="-120"/>
-              </a:rPr>
-              <a:t>1. 총취득원가 및 자기자본 소요</a:t>
-            </a:r>
-            <a:endParaRPr lang="en-US" sz="1350" dirty="0"/>
-          </a:p>
-        </p:txBody>
-      </p:sp>
-      <p:sp>
-        <p:nvSpPr>
-          <p:cNvPr id="8" name="Text 6"/>
-          <p:cNvSpPr/>
-          <p:nvPr/>
-        </p:nvSpPr>
-        <p:spPr>
-          <a:xfrm>
-            <a:off x="795528" y="2011680"/>
-            <a:ext cx="2269897" cy="475488"/>
-          </a:xfrm>
-          <a:prstGeom prst="rect">
-            <a:avLst/>
-          </a:prstGeom>
-          <a:noFill/>
-          <a:ln/>
-        </p:spPr>
-        <p:txBody>
-          <a:bodyPr wrap="square" lIns="0" tIns="0" rIns="0" bIns="0" rtlCol="0" anchor="ctr">
-            <a:normAutofit/>
-          </a:bodyPr>
-          <a:lstStyle/>
-          <a:p>
-            <a:pPr indent="0" marL="0">
-              <a:lnSpc>
-                <a:spcPct val="115000"/>
-              </a:lnSpc>
-              <a:buNone/>
-            </a:pPr>
-            <a:r>
-              <a:rPr lang="en-US" sz="1150" dirty="0">
-                <a:solidFill>
-                  <a:srgbClr val="718096"/>
-                </a:solidFill>
-                <a:latin typeface="Pretendard" pitchFamily="34" charset="0"/>
-                <a:ea typeface="Pretendard" pitchFamily="34" charset="-122"/>
-                <a:cs typeface="Pretendard" pitchFamily="34" charset="-120"/>
-              </a:rPr>
-              <a:t>매매 희망가 (A)</a:t>
-            </a:r>
-            <a:endParaRPr lang="en-US" sz="1150" dirty="0"/>
-          </a:p>
-        </p:txBody>
-      </p:sp>
-      <p:sp>
-        <p:nvSpPr>
-          <p:cNvPr id="9" name="Text 7"/>
-          <p:cNvSpPr/>
-          <p:nvPr/>
-        </p:nvSpPr>
-        <p:spPr>
-          <a:xfrm>
-            <a:off x="3065425" y="2011680"/>
-            <a:ext cx="2664662" cy="475488"/>
-          </a:xfrm>
-          <a:prstGeom prst="rect">
-            <a:avLst/>
-          </a:prstGeom>
-          <a:noFill/>
-          <a:ln/>
-        </p:spPr>
-        <p:txBody>
-          <a:bodyPr wrap="square" lIns="0" tIns="0" rIns="0" bIns="0" rtlCol="0" anchor="ctr">
-            <a:normAutofit/>
-          </a:bodyPr>
-          <a:lstStyle/>
-          <a:p>
-            <a:pPr indent="0" marL="0">
-              <a:lnSpc>
-                <a:spcPct val="115000"/>
-              </a:lnSpc>
-              <a:buNone/>
-            </a:pPr>
-            <a:r>
-              <a:rPr lang="en-US" sz="1150" b="1" dirty="0">
-                <a:solidFill>
-                  <a:srgbClr val="10161F"/>
-                </a:solidFill>
-                <a:latin typeface="Pretendard" pitchFamily="34" charset="0"/>
-                <a:ea typeface="Pretendard" pitchFamily="34" charset="-122"/>
-                <a:cs typeface="Pretendard" pitchFamily="34" charset="-120"/>
-              </a:rPr>
-              <a:t>210억 원</a:t>
-            </a:r>
-            <a:endParaRPr lang="en-US" sz="1150" dirty="0"/>
-          </a:p>
-        </p:txBody>
-      </p:sp>
-      <p:sp>
-        <p:nvSpPr>
-          <p:cNvPr id="10" name="Shape 8"/>
-          <p:cNvSpPr/>
-          <p:nvPr/>
-        </p:nvSpPr>
-        <p:spPr>
-          <a:xfrm>
-            <a:off x="795528" y="2487168"/>
-            <a:ext cx="4934560" cy="0"/>
-          </a:xfrm>
-          <a:prstGeom prst="line">
-            <a:avLst/>
-          </a:prstGeom>
-          <a:noFill/>
-          <a:ln w="3810">
-            <a:solidFill>
-              <a:srgbClr val="CBD5E0"/>
-            </a:solidFill>
-            <a:prstDash val="solid"/>
-          </a:ln>
-        </p:spPr>
-      </p:sp>
-      <p:sp>
-        <p:nvSpPr>
-          <p:cNvPr id="11" name="Text 9"/>
-          <p:cNvSpPr/>
-          <p:nvPr/>
-        </p:nvSpPr>
-        <p:spPr>
-          <a:xfrm>
-            <a:off x="795528" y="2487168"/>
-            <a:ext cx="2269897" cy="475488"/>
-          </a:xfrm>
-          <a:prstGeom prst="rect">
-            <a:avLst/>
-          </a:prstGeom>
-          <a:noFill/>
-          <a:ln/>
-        </p:spPr>
-        <p:txBody>
-          <a:bodyPr wrap="square" lIns="0" tIns="0" rIns="0" bIns="0" rtlCol="0" anchor="ctr">
-            <a:normAutofit/>
-          </a:bodyPr>
-          <a:lstStyle/>
-          <a:p>
-            <a:pPr indent="0" marL="0">
-              <a:lnSpc>
-                <a:spcPct val="115000"/>
-              </a:lnSpc>
-              <a:buNone/>
-            </a:pPr>
-            <a:r>
-              <a:rPr lang="en-US" sz="1150" dirty="0">
-                <a:solidFill>
-                  <a:srgbClr val="718096"/>
-                </a:solidFill>
-                <a:latin typeface="Pretendard" pitchFamily="34" charset="0"/>
-                <a:ea typeface="Pretendard" pitchFamily="34" charset="-122"/>
-                <a:cs typeface="Pretendard" pitchFamily="34" charset="-120"/>
-              </a:rPr>
-              <a:t>취득세 (4.6% 법정)</a:t>
-            </a:r>
-            <a:endParaRPr lang="en-US" sz="1150" dirty="0"/>
-          </a:p>
-        </p:txBody>
-      </p:sp>
-      <p:sp>
-        <p:nvSpPr>
-          <p:cNvPr id="12" name="Text 10"/>
-          <p:cNvSpPr/>
-          <p:nvPr/>
-        </p:nvSpPr>
-        <p:spPr>
-          <a:xfrm>
-            <a:off x="3065425" y="2487168"/>
-            <a:ext cx="2664662" cy="475488"/>
-          </a:xfrm>
-          <a:prstGeom prst="rect">
-            <a:avLst/>
-          </a:prstGeom>
-          <a:noFill/>
-          <a:ln/>
-        </p:spPr>
-        <p:txBody>
-          <a:bodyPr wrap="square" lIns="0" tIns="0" rIns="0" bIns="0" rtlCol="0" anchor="ctr">
-            <a:normAutofit/>
-          </a:bodyPr>
-          <a:lstStyle/>
-          <a:p>
-            <a:pPr indent="0" marL="0">
-              <a:lnSpc>
-                <a:spcPct val="115000"/>
-              </a:lnSpc>
-              <a:buNone/>
-            </a:pPr>
-            <a:r>
-              <a:rPr lang="en-US" sz="1150" b="1" dirty="0">
-                <a:solidFill>
-                  <a:srgbClr val="10161F"/>
-                </a:solidFill>
-                <a:latin typeface="Pretendard" pitchFamily="34" charset="0"/>
-                <a:ea typeface="Pretendard" pitchFamily="34" charset="-122"/>
-                <a:cs typeface="Pretendard" pitchFamily="34" charset="-120"/>
-              </a:rPr>
-              <a:t>9.66억 원</a:t>
-            </a:r>
-            <a:endParaRPr lang="en-US" sz="1150" dirty="0"/>
-          </a:p>
-        </p:txBody>
-      </p:sp>
-      <p:sp>
-        <p:nvSpPr>
-          <p:cNvPr id="13" name="Shape 11"/>
-          <p:cNvSpPr/>
-          <p:nvPr/>
-        </p:nvSpPr>
-        <p:spPr>
-          <a:xfrm>
-            <a:off x="795528" y="2962656"/>
-            <a:ext cx="4934560" cy="0"/>
-          </a:xfrm>
-          <a:prstGeom prst="line">
-            <a:avLst/>
-          </a:prstGeom>
-          <a:noFill/>
-          <a:ln w="3810">
-            <a:solidFill>
-              <a:srgbClr val="CBD5E0"/>
-            </a:solidFill>
-            <a:prstDash val="solid"/>
-          </a:ln>
-        </p:spPr>
-      </p:sp>
-      <p:sp>
-        <p:nvSpPr>
-          <p:cNvPr id="14" name="Text 12"/>
-          <p:cNvSpPr/>
-          <p:nvPr/>
-        </p:nvSpPr>
-        <p:spPr>
-          <a:xfrm>
-            <a:off x="795528" y="2962656"/>
-            <a:ext cx="2269897" cy="475488"/>
-          </a:xfrm>
-          <a:prstGeom prst="rect">
-            <a:avLst/>
-          </a:prstGeom>
-          <a:noFill/>
-          <a:ln/>
-        </p:spPr>
-        <p:txBody>
-          <a:bodyPr wrap="square" lIns="0" tIns="0" rIns="0" bIns="0" rtlCol="0" anchor="ctr">
-            <a:normAutofit/>
-          </a:bodyPr>
-          <a:lstStyle/>
-          <a:p>
-            <a:pPr indent="0" marL="0">
-              <a:lnSpc>
-                <a:spcPct val="115000"/>
-              </a:lnSpc>
-              <a:buNone/>
-            </a:pPr>
-            <a:r>
-              <a:rPr lang="en-US" sz="1150" dirty="0">
-                <a:solidFill>
-                  <a:srgbClr val="718096"/>
-                </a:solidFill>
-                <a:latin typeface="Pretendard" pitchFamily="34" charset="0"/>
-                <a:ea typeface="Pretendard" pitchFamily="34" charset="-122"/>
-                <a:cs typeface="Pretendard" pitchFamily="34" charset="-120"/>
-              </a:rPr>
-              <a:t>중개보수 (0.9% 한도)</a:t>
-            </a:r>
-            <a:endParaRPr lang="en-US" sz="1150" dirty="0"/>
-          </a:p>
-        </p:txBody>
-      </p:sp>
-      <p:sp>
-        <p:nvSpPr>
-          <p:cNvPr id="15" name="Text 13"/>
-          <p:cNvSpPr/>
-          <p:nvPr/>
-        </p:nvSpPr>
-        <p:spPr>
-          <a:xfrm>
-            <a:off x="3065425" y="2962656"/>
-            <a:ext cx="2664662" cy="475488"/>
-          </a:xfrm>
-          <a:prstGeom prst="rect">
-            <a:avLst/>
-          </a:prstGeom>
-          <a:noFill/>
-          <a:ln/>
-        </p:spPr>
-        <p:txBody>
-          <a:bodyPr wrap="square" lIns="0" tIns="0" rIns="0" bIns="0" rtlCol="0" anchor="ctr">
-            <a:normAutofit/>
-          </a:bodyPr>
-          <a:lstStyle/>
-          <a:p>
-            <a:pPr indent="0" marL="0">
-              <a:lnSpc>
-                <a:spcPct val="115000"/>
-              </a:lnSpc>
-              <a:buNone/>
-            </a:pPr>
-            <a:r>
-              <a:rPr lang="en-US" sz="1150" b="1" dirty="0">
-                <a:solidFill>
-                  <a:srgbClr val="10161F"/>
-                </a:solidFill>
-                <a:latin typeface="Pretendard" pitchFamily="34" charset="0"/>
-                <a:ea typeface="Pretendard" pitchFamily="34" charset="-122"/>
-                <a:cs typeface="Pretendard" pitchFamily="34" charset="-120"/>
-              </a:rPr>
-              <a:t>1.89억 원</a:t>
-            </a:r>
-            <a:endParaRPr lang="en-US" sz="1150" dirty="0"/>
-          </a:p>
-        </p:txBody>
-      </p:sp>
-      <p:sp>
-        <p:nvSpPr>
-          <p:cNvPr id="16" name="Shape 14"/>
-          <p:cNvSpPr/>
-          <p:nvPr/>
-        </p:nvSpPr>
-        <p:spPr>
-          <a:xfrm>
-            <a:off x="795528" y="3438144"/>
-            <a:ext cx="4934560" cy="0"/>
-          </a:xfrm>
-          <a:prstGeom prst="line">
-            <a:avLst/>
-          </a:prstGeom>
-          <a:noFill/>
-          <a:ln w="3810">
-            <a:solidFill>
-              <a:srgbClr val="CBD5E0"/>
-            </a:solidFill>
-            <a:prstDash val="solid"/>
-          </a:ln>
-        </p:spPr>
-      </p:sp>
-      <p:sp>
-        <p:nvSpPr>
-          <p:cNvPr id="17" name="Text 15"/>
-          <p:cNvSpPr/>
-          <p:nvPr/>
-        </p:nvSpPr>
-        <p:spPr>
-          <a:xfrm>
-            <a:off x="795528" y="3438144"/>
-            <a:ext cx="2269897" cy="475488"/>
-          </a:xfrm>
-          <a:prstGeom prst="rect">
-            <a:avLst/>
-          </a:prstGeom>
-          <a:noFill/>
-          <a:ln/>
-        </p:spPr>
-        <p:txBody>
-          <a:bodyPr wrap="square" lIns="0" tIns="0" rIns="0" bIns="0" rtlCol="0" anchor="ctr">
-            <a:normAutofit/>
-          </a:bodyPr>
-          <a:lstStyle/>
-          <a:p>
-            <a:pPr indent="0" marL="0">
-              <a:lnSpc>
-                <a:spcPct val="115000"/>
-              </a:lnSpc>
-              <a:buNone/>
-            </a:pPr>
-            <a:r>
-              <a:rPr lang="en-US" sz="1150" dirty="0">
-                <a:solidFill>
-                  <a:srgbClr val="718096"/>
-                </a:solidFill>
-                <a:latin typeface="Pretendard" pitchFamily="34" charset="0"/>
-                <a:ea typeface="Pretendard" pitchFamily="34" charset="-122"/>
-                <a:cs typeface="Pretendard" pitchFamily="34" charset="-120"/>
-              </a:rPr>
-              <a:t>총취득원가 (A + 세/비용)</a:t>
-            </a:r>
-            <a:endParaRPr lang="en-US" sz="1150" dirty="0"/>
-          </a:p>
-        </p:txBody>
-      </p:sp>
-      <p:sp>
-        <p:nvSpPr>
-          <p:cNvPr id="18" name="Text 16"/>
-          <p:cNvSpPr/>
-          <p:nvPr/>
-        </p:nvSpPr>
-        <p:spPr>
-          <a:xfrm>
-            <a:off x="3065425" y="3438144"/>
-            <a:ext cx="2664662" cy="475488"/>
-          </a:xfrm>
-          <a:prstGeom prst="rect">
-            <a:avLst/>
-          </a:prstGeom>
-          <a:noFill/>
-          <a:ln/>
-        </p:spPr>
-        <p:txBody>
-          <a:bodyPr wrap="square" lIns="0" tIns="0" rIns="0" bIns="0" rtlCol="0" anchor="ctr">
-            <a:normAutofit/>
-          </a:bodyPr>
-          <a:lstStyle/>
-          <a:p>
-            <a:pPr indent="0" marL="0">
-              <a:lnSpc>
-                <a:spcPct val="115000"/>
-              </a:lnSpc>
-              <a:buNone/>
-            </a:pPr>
-            <a:r>
-              <a:rPr lang="en-US" sz="1150" b="1" dirty="0">
-                <a:solidFill>
-                  <a:srgbClr val="10161F"/>
-                </a:solidFill>
-                <a:latin typeface="Pretendard" pitchFamily="34" charset="0"/>
-                <a:ea typeface="Pretendard" pitchFamily="34" charset="-122"/>
-                <a:cs typeface="Pretendard" pitchFamily="34" charset="-120"/>
-              </a:rPr>
-              <a:t>221.6억 원</a:t>
-            </a:r>
-            <a:endParaRPr lang="en-US" sz="1150" dirty="0"/>
-          </a:p>
-        </p:txBody>
-      </p:sp>
-      <p:sp>
-        <p:nvSpPr>
-          <p:cNvPr id="19" name="Shape 17"/>
-          <p:cNvSpPr/>
-          <p:nvPr/>
-        </p:nvSpPr>
-        <p:spPr>
-          <a:xfrm>
-            <a:off x="795528" y="3913632"/>
-            <a:ext cx="4934560" cy="0"/>
-          </a:xfrm>
-          <a:prstGeom prst="line">
-            <a:avLst/>
-          </a:prstGeom>
-          <a:noFill/>
-          <a:ln w="3810">
-            <a:solidFill>
-              <a:srgbClr val="CBD5E0"/>
-            </a:solidFill>
-            <a:prstDash val="solid"/>
-          </a:ln>
-        </p:spPr>
-      </p:sp>
-      <p:sp>
-        <p:nvSpPr>
-          <p:cNvPr id="20" name="Text 18"/>
-          <p:cNvSpPr/>
-          <p:nvPr/>
-        </p:nvSpPr>
-        <p:spPr>
-          <a:xfrm>
-            <a:off x="795528" y="3913632"/>
-            <a:ext cx="2269897" cy="475488"/>
-          </a:xfrm>
-          <a:prstGeom prst="rect">
-            <a:avLst/>
-          </a:prstGeom>
-          <a:noFill/>
-          <a:ln/>
-        </p:spPr>
-        <p:txBody>
-          <a:bodyPr wrap="square" lIns="0" tIns="0" rIns="0" bIns="0" rtlCol="0" anchor="ctr">
-            <a:normAutofit/>
-          </a:bodyPr>
-          <a:lstStyle/>
-          <a:p>
-            <a:pPr indent="0" marL="0">
-              <a:lnSpc>
-                <a:spcPct val="115000"/>
-              </a:lnSpc>
-              <a:buNone/>
-            </a:pPr>
-            <a:r>
-              <a:rPr lang="en-US" sz="1150" dirty="0">
-                <a:solidFill>
-                  <a:srgbClr val="718096"/>
-                </a:solidFill>
-                <a:latin typeface="Pretendard" pitchFamily="34" charset="0"/>
-                <a:ea typeface="Pretendard" pitchFamily="34" charset="-122"/>
-                <a:cs typeface="Pretendard" pitchFamily="34" charset="-120"/>
-              </a:rPr>
-              <a:t>(-) 임대보증금 승계</a:t>
-            </a:r>
-            <a:endParaRPr lang="en-US" sz="1150" dirty="0"/>
-          </a:p>
-        </p:txBody>
-      </p:sp>
-      <p:sp>
-        <p:nvSpPr>
-          <p:cNvPr id="21" name="Text 19"/>
-          <p:cNvSpPr/>
-          <p:nvPr/>
-        </p:nvSpPr>
-        <p:spPr>
-          <a:xfrm>
-            <a:off x="3065425" y="3913632"/>
-            <a:ext cx="2664662" cy="475488"/>
-          </a:xfrm>
-          <a:prstGeom prst="rect">
-            <a:avLst/>
-          </a:prstGeom>
-          <a:noFill/>
-          <a:ln/>
-        </p:spPr>
-        <p:txBody>
-          <a:bodyPr wrap="square" lIns="0" tIns="0" rIns="0" bIns="0" rtlCol="0" anchor="ctr">
-            <a:normAutofit/>
-          </a:bodyPr>
-          <a:lstStyle/>
-          <a:p>
-            <a:pPr indent="0" marL="0">
-              <a:lnSpc>
-                <a:spcPct val="115000"/>
-              </a:lnSpc>
-              <a:buNone/>
-            </a:pPr>
-            <a:r>
-              <a:rPr lang="en-US" sz="1150" b="1" dirty="0">
-                <a:solidFill>
-                  <a:srgbClr val="10161F"/>
-                </a:solidFill>
-                <a:latin typeface="Pretendard" pitchFamily="34" charset="0"/>
-                <a:ea typeface="Pretendard" pitchFamily="34" charset="-122"/>
-                <a:cs typeface="Pretendard" pitchFamily="34" charset="-120"/>
-              </a:rPr>
-              <a:t>-</a:t>
-            </a:r>
-            <a:endParaRPr lang="en-US" sz="1150" dirty="0"/>
-          </a:p>
-        </p:txBody>
-      </p:sp>
-      <p:sp>
-        <p:nvSpPr>
-          <p:cNvPr id="22" name="Shape 20"/>
-          <p:cNvSpPr/>
-          <p:nvPr/>
-        </p:nvSpPr>
-        <p:spPr>
-          <a:xfrm>
-            <a:off x="795528" y="4389120"/>
-            <a:ext cx="4934560" cy="0"/>
-          </a:xfrm>
-          <a:prstGeom prst="line">
-            <a:avLst/>
-          </a:prstGeom>
-          <a:noFill/>
-          <a:ln w="3810">
-            <a:solidFill>
-              <a:srgbClr val="CBD5E0"/>
-            </a:solidFill>
-            <a:prstDash val="solid"/>
-          </a:ln>
-        </p:spPr>
-      </p:sp>
-      <p:sp>
-        <p:nvSpPr>
-          <p:cNvPr id="23" name="Text 21"/>
-          <p:cNvSpPr/>
-          <p:nvPr/>
-        </p:nvSpPr>
-        <p:spPr>
-          <a:xfrm>
-            <a:off x="795528" y="4389120"/>
-            <a:ext cx="2269897" cy="475488"/>
-          </a:xfrm>
-          <a:prstGeom prst="rect">
-            <a:avLst/>
-          </a:prstGeom>
-          <a:noFill/>
-          <a:ln/>
-        </p:spPr>
-        <p:txBody>
-          <a:bodyPr wrap="square" lIns="0" tIns="0" rIns="0" bIns="0" rtlCol="0" anchor="ctr">
-            <a:normAutofit/>
-          </a:bodyPr>
-          <a:lstStyle/>
-          <a:p>
-            <a:pPr indent="0" marL="0">
-              <a:lnSpc>
-                <a:spcPct val="115000"/>
-              </a:lnSpc>
-              <a:buNone/>
-            </a:pPr>
-            <a:r>
-              <a:rPr lang="en-US" sz="1150" dirty="0">
-                <a:solidFill>
-                  <a:srgbClr val="718096"/>
-                </a:solidFill>
-                <a:latin typeface="Pretendard" pitchFamily="34" charset="0"/>
-                <a:ea typeface="Pretendard" pitchFamily="34" charset="-122"/>
-                <a:cs typeface="Pretendard" pitchFamily="34" charset="-120"/>
-              </a:rPr>
-              <a:t>(-) 담보대출 조달</a:t>
-            </a:r>
-            <a:endParaRPr lang="en-US" sz="1150" dirty="0"/>
-          </a:p>
-        </p:txBody>
-      </p:sp>
-      <p:sp>
-        <p:nvSpPr>
-          <p:cNvPr id="24" name="Text 22"/>
-          <p:cNvSpPr/>
-          <p:nvPr/>
-        </p:nvSpPr>
-        <p:spPr>
-          <a:xfrm>
-            <a:off x="3065425" y="4389120"/>
-            <a:ext cx="2664662" cy="475488"/>
-          </a:xfrm>
-          <a:prstGeom prst="rect">
-            <a:avLst/>
-          </a:prstGeom>
-          <a:noFill/>
-          <a:ln/>
-        </p:spPr>
-        <p:txBody>
-          <a:bodyPr wrap="square" lIns="0" tIns="0" rIns="0" bIns="0" rtlCol="0" anchor="ctr">
-            <a:normAutofit/>
-          </a:bodyPr>
-          <a:lstStyle/>
-          <a:p>
-            <a:pPr indent="0" marL="0">
-              <a:lnSpc>
-                <a:spcPct val="115000"/>
-              </a:lnSpc>
-              <a:buNone/>
-            </a:pPr>
-            <a:r>
-              <a:rPr lang="en-US" sz="1150" b="1" dirty="0">
-                <a:solidFill>
-                  <a:srgbClr val="10161F"/>
-                </a:solidFill>
-                <a:latin typeface="Pretendard" pitchFamily="34" charset="0"/>
-                <a:ea typeface="Pretendard" pitchFamily="34" charset="-122"/>
-                <a:cs typeface="Pretendard" pitchFamily="34" charset="-120"/>
-              </a:rPr>
-              <a:t>105억 원</a:t>
-            </a:r>
-            <a:endParaRPr lang="en-US" sz="1150" dirty="0"/>
-          </a:p>
-        </p:txBody>
-      </p:sp>
-      <p:sp>
-        <p:nvSpPr>
-          <p:cNvPr id="25" name="Shape 23"/>
-          <p:cNvSpPr/>
-          <p:nvPr/>
-        </p:nvSpPr>
-        <p:spPr>
-          <a:xfrm>
-            <a:off x="795528" y="4864608"/>
-            <a:ext cx="4934560" cy="0"/>
-          </a:xfrm>
-          <a:prstGeom prst="line">
-            <a:avLst/>
-          </a:prstGeom>
-          <a:noFill/>
-          <a:ln w="3810">
-            <a:solidFill>
-              <a:srgbClr val="CBD5E0"/>
-            </a:solidFill>
-            <a:prstDash val="solid"/>
-          </a:ln>
-        </p:spPr>
-      </p:sp>
-      <p:sp>
-        <p:nvSpPr>
-          <p:cNvPr id="26" name="Text 24"/>
-          <p:cNvSpPr/>
-          <p:nvPr/>
-        </p:nvSpPr>
-        <p:spPr>
-          <a:xfrm>
-            <a:off x="795528" y="4864608"/>
-            <a:ext cx="2269897" cy="475488"/>
-          </a:xfrm>
-          <a:prstGeom prst="rect">
-            <a:avLst/>
-          </a:prstGeom>
-          <a:noFill/>
-          <a:ln/>
-        </p:spPr>
-        <p:txBody>
-          <a:bodyPr wrap="square" lIns="0" tIns="0" rIns="0" bIns="0" rtlCol="0" anchor="ctr">
-            <a:normAutofit/>
-          </a:bodyPr>
-          <a:lstStyle/>
-          <a:p>
-            <a:pPr indent="0" marL="0">
-              <a:lnSpc>
-                <a:spcPct val="115000"/>
-              </a:lnSpc>
-              <a:buNone/>
-            </a:pPr>
-            <a:r>
-              <a:rPr lang="en-US" sz="1150" dirty="0">
-                <a:solidFill>
-                  <a:srgbClr val="718096"/>
-                </a:solidFill>
-                <a:latin typeface="Pretendard" pitchFamily="34" charset="0"/>
-                <a:ea typeface="Pretendard" pitchFamily="34" charset="-122"/>
-                <a:cs typeface="Pretendard" pitchFamily="34" charset="-120"/>
-              </a:rPr>
-              <a:t>실투자금 (Net Equity)</a:t>
-            </a:r>
-            <a:endParaRPr lang="en-US" sz="1150" dirty="0"/>
-          </a:p>
-        </p:txBody>
-      </p:sp>
-      <p:sp>
-        <p:nvSpPr>
-          <p:cNvPr id="27" name="Text 25"/>
-          <p:cNvSpPr/>
-          <p:nvPr/>
-        </p:nvSpPr>
-        <p:spPr>
-          <a:xfrm>
-            <a:off x="3065425" y="4864608"/>
-            <a:ext cx="2664662" cy="475488"/>
-          </a:xfrm>
-          <a:prstGeom prst="rect">
-            <a:avLst/>
-          </a:prstGeom>
-          <a:noFill/>
-          <a:ln/>
-        </p:spPr>
-        <p:txBody>
-          <a:bodyPr wrap="square" lIns="0" tIns="0" rIns="0" bIns="0" rtlCol="0" anchor="ctr">
-            <a:normAutofit/>
-          </a:bodyPr>
-          <a:lstStyle/>
-          <a:p>
-            <a:pPr indent="0" marL="0">
-              <a:lnSpc>
-                <a:spcPct val="115000"/>
-              </a:lnSpc>
-              <a:buNone/>
-            </a:pPr>
-            <a:r>
-              <a:rPr lang="en-US" sz="1150" b="1" dirty="0">
-                <a:solidFill>
-                  <a:srgbClr val="10161F"/>
-                </a:solidFill>
-                <a:latin typeface="Pretendard" pitchFamily="34" charset="0"/>
-                <a:ea typeface="Pretendard" pitchFamily="34" charset="-122"/>
-                <a:cs typeface="Pretendard" pitchFamily="34" charset="-120"/>
-              </a:rPr>
-              <a:t>116.5억 원</a:t>
-            </a:r>
-            <a:endParaRPr lang="en-US" sz="1150" dirty="0"/>
-          </a:p>
-        </p:txBody>
-      </p:sp>
-      <p:sp>
-        <p:nvSpPr>
-          <p:cNvPr id="28" name="Shape 26"/>
-          <p:cNvSpPr/>
-          <p:nvPr/>
-        </p:nvSpPr>
-        <p:spPr>
-          <a:xfrm>
-            <a:off x="6233008" y="1417320"/>
-            <a:ext cx="5391760" cy="4389120"/>
+          <p:cNvPr id="12" name="Shape 10"/>
+          <p:cNvSpPr/>
+          <p:nvPr/>
+        </p:nvSpPr>
+        <p:spPr>
+          <a:xfrm>
+            <a:off x="7784287" y="1645920"/>
+            <a:ext cx="3840480" cy="1645920"/>
           </a:xfrm>
           <a:prstGeom prst="roundRect">
             <a:avLst>
-              <a:gd name="adj" fmla="val 1250"/>
+              <a:gd name="adj" fmla="val 3333"/>
             </a:avLst>
           </a:prstGeom>
           <a:solidFill>
-            <a:srgbClr val="F7FAFC"/>
+            <a:srgbClr val="F3EBDA"/>
           </a:solidFill>
-          <a:ln w="6350">
-            <a:solidFill>
-              <a:srgbClr val="CBD5E0"/>
-            </a:solidFill>
-            <a:prstDash val="solid"/>
-          </a:ln>
-        </p:spPr>
-      </p:sp>
-      <p:sp>
-        <p:nvSpPr>
-          <p:cNvPr id="29" name="Text 27"/>
-          <p:cNvSpPr/>
-          <p:nvPr/>
-        </p:nvSpPr>
-        <p:spPr>
-          <a:xfrm>
-            <a:off x="6461608" y="1618488"/>
-            <a:ext cx="4934560" cy="320040"/>
+          <a:ln/>
+        </p:spPr>
+      </p:sp>
+      <p:sp>
+        <p:nvSpPr>
+          <p:cNvPr id="13" name="Shape 11"/>
+          <p:cNvSpPr/>
+          <p:nvPr/>
+        </p:nvSpPr>
+        <p:spPr>
+          <a:xfrm>
+            <a:off x="7784287" y="1700784"/>
+            <a:ext cx="36576" cy="1536192"/>
+          </a:xfrm>
+          <a:prstGeom prst="rect">
+            <a:avLst/>
+          </a:prstGeom>
+          <a:solidFill>
+            <a:srgbClr val="977024"/>
+          </a:solidFill>
+          <a:ln/>
+        </p:spPr>
+      </p:sp>
+      <p:sp>
+        <p:nvSpPr>
+          <p:cNvPr id="14" name="Text 12"/>
+          <p:cNvSpPr/>
+          <p:nvPr/>
+        </p:nvSpPr>
+        <p:spPr>
+          <a:xfrm>
+            <a:off x="7930591" y="1737360"/>
+            <a:ext cx="3584448" cy="201168"/>
           </a:xfrm>
           <a:prstGeom prst="rect">
             <a:avLst/>
@@ -8955,1626 +9763,20 @@
             <a:pPr indent="0" marL="0">
               <a:buNone/>
             </a:pPr>
-            <a:r>
-              <a:rPr lang="en-US" sz="1350" b="1" dirty="0">
-                <a:solidFill>
-                  <a:srgbClr val="977024"/>
-                </a:solidFill>
-                <a:latin typeface="Pretendard" pitchFamily="34" charset="0"/>
-                <a:ea typeface="Pretendard" pitchFamily="34" charset="-122"/>
-                <a:cs typeface="Pretendard" pitchFamily="34" charset="-120"/>
-              </a:rPr>
-              <a:t>2. LTV 시나리오별 레버리지 효과</a:t>
-            </a:r>
-            <a:endParaRPr lang="en-US" sz="1350" dirty="0"/>
-          </a:p>
-        </p:txBody>
-      </p:sp>
-      <p:graphicFrame>
-        <p:nvGraphicFramePr>
-          <p:cNvPr id="7" name="Table 0"/>
-          <p:cNvGraphicFramePr>
-            <a:graphicFrameLocks noGrp="1"/>
-          </p:cNvGraphicFramePr>
-          <p:nvPr>
-            <p:extLst>
-              <p:ext uri="{D42A27DB-BD31-4B8C-83A1-F6EECF244321}">
-                <p14:modId xmlns:p14="http://schemas.microsoft.com/office/powerpoint/2010/main" val="1579011935"/>
-              </p:ext>
-            </p:extLst>
-          </p:nvPr>
-        </p:nvGraphicFramePr>
-        <p:xfrm>
-          <a:off x="6461608" y="2057400"/>
-          <a:ext cx="4934560" cy="914400"/>
-        </p:xfrm>
-        <a:graphic>
-          <a:graphicData uri="http://schemas.openxmlformats.org/drawingml/2006/table">
-            <a:tbl>
-              <a:tblPr/>
-              <a:tblGrid>
-                <a:gridCol w="1463040"/>
-                <a:gridCol w="1005840"/>
-                <a:gridCol w="1280160"/>
-                <a:gridCol w="1280160"/>
-              </a:tblGrid>
-              <a:tr h="457200">
-                <a:tc>
-                  <a:txBody>
-                    <a:bodyPr/>
-                    <a:lstStyle/>
-                    <a:p>
-                      <a:pPr indent="0" marL="0">
-                        <a:buNone/>
-                      </a:pPr>
-                      <a:r>
-                        <a:rPr lang="en-US" sz="1100" b="1" dirty="0">
-                          <a:solidFill>
-                            <a:srgbClr val="FFFFFF"/>
-                          </a:solidFill>
-                          <a:latin typeface="Pretendard" pitchFamily="34" charset="0"/>
-                          <a:ea typeface="Pretendard" pitchFamily="34" charset="-122"/>
-                          <a:cs typeface="Pretendard" pitchFamily="34" charset="-120"/>
-                        </a:rPr>
-                        <a:t>구분</a:t>
-                      </a:r>
-                      <a:endParaRPr lang="en-US" sz="1100" dirty="0">
-                        <a:latin typeface="Pretendard" charset="0"/>
-                        <a:ea typeface="Pretendard" charset="0"/>
-                        <a:cs typeface="Pretendard" charset="0"/>
-                      </a:endParaRPr>
-                    </a:p>
-                  </a:txBody>
-                  <a:tcPr marL="50800" marR="50800" marT="25400" marB="25400" anchor="ctr">
-                    <a:lnL w="3810" cap="flat" cmpd="sng" algn="ctr">
-                      <a:solidFill>
-                        <a:srgbClr val="CBD5E0"/>
-                      </a:solidFill>
-                      <a:prstDash val="solid"/>
-                      <a:round/>
-                      <a:headEnd type="none" w="med" len="med"/>
-                      <a:tailEnd type="none" w="med" len="med"/>
-                    </a:lnL>
-                    <a:lnR w="3810" cap="flat" cmpd="sng" algn="ctr">
-                      <a:solidFill>
-                        <a:srgbClr val="CBD5E0"/>
-                      </a:solidFill>
-                      <a:prstDash val="solid"/>
-                      <a:round/>
-                      <a:headEnd type="none" w="med" len="med"/>
-                      <a:tailEnd type="none" w="med" len="med"/>
-                    </a:lnR>
-                    <a:lnT w="3810" cap="flat" cmpd="sng" algn="ctr">
-                      <a:solidFill>
-                        <a:srgbClr val="CBD5E0"/>
-                      </a:solidFill>
-                      <a:prstDash val="solid"/>
-                      <a:round/>
-                      <a:headEnd type="none" w="med" len="med"/>
-                      <a:tailEnd type="none" w="med" len="med"/>
-                    </a:lnT>
-                    <a:lnB w="3810" cap="flat" cmpd="sng" algn="ctr">
-                      <a:solidFill>
-                        <a:srgbClr val="CBD5E0"/>
-                      </a:solidFill>
-                      <a:prstDash val="solid"/>
-                      <a:round/>
-                      <a:headEnd type="none" w="med" len="med"/>
-                      <a:tailEnd type="none" w="med" len="med"/>
-                    </a:lnB>
-                    <a:solidFill>
-                      <a:srgbClr val="10161F"/>
-                    </a:solidFill>
-                  </a:tcPr>
-                </a:tc>
-                <a:tc>
-                  <a:txBody>
-                    <a:bodyPr/>
-                    <a:lstStyle/>
-                    <a:p>
-                      <a:pPr indent="0" marL="0">
-                        <a:buNone/>
-                      </a:pPr>
-                      <a:r>
-                        <a:rPr lang="en-US" sz="1100" b="1" dirty="0">
-                          <a:solidFill>
-                            <a:srgbClr val="FFFFFF"/>
-                          </a:solidFill>
-                          <a:latin typeface="Pretendard" pitchFamily="34" charset="0"/>
-                          <a:ea typeface="Pretendard" pitchFamily="34" charset="-122"/>
-                          <a:cs typeface="Pretendard" pitchFamily="34" charset="-120"/>
-                        </a:rPr>
-                        <a:t>대출비율</a:t>
-                      </a:r>
-                      <a:endParaRPr lang="en-US" sz="1100" dirty="0">
-                        <a:latin typeface="Pretendard" charset="0"/>
-                        <a:ea typeface="Pretendard" charset="0"/>
-                        <a:cs typeface="Pretendard" charset="0"/>
-                      </a:endParaRPr>
-                    </a:p>
-                  </a:txBody>
-                  <a:tcPr marL="50800" marR="50800" marT="25400" marB="25400" anchor="ctr">
-                    <a:lnL w="3810" cap="flat" cmpd="sng" algn="ctr">
-                      <a:solidFill>
-                        <a:srgbClr val="CBD5E0"/>
-                      </a:solidFill>
-                      <a:prstDash val="solid"/>
-                      <a:round/>
-                      <a:headEnd type="none" w="med" len="med"/>
-                      <a:tailEnd type="none" w="med" len="med"/>
-                    </a:lnL>
-                    <a:lnR w="3810" cap="flat" cmpd="sng" algn="ctr">
-                      <a:solidFill>
-                        <a:srgbClr val="CBD5E0"/>
-                      </a:solidFill>
-                      <a:prstDash val="solid"/>
-                      <a:round/>
-                      <a:headEnd type="none" w="med" len="med"/>
-                      <a:tailEnd type="none" w="med" len="med"/>
-                    </a:lnR>
-                    <a:lnT w="3810" cap="flat" cmpd="sng" algn="ctr">
-                      <a:solidFill>
-                        <a:srgbClr val="CBD5E0"/>
-                      </a:solidFill>
-                      <a:prstDash val="solid"/>
-                      <a:round/>
-                      <a:headEnd type="none" w="med" len="med"/>
-                      <a:tailEnd type="none" w="med" len="med"/>
-                    </a:lnT>
-                    <a:lnB w="3810" cap="flat" cmpd="sng" algn="ctr">
-                      <a:solidFill>
-                        <a:srgbClr val="CBD5E0"/>
-                      </a:solidFill>
-                      <a:prstDash val="solid"/>
-                      <a:round/>
-                      <a:headEnd type="none" w="med" len="med"/>
-                      <a:tailEnd type="none" w="med" len="med"/>
-                    </a:lnB>
-                    <a:solidFill>
-                      <a:srgbClr val="10161F"/>
-                    </a:solidFill>
-                  </a:tcPr>
-                </a:tc>
-                <a:tc>
-                  <a:txBody>
-                    <a:bodyPr/>
-                    <a:lstStyle/>
-                    <a:p>
-                      <a:pPr indent="0" marL="0">
-                        <a:buNone/>
-                      </a:pPr>
-                      <a:r>
-                        <a:rPr lang="en-US" sz="1100" b="1" dirty="0">
-                          <a:solidFill>
-                            <a:srgbClr val="FFFFFF"/>
-                          </a:solidFill>
-                          <a:latin typeface="Pretendard" pitchFamily="34" charset="0"/>
-                          <a:ea typeface="Pretendard" pitchFamily="34" charset="-122"/>
-                          <a:cs typeface="Pretendard" pitchFamily="34" charset="-120"/>
-                        </a:rPr>
-                        <a:t>실투자금</a:t>
-                      </a:r>
-                      <a:endParaRPr lang="en-US" sz="1100" dirty="0">
-                        <a:latin typeface="Pretendard" charset="0"/>
-                        <a:ea typeface="Pretendard" charset="0"/>
-                        <a:cs typeface="Pretendard" charset="0"/>
-                      </a:endParaRPr>
-                    </a:p>
-                  </a:txBody>
-                  <a:tcPr marL="50800" marR="50800" marT="25400" marB="25400" anchor="ctr">
-                    <a:lnL w="3810" cap="flat" cmpd="sng" algn="ctr">
-                      <a:solidFill>
-                        <a:srgbClr val="CBD5E0"/>
-                      </a:solidFill>
-                      <a:prstDash val="solid"/>
-                      <a:round/>
-                      <a:headEnd type="none" w="med" len="med"/>
-                      <a:tailEnd type="none" w="med" len="med"/>
-                    </a:lnL>
-                    <a:lnR w="3810" cap="flat" cmpd="sng" algn="ctr">
-                      <a:solidFill>
-                        <a:srgbClr val="CBD5E0"/>
-                      </a:solidFill>
-                      <a:prstDash val="solid"/>
-                      <a:round/>
-                      <a:headEnd type="none" w="med" len="med"/>
-                      <a:tailEnd type="none" w="med" len="med"/>
-                    </a:lnR>
-                    <a:lnT w="3810" cap="flat" cmpd="sng" algn="ctr">
-                      <a:solidFill>
-                        <a:srgbClr val="CBD5E0"/>
-                      </a:solidFill>
-                      <a:prstDash val="solid"/>
-                      <a:round/>
-                      <a:headEnd type="none" w="med" len="med"/>
-                      <a:tailEnd type="none" w="med" len="med"/>
-                    </a:lnT>
-                    <a:lnB w="3810" cap="flat" cmpd="sng" algn="ctr">
-                      <a:solidFill>
-                        <a:srgbClr val="CBD5E0"/>
-                      </a:solidFill>
-                      <a:prstDash val="solid"/>
-                      <a:round/>
-                      <a:headEnd type="none" w="med" len="med"/>
-                      <a:tailEnd type="none" w="med" len="med"/>
-                    </a:lnB>
-                    <a:solidFill>
-                      <a:srgbClr val="10161F"/>
-                    </a:solidFill>
-                  </a:tcPr>
-                </a:tc>
-                <a:tc>
-                  <a:txBody>
-                    <a:bodyPr/>
-                    <a:lstStyle/>
-                    <a:p>
-                      <a:pPr indent="0" marL="0">
-                        <a:buNone/>
-                      </a:pPr>
-                      <a:r>
-                        <a:rPr lang="en-US" sz="1100" b="1" dirty="0">
-                          <a:solidFill>
-                            <a:srgbClr val="FFFFFF"/>
-                          </a:solidFill>
-                          <a:latin typeface="Pretendard" pitchFamily="34" charset="0"/>
-                          <a:ea typeface="Pretendard" pitchFamily="34" charset="-122"/>
-                          <a:cs typeface="Pretendard" pitchFamily="34" charset="-120"/>
-                        </a:rPr>
-                        <a:t>예상수익률</a:t>
-                      </a:r>
-                      <a:endParaRPr lang="en-US" sz="1100" dirty="0">
-                        <a:latin typeface="Pretendard" charset="0"/>
-                        <a:ea typeface="Pretendard" charset="0"/>
-                        <a:cs typeface="Pretendard" charset="0"/>
-                      </a:endParaRPr>
-                    </a:p>
-                  </a:txBody>
-                  <a:tcPr marL="50800" marR="50800" marT="25400" marB="25400" anchor="ctr">
-                    <a:lnL w="3810" cap="flat" cmpd="sng" algn="ctr">
-                      <a:solidFill>
-                        <a:srgbClr val="CBD5E0"/>
-                      </a:solidFill>
-                      <a:prstDash val="solid"/>
-                      <a:round/>
-                      <a:headEnd type="none" w="med" len="med"/>
-                      <a:tailEnd type="none" w="med" len="med"/>
-                    </a:lnL>
-                    <a:lnR w="3810" cap="flat" cmpd="sng" algn="ctr">
-                      <a:solidFill>
-                        <a:srgbClr val="CBD5E0"/>
-                      </a:solidFill>
-                      <a:prstDash val="solid"/>
-                      <a:round/>
-                      <a:headEnd type="none" w="med" len="med"/>
-                      <a:tailEnd type="none" w="med" len="med"/>
-                    </a:lnR>
-                    <a:lnT w="3810" cap="flat" cmpd="sng" algn="ctr">
-                      <a:solidFill>
-                        <a:srgbClr val="CBD5E0"/>
-                      </a:solidFill>
-                      <a:prstDash val="solid"/>
-                      <a:round/>
-                      <a:headEnd type="none" w="med" len="med"/>
-                      <a:tailEnd type="none" w="med" len="med"/>
-                    </a:lnT>
-                    <a:lnB w="3810" cap="flat" cmpd="sng" algn="ctr">
-                      <a:solidFill>
-                        <a:srgbClr val="CBD5E0"/>
-                      </a:solidFill>
-                      <a:prstDash val="solid"/>
-                      <a:round/>
-                      <a:headEnd type="none" w="med" len="med"/>
-                      <a:tailEnd type="none" w="med" len="med"/>
-                    </a:lnB>
-                    <a:solidFill>
-                      <a:srgbClr val="10161F"/>
-                    </a:solidFill>
-                  </a:tcPr>
-                </a:tc>
-              </a:tr>
-              <a:tr h="457200">
-                <a:tc>
-                  <a:txBody>
-                    <a:bodyPr/>
-                    <a:lstStyle/>
-                    <a:p>
-                      <a:pPr indent="0" marL="0">
-                        <a:buNone/>
-                      </a:pPr>
-                      <a:r>
-                        <a:rPr lang="en-US" sz="1100" b="1" dirty="0">
-                          <a:solidFill>
-                            <a:srgbClr val="10161F"/>
-                          </a:solidFill>
-                          <a:latin typeface="Pretendard" pitchFamily="34" charset="0"/>
-                          <a:ea typeface="Pretendard" pitchFamily="34" charset="-122"/>
-                          <a:cs typeface="Pretendard" pitchFamily="34" charset="-120"/>
-                        </a:rPr>
-                        <a:t>전액 </a:t>
-                      </a:r>
-                      <a:pPr indent="0" marL="0">
-                        <a:buNone/>
-                      </a:pPr>
-                      <a:r>
-                        <a:rPr lang="en-US" sz="1100" b="1" dirty="0">
-                          <a:solidFill>
-                            <a:srgbClr val="10161F"/>
-                          </a:solidFill>
-                          <a:latin typeface="Pretendard" pitchFamily="34" charset="0"/>
-                          <a:ea typeface="Pretendard" pitchFamily="34" charset="-122"/>
-                          <a:cs typeface="Pretendard" pitchFamily="34" charset="-120"/>
-                        </a:rPr>
-                        <a:t>자기자본 </a:t>
-                      </a:r>
-                      <a:pPr indent="0" marL="0">
-                        <a:buNone/>
-                      </a:pPr>
-                      <a:r>
-                        <a:rPr lang="en-US" sz="1100" b="1" dirty="0">
-                          <a:solidFill>
-                            <a:srgbClr val="10161F"/>
-                          </a:solidFill>
-                          <a:latin typeface="Pretendard" pitchFamily="34" charset="0"/>
-                          <a:ea typeface="Pretendard" pitchFamily="34" charset="-122"/>
-                          <a:cs typeface="Pretendard" pitchFamily="34" charset="-120"/>
-                        </a:rPr>
-                        <a:t>(무차입)</a:t>
-                      </a:r>
-                      <a:endParaRPr lang="en-US" sz="1100" dirty="0">
-                        <a:latin typeface="Pretendard" charset="0"/>
-                        <a:ea typeface="Pretendard" charset="0"/>
-                        <a:cs typeface="Pretendard" charset="0"/>
-                      </a:endParaRPr>
-                    </a:p>
-                  </a:txBody>
-                  <a:tcPr marL="50800" marR="50800" marT="25400" marB="25400" anchor="ctr">
-                    <a:lnL w="3810" cap="flat" cmpd="sng" algn="ctr">
-                      <a:solidFill>
-                        <a:srgbClr val="CBD5E0"/>
-                      </a:solidFill>
-                      <a:prstDash val="solid"/>
-                      <a:round/>
-                      <a:headEnd type="none" w="med" len="med"/>
-                      <a:tailEnd type="none" w="med" len="med"/>
-                    </a:lnL>
-                    <a:lnR w="3810" cap="flat" cmpd="sng" algn="ctr">
-                      <a:solidFill>
-                        <a:srgbClr val="CBD5E0"/>
-                      </a:solidFill>
-                      <a:prstDash val="solid"/>
-                      <a:round/>
-                      <a:headEnd type="none" w="med" len="med"/>
-                      <a:tailEnd type="none" w="med" len="med"/>
-                    </a:lnR>
-                    <a:lnT w="3810" cap="flat" cmpd="sng" algn="ctr">
-                      <a:solidFill>
-                        <a:srgbClr val="CBD5E0"/>
-                      </a:solidFill>
-                      <a:prstDash val="solid"/>
-                      <a:round/>
-                      <a:headEnd type="none" w="med" len="med"/>
-                      <a:tailEnd type="none" w="med" len="med"/>
-                    </a:lnT>
-                    <a:lnB w="3810" cap="flat" cmpd="sng" algn="ctr">
-                      <a:solidFill>
-                        <a:srgbClr val="CBD5E0"/>
-                      </a:solidFill>
-                      <a:prstDash val="solid"/>
-                      <a:round/>
-                      <a:headEnd type="none" w="med" len="med"/>
-                      <a:tailEnd type="none" w="med" len="med"/>
-                    </a:lnB>
-                    <a:solidFill>
-                      <a:srgbClr val="FFFFFF"/>
-                    </a:solidFill>
-                  </a:tcPr>
-                </a:tc>
-                <a:tc>
-                  <a:txBody>
-                    <a:bodyPr/>
-                    <a:lstStyle/>
-                    <a:p>
-                      <a:pPr indent="0" marL="0">
-                        <a:buNone/>
-                      </a:pPr>
-                      <a:r>
-                        <a:rPr lang="en-US" sz="1100" dirty="0">
-                          <a:solidFill>
-                            <a:srgbClr val="10161F"/>
-                          </a:solidFill>
-                          <a:latin typeface="Pretendard" pitchFamily="34" charset="0"/>
-                          <a:ea typeface="Pretendard" pitchFamily="34" charset="-122"/>
-                          <a:cs typeface="Pretendard" pitchFamily="34" charset="-120"/>
-                        </a:rPr>
-                        <a:t>0%</a:t>
-                      </a:r>
-                      <a:endParaRPr lang="en-US" sz="1100" dirty="0">
-                        <a:latin typeface="Pretendard" charset="0"/>
-                        <a:ea typeface="Pretendard" charset="0"/>
-                        <a:cs typeface="Pretendard" charset="0"/>
-                      </a:endParaRPr>
-                    </a:p>
-                  </a:txBody>
-                  <a:tcPr marL="50800" marR="50800" marT="25400" marB="25400" anchor="ctr">
-                    <a:lnL w="3810" cap="flat" cmpd="sng" algn="ctr">
-                      <a:solidFill>
-                        <a:srgbClr val="CBD5E0"/>
-                      </a:solidFill>
-                      <a:prstDash val="solid"/>
-                      <a:round/>
-                      <a:headEnd type="none" w="med" len="med"/>
-                      <a:tailEnd type="none" w="med" len="med"/>
-                    </a:lnL>
-                    <a:lnR w="3810" cap="flat" cmpd="sng" algn="ctr">
-                      <a:solidFill>
-                        <a:srgbClr val="CBD5E0"/>
-                      </a:solidFill>
-                      <a:prstDash val="solid"/>
-                      <a:round/>
-                      <a:headEnd type="none" w="med" len="med"/>
-                      <a:tailEnd type="none" w="med" len="med"/>
-                    </a:lnR>
-                    <a:lnT w="3810" cap="flat" cmpd="sng" algn="ctr">
-                      <a:solidFill>
-                        <a:srgbClr val="CBD5E0"/>
-                      </a:solidFill>
-                      <a:prstDash val="solid"/>
-                      <a:round/>
-                      <a:headEnd type="none" w="med" len="med"/>
-                      <a:tailEnd type="none" w="med" len="med"/>
-                    </a:lnT>
-                    <a:lnB w="3810" cap="flat" cmpd="sng" algn="ctr">
-                      <a:solidFill>
-                        <a:srgbClr val="CBD5E0"/>
-                      </a:solidFill>
-                      <a:prstDash val="solid"/>
-                      <a:round/>
-                      <a:headEnd type="none" w="med" len="med"/>
-                      <a:tailEnd type="none" w="med" len="med"/>
-                    </a:lnB>
-                    <a:solidFill>
-                      <a:srgbClr val="FFFFFF"/>
-                    </a:solidFill>
-                  </a:tcPr>
-                </a:tc>
-                <a:tc>
-                  <a:txBody>
-                    <a:bodyPr/>
-                    <a:lstStyle/>
-                    <a:p>
-                      <a:pPr indent="0" marL="0">
-                        <a:buNone/>
-                      </a:pPr>
-                      <a:r>
-                        <a:rPr lang="en-US" sz="1100" dirty="0">
-                          <a:solidFill>
-                            <a:srgbClr val="10161F"/>
-                          </a:solidFill>
-                          <a:latin typeface="Pretendard" pitchFamily="34" charset="0"/>
-                          <a:ea typeface="Pretendard" pitchFamily="34" charset="-122"/>
-                          <a:cs typeface="Pretendard" pitchFamily="34" charset="-120"/>
-                        </a:rPr>
-                        <a:t>221.6억</a:t>
-                      </a:r>
-                      <a:endParaRPr lang="en-US" sz="1100" dirty="0">
-                        <a:latin typeface="Pretendard" charset="0"/>
-                        <a:ea typeface="Pretendard" charset="0"/>
-                        <a:cs typeface="Pretendard" charset="0"/>
-                      </a:endParaRPr>
-                    </a:p>
-                  </a:txBody>
-                  <a:tcPr marL="50800" marR="50800" marT="25400" marB="25400" anchor="ctr">
-                    <a:lnL w="3810" cap="flat" cmpd="sng" algn="ctr">
-                      <a:solidFill>
-                        <a:srgbClr val="CBD5E0"/>
-                      </a:solidFill>
-                      <a:prstDash val="solid"/>
-                      <a:round/>
-                      <a:headEnd type="none" w="med" len="med"/>
-                      <a:tailEnd type="none" w="med" len="med"/>
-                    </a:lnL>
-                    <a:lnR w="3810" cap="flat" cmpd="sng" algn="ctr">
-                      <a:solidFill>
-                        <a:srgbClr val="CBD5E0"/>
-                      </a:solidFill>
-                      <a:prstDash val="solid"/>
-                      <a:round/>
-                      <a:headEnd type="none" w="med" len="med"/>
-                      <a:tailEnd type="none" w="med" len="med"/>
-                    </a:lnR>
-                    <a:lnT w="3810" cap="flat" cmpd="sng" algn="ctr">
-                      <a:solidFill>
-                        <a:srgbClr val="CBD5E0"/>
-                      </a:solidFill>
-                      <a:prstDash val="solid"/>
-                      <a:round/>
-                      <a:headEnd type="none" w="med" len="med"/>
-                      <a:tailEnd type="none" w="med" len="med"/>
-                    </a:lnT>
-                    <a:lnB w="3810" cap="flat" cmpd="sng" algn="ctr">
-                      <a:solidFill>
-                        <a:srgbClr val="CBD5E0"/>
-                      </a:solidFill>
-                      <a:prstDash val="solid"/>
-                      <a:round/>
-                      <a:headEnd type="none" w="med" len="med"/>
-                      <a:tailEnd type="none" w="med" len="med"/>
-                    </a:lnB>
-                    <a:solidFill>
-                      <a:srgbClr val="FFFFFF"/>
-                    </a:solidFill>
-                  </a:tcPr>
-                </a:tc>
-                <a:tc>
-                  <a:txBody>
-                    <a:bodyPr/>
-                    <a:lstStyle/>
-                    <a:p>
-                      <a:pPr indent="0" marL="0">
-                        <a:buNone/>
-                      </a:pPr>
-                      <a:r>
-                        <a:rPr lang="en-US" sz="1100" dirty="0">
-                          <a:solidFill>
-                            <a:srgbClr val="10161F"/>
-                          </a:solidFill>
-                          <a:latin typeface="Pretendard" pitchFamily="34" charset="0"/>
-                          <a:ea typeface="Pretendard" pitchFamily="34" charset="-122"/>
-                          <a:cs typeface="Pretendard" pitchFamily="34" charset="-120"/>
-                        </a:rPr>
-                        <a:t>-</a:t>
-                      </a:r>
-                      <a:endParaRPr lang="en-US" sz="1100" dirty="0">
-                        <a:latin typeface="Pretendard" charset="0"/>
-                        <a:ea typeface="Pretendard" charset="0"/>
-                        <a:cs typeface="Pretendard" charset="0"/>
-                      </a:endParaRPr>
-                    </a:p>
-                  </a:txBody>
-                  <a:tcPr marL="50800" marR="50800" marT="25400" marB="25400" anchor="ctr">
-                    <a:lnL w="3810" cap="flat" cmpd="sng" algn="ctr">
-                      <a:solidFill>
-                        <a:srgbClr val="CBD5E0"/>
-                      </a:solidFill>
-                      <a:prstDash val="solid"/>
-                      <a:round/>
-                      <a:headEnd type="none" w="med" len="med"/>
-                      <a:tailEnd type="none" w="med" len="med"/>
-                    </a:lnL>
-                    <a:lnR w="3810" cap="flat" cmpd="sng" algn="ctr">
-                      <a:solidFill>
-                        <a:srgbClr val="CBD5E0"/>
-                      </a:solidFill>
-                      <a:prstDash val="solid"/>
-                      <a:round/>
-                      <a:headEnd type="none" w="med" len="med"/>
-                      <a:tailEnd type="none" w="med" len="med"/>
-                    </a:lnR>
-                    <a:lnT w="3810" cap="flat" cmpd="sng" algn="ctr">
-                      <a:solidFill>
-                        <a:srgbClr val="CBD5E0"/>
-                      </a:solidFill>
-                      <a:prstDash val="solid"/>
-                      <a:round/>
-                      <a:headEnd type="none" w="med" len="med"/>
-                      <a:tailEnd type="none" w="med" len="med"/>
-                    </a:lnT>
-                    <a:lnB w="3810" cap="flat" cmpd="sng" algn="ctr">
-                      <a:solidFill>
-                        <a:srgbClr val="CBD5E0"/>
-                      </a:solidFill>
-                      <a:prstDash val="solid"/>
-                      <a:round/>
-                      <a:headEnd type="none" w="med" len="med"/>
-                      <a:tailEnd type="none" w="med" len="med"/>
-                    </a:lnB>
-                    <a:solidFill>
-                      <a:srgbClr val="FFFFFF"/>
-                    </a:solidFill>
-                  </a:tcPr>
-                </a:tc>
-              </a:tr>
-              <a:tr h="457200">
-                <a:tc>
-                  <a:txBody>
-                    <a:bodyPr/>
-                    <a:lstStyle/>
-                    <a:p>
-                      <a:pPr indent="0" marL="0">
-                        <a:buNone/>
-                      </a:pPr>
-                      <a:r>
-                        <a:rPr lang="en-US" sz="1100" b="1" dirty="0">
-                          <a:solidFill>
-                            <a:srgbClr val="10161F"/>
-                          </a:solidFill>
-                          <a:latin typeface="Pretendard" pitchFamily="34" charset="0"/>
-                          <a:ea typeface="Pretendard" pitchFamily="34" charset="-122"/>
-                          <a:cs typeface="Pretendard" pitchFamily="34" charset="-120"/>
-                        </a:rPr>
-                        <a:t>보수적 </a:t>
-                      </a:r>
-                      <a:pPr indent="0" marL="0">
-                        <a:buNone/>
-                      </a:pPr>
-                      <a:r>
-                        <a:rPr lang="en-US" sz="1100" b="1" dirty="0">
-                          <a:solidFill>
-                            <a:srgbClr val="10161F"/>
-                          </a:solidFill>
-                          <a:latin typeface="Pretendard" pitchFamily="34" charset="0"/>
-                          <a:ea typeface="Pretendard" pitchFamily="34" charset="-122"/>
-                          <a:cs typeface="Pretendard" pitchFamily="34" charset="-120"/>
-                        </a:rPr>
-                        <a:t>차입 </a:t>
-                      </a:r>
-                      <a:pPr indent="0" marL="0">
-                        <a:buNone/>
-                      </a:pPr>
-                      <a:r>
-                        <a:rPr lang="en-US" sz="1100" b="1" dirty="0">
-                          <a:solidFill>
-                            <a:srgbClr val="10161F"/>
-                          </a:solidFill>
-                          <a:latin typeface="Pretendard" pitchFamily="34" charset="0"/>
-                          <a:ea typeface="Pretendard" pitchFamily="34" charset="-122"/>
-                          <a:cs typeface="Pretendard" pitchFamily="34" charset="-120"/>
-                        </a:rPr>
-                        <a:t>(안정형)</a:t>
-                      </a:r>
-                      <a:endParaRPr lang="en-US" sz="1100" dirty="0">
-                        <a:latin typeface="Pretendard" charset="0"/>
-                        <a:ea typeface="Pretendard" charset="0"/>
-                        <a:cs typeface="Pretendard" charset="0"/>
-                      </a:endParaRPr>
-                    </a:p>
-                  </a:txBody>
-                  <a:tcPr marL="50800" marR="50800" marT="25400" marB="25400" anchor="ctr">
-                    <a:lnL w="3810" cap="flat" cmpd="sng" algn="ctr">
-                      <a:solidFill>
-                        <a:srgbClr val="CBD5E0"/>
-                      </a:solidFill>
-                      <a:prstDash val="solid"/>
-                      <a:round/>
-                      <a:headEnd type="none" w="med" len="med"/>
-                      <a:tailEnd type="none" w="med" len="med"/>
-                    </a:lnL>
-                    <a:lnR w="3810" cap="flat" cmpd="sng" algn="ctr">
-                      <a:solidFill>
-                        <a:srgbClr val="CBD5E0"/>
-                      </a:solidFill>
-                      <a:prstDash val="solid"/>
-                      <a:round/>
-                      <a:headEnd type="none" w="med" len="med"/>
-                      <a:tailEnd type="none" w="med" len="med"/>
-                    </a:lnR>
-                    <a:lnT w="3810" cap="flat" cmpd="sng" algn="ctr">
-                      <a:solidFill>
-                        <a:srgbClr val="CBD5E0"/>
-                      </a:solidFill>
-                      <a:prstDash val="solid"/>
-                      <a:round/>
-                      <a:headEnd type="none" w="med" len="med"/>
-                      <a:tailEnd type="none" w="med" len="med"/>
-                    </a:lnT>
-                    <a:lnB w="3810" cap="flat" cmpd="sng" algn="ctr">
-                      <a:solidFill>
-                        <a:srgbClr val="CBD5E0"/>
-                      </a:solidFill>
-                      <a:prstDash val="solid"/>
-                      <a:round/>
-                      <a:headEnd type="none" w="med" len="med"/>
-                      <a:tailEnd type="none" w="med" len="med"/>
-                    </a:lnB>
-                    <a:solidFill>
-                      <a:srgbClr val="F7FAFC"/>
-                    </a:solidFill>
-                  </a:tcPr>
-                </a:tc>
-                <a:tc>
-                  <a:txBody>
-                    <a:bodyPr/>
-                    <a:lstStyle/>
-                    <a:p>
-                      <a:pPr indent="0" marL="0">
-                        <a:buNone/>
-                      </a:pPr>
-                      <a:r>
-                        <a:rPr lang="en-US" sz="1100" dirty="0">
-                          <a:solidFill>
-                            <a:srgbClr val="10161F"/>
-                          </a:solidFill>
-                          <a:latin typeface="Pretendard" pitchFamily="34" charset="0"/>
-                          <a:ea typeface="Pretendard" pitchFamily="34" charset="-122"/>
-                          <a:cs typeface="Pretendard" pitchFamily="34" charset="-120"/>
-                        </a:rPr>
-                        <a:t>40%</a:t>
-                      </a:r>
-                      <a:endParaRPr lang="en-US" sz="1100" dirty="0">
-                        <a:latin typeface="Pretendard" charset="0"/>
-                        <a:ea typeface="Pretendard" charset="0"/>
-                        <a:cs typeface="Pretendard" charset="0"/>
-                      </a:endParaRPr>
-                    </a:p>
-                  </a:txBody>
-                  <a:tcPr marL="50800" marR="50800" marT="25400" marB="25400" anchor="ctr">
-                    <a:lnL w="3810" cap="flat" cmpd="sng" algn="ctr">
-                      <a:solidFill>
-                        <a:srgbClr val="CBD5E0"/>
-                      </a:solidFill>
-                      <a:prstDash val="solid"/>
-                      <a:round/>
-                      <a:headEnd type="none" w="med" len="med"/>
-                      <a:tailEnd type="none" w="med" len="med"/>
-                    </a:lnL>
-                    <a:lnR w="3810" cap="flat" cmpd="sng" algn="ctr">
-                      <a:solidFill>
-                        <a:srgbClr val="CBD5E0"/>
-                      </a:solidFill>
-                      <a:prstDash val="solid"/>
-                      <a:round/>
-                      <a:headEnd type="none" w="med" len="med"/>
-                      <a:tailEnd type="none" w="med" len="med"/>
-                    </a:lnR>
-                    <a:lnT w="3810" cap="flat" cmpd="sng" algn="ctr">
-                      <a:solidFill>
-                        <a:srgbClr val="CBD5E0"/>
-                      </a:solidFill>
-                      <a:prstDash val="solid"/>
-                      <a:round/>
-                      <a:headEnd type="none" w="med" len="med"/>
-                      <a:tailEnd type="none" w="med" len="med"/>
-                    </a:lnT>
-                    <a:lnB w="3810" cap="flat" cmpd="sng" algn="ctr">
-                      <a:solidFill>
-                        <a:srgbClr val="CBD5E0"/>
-                      </a:solidFill>
-                      <a:prstDash val="solid"/>
-                      <a:round/>
-                      <a:headEnd type="none" w="med" len="med"/>
-                      <a:tailEnd type="none" w="med" len="med"/>
-                    </a:lnB>
-                    <a:solidFill>
-                      <a:srgbClr val="F7FAFC"/>
-                    </a:solidFill>
-                  </a:tcPr>
-                </a:tc>
-                <a:tc>
-                  <a:txBody>
-                    <a:bodyPr/>
-                    <a:lstStyle/>
-                    <a:p>
-                      <a:pPr indent="0" marL="0">
-                        <a:buNone/>
-                      </a:pPr>
-                      <a:r>
-                        <a:rPr lang="en-US" sz="1100" dirty="0">
-                          <a:solidFill>
-                            <a:srgbClr val="10161F"/>
-                          </a:solidFill>
-                          <a:latin typeface="Pretendard" pitchFamily="34" charset="0"/>
-                          <a:ea typeface="Pretendard" pitchFamily="34" charset="-122"/>
-                          <a:cs typeface="Pretendard" pitchFamily="34" charset="-120"/>
-                        </a:rPr>
-                        <a:t>137.6억</a:t>
-                      </a:r>
-                      <a:endParaRPr lang="en-US" sz="1100" dirty="0">
-                        <a:latin typeface="Pretendard" charset="0"/>
-                        <a:ea typeface="Pretendard" charset="0"/>
-                        <a:cs typeface="Pretendard" charset="0"/>
-                      </a:endParaRPr>
-                    </a:p>
-                  </a:txBody>
-                  <a:tcPr marL="50800" marR="50800" marT="25400" marB="25400" anchor="ctr">
-                    <a:lnL w="3810" cap="flat" cmpd="sng" algn="ctr">
-                      <a:solidFill>
-                        <a:srgbClr val="CBD5E0"/>
-                      </a:solidFill>
-                      <a:prstDash val="solid"/>
-                      <a:round/>
-                      <a:headEnd type="none" w="med" len="med"/>
-                      <a:tailEnd type="none" w="med" len="med"/>
-                    </a:lnL>
-                    <a:lnR w="3810" cap="flat" cmpd="sng" algn="ctr">
-                      <a:solidFill>
-                        <a:srgbClr val="CBD5E0"/>
-                      </a:solidFill>
-                      <a:prstDash val="solid"/>
-                      <a:round/>
-                      <a:headEnd type="none" w="med" len="med"/>
-                      <a:tailEnd type="none" w="med" len="med"/>
-                    </a:lnR>
-                    <a:lnT w="3810" cap="flat" cmpd="sng" algn="ctr">
-                      <a:solidFill>
-                        <a:srgbClr val="CBD5E0"/>
-                      </a:solidFill>
-                      <a:prstDash val="solid"/>
-                      <a:round/>
-                      <a:headEnd type="none" w="med" len="med"/>
-                      <a:tailEnd type="none" w="med" len="med"/>
-                    </a:lnT>
-                    <a:lnB w="3810" cap="flat" cmpd="sng" algn="ctr">
-                      <a:solidFill>
-                        <a:srgbClr val="CBD5E0"/>
-                      </a:solidFill>
-                      <a:prstDash val="solid"/>
-                      <a:round/>
-                      <a:headEnd type="none" w="med" len="med"/>
-                      <a:tailEnd type="none" w="med" len="med"/>
-                    </a:lnB>
-                    <a:solidFill>
-                      <a:srgbClr val="F7FAFC"/>
-                    </a:solidFill>
-                  </a:tcPr>
-                </a:tc>
-                <a:tc>
-                  <a:txBody>
-                    <a:bodyPr/>
-                    <a:lstStyle/>
-                    <a:p>
-                      <a:pPr indent="0" marL="0">
-                        <a:buNone/>
-                      </a:pPr>
-                      <a:r>
-                        <a:rPr lang="en-US" sz="1100" dirty="0">
-                          <a:solidFill>
-                            <a:srgbClr val="10161F"/>
-                          </a:solidFill>
-                          <a:latin typeface="Pretendard" pitchFamily="34" charset="0"/>
-                          <a:ea typeface="Pretendard" pitchFamily="34" charset="-122"/>
-                          <a:cs typeface="Pretendard" pitchFamily="34" charset="-120"/>
-                        </a:rPr>
-                        <a:t>-</a:t>
-                      </a:r>
-                      <a:endParaRPr lang="en-US" sz="1100" dirty="0">
-                        <a:latin typeface="Pretendard" charset="0"/>
-                        <a:ea typeface="Pretendard" charset="0"/>
-                        <a:cs typeface="Pretendard" charset="0"/>
-                      </a:endParaRPr>
-                    </a:p>
-                  </a:txBody>
-                  <a:tcPr marL="50800" marR="50800" marT="25400" marB="25400" anchor="ctr">
-                    <a:lnL w="3810" cap="flat" cmpd="sng" algn="ctr">
-                      <a:solidFill>
-                        <a:srgbClr val="CBD5E0"/>
-                      </a:solidFill>
-                      <a:prstDash val="solid"/>
-                      <a:round/>
-                      <a:headEnd type="none" w="med" len="med"/>
-                      <a:tailEnd type="none" w="med" len="med"/>
-                    </a:lnL>
-                    <a:lnR w="3810" cap="flat" cmpd="sng" algn="ctr">
-                      <a:solidFill>
-                        <a:srgbClr val="CBD5E0"/>
-                      </a:solidFill>
-                      <a:prstDash val="solid"/>
-                      <a:round/>
-                      <a:headEnd type="none" w="med" len="med"/>
-                      <a:tailEnd type="none" w="med" len="med"/>
-                    </a:lnR>
-                    <a:lnT w="3810" cap="flat" cmpd="sng" algn="ctr">
-                      <a:solidFill>
-                        <a:srgbClr val="CBD5E0"/>
-                      </a:solidFill>
-                      <a:prstDash val="solid"/>
-                      <a:round/>
-                      <a:headEnd type="none" w="med" len="med"/>
-                      <a:tailEnd type="none" w="med" len="med"/>
-                    </a:lnT>
-                    <a:lnB w="3810" cap="flat" cmpd="sng" algn="ctr">
-                      <a:solidFill>
-                        <a:srgbClr val="CBD5E0"/>
-                      </a:solidFill>
-                      <a:prstDash val="solid"/>
-                      <a:round/>
-                      <a:headEnd type="none" w="med" len="med"/>
-                      <a:tailEnd type="none" w="med" len="med"/>
-                    </a:lnB>
-                    <a:solidFill>
-                      <a:srgbClr val="F7FAFC"/>
-                    </a:solidFill>
-                  </a:tcPr>
-                </a:tc>
-              </a:tr>
-              <a:tr h="457200">
-                <a:tc>
-                  <a:txBody>
-                    <a:bodyPr/>
-                    <a:lstStyle/>
-                    <a:p>
-                      <a:pPr indent="0" marL="0">
-                        <a:buNone/>
-                      </a:pPr>
-                      <a:r>
-                        <a:rPr lang="en-US" sz="1100" b="1" dirty="0">
-                          <a:solidFill>
-                            <a:srgbClr val="10161F"/>
-                          </a:solidFill>
-                          <a:latin typeface="Pretendard" pitchFamily="34" charset="0"/>
-                          <a:ea typeface="Pretendard" pitchFamily="34" charset="-122"/>
-                          <a:cs typeface="Pretendard" pitchFamily="34" charset="-120"/>
-                        </a:rPr>
-                        <a:t>표준 </a:t>
-                      </a:r>
-                      <a:pPr indent="0" marL="0">
-                        <a:buNone/>
-                      </a:pPr>
-                      <a:r>
-                        <a:rPr lang="en-US" sz="1100" b="1" dirty="0">
-                          <a:solidFill>
-                            <a:srgbClr val="10161F"/>
-                          </a:solidFill>
-                          <a:latin typeface="Pretendard" pitchFamily="34" charset="0"/>
-                          <a:ea typeface="Pretendard" pitchFamily="34" charset="-122"/>
-                          <a:cs typeface="Pretendard" pitchFamily="34" charset="-120"/>
-                        </a:rPr>
-                        <a:t>차입 </a:t>
-                      </a:r>
-                      <a:pPr indent="0" marL="0">
-                        <a:buNone/>
-                      </a:pPr>
-                      <a:r>
-                        <a:rPr lang="en-US" sz="1100" b="1" dirty="0">
-                          <a:solidFill>
-                            <a:srgbClr val="10161F"/>
-                          </a:solidFill>
-                          <a:latin typeface="Pretendard" pitchFamily="34" charset="0"/>
-                          <a:ea typeface="Pretendard" pitchFamily="34" charset="-122"/>
-                          <a:cs typeface="Pretendard" pitchFamily="34" charset="-120"/>
-                        </a:rPr>
-                        <a:t>(기본형)</a:t>
-                      </a:r>
-                      <a:endParaRPr lang="en-US" sz="1100" dirty="0">
-                        <a:latin typeface="Pretendard" charset="0"/>
-                        <a:ea typeface="Pretendard" charset="0"/>
-                        <a:cs typeface="Pretendard" charset="0"/>
-                      </a:endParaRPr>
-                    </a:p>
-                  </a:txBody>
-                  <a:tcPr marL="50800" marR="50800" marT="25400" marB="25400" anchor="ctr">
-                    <a:lnL w="3810" cap="flat" cmpd="sng" algn="ctr">
-                      <a:solidFill>
-                        <a:srgbClr val="CBD5E0"/>
-                      </a:solidFill>
-                      <a:prstDash val="solid"/>
-                      <a:round/>
-                      <a:headEnd type="none" w="med" len="med"/>
-                      <a:tailEnd type="none" w="med" len="med"/>
-                    </a:lnL>
-                    <a:lnR w="3810" cap="flat" cmpd="sng" algn="ctr">
-                      <a:solidFill>
-                        <a:srgbClr val="CBD5E0"/>
-                      </a:solidFill>
-                      <a:prstDash val="solid"/>
-                      <a:round/>
-                      <a:headEnd type="none" w="med" len="med"/>
-                      <a:tailEnd type="none" w="med" len="med"/>
-                    </a:lnR>
-                    <a:lnT w="3810" cap="flat" cmpd="sng" algn="ctr">
-                      <a:solidFill>
-                        <a:srgbClr val="CBD5E0"/>
-                      </a:solidFill>
-                      <a:prstDash val="solid"/>
-                      <a:round/>
-                      <a:headEnd type="none" w="med" len="med"/>
-                      <a:tailEnd type="none" w="med" len="med"/>
-                    </a:lnT>
-                    <a:lnB w="3810" cap="flat" cmpd="sng" algn="ctr">
-                      <a:solidFill>
-                        <a:srgbClr val="CBD5E0"/>
-                      </a:solidFill>
-                      <a:prstDash val="solid"/>
-                      <a:round/>
-                      <a:headEnd type="none" w="med" len="med"/>
-                      <a:tailEnd type="none" w="med" len="med"/>
-                    </a:lnB>
-                    <a:solidFill>
-                      <a:srgbClr val="FFFFFF"/>
-                    </a:solidFill>
-                  </a:tcPr>
-                </a:tc>
-                <a:tc>
-                  <a:txBody>
-                    <a:bodyPr/>
-                    <a:lstStyle/>
-                    <a:p>
-                      <a:pPr indent="0" marL="0">
-                        <a:buNone/>
-                      </a:pPr>
-                      <a:r>
-                        <a:rPr lang="en-US" sz="1100" dirty="0">
-                          <a:solidFill>
-                            <a:srgbClr val="10161F"/>
-                          </a:solidFill>
-                          <a:latin typeface="Pretendard" pitchFamily="34" charset="0"/>
-                          <a:ea typeface="Pretendard" pitchFamily="34" charset="-122"/>
-                          <a:cs typeface="Pretendard" pitchFamily="34" charset="-120"/>
-                        </a:rPr>
-                        <a:t>50%</a:t>
-                      </a:r>
-                      <a:endParaRPr lang="en-US" sz="1100" dirty="0">
-                        <a:latin typeface="Pretendard" charset="0"/>
-                        <a:ea typeface="Pretendard" charset="0"/>
-                        <a:cs typeface="Pretendard" charset="0"/>
-                      </a:endParaRPr>
-                    </a:p>
-                  </a:txBody>
-                  <a:tcPr marL="50800" marR="50800" marT="25400" marB="25400" anchor="ctr">
-                    <a:lnL w="3810" cap="flat" cmpd="sng" algn="ctr">
-                      <a:solidFill>
-                        <a:srgbClr val="CBD5E0"/>
-                      </a:solidFill>
-                      <a:prstDash val="solid"/>
-                      <a:round/>
-                      <a:headEnd type="none" w="med" len="med"/>
-                      <a:tailEnd type="none" w="med" len="med"/>
-                    </a:lnL>
-                    <a:lnR w="3810" cap="flat" cmpd="sng" algn="ctr">
-                      <a:solidFill>
-                        <a:srgbClr val="CBD5E0"/>
-                      </a:solidFill>
-                      <a:prstDash val="solid"/>
-                      <a:round/>
-                      <a:headEnd type="none" w="med" len="med"/>
-                      <a:tailEnd type="none" w="med" len="med"/>
-                    </a:lnR>
-                    <a:lnT w="3810" cap="flat" cmpd="sng" algn="ctr">
-                      <a:solidFill>
-                        <a:srgbClr val="CBD5E0"/>
-                      </a:solidFill>
-                      <a:prstDash val="solid"/>
-                      <a:round/>
-                      <a:headEnd type="none" w="med" len="med"/>
-                      <a:tailEnd type="none" w="med" len="med"/>
-                    </a:lnT>
-                    <a:lnB w="3810" cap="flat" cmpd="sng" algn="ctr">
-                      <a:solidFill>
-                        <a:srgbClr val="CBD5E0"/>
-                      </a:solidFill>
-                      <a:prstDash val="solid"/>
-                      <a:round/>
-                      <a:headEnd type="none" w="med" len="med"/>
-                      <a:tailEnd type="none" w="med" len="med"/>
-                    </a:lnB>
-                    <a:solidFill>
-                      <a:srgbClr val="FFFFFF"/>
-                    </a:solidFill>
-                  </a:tcPr>
-                </a:tc>
-                <a:tc>
-                  <a:txBody>
-                    <a:bodyPr/>
-                    <a:lstStyle/>
-                    <a:p>
-                      <a:pPr indent="0" marL="0">
-                        <a:buNone/>
-                      </a:pPr>
-                      <a:r>
-                        <a:rPr lang="en-US" sz="1100" dirty="0">
-                          <a:solidFill>
-                            <a:srgbClr val="10161F"/>
-                          </a:solidFill>
-                          <a:latin typeface="Pretendard" pitchFamily="34" charset="0"/>
-                          <a:ea typeface="Pretendard" pitchFamily="34" charset="-122"/>
-                          <a:cs typeface="Pretendard" pitchFamily="34" charset="-120"/>
-                        </a:rPr>
-                        <a:t>116.5억</a:t>
-                      </a:r>
-                      <a:endParaRPr lang="en-US" sz="1100" dirty="0">
-                        <a:latin typeface="Pretendard" charset="0"/>
-                        <a:ea typeface="Pretendard" charset="0"/>
-                        <a:cs typeface="Pretendard" charset="0"/>
-                      </a:endParaRPr>
-                    </a:p>
-                  </a:txBody>
-                  <a:tcPr marL="50800" marR="50800" marT="25400" marB="25400" anchor="ctr">
-                    <a:lnL w="3810" cap="flat" cmpd="sng" algn="ctr">
-                      <a:solidFill>
-                        <a:srgbClr val="CBD5E0"/>
-                      </a:solidFill>
-                      <a:prstDash val="solid"/>
-                      <a:round/>
-                      <a:headEnd type="none" w="med" len="med"/>
-                      <a:tailEnd type="none" w="med" len="med"/>
-                    </a:lnL>
-                    <a:lnR w="3810" cap="flat" cmpd="sng" algn="ctr">
-                      <a:solidFill>
-                        <a:srgbClr val="CBD5E0"/>
-                      </a:solidFill>
-                      <a:prstDash val="solid"/>
-                      <a:round/>
-                      <a:headEnd type="none" w="med" len="med"/>
-                      <a:tailEnd type="none" w="med" len="med"/>
-                    </a:lnR>
-                    <a:lnT w="3810" cap="flat" cmpd="sng" algn="ctr">
-                      <a:solidFill>
-                        <a:srgbClr val="CBD5E0"/>
-                      </a:solidFill>
-                      <a:prstDash val="solid"/>
-                      <a:round/>
-                      <a:headEnd type="none" w="med" len="med"/>
-                      <a:tailEnd type="none" w="med" len="med"/>
-                    </a:lnT>
-                    <a:lnB w="3810" cap="flat" cmpd="sng" algn="ctr">
-                      <a:solidFill>
-                        <a:srgbClr val="CBD5E0"/>
-                      </a:solidFill>
-                      <a:prstDash val="solid"/>
-                      <a:round/>
-                      <a:headEnd type="none" w="med" len="med"/>
-                      <a:tailEnd type="none" w="med" len="med"/>
-                    </a:lnB>
-                    <a:solidFill>
-                      <a:srgbClr val="FFFFFF"/>
-                    </a:solidFill>
-                  </a:tcPr>
-                </a:tc>
-                <a:tc>
-                  <a:txBody>
-                    <a:bodyPr/>
-                    <a:lstStyle/>
-                    <a:p>
-                      <a:pPr indent="0" marL="0">
-                        <a:buNone/>
-                      </a:pPr>
-                      <a:r>
-                        <a:rPr lang="en-US" sz="1100" dirty="0">
-                          <a:solidFill>
-                            <a:srgbClr val="10161F"/>
-                          </a:solidFill>
-                          <a:latin typeface="Pretendard" pitchFamily="34" charset="0"/>
-                          <a:ea typeface="Pretendard" pitchFamily="34" charset="-122"/>
-                          <a:cs typeface="Pretendard" pitchFamily="34" charset="-120"/>
-                        </a:rPr>
-                        <a:t>-</a:t>
-                      </a:r>
-                      <a:endParaRPr lang="en-US" sz="1100" dirty="0">
-                        <a:latin typeface="Pretendard" charset="0"/>
-                        <a:ea typeface="Pretendard" charset="0"/>
-                        <a:cs typeface="Pretendard" charset="0"/>
-                      </a:endParaRPr>
-                    </a:p>
-                  </a:txBody>
-                  <a:tcPr marL="50800" marR="50800" marT="25400" marB="25400" anchor="ctr">
-                    <a:lnL w="3810" cap="flat" cmpd="sng" algn="ctr">
-                      <a:solidFill>
-                        <a:srgbClr val="CBD5E0"/>
-                      </a:solidFill>
-                      <a:prstDash val="solid"/>
-                      <a:round/>
-                      <a:headEnd type="none" w="med" len="med"/>
-                      <a:tailEnd type="none" w="med" len="med"/>
-                    </a:lnL>
-                    <a:lnR w="3810" cap="flat" cmpd="sng" algn="ctr">
-                      <a:solidFill>
-                        <a:srgbClr val="CBD5E0"/>
-                      </a:solidFill>
-                      <a:prstDash val="solid"/>
-                      <a:round/>
-                      <a:headEnd type="none" w="med" len="med"/>
-                      <a:tailEnd type="none" w="med" len="med"/>
-                    </a:lnR>
-                    <a:lnT w="3810" cap="flat" cmpd="sng" algn="ctr">
-                      <a:solidFill>
-                        <a:srgbClr val="CBD5E0"/>
-                      </a:solidFill>
-                      <a:prstDash val="solid"/>
-                      <a:round/>
-                      <a:headEnd type="none" w="med" len="med"/>
-                      <a:tailEnd type="none" w="med" len="med"/>
-                    </a:lnT>
-                    <a:lnB w="3810" cap="flat" cmpd="sng" algn="ctr">
-                      <a:solidFill>
-                        <a:srgbClr val="CBD5E0"/>
-                      </a:solidFill>
-                      <a:prstDash val="solid"/>
-                      <a:round/>
-                      <a:headEnd type="none" w="med" len="med"/>
-                      <a:tailEnd type="none" w="med" len="med"/>
-                    </a:lnB>
-                    <a:solidFill>
-                      <a:srgbClr val="FFFFFF"/>
-                    </a:solidFill>
-                  </a:tcPr>
-                </a:tc>
-              </a:tr>
-              <a:tr h="457200">
-                <a:tc>
-                  <a:txBody>
-                    <a:bodyPr/>
-                    <a:lstStyle/>
-                    <a:p>
-                      <a:pPr indent="0" marL="0">
-                        <a:buNone/>
-                      </a:pPr>
-                      <a:r>
-                        <a:rPr lang="en-US" sz="1100" b="1" dirty="0">
-                          <a:solidFill>
-                            <a:srgbClr val="10161F"/>
-                          </a:solidFill>
-                          <a:latin typeface="Pretendard" pitchFamily="34" charset="0"/>
-                          <a:ea typeface="Pretendard" pitchFamily="34" charset="-122"/>
-                          <a:cs typeface="Pretendard" pitchFamily="34" charset="-120"/>
-                        </a:rPr>
-                        <a:t>적극적 </a:t>
-                      </a:r>
-                      <a:pPr indent="0" marL="0">
-                        <a:buNone/>
-                      </a:pPr>
-                      <a:r>
-                        <a:rPr lang="en-US" sz="1100" b="1" dirty="0">
-                          <a:solidFill>
-                            <a:srgbClr val="10161F"/>
-                          </a:solidFill>
-                          <a:latin typeface="Pretendard" pitchFamily="34" charset="0"/>
-                          <a:ea typeface="Pretendard" pitchFamily="34" charset="-122"/>
-                          <a:cs typeface="Pretendard" pitchFamily="34" charset="-120"/>
-                        </a:rPr>
-                        <a:t>차입 </a:t>
-                      </a:r>
-                      <a:pPr indent="0" marL="0">
-                        <a:buNone/>
-                      </a:pPr>
-                      <a:r>
-                        <a:rPr lang="en-US" sz="1100" b="1" dirty="0">
-                          <a:solidFill>
-                            <a:srgbClr val="10161F"/>
-                          </a:solidFill>
-                          <a:latin typeface="Pretendard" pitchFamily="34" charset="0"/>
-                          <a:ea typeface="Pretendard" pitchFamily="34" charset="-122"/>
-                          <a:cs typeface="Pretendard" pitchFamily="34" charset="-120"/>
-                        </a:rPr>
-                        <a:t>(레버리지)</a:t>
-                      </a:r>
-                      <a:endParaRPr lang="en-US" sz="1100" dirty="0">
-                        <a:latin typeface="Pretendard" charset="0"/>
-                        <a:ea typeface="Pretendard" charset="0"/>
-                        <a:cs typeface="Pretendard" charset="0"/>
-                      </a:endParaRPr>
-                    </a:p>
-                  </a:txBody>
-                  <a:tcPr marL="50800" marR="50800" marT="25400" marB="25400" anchor="ctr">
-                    <a:lnL w="3810" cap="flat" cmpd="sng" algn="ctr">
-                      <a:solidFill>
-                        <a:srgbClr val="CBD5E0"/>
-                      </a:solidFill>
-                      <a:prstDash val="solid"/>
-                      <a:round/>
-                      <a:headEnd type="none" w="med" len="med"/>
-                      <a:tailEnd type="none" w="med" len="med"/>
-                    </a:lnL>
-                    <a:lnR w="3810" cap="flat" cmpd="sng" algn="ctr">
-                      <a:solidFill>
-                        <a:srgbClr val="CBD5E0"/>
-                      </a:solidFill>
-                      <a:prstDash val="solid"/>
-                      <a:round/>
-                      <a:headEnd type="none" w="med" len="med"/>
-                      <a:tailEnd type="none" w="med" len="med"/>
-                    </a:lnR>
-                    <a:lnT w="3810" cap="flat" cmpd="sng" algn="ctr">
-                      <a:solidFill>
-                        <a:srgbClr val="CBD5E0"/>
-                      </a:solidFill>
-                      <a:prstDash val="solid"/>
-                      <a:round/>
-                      <a:headEnd type="none" w="med" len="med"/>
-                      <a:tailEnd type="none" w="med" len="med"/>
-                    </a:lnT>
-                    <a:lnB w="3810" cap="flat" cmpd="sng" algn="ctr">
-                      <a:solidFill>
-                        <a:srgbClr val="CBD5E0"/>
-                      </a:solidFill>
-                      <a:prstDash val="solid"/>
-                      <a:round/>
-                      <a:headEnd type="none" w="med" len="med"/>
-                      <a:tailEnd type="none" w="med" len="med"/>
-                    </a:lnB>
-                    <a:solidFill>
-                      <a:srgbClr val="F7FAFC"/>
-                    </a:solidFill>
-                  </a:tcPr>
-                </a:tc>
-                <a:tc>
-                  <a:txBody>
-                    <a:bodyPr/>
-                    <a:lstStyle/>
-                    <a:p>
-                      <a:pPr indent="0" marL="0">
-                        <a:buNone/>
-                      </a:pPr>
-                      <a:r>
-                        <a:rPr lang="en-US" sz="1100" dirty="0">
-                          <a:solidFill>
-                            <a:srgbClr val="10161F"/>
-                          </a:solidFill>
-                          <a:latin typeface="Pretendard" pitchFamily="34" charset="0"/>
-                          <a:ea typeface="Pretendard" pitchFamily="34" charset="-122"/>
-                          <a:cs typeface="Pretendard" pitchFamily="34" charset="-120"/>
-                        </a:rPr>
-                        <a:t>60%</a:t>
-                      </a:r>
-                      <a:endParaRPr lang="en-US" sz="1100" dirty="0">
-                        <a:latin typeface="Pretendard" charset="0"/>
-                        <a:ea typeface="Pretendard" charset="0"/>
-                        <a:cs typeface="Pretendard" charset="0"/>
-                      </a:endParaRPr>
-                    </a:p>
-                  </a:txBody>
-                  <a:tcPr marL="50800" marR="50800" marT="25400" marB="25400" anchor="ctr">
-                    <a:lnL w="3810" cap="flat" cmpd="sng" algn="ctr">
-                      <a:solidFill>
-                        <a:srgbClr val="CBD5E0"/>
-                      </a:solidFill>
-                      <a:prstDash val="solid"/>
-                      <a:round/>
-                      <a:headEnd type="none" w="med" len="med"/>
-                      <a:tailEnd type="none" w="med" len="med"/>
-                    </a:lnL>
-                    <a:lnR w="3810" cap="flat" cmpd="sng" algn="ctr">
-                      <a:solidFill>
-                        <a:srgbClr val="CBD5E0"/>
-                      </a:solidFill>
-                      <a:prstDash val="solid"/>
-                      <a:round/>
-                      <a:headEnd type="none" w="med" len="med"/>
-                      <a:tailEnd type="none" w="med" len="med"/>
-                    </a:lnR>
-                    <a:lnT w="3810" cap="flat" cmpd="sng" algn="ctr">
-                      <a:solidFill>
-                        <a:srgbClr val="CBD5E0"/>
-                      </a:solidFill>
-                      <a:prstDash val="solid"/>
-                      <a:round/>
-                      <a:headEnd type="none" w="med" len="med"/>
-                      <a:tailEnd type="none" w="med" len="med"/>
-                    </a:lnT>
-                    <a:lnB w="3810" cap="flat" cmpd="sng" algn="ctr">
-                      <a:solidFill>
-                        <a:srgbClr val="CBD5E0"/>
-                      </a:solidFill>
-                      <a:prstDash val="solid"/>
-                      <a:round/>
-                      <a:headEnd type="none" w="med" len="med"/>
-                      <a:tailEnd type="none" w="med" len="med"/>
-                    </a:lnB>
-                    <a:solidFill>
-                      <a:srgbClr val="F7FAFC"/>
-                    </a:solidFill>
-                  </a:tcPr>
-                </a:tc>
-                <a:tc>
-                  <a:txBody>
-                    <a:bodyPr/>
-                    <a:lstStyle/>
-                    <a:p>
-                      <a:pPr indent="0" marL="0">
-                        <a:buNone/>
-                      </a:pPr>
-                      <a:r>
-                        <a:rPr lang="en-US" sz="1100" dirty="0">
-                          <a:solidFill>
-                            <a:srgbClr val="10161F"/>
-                          </a:solidFill>
-                          <a:latin typeface="Pretendard" pitchFamily="34" charset="0"/>
-                          <a:ea typeface="Pretendard" pitchFamily="34" charset="-122"/>
-                          <a:cs typeface="Pretendard" pitchFamily="34" charset="-120"/>
-                        </a:rPr>
-                        <a:t>95.5억</a:t>
-                      </a:r>
-                      <a:endParaRPr lang="en-US" sz="1100" dirty="0">
-                        <a:latin typeface="Pretendard" charset="0"/>
-                        <a:ea typeface="Pretendard" charset="0"/>
-                        <a:cs typeface="Pretendard" charset="0"/>
-                      </a:endParaRPr>
-                    </a:p>
-                  </a:txBody>
-                  <a:tcPr marL="50800" marR="50800" marT="25400" marB="25400" anchor="ctr">
-                    <a:lnL w="3810" cap="flat" cmpd="sng" algn="ctr">
-                      <a:solidFill>
-                        <a:srgbClr val="CBD5E0"/>
-                      </a:solidFill>
-                      <a:prstDash val="solid"/>
-                      <a:round/>
-                      <a:headEnd type="none" w="med" len="med"/>
-                      <a:tailEnd type="none" w="med" len="med"/>
-                    </a:lnL>
-                    <a:lnR w="3810" cap="flat" cmpd="sng" algn="ctr">
-                      <a:solidFill>
-                        <a:srgbClr val="CBD5E0"/>
-                      </a:solidFill>
-                      <a:prstDash val="solid"/>
-                      <a:round/>
-                      <a:headEnd type="none" w="med" len="med"/>
-                      <a:tailEnd type="none" w="med" len="med"/>
-                    </a:lnR>
-                    <a:lnT w="3810" cap="flat" cmpd="sng" algn="ctr">
-                      <a:solidFill>
-                        <a:srgbClr val="CBD5E0"/>
-                      </a:solidFill>
-                      <a:prstDash val="solid"/>
-                      <a:round/>
-                      <a:headEnd type="none" w="med" len="med"/>
-                      <a:tailEnd type="none" w="med" len="med"/>
-                    </a:lnT>
-                    <a:lnB w="3810" cap="flat" cmpd="sng" algn="ctr">
-                      <a:solidFill>
-                        <a:srgbClr val="CBD5E0"/>
-                      </a:solidFill>
-                      <a:prstDash val="solid"/>
-                      <a:round/>
-                      <a:headEnd type="none" w="med" len="med"/>
-                      <a:tailEnd type="none" w="med" len="med"/>
-                    </a:lnB>
-                    <a:solidFill>
-                      <a:srgbClr val="F7FAFC"/>
-                    </a:solidFill>
-                  </a:tcPr>
-                </a:tc>
-                <a:tc>
-                  <a:txBody>
-                    <a:bodyPr/>
-                    <a:lstStyle/>
-                    <a:p>
-                      <a:pPr indent="0" marL="0">
-                        <a:buNone/>
-                      </a:pPr>
-                      <a:r>
-                        <a:rPr lang="en-US" sz="1100" dirty="0">
-                          <a:solidFill>
-                            <a:srgbClr val="10161F"/>
-                          </a:solidFill>
-                          <a:latin typeface="Pretendard" pitchFamily="34" charset="0"/>
-                          <a:ea typeface="Pretendard" pitchFamily="34" charset="-122"/>
-                          <a:cs typeface="Pretendard" pitchFamily="34" charset="-120"/>
-                        </a:rPr>
-                        <a:t>-</a:t>
-                      </a:r>
-                      <a:endParaRPr lang="en-US" sz="1100" dirty="0">
-                        <a:latin typeface="Pretendard" charset="0"/>
-                        <a:ea typeface="Pretendard" charset="0"/>
-                        <a:cs typeface="Pretendard" charset="0"/>
-                      </a:endParaRPr>
-                    </a:p>
-                  </a:txBody>
-                  <a:tcPr marL="50800" marR="50800" marT="25400" marB="25400" anchor="ctr">
-                    <a:lnL w="3810" cap="flat" cmpd="sng" algn="ctr">
-                      <a:solidFill>
-                        <a:srgbClr val="CBD5E0"/>
-                      </a:solidFill>
-                      <a:prstDash val="solid"/>
-                      <a:round/>
-                      <a:headEnd type="none" w="med" len="med"/>
-                      <a:tailEnd type="none" w="med" len="med"/>
-                    </a:lnL>
-                    <a:lnR w="3810" cap="flat" cmpd="sng" algn="ctr">
-                      <a:solidFill>
-                        <a:srgbClr val="CBD5E0"/>
-                      </a:solidFill>
-                      <a:prstDash val="solid"/>
-                      <a:round/>
-                      <a:headEnd type="none" w="med" len="med"/>
-                      <a:tailEnd type="none" w="med" len="med"/>
-                    </a:lnR>
-                    <a:lnT w="3810" cap="flat" cmpd="sng" algn="ctr">
-                      <a:solidFill>
-                        <a:srgbClr val="CBD5E0"/>
-                      </a:solidFill>
-                      <a:prstDash val="solid"/>
-                      <a:round/>
-                      <a:headEnd type="none" w="med" len="med"/>
-                      <a:tailEnd type="none" w="med" len="med"/>
-                    </a:lnT>
-                    <a:lnB w="3810" cap="flat" cmpd="sng" algn="ctr">
-                      <a:solidFill>
-                        <a:srgbClr val="CBD5E0"/>
-                      </a:solidFill>
-                      <a:prstDash val="solid"/>
-                      <a:round/>
-                      <a:headEnd type="none" w="med" len="med"/>
-                      <a:tailEnd type="none" w="med" len="med"/>
-                    </a:lnB>
-                    <a:solidFill>
-                      <a:srgbClr val="F7FAFC"/>
-                    </a:solidFill>
-                  </a:tcPr>
-                </a:tc>
-              </a:tr>
-            </a:tbl>
-          </a:graphicData>
-        </a:graphic>
-      </p:graphicFrame>
-      <p:sp>
-        <p:nvSpPr>
-          <p:cNvPr id="31" name="Shape 28"/>
-          <p:cNvSpPr/>
-          <p:nvPr/>
-        </p:nvSpPr>
-        <p:spPr>
-          <a:xfrm>
-            <a:off x="6461608" y="4069080"/>
-            <a:ext cx="4934560" cy="1463040"/>
-          </a:xfrm>
-          <a:prstGeom prst="roundRect">
-            <a:avLst>
-              <a:gd name="adj" fmla="val 3750"/>
-            </a:avLst>
-          </a:prstGeom>
-          <a:solidFill>
-            <a:srgbClr val="FEEBC8"/>
-          </a:solidFill>
-          <a:ln/>
-        </p:spPr>
-      </p:sp>
-      <p:sp>
-        <p:nvSpPr>
-          <p:cNvPr id="32" name="Shape 29"/>
-          <p:cNvSpPr/>
-          <p:nvPr/>
-        </p:nvSpPr>
-        <p:spPr>
-          <a:xfrm>
-            <a:off x="6461608" y="4123944"/>
-            <a:ext cx="36576" cy="1353312"/>
-          </a:xfrm>
-          <a:prstGeom prst="rect">
-            <a:avLst/>
-          </a:prstGeom>
-          <a:solidFill>
-            <a:srgbClr val="9C4221"/>
-          </a:solidFill>
-          <a:ln/>
-        </p:spPr>
-      </p:sp>
-      <p:sp>
-        <p:nvSpPr>
-          <p:cNvPr id="33" name="Text 30"/>
-          <p:cNvSpPr/>
-          <p:nvPr/>
-        </p:nvSpPr>
-        <p:spPr>
-          <a:xfrm>
-            <a:off x="6607912" y="4160520"/>
-            <a:ext cx="4678528" cy="201168"/>
-          </a:xfrm>
-          <a:prstGeom prst="rect">
-            <a:avLst/>
-          </a:prstGeom>
-          <a:noFill/>
-          <a:ln/>
-        </p:spPr>
-        <p:txBody>
-          <a:bodyPr wrap="square" lIns="0" tIns="0" rIns="0" bIns="0" rtlCol="0" anchor="ctr"/>
-          <a:lstStyle/>
-          <a:p>
-            <a:pPr indent="0" marL="0">
-              <a:buNone/>
-            </a:pPr>
-            <a:r>
-              <a:rPr lang="en-US" sz="1050" b="1" dirty="0">
-                <a:solidFill>
-                  <a:srgbClr val="9C4221"/>
-                </a:solidFill>
-                <a:latin typeface="Pretendard" pitchFamily="34" charset="0"/>
-                <a:ea typeface="Pretendard" pitchFamily="34" charset="-122"/>
-                <a:cs typeface="Pretendard" pitchFamily="34" charset="-120"/>
-              </a:rPr>
-              <a:t>역레버리지 유의 구간</a:t>
-            </a:r>
             <a:endParaRPr lang="en-US" sz="1050" dirty="0"/>
           </a:p>
         </p:txBody>
       </p:sp>
       <p:sp>
         <p:nvSpPr>
-          <p:cNvPr id="34" name="Text 31"/>
-          <p:cNvSpPr/>
-          <p:nvPr/>
-        </p:nvSpPr>
-        <p:spPr>
-          <a:xfrm>
-            <a:off x="6607912" y="4361688"/>
-            <a:ext cx="4678528" cy="1133856"/>
+          <p:cNvPr id="15" name="Text 13"/>
+          <p:cNvSpPr/>
+          <p:nvPr/>
+        </p:nvSpPr>
+        <p:spPr>
+          <a:xfrm>
+            <a:off x="7930591" y="1938528"/>
+            <a:ext cx="3584448" cy="1316736"/>
           </a:xfrm>
           <a:prstGeom prst="rect">
             <a:avLst/>
@@ -10601,7 +9803,7 @@
                 <a:ea typeface="Pretendard" pitchFamily="34" charset="-122"/>
                 <a:cs typeface="Pretendard" pitchFamily="34" charset="-120"/>
               </a:rPr>
-              <a:t>차입 금리가 자산 총수익률을 상회하여 대출 실행 시 자기자본수익률이 하락할 수 있습니다. 에쿼티 비중 확대를 권장합니다.</a:t>
+              <a:t>건폐율 50%, 용적률 250% 적용 시 약 680평 신축 가능합니다.</a:t>
             </a:r>
             <a:endParaRPr lang="en-US" sz="980" dirty="0"/>
           </a:p>
@@ -10609,7 +9811,7 @@
       </p:sp>
       <p:sp>
         <p:nvSpPr>
-          <p:cNvPr id="35" name="Text 32"/>
+          <p:cNvPr id="16" name="Text 14"/>
           <p:cNvSpPr/>
           <p:nvPr/>
         </p:nvSpPr>
@@ -10648,7 +9850,7 @@
       </p:sp>
       <p:sp>
         <p:nvSpPr>
-          <p:cNvPr id="36" name="Text 33"/>
+          <p:cNvPr id="17" name="Text 15"/>
           <p:cNvSpPr/>
           <p:nvPr/>
         </p:nvSpPr>
@@ -10809,7 +10011,7 @@
                 <a:ea typeface="Arial" pitchFamily="34" charset="-122"/>
                 <a:cs typeface="Arial" pitchFamily="34" charset="-120"/>
               </a:rPr>
-              <a:t>Thesis</a:t>
+              <a:t>Feasibility</a:t>
             </a:r>
             <a:endParaRPr lang="en-US" sz="950" dirty="0"/>
           </a:p>
@@ -10850,7 +10052,7 @@
                 <a:ea typeface="Pretendard" pitchFamily="34" charset="-122"/>
                 <a:cs typeface="Pretendard" pitchFamily="34" charset="-120"/>
               </a:rPr>
-              <a:t>투자 논거</a:t>
+              <a:t>사업수지</a:t>
             </a:r>
             <a:endParaRPr lang="en-US" sz="2300" dirty="0"/>
           </a:p>
@@ -10864,20 +10066,16 @@
         </p:nvSpPr>
         <p:spPr>
           <a:xfrm>
-            <a:off x="566928" y="4937760"/>
-            <a:ext cx="11057839" cy="804672"/>
-          </a:xfrm>
-          <a:prstGeom prst="roundRect">
-            <a:avLst>
-              <a:gd name="adj" fmla="val 6818"/>
-            </a:avLst>
-          </a:prstGeom>
-          <a:solidFill>
-            <a:srgbClr val="F3EBDA"/>
-          </a:solidFill>
-          <a:ln w="10160">
+            <a:off x="566928" y="1325880"/>
+            <a:ext cx="11057839" cy="0"/>
+          </a:xfrm>
+          <a:prstGeom prst="line">
+            <a:avLst/>
+          </a:prstGeom>
+          <a:noFill/>
+          <a:ln w="19050">
             <a:solidFill>
-              <a:srgbClr val="D9B668"/>
+              <a:srgbClr val="B98A2E"/>
             </a:solidFill>
             <a:prstDash val="solid"/>
           </a:ln>
@@ -10885,14 +10083,56 @@
       </p:sp>
       <p:sp>
         <p:nvSpPr>
-          <p:cNvPr id="7" name="Text 5"/>
-          <p:cNvSpPr/>
-          <p:nvPr/>
-        </p:nvSpPr>
-        <p:spPr>
-          <a:xfrm>
-            <a:off x="749808" y="5047488"/>
-            <a:ext cx="1691640" cy="256032"/>
+          <p:cNvPr id="7" name="Shape 5"/>
+          <p:cNvSpPr/>
+          <p:nvPr/>
+        </p:nvSpPr>
+        <p:spPr>
+          <a:xfrm>
+            <a:off x="566928" y="1645920"/>
+            <a:ext cx="11057839" cy="1280160"/>
+          </a:xfrm>
+          <a:prstGeom prst="roundRect">
+            <a:avLst>
+              <a:gd name="adj" fmla="val 4286"/>
+            </a:avLst>
+          </a:prstGeom>
+          <a:solidFill>
+            <a:srgbClr val="BEE3F8"/>
+          </a:solidFill>
+          <a:ln/>
+        </p:spPr>
+      </p:sp>
+      <p:sp>
+        <p:nvSpPr>
+          <p:cNvPr id="8" name="Shape 6"/>
+          <p:cNvSpPr/>
+          <p:nvPr/>
+        </p:nvSpPr>
+        <p:spPr>
+          <a:xfrm>
+            <a:off x="566928" y="1700784"/>
+            <a:ext cx="36576" cy="1170432"/>
+          </a:xfrm>
+          <a:prstGeom prst="rect">
+            <a:avLst/>
+          </a:prstGeom>
+          <a:solidFill>
+            <a:srgbClr val="2B6CB0"/>
+          </a:solidFill>
+          <a:ln/>
+        </p:spPr>
+      </p:sp>
+      <p:sp>
+        <p:nvSpPr>
+          <p:cNvPr id="9" name="Text 7"/>
+          <p:cNvSpPr/>
+          <p:nvPr/>
+        </p:nvSpPr>
+        <p:spPr>
+          <a:xfrm>
+            <a:off x="713232" y="1737360"/>
+            <a:ext cx="10801807" cy="201168"/>
           </a:xfrm>
           <a:prstGeom prst="rect">
             <a:avLst/>
@@ -10910,13 +10150,13 @@
             <a:r>
               <a:rPr lang="en-US" sz="1050" b="1" dirty="0">
                 <a:solidFill>
-                  <a:srgbClr val="977024"/>
-                </a:solidFill>
-                <a:latin typeface="Pretendard" pitchFamily="34" charset="0"/>
-                <a:ea typeface="Pretendard" pitchFamily="34" charset="-122"/>
-                <a:cs typeface="Pretendard" pitchFamily="34" charset="-120"/>
-              </a:rPr>
-              <a:t>종합 가치 제안</a:t>
+                  <a:srgbClr val="2B6CB0"/>
+                </a:solidFill>
+                <a:latin typeface="Pretendard" pitchFamily="34" charset="0"/>
+                <a:ea typeface="Pretendard" pitchFamily="34" charset="-122"/>
+                <a:cs typeface="Pretendard" pitchFamily="34" charset="-120"/>
+              </a:rPr>
+              <a:t>투자 가치 제안</a:t>
             </a:r>
             <a:endParaRPr lang="en-US" sz="1050" dirty="0"/>
           </a:p>
@@ -10924,33 +10164,33 @@
       </p:sp>
       <p:sp>
         <p:nvSpPr>
-          <p:cNvPr id="8" name="Text 6"/>
-          <p:cNvSpPr/>
-          <p:nvPr/>
-        </p:nvSpPr>
-        <p:spPr>
-          <a:xfrm>
-            <a:off x="2487168" y="5010912"/>
-            <a:ext cx="8954719" cy="658368"/>
-          </a:xfrm>
-          <a:prstGeom prst="rect">
-            <a:avLst/>
-          </a:prstGeom>
-          <a:noFill/>
-          <a:ln/>
-        </p:spPr>
-        <p:txBody>
-          <a:bodyPr wrap="square" lIns="0" tIns="0" rIns="0" bIns="0" rtlCol="0" anchor="ctr"/>
+          <p:cNvPr id="10" name="Text 8"/>
+          <p:cNvSpPr/>
+          <p:nvPr/>
+        </p:nvSpPr>
+        <p:spPr>
+          <a:xfrm>
+            <a:off x="713232" y="1938528"/>
+            <a:ext cx="10801807" cy="950976"/>
+          </a:xfrm>
+          <a:prstGeom prst="rect">
+            <a:avLst/>
+          </a:prstGeom>
+          <a:noFill/>
+          <a:ln/>
+        </p:spPr>
+        <p:txBody>
+          <a:bodyPr wrap="square" lIns="0" tIns="0" rIns="0" bIns="0" rtlCol="0" anchor="t"/>
           <a:lstStyle/>
           <a:p>
             <a:pPr indent="0" marL="0">
               <a:lnSpc>
-                <a:spcPct val="125000"/>
+                <a:spcPct val="108000"/>
               </a:lnSpc>
               <a:buNone/>
             </a:pPr>
             <a:r>
-              <a:rPr lang="en-US" sz="1100" dirty="0">
+              <a:rPr lang="en-US" sz="980" dirty="0">
                 <a:solidFill>
                   <a:srgbClr val="10161F"/>
                 </a:solidFill>
@@ -10958,15 +10198,15 @@
                 <a:ea typeface="Pretendard" pitchFamily="34" charset="-122"/>
                 <a:cs typeface="Pretendard" pitchFamily="34" charset="-120"/>
               </a:rPr>
-              <a:t>테헤란로 프라임 입지의 개발 가치와 용적률 잔여 활용 가능성이 핵심입니다.</a:t>
-            </a:r>
-            <a:endParaRPr lang="en-US" sz="1100" dirty="0"/>
-          </a:p>
-        </p:txBody>
-      </p:sp>
-      <p:sp>
-        <p:nvSpPr>
-          <p:cNvPr id="9" name="Text 7"/>
+              <a:t>예상 개발이익률 약 28%, 완공 후 자산가치 350억 상회 전망입니다.</a:t>
+            </a:r>
+            <a:endParaRPr lang="en-US" sz="980" dirty="0"/>
+          </a:p>
+        </p:txBody>
+      </p:sp>
+      <p:sp>
+        <p:nvSpPr>
+          <p:cNvPr id="11" name="Text 9"/>
           <p:cNvSpPr/>
           <p:nvPr/>
         </p:nvSpPr>
@@ -11005,7 +10245,7 @@
       </p:sp>
       <p:sp>
         <p:nvSpPr>
-          <p:cNvPr id="10" name="Text 8"/>
+          <p:cNvPr id="12" name="Text 10"/>
           <p:cNvSpPr/>
           <p:nvPr/>
         </p:nvSpPr>
@@ -11166,7 +10406,7 @@
                 <a:ea typeface="Arial" pitchFamily="34" charset="-122"/>
                 <a:cs typeface="Arial" pitchFamily="34" charset="-120"/>
               </a:rPr>
-              <a:t>Risk</a:t>
+              <a:t>Thesis</a:t>
             </a:r>
             <a:endParaRPr lang="en-US" sz="950" dirty="0"/>
           </a:p>
@@ -11207,7 +10447,7 @@
                 <a:ea typeface="Pretendard" pitchFamily="34" charset="-122"/>
                 <a:cs typeface="Pretendard" pitchFamily="34" charset="-120"/>
               </a:rPr>
-              <a:t>리스크</a:t>
+              <a:t>투자 논거</a:t>
             </a:r>
             <a:endParaRPr lang="en-US" sz="2300" dirty="0"/>
           </a:p>
@@ -11221,20 +10461,20 @@
         </p:nvSpPr>
         <p:spPr>
           <a:xfrm>
-            <a:off x="566928" y="1417320"/>
-            <a:ext cx="11057839" cy="3657600"/>
+            <a:off x="566928" y="4937760"/>
+            <a:ext cx="11057839" cy="804672"/>
           </a:xfrm>
           <a:prstGeom prst="roundRect">
             <a:avLst>
-              <a:gd name="adj" fmla="val 1500"/>
+              <a:gd name="adj" fmla="val 6818"/>
             </a:avLst>
           </a:prstGeom>
           <a:solidFill>
-            <a:srgbClr val="F7FAFC"/>
+            <a:srgbClr val="F3EBDA"/>
           </a:solidFill>
-          <a:ln w="6350">
+          <a:ln w="10160">
             <a:solidFill>
-              <a:srgbClr val="CBD5E0"/>
+              <a:srgbClr val="D9B668"/>
             </a:solidFill>
             <a:prstDash val="solid"/>
           </a:ln>
@@ -11242,23 +10482,42 @@
       </p:sp>
       <p:sp>
         <p:nvSpPr>
-          <p:cNvPr id="7" name="Shape 5"/>
-          <p:cNvSpPr/>
-          <p:nvPr/>
-        </p:nvSpPr>
-        <p:spPr>
-          <a:xfrm>
-            <a:off x="566928" y="1417320"/>
-            <a:ext cx="11057839" cy="45720"/>
-          </a:xfrm>
-          <a:prstGeom prst="rect">
-            <a:avLst/>
-          </a:prstGeom>
-          <a:solidFill>
-            <a:srgbClr val="B98A2E"/>
-          </a:solidFill>
-          <a:ln/>
-        </p:spPr>
+          <p:cNvPr id="7" name="Text 5"/>
+          <p:cNvSpPr/>
+          <p:nvPr/>
+        </p:nvSpPr>
+        <p:spPr>
+          <a:xfrm>
+            <a:off x="749808" y="5047488"/>
+            <a:ext cx="1691640" cy="256032"/>
+          </a:xfrm>
+          <a:prstGeom prst="rect">
+            <a:avLst/>
+          </a:prstGeom>
+          <a:noFill/>
+          <a:ln/>
+        </p:spPr>
+        <p:txBody>
+          <a:bodyPr wrap="square" lIns="0" tIns="0" rIns="0" bIns="0" rtlCol="0" anchor="ctr"/>
+          <a:lstStyle/>
+          <a:p>
+            <a:pPr indent="0" marL="0">
+              <a:buNone/>
+            </a:pPr>
+            <a:r>
+              <a:rPr lang="en-US" sz="1050" b="1" dirty="0">
+                <a:solidFill>
+                  <a:srgbClr val="977024"/>
+                </a:solidFill>
+                <a:latin typeface="Pretendard" pitchFamily="34" charset="0"/>
+                <a:ea typeface="Pretendard" pitchFamily="34" charset="-122"/>
+                <a:cs typeface="Pretendard" pitchFamily="34" charset="-120"/>
+              </a:rPr>
+              <a:t>종합 가치 제안</a:t>
+            </a:r>
+            <a:endParaRPr lang="en-US" sz="1050" dirty="0"/>
+          </a:p>
+        </p:txBody>
       </p:sp>
       <p:sp>
         <p:nvSpPr>
@@ -11268,8 +10527,8 @@
         </p:nvSpPr>
         <p:spPr>
           <a:xfrm>
-            <a:off x="795528" y="1618488"/>
-            <a:ext cx="10600639" cy="292608"/>
+            <a:off x="2487168" y="5010912"/>
+            <a:ext cx="8954719" cy="658368"/>
           </a:xfrm>
           <a:prstGeom prst="rect">
             <a:avLst/>
@@ -11282,178 +10541,29 @@
           <a:lstStyle/>
           <a:p>
             <a:pPr indent="0" marL="0">
-              <a:buNone/>
-            </a:pPr>
-            <a:r>
-              <a:rPr lang="en-US" sz="1350" b="1" dirty="0">
-                <a:solidFill>
-                  <a:srgbClr val="977024"/>
-                </a:solidFill>
-                <a:latin typeface="Pretendard" pitchFamily="34" charset="0"/>
-                <a:ea typeface="Pretendard" pitchFamily="34" charset="-122"/>
-                <a:cs typeface="Pretendard" pitchFamily="34" charset="-120"/>
-              </a:rPr>
-              <a:t>인허가 지연</a:t>
-            </a:r>
-            <a:endParaRPr lang="en-US" sz="1350" dirty="0"/>
+              <a:lnSpc>
+                <a:spcPct val="125000"/>
+              </a:lnSpc>
+              <a:buNone/>
+            </a:pPr>
+            <a:r>
+              <a:rPr lang="en-US" sz="1100" dirty="0">
+                <a:solidFill>
+                  <a:srgbClr val="10161F"/>
+                </a:solidFill>
+                <a:latin typeface="Pretendard" pitchFamily="34" charset="0"/>
+                <a:ea typeface="Pretendard" pitchFamily="34" charset="-122"/>
+                <a:cs typeface="Pretendard" pitchFamily="34" charset="-120"/>
+              </a:rPr>
+              <a:t>테헤란로 프라임 입지의 개발 가치와 용적률 잔여 활용 가능성이 핵심입니다.</a:t>
+            </a:r>
+            <a:endParaRPr lang="en-US" sz="1100" dirty="0"/>
           </a:p>
         </p:txBody>
       </p:sp>
       <p:sp>
         <p:nvSpPr>
           <p:cNvPr id="9" name="Text 7"/>
-          <p:cNvSpPr/>
-          <p:nvPr/>
-        </p:nvSpPr>
-        <p:spPr>
-          <a:xfrm>
-            <a:off x="795528" y="1947672"/>
-            <a:ext cx="10600639" cy="365760"/>
-          </a:xfrm>
-          <a:prstGeom prst="rect">
-            <a:avLst/>
-          </a:prstGeom>
-          <a:noFill/>
-          <a:ln/>
-        </p:spPr>
-        <p:txBody>
-          <a:bodyPr wrap="square" lIns="0" tIns="0" rIns="0" bIns="0" rtlCol="0" anchor="ctr">
-            <a:normAutofit/>
-          </a:bodyPr>
-          <a:lstStyle/>
-          <a:p>
-            <a:pPr indent="0" marL="0">
-              <a:buNone/>
-            </a:pPr>
-            <a:r>
-              <a:rPr lang="en-US" sz="1250" b="1" dirty="0">
-                <a:solidFill>
-                  <a:srgbClr val="10161F"/>
-                </a:solidFill>
-                <a:latin typeface="Pretendard" pitchFamily="34" charset="0"/>
-                <a:ea typeface="Pretendard" pitchFamily="34" charset="-122"/>
-                <a:cs typeface="Pretendard" pitchFamily="34" charset="-120"/>
-              </a:rPr>
-              <a:t>사전협의 완료</a:t>
-            </a:r>
-            <a:endParaRPr lang="en-US" sz="1250" dirty="0"/>
-          </a:p>
-        </p:txBody>
-      </p:sp>
-      <p:sp>
-        <p:nvSpPr>
-          <p:cNvPr id="10" name="Text 8"/>
-          <p:cNvSpPr/>
-          <p:nvPr/>
-        </p:nvSpPr>
-        <p:spPr>
-          <a:xfrm>
-            <a:off x="795528" y="2377440"/>
-            <a:ext cx="10600639" cy="2606040"/>
-          </a:xfrm>
-          <a:prstGeom prst="rect">
-            <a:avLst/>
-          </a:prstGeom>
-          <a:noFill/>
-          <a:ln/>
-        </p:spPr>
-        <p:txBody>
-          <a:bodyPr wrap="square" lIns="0" tIns="0" rIns="0" bIns="0" rtlCol="0" anchor="t">
-            <a:normAutofit/>
-          </a:bodyPr>
-          <a:lstStyle/>
-          <a:p>
-            <a:pPr marL="342900" indent="-342900">
-              <a:lnSpc>
-                <a:spcPct val="115000"/>
-              </a:lnSpc>
-              <a:buSzPct val="100000"/>
-              <a:buChar char="•"/>
-            </a:pPr>
-            <a:r>
-              <a:rPr lang="en-US" sz="1100" dirty="0">
-                <a:solidFill>
-                  <a:srgbClr val="10161F"/>
-                </a:solidFill>
-                <a:latin typeface="Pretendard" pitchFamily="34" charset="0"/>
-                <a:ea typeface="Pretendard" pitchFamily="34" charset="-122"/>
-                <a:cs typeface="Pretendard" pitchFamily="34" charset="-120"/>
-              </a:rPr>
-              <a:t>2개월 내 착수 가능</a:t>
-            </a:r>
-            <a:endParaRPr lang="en-US" sz="1100" dirty="0"/>
-          </a:p>
-        </p:txBody>
-      </p:sp>
-      <p:sp>
-        <p:nvSpPr>
-          <p:cNvPr id="11" name="Shape 9"/>
-          <p:cNvSpPr/>
-          <p:nvPr/>
-        </p:nvSpPr>
-        <p:spPr>
-          <a:xfrm>
-            <a:off x="566928" y="5193792"/>
-            <a:ext cx="11057839" cy="621792"/>
-          </a:xfrm>
-          <a:prstGeom prst="roundRect">
-            <a:avLst>
-              <a:gd name="adj" fmla="val 8824"/>
-            </a:avLst>
-          </a:prstGeom>
-          <a:solidFill>
-            <a:srgbClr val="F7FAFC"/>
-          </a:solidFill>
-          <a:ln w="6350">
-            <a:solidFill>
-              <a:srgbClr val="CBD5E0"/>
-            </a:solidFill>
-            <a:prstDash val="solid"/>
-          </a:ln>
-        </p:spPr>
-      </p:sp>
-      <p:sp>
-        <p:nvSpPr>
-          <p:cNvPr id="12" name="Text 10"/>
-          <p:cNvSpPr/>
-          <p:nvPr/>
-        </p:nvSpPr>
-        <p:spPr>
-          <a:xfrm>
-            <a:off x="795528" y="5193792"/>
-            <a:ext cx="10600639" cy="621792"/>
-          </a:xfrm>
-          <a:prstGeom prst="rect">
-            <a:avLst/>
-          </a:prstGeom>
-          <a:noFill/>
-          <a:ln/>
-        </p:spPr>
-        <p:txBody>
-          <a:bodyPr wrap="square" lIns="0" tIns="0" rIns="0" bIns="0" rtlCol="0" anchor="ctr"/>
-          <a:lstStyle/>
-          <a:p>
-            <a:pPr indent="0" marL="0">
-              <a:buNone/>
-            </a:pPr>
-            <a:r>
-              <a:rPr lang="en-US" sz="1100" dirty="0">
-                <a:solidFill>
-                  <a:srgbClr val="10161F"/>
-                </a:solidFill>
-                <a:latin typeface="Pretendard" pitchFamily="34" charset="0"/>
-                <a:ea typeface="Pretendard" pitchFamily="34" charset="-122"/>
-                <a:cs typeface="Pretendard" pitchFamily="34" charset="-120"/>
-              </a:rPr>
-              <a:t>※ 본 리스크 체크는 공부 및 브로커 확인 기반이며, 매수 전 전문 실사팀(변호사/건축사)을 통한 정밀 실사가 필요합니다.</a:t>
-            </a:r>
-            <a:endParaRPr lang="en-US" sz="1100" dirty="0"/>
-          </a:p>
-        </p:txBody>
-      </p:sp>
-      <p:sp>
-        <p:nvSpPr>
-          <p:cNvPr id="13" name="Text 11"/>
           <p:cNvSpPr/>
           <p:nvPr/>
         </p:nvSpPr>
@@ -11492,7 +10602,7 @@
       </p:sp>
       <p:sp>
         <p:nvSpPr>
-          <p:cNvPr id="14" name="Text 12"/>
+          <p:cNvPr id="10" name="Text 8"/>
           <p:cNvSpPr/>
           <p:nvPr/>
         </p:nvSpPr>
@@ -11653,7 +10763,7 @@
                 <a:ea typeface="Arial" pitchFamily="34" charset="-122"/>
                 <a:cs typeface="Arial" pitchFamily="34" charset="-120"/>
               </a:rPr>
-              <a:t>Checklist</a:t>
+              <a:t>Risk</a:t>
             </a:r>
             <a:endParaRPr lang="en-US" sz="950" dirty="0"/>
           </a:p>
@@ -11694,7 +10804,7 @@
                 <a:ea typeface="Pretendard" pitchFamily="34" charset="-122"/>
                 <a:cs typeface="Pretendard" pitchFamily="34" charset="-120"/>
               </a:rPr>
-              <a:t>실사 체크리스트</a:t>
+              <a:t>리스크</a:t>
             </a:r>
             <a:endParaRPr lang="en-US" sz="2300" dirty="0"/>
           </a:p>
@@ -11702,63 +10812,26 @@
       </p:sp>
       <p:sp>
         <p:nvSpPr>
-          <p:cNvPr id="6" name="Text 4"/>
-          <p:cNvSpPr/>
-          <p:nvPr/>
-        </p:nvSpPr>
-        <p:spPr>
-          <a:xfrm>
-            <a:off x="566928" y="1371600"/>
-            <a:ext cx="11057839" cy="237744"/>
-          </a:xfrm>
-          <a:prstGeom prst="rect">
-            <a:avLst/>
-          </a:prstGeom>
-          <a:noFill/>
-          <a:ln/>
-        </p:spPr>
-        <p:txBody>
-          <a:bodyPr wrap="square" lIns="0" tIns="0" rIns="0" bIns="0" rtlCol="0" anchor="ctr"/>
-          <a:lstStyle/>
-          <a:p>
-            <a:pPr indent="0" marL="0">
-              <a:buNone/>
-            </a:pPr>
-            <a:r>
-              <a:rPr lang="en-US" sz="1100" b="1" dirty="0">
-                <a:solidFill>
-                  <a:srgbClr val="10161F"/>
-                </a:solidFill>
-                <a:latin typeface="Pretendard" pitchFamily="34" charset="0"/>
-                <a:ea typeface="Pretendard" pitchFamily="34" charset="-122"/>
-                <a:cs typeface="Pretendard" pitchFamily="34" charset="-120"/>
-              </a:rPr>
-              <a:t>거래 안정성 확보를 위한 필수 법률·물리·임대차 실사 점검 항목 (총 6건)</a:t>
-            </a:r>
-            <a:endParaRPr lang="en-US" sz="1100" dirty="0"/>
-          </a:p>
-        </p:txBody>
-      </p:sp>
-      <p:sp>
-        <p:nvSpPr>
-          <p:cNvPr id="7" name="Shape 5"/>
-          <p:cNvSpPr/>
-          <p:nvPr/>
-        </p:nvSpPr>
-        <p:spPr>
-          <a:xfrm>
-            <a:off x="566928" y="1719072"/>
-            <a:ext cx="5368900" cy="749808"/>
-          </a:xfrm>
-          <a:prstGeom prst="rect">
-            <a:avLst/>
+          <p:cNvPr id="6" name="Shape 4"/>
+          <p:cNvSpPr/>
+          <p:nvPr/>
+        </p:nvSpPr>
+        <p:spPr>
+          <a:xfrm>
+            <a:off x="566928" y="1417320"/>
+            <a:ext cx="11057839" cy="3657600"/>
+          </a:xfrm>
+          <a:prstGeom prst="roundRect">
+            <a:avLst>
+              <a:gd name="adj" fmla="val 1500"/>
+            </a:avLst>
           </a:prstGeom>
           <a:solidFill>
             <a:srgbClr val="F7FAFC"/>
           </a:solidFill>
           <a:ln w="6350">
             <a:solidFill>
-              <a:srgbClr val="D9B668"/>
+              <a:srgbClr val="CBD5E0"/>
             </a:solidFill>
             <a:prstDash val="solid"/>
           </a:ln>
@@ -11766,60 +10839,101 @@
       </p:sp>
       <p:sp>
         <p:nvSpPr>
-          <p:cNvPr id="8" name="Shape 6"/>
-          <p:cNvSpPr/>
-          <p:nvPr/>
-        </p:nvSpPr>
-        <p:spPr>
-          <a:xfrm>
-            <a:off x="704088" y="1947672"/>
-            <a:ext cx="292608" cy="292608"/>
+          <p:cNvPr id="7" name="Shape 5"/>
+          <p:cNvSpPr/>
+          <p:nvPr/>
+        </p:nvSpPr>
+        <p:spPr>
+          <a:xfrm>
+            <a:off x="566928" y="1417320"/>
+            <a:ext cx="11057839" cy="45720"/>
           </a:xfrm>
           <a:prstGeom prst="rect">
             <a:avLst/>
           </a:prstGeom>
           <a:solidFill>
-            <a:srgbClr val="977024"/>
+            <a:srgbClr val="B98A2E"/>
           </a:solidFill>
           <a:ln/>
         </p:spPr>
       </p:sp>
       <p:sp>
         <p:nvSpPr>
+          <p:cNvPr id="8" name="Text 6"/>
+          <p:cNvSpPr/>
+          <p:nvPr/>
+        </p:nvSpPr>
+        <p:spPr>
+          <a:xfrm>
+            <a:off x="795528" y="1618488"/>
+            <a:ext cx="10600639" cy="292608"/>
+          </a:xfrm>
+          <a:prstGeom prst="rect">
+            <a:avLst/>
+          </a:prstGeom>
+          <a:noFill/>
+          <a:ln/>
+        </p:spPr>
+        <p:txBody>
+          <a:bodyPr wrap="square" lIns="0" tIns="0" rIns="0" bIns="0" rtlCol="0" anchor="ctr"/>
+          <a:lstStyle/>
+          <a:p>
+            <a:pPr indent="0" marL="0">
+              <a:buNone/>
+            </a:pPr>
+            <a:r>
+              <a:rPr lang="en-US" sz="1350" b="1" dirty="0">
+                <a:solidFill>
+                  <a:srgbClr val="977024"/>
+                </a:solidFill>
+                <a:latin typeface="Pretendard" pitchFamily="34" charset="0"/>
+                <a:ea typeface="Pretendard" pitchFamily="34" charset="-122"/>
+                <a:cs typeface="Pretendard" pitchFamily="34" charset="-120"/>
+              </a:rPr>
+              <a:t>인허가 지연</a:t>
+            </a:r>
+            <a:endParaRPr lang="en-US" sz="1350" dirty="0"/>
+          </a:p>
+        </p:txBody>
+      </p:sp>
+      <p:sp>
+        <p:nvSpPr>
           <p:cNvPr id="9" name="Text 7"/>
           <p:cNvSpPr/>
           <p:nvPr/>
         </p:nvSpPr>
         <p:spPr>
           <a:xfrm>
-            <a:off x="704088" y="1947672"/>
-            <a:ext cx="292608" cy="292608"/>
-          </a:xfrm>
-          <a:prstGeom prst="rect">
-            <a:avLst/>
-          </a:prstGeom>
-          <a:noFill/>
-          <a:ln/>
-        </p:spPr>
-        <p:txBody>
-          <a:bodyPr wrap="square" rtlCol="0" anchor="ctr"/>
-          <a:lstStyle/>
-          <a:p>
-            <a:pPr algn="ctr" indent="0" marL="0">
-              <a:buNone/>
-            </a:pPr>
-            <a:r>
-              <a:rPr lang="en-US" sz="1050" b="1" dirty="0">
-                <a:solidFill>
-                  <a:srgbClr val="FFFFFF"/>
-                </a:solidFill>
-                <a:latin typeface="Pretendard" pitchFamily="34" charset="0"/>
-                <a:ea typeface="Pretendard" pitchFamily="34" charset="-122"/>
-                <a:cs typeface="Pretendard" pitchFamily="34" charset="-120"/>
-              </a:rPr>
-              <a:t>✓</a:t>
-            </a:r>
-            <a:endParaRPr lang="en-US" sz="1050" dirty="0"/>
+            <a:off x="795528" y="1947672"/>
+            <a:ext cx="10600639" cy="365760"/>
+          </a:xfrm>
+          <a:prstGeom prst="rect">
+            <a:avLst/>
+          </a:prstGeom>
+          <a:noFill/>
+          <a:ln/>
+        </p:spPr>
+        <p:txBody>
+          <a:bodyPr wrap="square" lIns="0" tIns="0" rIns="0" bIns="0" rtlCol="0" anchor="ctr">
+            <a:normAutofit/>
+          </a:bodyPr>
+          <a:lstStyle/>
+          <a:p>
+            <a:pPr indent="0" marL="0">
+              <a:buNone/>
+            </a:pPr>
+            <a:r>
+              <a:rPr lang="en-US" sz="1250" b="1" dirty="0">
+                <a:solidFill>
+                  <a:srgbClr val="10161F"/>
+                </a:solidFill>
+                <a:latin typeface="Pretendard" pitchFamily="34" charset="0"/>
+                <a:ea typeface="Pretendard" pitchFamily="34" charset="-122"/>
+                <a:cs typeface="Pretendard" pitchFamily="34" charset="-120"/>
+              </a:rPr>
+              <a:t>사전협의 완료</a:t>
+            </a:r>
+            <a:endParaRPr lang="en-US" sz="1250" dirty="0"/>
           </a:p>
         </p:txBody>
       </p:sp>
@@ -11831,27 +10945,30 @@
         </p:nvSpPr>
         <p:spPr>
           <a:xfrm>
-            <a:off x="1097280" y="1792224"/>
-            <a:ext cx="4710532" cy="603504"/>
-          </a:xfrm>
-          <a:prstGeom prst="rect">
-            <a:avLst/>
-          </a:prstGeom>
-          <a:noFill/>
-          <a:ln/>
-        </p:spPr>
-        <p:txBody>
-          <a:bodyPr wrap="square" rtlCol="0" anchor="ctr"/>
-          <a:lstStyle/>
-          <a:p>
-            <a:pPr indent="0" marL="0">
+            <a:off x="795528" y="2377440"/>
+            <a:ext cx="10600639" cy="2606040"/>
+          </a:xfrm>
+          <a:prstGeom prst="rect">
+            <a:avLst/>
+          </a:prstGeom>
+          <a:noFill/>
+          <a:ln/>
+        </p:spPr>
+        <p:txBody>
+          <a:bodyPr wrap="square" lIns="0" tIns="0" rIns="0" bIns="0" rtlCol="0" anchor="t">
+            <a:normAutofit/>
+          </a:bodyPr>
+          <a:lstStyle/>
+          <a:p>
+            <a:pPr marL="342900" indent="-342900">
               <a:lnSpc>
-                <a:spcPct val="110000"/>
+                <a:spcPct val="115000"/>
               </a:lnSpc>
-              <a:buNone/>
-            </a:pPr>
-            <a:r>
-              <a:rPr lang="en-US" sz="950" dirty="0">
+              <a:buSzPct val="100000"/>
+              <a:buChar char="•"/>
+            </a:pPr>
+            <a:r>
+              <a:rPr lang="en-US" sz="1100" dirty="0">
                 <a:solidFill>
                   <a:srgbClr val="10161F"/>
                 </a:solidFill>
@@ -11859,9 +10976,9 @@
                 <a:ea typeface="Pretendard" pitchFamily="34" charset="-122"/>
                 <a:cs typeface="Pretendard" pitchFamily="34" charset="-120"/>
               </a:rPr>
-              <a:t>등기부등본 갑구/을구 권리관계 및 근저당 채권최고액 전액 말소 조건 원본 대조</a:t>
-            </a:r>
-            <a:endParaRPr lang="en-US" sz="950" dirty="0"/>
+              <a:t>2개월 내 착수 가능</a:t>
+            </a:r>
+            <a:endParaRPr lang="en-US" sz="1100" dirty="0"/>
           </a:p>
         </p:txBody>
       </p:sp>
@@ -11873,18 +10990,20 @@
         </p:nvSpPr>
         <p:spPr>
           <a:xfrm>
-            <a:off x="566928" y="2542032"/>
-            <a:ext cx="5368900" cy="749808"/>
-          </a:xfrm>
-          <a:prstGeom prst="rect">
-            <a:avLst/>
+            <a:off x="566928" y="5193792"/>
+            <a:ext cx="11057839" cy="621792"/>
+          </a:xfrm>
+          <a:prstGeom prst="roundRect">
+            <a:avLst>
+              <a:gd name="adj" fmla="val 8824"/>
+            </a:avLst>
           </a:prstGeom>
           <a:solidFill>
             <a:srgbClr val="F7FAFC"/>
           </a:solidFill>
           <a:ln w="6350">
             <a:solidFill>
-              <a:srgbClr val="D9B668"/>
+              <a:srgbClr val="CBD5E0"/>
             </a:solidFill>
             <a:prstDash val="solid"/>
           </a:ln>
@@ -11892,671 +11011,46 @@
       </p:sp>
       <p:sp>
         <p:nvSpPr>
-          <p:cNvPr id="12" name="Shape 10"/>
-          <p:cNvSpPr/>
-          <p:nvPr/>
-        </p:nvSpPr>
-        <p:spPr>
-          <a:xfrm>
-            <a:off x="704088" y="2770632"/>
-            <a:ext cx="292608" cy="292608"/>
-          </a:xfrm>
-          <a:prstGeom prst="rect">
-            <a:avLst/>
-          </a:prstGeom>
-          <a:solidFill>
-            <a:srgbClr val="977024"/>
-          </a:solidFill>
-          <a:ln/>
-        </p:spPr>
+          <p:cNvPr id="12" name="Text 10"/>
+          <p:cNvSpPr/>
+          <p:nvPr/>
+        </p:nvSpPr>
+        <p:spPr>
+          <a:xfrm>
+            <a:off x="795528" y="5193792"/>
+            <a:ext cx="10600639" cy="621792"/>
+          </a:xfrm>
+          <a:prstGeom prst="rect">
+            <a:avLst/>
+          </a:prstGeom>
+          <a:noFill/>
+          <a:ln/>
+        </p:spPr>
+        <p:txBody>
+          <a:bodyPr wrap="square" lIns="0" tIns="0" rIns="0" bIns="0" rtlCol="0" anchor="ctr"/>
+          <a:lstStyle/>
+          <a:p>
+            <a:pPr indent="0" marL="0">
+              <a:buNone/>
+            </a:pPr>
+            <a:r>
+              <a:rPr lang="en-US" sz="1100" dirty="0">
+                <a:solidFill>
+                  <a:srgbClr val="10161F"/>
+                </a:solidFill>
+                <a:latin typeface="Pretendard" pitchFamily="34" charset="0"/>
+                <a:ea typeface="Pretendard" pitchFamily="34" charset="-122"/>
+                <a:cs typeface="Pretendard" pitchFamily="34" charset="-120"/>
+              </a:rPr>
+              <a:t>※ 본 리스크 체크는 공부 및 브로커 확인 기반이며, 매수 전 전문 실사팀(변호사/건축사)을 통한 정밀 실사가 필요합니다.</a:t>
+            </a:r>
+            <a:endParaRPr lang="en-US" sz="1100" dirty="0"/>
+          </a:p>
+        </p:txBody>
       </p:sp>
       <p:sp>
         <p:nvSpPr>
           <p:cNvPr id="13" name="Text 11"/>
-          <p:cNvSpPr/>
-          <p:nvPr/>
-        </p:nvSpPr>
-        <p:spPr>
-          <a:xfrm>
-            <a:off x="704088" y="2770632"/>
-            <a:ext cx="292608" cy="292608"/>
-          </a:xfrm>
-          <a:prstGeom prst="rect">
-            <a:avLst/>
-          </a:prstGeom>
-          <a:noFill/>
-          <a:ln/>
-        </p:spPr>
-        <p:txBody>
-          <a:bodyPr wrap="square" rtlCol="0" anchor="ctr"/>
-          <a:lstStyle/>
-          <a:p>
-            <a:pPr algn="ctr" indent="0" marL="0">
-              <a:buNone/>
-            </a:pPr>
-            <a:r>
-              <a:rPr lang="en-US" sz="1050" b="1" dirty="0">
-                <a:solidFill>
-                  <a:srgbClr val="FFFFFF"/>
-                </a:solidFill>
-                <a:latin typeface="Pretendard" pitchFamily="34" charset="0"/>
-                <a:ea typeface="Pretendard" pitchFamily="34" charset="-122"/>
-                <a:cs typeface="Pretendard" pitchFamily="34" charset="-120"/>
-              </a:rPr>
-              <a:t>✓</a:t>
-            </a:r>
-            <a:endParaRPr lang="en-US" sz="1050" dirty="0"/>
-          </a:p>
-        </p:txBody>
-      </p:sp>
-      <p:sp>
-        <p:nvSpPr>
-          <p:cNvPr id="14" name="Text 12"/>
-          <p:cNvSpPr/>
-          <p:nvPr/>
-        </p:nvSpPr>
-        <p:spPr>
-          <a:xfrm>
-            <a:off x="1097280" y="2615184"/>
-            <a:ext cx="4710532" cy="603504"/>
-          </a:xfrm>
-          <a:prstGeom prst="rect">
-            <a:avLst/>
-          </a:prstGeom>
-          <a:noFill/>
-          <a:ln/>
-        </p:spPr>
-        <p:txBody>
-          <a:bodyPr wrap="square" rtlCol="0" anchor="ctr"/>
-          <a:lstStyle/>
-          <a:p>
-            <a:pPr indent="0" marL="0">
-              <a:lnSpc>
-                <a:spcPct val="110000"/>
-              </a:lnSpc>
-              <a:buNone/>
-            </a:pPr>
-            <a:r>
-              <a:rPr lang="en-US" sz="950" dirty="0">
-                <a:solidFill>
-                  <a:srgbClr val="10161F"/>
-                </a:solidFill>
-                <a:latin typeface="Pretendard" pitchFamily="34" charset="0"/>
-                <a:ea typeface="Pretendard" pitchFamily="34" charset="-122"/>
-                <a:cs typeface="Pretendard" pitchFamily="34" charset="-120"/>
-              </a:rPr>
-              <a:t>임대차 원본 계약서 검토 (보증금, 월임대료, 관리비 실입금 내역 및 제소전화해조서)</a:t>
-            </a:r>
-            <a:endParaRPr lang="en-US" sz="950" dirty="0"/>
-          </a:p>
-        </p:txBody>
-      </p:sp>
-      <p:sp>
-        <p:nvSpPr>
-          <p:cNvPr id="15" name="Shape 13"/>
-          <p:cNvSpPr/>
-          <p:nvPr/>
-        </p:nvSpPr>
-        <p:spPr>
-          <a:xfrm>
-            <a:off x="566928" y="3364992"/>
-            <a:ext cx="5368900" cy="749808"/>
-          </a:xfrm>
-          <a:prstGeom prst="rect">
-            <a:avLst/>
-          </a:prstGeom>
-          <a:solidFill>
-            <a:srgbClr val="F7FAFC"/>
-          </a:solidFill>
-          <a:ln w="6350">
-            <a:solidFill>
-              <a:srgbClr val="D9B668"/>
-            </a:solidFill>
-            <a:prstDash val="solid"/>
-          </a:ln>
-        </p:spPr>
-      </p:sp>
-      <p:sp>
-        <p:nvSpPr>
-          <p:cNvPr id="16" name="Shape 14"/>
-          <p:cNvSpPr/>
-          <p:nvPr/>
-        </p:nvSpPr>
-        <p:spPr>
-          <a:xfrm>
-            <a:off x="704088" y="3593592"/>
-            <a:ext cx="292608" cy="292608"/>
-          </a:xfrm>
-          <a:prstGeom prst="rect">
-            <a:avLst/>
-          </a:prstGeom>
-          <a:solidFill>
-            <a:srgbClr val="977024"/>
-          </a:solidFill>
-          <a:ln/>
-        </p:spPr>
-      </p:sp>
-      <p:sp>
-        <p:nvSpPr>
-          <p:cNvPr id="17" name="Text 15"/>
-          <p:cNvSpPr/>
-          <p:nvPr/>
-        </p:nvSpPr>
-        <p:spPr>
-          <a:xfrm>
-            <a:off x="704088" y="3593592"/>
-            <a:ext cx="292608" cy="292608"/>
-          </a:xfrm>
-          <a:prstGeom prst="rect">
-            <a:avLst/>
-          </a:prstGeom>
-          <a:noFill/>
-          <a:ln/>
-        </p:spPr>
-        <p:txBody>
-          <a:bodyPr wrap="square" rtlCol="0" anchor="ctr"/>
-          <a:lstStyle/>
-          <a:p>
-            <a:pPr algn="ctr" indent="0" marL="0">
-              <a:buNone/>
-            </a:pPr>
-            <a:r>
-              <a:rPr lang="en-US" sz="1050" b="1" dirty="0">
-                <a:solidFill>
-                  <a:srgbClr val="FFFFFF"/>
-                </a:solidFill>
-                <a:latin typeface="Pretendard" pitchFamily="34" charset="0"/>
-                <a:ea typeface="Pretendard" pitchFamily="34" charset="-122"/>
-                <a:cs typeface="Pretendard" pitchFamily="34" charset="-120"/>
-              </a:rPr>
-              <a:t>✓</a:t>
-            </a:r>
-            <a:endParaRPr lang="en-US" sz="1050" dirty="0"/>
-          </a:p>
-        </p:txBody>
-      </p:sp>
-      <p:sp>
-        <p:nvSpPr>
-          <p:cNvPr id="18" name="Text 16"/>
-          <p:cNvSpPr/>
-          <p:nvPr/>
-        </p:nvSpPr>
-        <p:spPr>
-          <a:xfrm>
-            <a:off x="1097280" y="3438144"/>
-            <a:ext cx="4710532" cy="603504"/>
-          </a:xfrm>
-          <a:prstGeom prst="rect">
-            <a:avLst/>
-          </a:prstGeom>
-          <a:noFill/>
-          <a:ln/>
-        </p:spPr>
-        <p:txBody>
-          <a:bodyPr wrap="square" rtlCol="0" anchor="ctr"/>
-          <a:lstStyle/>
-          <a:p>
-            <a:pPr indent="0" marL="0">
-              <a:lnSpc>
-                <a:spcPct val="110000"/>
-              </a:lnSpc>
-              <a:buNone/>
-            </a:pPr>
-            <a:r>
-              <a:rPr lang="en-US" sz="950" dirty="0">
-                <a:solidFill>
-                  <a:srgbClr val="10161F"/>
-                </a:solidFill>
-                <a:latin typeface="Pretendard" pitchFamily="34" charset="0"/>
-                <a:ea typeface="Pretendard" pitchFamily="34" charset="-122"/>
-                <a:cs typeface="Pretendard" pitchFamily="34" charset="-120"/>
-              </a:rPr>
-              <a:t>건축물대장상 위반건축물 등재 여부 및 불법 증축·용도변경 이행강제금 납부 이력 점검</a:t>
-            </a:r>
-            <a:endParaRPr lang="en-US" sz="950" dirty="0"/>
-          </a:p>
-        </p:txBody>
-      </p:sp>
-      <p:sp>
-        <p:nvSpPr>
-          <p:cNvPr id="19" name="Shape 17"/>
-          <p:cNvSpPr/>
-          <p:nvPr/>
-        </p:nvSpPr>
-        <p:spPr>
-          <a:xfrm>
-            <a:off x="6255868" y="1719072"/>
-            <a:ext cx="5368900" cy="749808"/>
-          </a:xfrm>
-          <a:prstGeom prst="rect">
-            <a:avLst/>
-          </a:prstGeom>
-          <a:solidFill>
-            <a:srgbClr val="F7FAFC"/>
-          </a:solidFill>
-          <a:ln w="6350">
-            <a:solidFill>
-              <a:srgbClr val="D9B668"/>
-            </a:solidFill>
-            <a:prstDash val="solid"/>
-          </a:ln>
-        </p:spPr>
-      </p:sp>
-      <p:sp>
-        <p:nvSpPr>
-          <p:cNvPr id="20" name="Shape 18"/>
-          <p:cNvSpPr/>
-          <p:nvPr/>
-        </p:nvSpPr>
-        <p:spPr>
-          <a:xfrm>
-            <a:off x="6393028" y="1947672"/>
-            <a:ext cx="292608" cy="292608"/>
-          </a:xfrm>
-          <a:prstGeom prst="rect">
-            <a:avLst/>
-          </a:prstGeom>
-          <a:solidFill>
-            <a:srgbClr val="977024"/>
-          </a:solidFill>
-          <a:ln/>
-        </p:spPr>
-      </p:sp>
-      <p:sp>
-        <p:nvSpPr>
-          <p:cNvPr id="21" name="Text 19"/>
-          <p:cNvSpPr/>
-          <p:nvPr/>
-        </p:nvSpPr>
-        <p:spPr>
-          <a:xfrm>
-            <a:off x="6393028" y="1947672"/>
-            <a:ext cx="292608" cy="292608"/>
-          </a:xfrm>
-          <a:prstGeom prst="rect">
-            <a:avLst/>
-          </a:prstGeom>
-          <a:noFill/>
-          <a:ln/>
-        </p:spPr>
-        <p:txBody>
-          <a:bodyPr wrap="square" rtlCol="0" anchor="ctr"/>
-          <a:lstStyle/>
-          <a:p>
-            <a:pPr algn="ctr" indent="0" marL="0">
-              <a:buNone/>
-            </a:pPr>
-            <a:r>
-              <a:rPr lang="en-US" sz="1050" b="1" dirty="0">
-                <a:solidFill>
-                  <a:srgbClr val="FFFFFF"/>
-                </a:solidFill>
-                <a:latin typeface="Pretendard" pitchFamily="34" charset="0"/>
-                <a:ea typeface="Pretendard" pitchFamily="34" charset="-122"/>
-                <a:cs typeface="Pretendard" pitchFamily="34" charset="-120"/>
-              </a:rPr>
-              <a:t>✓</a:t>
-            </a:r>
-            <a:endParaRPr lang="en-US" sz="1050" dirty="0"/>
-          </a:p>
-        </p:txBody>
-      </p:sp>
-      <p:sp>
-        <p:nvSpPr>
-          <p:cNvPr id="22" name="Text 20"/>
-          <p:cNvSpPr/>
-          <p:nvPr/>
-        </p:nvSpPr>
-        <p:spPr>
-          <a:xfrm>
-            <a:off x="6786220" y="1792224"/>
-            <a:ext cx="4710532" cy="603504"/>
-          </a:xfrm>
-          <a:prstGeom prst="rect">
-            <a:avLst/>
-          </a:prstGeom>
-          <a:noFill/>
-          <a:ln/>
-        </p:spPr>
-        <p:txBody>
-          <a:bodyPr wrap="square" rtlCol="0" anchor="ctr"/>
-          <a:lstStyle/>
-          <a:p>
-            <a:pPr indent="0" marL="0">
-              <a:lnSpc>
-                <a:spcPct val="110000"/>
-              </a:lnSpc>
-              <a:buNone/>
-            </a:pPr>
-            <a:r>
-              <a:rPr lang="en-US" sz="950" dirty="0">
-                <a:solidFill>
-                  <a:srgbClr val="10161F"/>
-                </a:solidFill>
-                <a:latin typeface="Pretendard" pitchFamily="34" charset="0"/>
-                <a:ea typeface="Pretendard" pitchFamily="34" charset="-122"/>
-                <a:cs typeface="Pretendard" pitchFamily="34" charset="-120"/>
-              </a:rPr>
-              <a:t>토지이용계획확인원상 도시계획시설 저촉, 건축선 후퇴, 지구단위계획 특별계획구역 확인</a:t>
-            </a:r>
-            <a:endParaRPr lang="en-US" sz="950" dirty="0"/>
-          </a:p>
-        </p:txBody>
-      </p:sp>
-      <p:sp>
-        <p:nvSpPr>
-          <p:cNvPr id="23" name="Shape 21"/>
-          <p:cNvSpPr/>
-          <p:nvPr/>
-        </p:nvSpPr>
-        <p:spPr>
-          <a:xfrm>
-            <a:off x="6255868" y="2542032"/>
-            <a:ext cx="5368900" cy="749808"/>
-          </a:xfrm>
-          <a:prstGeom prst="rect">
-            <a:avLst/>
-          </a:prstGeom>
-          <a:solidFill>
-            <a:srgbClr val="F7FAFC"/>
-          </a:solidFill>
-          <a:ln w="6350">
-            <a:solidFill>
-              <a:srgbClr val="D9B668"/>
-            </a:solidFill>
-            <a:prstDash val="solid"/>
-          </a:ln>
-        </p:spPr>
-      </p:sp>
-      <p:sp>
-        <p:nvSpPr>
-          <p:cNvPr id="24" name="Shape 22"/>
-          <p:cNvSpPr/>
-          <p:nvPr/>
-        </p:nvSpPr>
-        <p:spPr>
-          <a:xfrm>
-            <a:off x="6393028" y="2770632"/>
-            <a:ext cx="292608" cy="292608"/>
-          </a:xfrm>
-          <a:prstGeom prst="rect">
-            <a:avLst/>
-          </a:prstGeom>
-          <a:solidFill>
-            <a:srgbClr val="977024"/>
-          </a:solidFill>
-          <a:ln/>
-        </p:spPr>
-      </p:sp>
-      <p:sp>
-        <p:nvSpPr>
-          <p:cNvPr id="25" name="Text 23"/>
-          <p:cNvSpPr/>
-          <p:nvPr/>
-        </p:nvSpPr>
-        <p:spPr>
-          <a:xfrm>
-            <a:off x="6393028" y="2770632"/>
-            <a:ext cx="292608" cy="292608"/>
-          </a:xfrm>
-          <a:prstGeom prst="rect">
-            <a:avLst/>
-          </a:prstGeom>
-          <a:noFill/>
-          <a:ln/>
-        </p:spPr>
-        <p:txBody>
-          <a:bodyPr wrap="square" rtlCol="0" anchor="ctr"/>
-          <a:lstStyle/>
-          <a:p>
-            <a:pPr algn="ctr" indent="0" marL="0">
-              <a:buNone/>
-            </a:pPr>
-            <a:r>
-              <a:rPr lang="en-US" sz="1050" b="1" dirty="0">
-                <a:solidFill>
-                  <a:srgbClr val="FFFFFF"/>
-                </a:solidFill>
-                <a:latin typeface="Pretendard" pitchFamily="34" charset="0"/>
-                <a:ea typeface="Pretendard" pitchFamily="34" charset="-122"/>
-                <a:cs typeface="Pretendard" pitchFamily="34" charset="-120"/>
-              </a:rPr>
-              <a:t>✓</a:t>
-            </a:r>
-            <a:endParaRPr lang="en-US" sz="1050" dirty="0"/>
-          </a:p>
-        </p:txBody>
-      </p:sp>
-      <p:sp>
-        <p:nvSpPr>
-          <p:cNvPr id="26" name="Text 24"/>
-          <p:cNvSpPr/>
-          <p:nvPr/>
-        </p:nvSpPr>
-        <p:spPr>
-          <a:xfrm>
-            <a:off x="6786220" y="2615184"/>
-            <a:ext cx="4710532" cy="603504"/>
-          </a:xfrm>
-          <a:prstGeom prst="rect">
-            <a:avLst/>
-          </a:prstGeom>
-          <a:noFill/>
-          <a:ln/>
-        </p:spPr>
-        <p:txBody>
-          <a:bodyPr wrap="square" rtlCol="0" anchor="ctr"/>
-          <a:lstStyle/>
-          <a:p>
-            <a:pPr indent="0" marL="0">
-              <a:lnSpc>
-                <a:spcPct val="110000"/>
-              </a:lnSpc>
-              <a:buNone/>
-            </a:pPr>
-            <a:r>
-              <a:rPr lang="en-US" sz="950" dirty="0">
-                <a:solidFill>
-                  <a:srgbClr val="10161F"/>
-                </a:solidFill>
-                <a:latin typeface="Pretendard" pitchFamily="34" charset="0"/>
-                <a:ea typeface="Pretendard" pitchFamily="34" charset="-122"/>
-                <a:cs typeface="Pretendard" pitchFamily="34" charset="-120"/>
-              </a:rPr>
-              <a:t>기계식 주차기 정기 안전점검 합격증, 승강기 검사필증, 소방 완비증명서 실물 실사</a:t>
-            </a:r>
-            <a:endParaRPr lang="en-US" sz="950" dirty="0"/>
-          </a:p>
-        </p:txBody>
-      </p:sp>
-      <p:sp>
-        <p:nvSpPr>
-          <p:cNvPr id="27" name="Shape 25"/>
-          <p:cNvSpPr/>
-          <p:nvPr/>
-        </p:nvSpPr>
-        <p:spPr>
-          <a:xfrm>
-            <a:off x="6255868" y="3364992"/>
-            <a:ext cx="5368900" cy="749808"/>
-          </a:xfrm>
-          <a:prstGeom prst="rect">
-            <a:avLst/>
-          </a:prstGeom>
-          <a:solidFill>
-            <a:srgbClr val="F7FAFC"/>
-          </a:solidFill>
-          <a:ln w="6350">
-            <a:solidFill>
-              <a:srgbClr val="D9B668"/>
-            </a:solidFill>
-            <a:prstDash val="solid"/>
-          </a:ln>
-        </p:spPr>
-      </p:sp>
-      <p:sp>
-        <p:nvSpPr>
-          <p:cNvPr id="28" name="Shape 26"/>
-          <p:cNvSpPr/>
-          <p:nvPr/>
-        </p:nvSpPr>
-        <p:spPr>
-          <a:xfrm>
-            <a:off x="6393028" y="3593592"/>
-            <a:ext cx="292608" cy="292608"/>
-          </a:xfrm>
-          <a:prstGeom prst="rect">
-            <a:avLst/>
-          </a:prstGeom>
-          <a:solidFill>
-            <a:srgbClr val="977024"/>
-          </a:solidFill>
-          <a:ln/>
-        </p:spPr>
-      </p:sp>
-      <p:sp>
-        <p:nvSpPr>
-          <p:cNvPr id="29" name="Text 27"/>
-          <p:cNvSpPr/>
-          <p:nvPr/>
-        </p:nvSpPr>
-        <p:spPr>
-          <a:xfrm>
-            <a:off x="6393028" y="3593592"/>
-            <a:ext cx="292608" cy="292608"/>
-          </a:xfrm>
-          <a:prstGeom prst="rect">
-            <a:avLst/>
-          </a:prstGeom>
-          <a:noFill/>
-          <a:ln/>
-        </p:spPr>
-        <p:txBody>
-          <a:bodyPr wrap="square" rtlCol="0" anchor="ctr"/>
-          <a:lstStyle/>
-          <a:p>
-            <a:pPr algn="ctr" indent="0" marL="0">
-              <a:buNone/>
-            </a:pPr>
-            <a:r>
-              <a:rPr lang="en-US" sz="1050" b="1" dirty="0">
-                <a:solidFill>
-                  <a:srgbClr val="FFFFFF"/>
-                </a:solidFill>
-                <a:latin typeface="Pretendard" pitchFamily="34" charset="0"/>
-                <a:ea typeface="Pretendard" pitchFamily="34" charset="-122"/>
-                <a:cs typeface="Pretendard" pitchFamily="34" charset="-120"/>
-              </a:rPr>
-              <a:t>✓</a:t>
-            </a:r>
-            <a:endParaRPr lang="en-US" sz="1050" dirty="0"/>
-          </a:p>
-        </p:txBody>
-      </p:sp>
-      <p:sp>
-        <p:nvSpPr>
-          <p:cNvPr id="30" name="Text 28"/>
-          <p:cNvSpPr/>
-          <p:nvPr/>
-        </p:nvSpPr>
-        <p:spPr>
-          <a:xfrm>
-            <a:off x="6786220" y="3438144"/>
-            <a:ext cx="4710532" cy="603504"/>
-          </a:xfrm>
-          <a:prstGeom prst="rect">
-            <a:avLst/>
-          </a:prstGeom>
-          <a:noFill/>
-          <a:ln/>
-        </p:spPr>
-        <p:txBody>
-          <a:bodyPr wrap="square" rtlCol="0" anchor="ctr"/>
-          <a:lstStyle/>
-          <a:p>
-            <a:pPr indent="0" marL="0">
-              <a:lnSpc>
-                <a:spcPct val="110000"/>
-              </a:lnSpc>
-              <a:buNone/>
-            </a:pPr>
-            <a:r>
-              <a:rPr lang="en-US" sz="950" dirty="0">
-                <a:solidFill>
-                  <a:srgbClr val="10161F"/>
-                </a:solidFill>
-                <a:latin typeface="Pretendard" pitchFamily="34" charset="0"/>
-                <a:ea typeface="Pretendard" pitchFamily="34" charset="-122"/>
-                <a:cs typeface="Pretendard" pitchFamily="34" charset="-120"/>
-              </a:rPr>
-              <a:t>정화조 용량 대비 현 업종 적합성 및 하수도 원인자부담금 추가 부과 대상 여부 확인</a:t>
-            </a:r>
-            <a:endParaRPr lang="en-US" sz="950" dirty="0"/>
-          </a:p>
-        </p:txBody>
-      </p:sp>
-      <p:sp>
-        <p:nvSpPr>
-          <p:cNvPr id="31" name="Shape 29"/>
-          <p:cNvSpPr/>
-          <p:nvPr/>
-        </p:nvSpPr>
-        <p:spPr>
-          <a:xfrm>
-            <a:off x="566928" y="5349240"/>
-            <a:ext cx="11057839" cy="457200"/>
-          </a:xfrm>
-          <a:prstGeom prst="rect">
-            <a:avLst/>
-          </a:prstGeom>
-          <a:solidFill>
-            <a:srgbClr val="D9B668"/>
-          </a:solidFill>
-          <a:ln/>
-        </p:spPr>
-      </p:sp>
-      <p:sp>
-        <p:nvSpPr>
-          <p:cNvPr id="32" name="Text 30"/>
-          <p:cNvSpPr/>
-          <p:nvPr/>
-        </p:nvSpPr>
-        <p:spPr>
-          <a:xfrm>
-            <a:off x="749808" y="5422392"/>
-            <a:ext cx="10692079" cy="310896"/>
-          </a:xfrm>
-          <a:prstGeom prst="rect">
-            <a:avLst/>
-          </a:prstGeom>
-          <a:noFill/>
-          <a:ln/>
-        </p:spPr>
-        <p:txBody>
-          <a:bodyPr wrap="square" rtlCol="0" anchor="ctr"/>
-          <a:lstStyle/>
-          <a:p>
-            <a:pPr indent="0" marL="0">
-              <a:buNone/>
-            </a:pPr>
-            <a:r>
-              <a:rPr lang="en-US" sz="950" b="1" dirty="0">
-                <a:solidFill>
-                  <a:srgbClr val="977024"/>
-                </a:solidFill>
-                <a:latin typeface="Pretendard" pitchFamily="34" charset="0"/>
-                <a:ea typeface="Pretendard" pitchFamily="34" charset="-122"/>
-                <a:cs typeface="Pretendard" pitchFamily="34" charset="-120"/>
-              </a:rPr>
-              <a:t>※ 본 체크리스트는 계약 전 매수인의 안전한 자산 인수를 위한 필수 확인 사항이며, 실사(Due Diligence) 결과에 따라 매매 조건 및 잔금 일정이 조정될 수 있습니다.</a:t>
-            </a:r>
-            <a:endParaRPr lang="en-US" sz="950" dirty="0"/>
-          </a:p>
-        </p:txBody>
-      </p:sp>
-      <p:sp>
-        <p:nvSpPr>
-          <p:cNvPr id="33" name="Text 31"/>
           <p:cNvSpPr/>
           <p:nvPr/>
         </p:nvSpPr>
@@ -12595,7 +11089,7 @@
       </p:sp>
       <p:sp>
         <p:nvSpPr>
-          <p:cNvPr id="34" name="Text 32"/>
+          <p:cNvPr id="14" name="Text 12"/>
           <p:cNvSpPr/>
           <p:nvPr/>
         </p:nvSpPr>
